--- a/documentos/YourTree.pptx
+++ b/documentos/YourTree.pptx
@@ -5,7 +5,7 @@
     <p:sldMasterId id="2147483648" r:id="rId1"/>
   </p:sldMasterIdLst>
   <p:notesMasterIdLst>
-    <p:notesMasterId r:id="rId12"/>
+    <p:notesMasterId r:id="rId14"/>
   </p:notesMasterIdLst>
   <p:sldIdLst>
     <p:sldId id="256" r:id="rId2"/>
@@ -17,17 +17,19 @@
     <p:sldId id="262" r:id="rId8"/>
     <p:sldId id="263" r:id="rId9"/>
     <p:sldId id="264" r:id="rId10"/>
-    <p:sldId id="265" r:id="rId11"/>
+    <p:sldId id="266" r:id="rId11"/>
+    <p:sldId id="267" r:id="rId12"/>
+    <p:sldId id="265" r:id="rId13"/>
   </p:sldIdLst>
   <p:sldSz cx="16256000" cy="9144000"/>
   <p:notesSz cx="9144000" cy="16256000"/>
   <p:embeddedFontLst>
     <p:embeddedFont>
       <p:font typeface="Quattrocento Sans" panose="020B0502050000020003" pitchFamily="34" charset="0"/>
-      <p:regular r:id="rId13"/>
-      <p:bold r:id="rId14"/>
-      <p:italic r:id="rId15"/>
-      <p:boldItalic r:id="rId16"/>
+      <p:regular r:id="rId15"/>
+      <p:bold r:id="rId16"/>
+      <p:italic r:id="rId17"/>
+      <p:boldItalic r:id="rId18"/>
     </p:embeddedFont>
   </p:embeddedFontLst>
   <p:defaultTextStyle>
@@ -839,6 +841,222 @@
   <p:cSld>
     <p:spTree>
       <p:nvGrpSpPr>
+        <p:cNvPr id="1" name="">
+          <a:extLst>
+            <a:ext uri="{FF2B5EF4-FFF2-40B4-BE49-F238E27FC236}">
+              <a16:creationId xmlns:a16="http://schemas.microsoft.com/office/drawing/2014/main" id="{AA8D7852-FF97-13CF-1C85-CFC8823E2A92}"/>
+            </a:ext>
+          </a:extLst>
+        </p:cNvPr>
+        <p:cNvGrpSpPr/>
+        <p:nvPr/>
+      </p:nvGrpSpPr>
+      <p:grpSpPr>
+        <a:xfrm>
+          <a:off x="0" y="0"/>
+          <a:ext cx="0" cy="0"/>
+          <a:chOff x="0" y="0"/>
+          <a:chExt cx="0" cy="0"/>
+        </a:xfrm>
+      </p:grpSpPr>
+      <p:sp>
+        <p:nvSpPr>
+          <p:cNvPr id="2" name="Slide Image Placeholder 1">
+            <a:extLst>
+              <a:ext uri="{FF2B5EF4-FFF2-40B4-BE49-F238E27FC236}">
+                <a16:creationId xmlns:a16="http://schemas.microsoft.com/office/drawing/2014/main" id="{C3C739CB-8130-55B8-CD7B-0040AEAC1B31}"/>
+              </a:ext>
+            </a:extLst>
+          </p:cNvPr>
+          <p:cNvSpPr>
+            <a:spLocks noGrp="1" noRot="1" noChangeAspect="1"/>
+          </p:cNvSpPr>
+          <p:nvPr>
+            <p:ph type="sldImg"/>
+          </p:nvPr>
+        </p:nvSpPr>
+        <p:spPr/>
+      </p:sp>
+      <p:sp>
+        <p:nvSpPr>
+          <p:cNvPr id="3" name="Notes Placeholder 2">
+            <a:extLst>
+              <a:ext uri="{FF2B5EF4-FFF2-40B4-BE49-F238E27FC236}">
+                <a16:creationId xmlns:a16="http://schemas.microsoft.com/office/drawing/2014/main" id="{79E36B06-1451-5DD6-2D63-1985743374B2}"/>
+              </a:ext>
+            </a:extLst>
+          </p:cNvPr>
+          <p:cNvSpPr>
+            <a:spLocks noGrp="1"/>
+          </p:cNvSpPr>
+          <p:nvPr>
+            <p:ph type="body" idx="1"/>
+          </p:nvPr>
+        </p:nvSpPr>
+        <p:spPr/>
+        <p:txBody>
+          <a:bodyPr/>
+          <a:lstStyle/>
+          <a:p>
+            <a:endParaRPr lang="en-US" dirty="0"/>
+          </a:p>
+        </p:txBody>
+      </p:sp>
+      <p:sp>
+        <p:nvSpPr>
+          <p:cNvPr id="4" name="Slide Number Placeholder 3">
+            <a:extLst>
+              <a:ext uri="{FF2B5EF4-FFF2-40B4-BE49-F238E27FC236}">
+                <a16:creationId xmlns:a16="http://schemas.microsoft.com/office/drawing/2014/main" id="{71C62ABC-1624-38F5-B123-892D70C874FA}"/>
+              </a:ext>
+            </a:extLst>
+          </p:cNvPr>
+          <p:cNvSpPr>
+            <a:spLocks noGrp="1"/>
+          </p:cNvSpPr>
+          <p:nvPr>
+            <p:ph type="sldNum" sz="quarter" idx="10"/>
+          </p:nvPr>
+        </p:nvSpPr>
+        <p:spPr/>
+        <p:txBody>
+          <a:bodyPr/>
+          <a:lstStyle/>
+          <a:p>
+            <a:fld id="{F7021451-1387-4CA6-816F-3879F97B5CBC}" type="slidenum">
+              <a:rPr lang="en-US"/>
+              <a:t>10</a:t>
+            </a:fld>
+            <a:endParaRPr lang="en-US"/>
+          </a:p>
+        </p:txBody>
+      </p:sp>
+    </p:spTree>
+    <p:extLst>
+      <p:ext uri="{BB962C8B-B14F-4D97-AF65-F5344CB8AC3E}">
+        <p14:creationId xmlns:p14="http://schemas.microsoft.com/office/powerpoint/2010/main" val="131301822"/>
+      </p:ext>
+    </p:extLst>
+  </p:cSld>
+  <p:clrMapOvr>
+    <a:masterClrMapping/>
+  </p:clrMapOvr>
+</p:notes>
+</file>
+
+<file path=ppt/notesSlides/notesSlide11.xml><?xml version="1.0" encoding="utf-8"?>
+<p:notes xmlns:a="http://schemas.openxmlformats.org/drawingml/2006/main" xmlns:r="http://schemas.openxmlformats.org/officeDocument/2006/relationships" xmlns:p="http://schemas.openxmlformats.org/presentationml/2006/main">
+  <p:cSld>
+    <p:spTree>
+      <p:nvGrpSpPr>
+        <p:cNvPr id="1" name="">
+          <a:extLst>
+            <a:ext uri="{FF2B5EF4-FFF2-40B4-BE49-F238E27FC236}">
+              <a16:creationId xmlns:a16="http://schemas.microsoft.com/office/drawing/2014/main" id="{F5CD5D20-E6B7-1226-5BCA-3D68257BFE5F}"/>
+            </a:ext>
+          </a:extLst>
+        </p:cNvPr>
+        <p:cNvGrpSpPr/>
+        <p:nvPr/>
+      </p:nvGrpSpPr>
+      <p:grpSpPr>
+        <a:xfrm>
+          <a:off x="0" y="0"/>
+          <a:ext cx="0" cy="0"/>
+          <a:chOff x="0" y="0"/>
+          <a:chExt cx="0" cy="0"/>
+        </a:xfrm>
+      </p:grpSpPr>
+      <p:sp>
+        <p:nvSpPr>
+          <p:cNvPr id="2" name="Slide Image Placeholder 1">
+            <a:extLst>
+              <a:ext uri="{FF2B5EF4-FFF2-40B4-BE49-F238E27FC236}">
+                <a16:creationId xmlns:a16="http://schemas.microsoft.com/office/drawing/2014/main" id="{3E827CBF-EFBD-BCEF-A2FB-1670C9BC44B4}"/>
+              </a:ext>
+            </a:extLst>
+          </p:cNvPr>
+          <p:cNvSpPr>
+            <a:spLocks noGrp="1" noRot="1" noChangeAspect="1"/>
+          </p:cNvSpPr>
+          <p:nvPr>
+            <p:ph type="sldImg"/>
+          </p:nvPr>
+        </p:nvSpPr>
+        <p:spPr/>
+      </p:sp>
+      <p:sp>
+        <p:nvSpPr>
+          <p:cNvPr id="3" name="Notes Placeholder 2">
+            <a:extLst>
+              <a:ext uri="{FF2B5EF4-FFF2-40B4-BE49-F238E27FC236}">
+                <a16:creationId xmlns:a16="http://schemas.microsoft.com/office/drawing/2014/main" id="{985D905B-C313-EAA7-C8D6-95912FDFE3CB}"/>
+              </a:ext>
+            </a:extLst>
+          </p:cNvPr>
+          <p:cNvSpPr>
+            <a:spLocks noGrp="1"/>
+          </p:cNvSpPr>
+          <p:nvPr>
+            <p:ph type="body" idx="1"/>
+          </p:nvPr>
+        </p:nvSpPr>
+        <p:spPr/>
+        <p:txBody>
+          <a:bodyPr/>
+          <a:lstStyle/>
+          <a:p>
+            <a:endParaRPr lang="en-US" dirty="0"/>
+          </a:p>
+        </p:txBody>
+      </p:sp>
+      <p:sp>
+        <p:nvSpPr>
+          <p:cNvPr id="4" name="Slide Number Placeholder 3">
+            <a:extLst>
+              <a:ext uri="{FF2B5EF4-FFF2-40B4-BE49-F238E27FC236}">
+                <a16:creationId xmlns:a16="http://schemas.microsoft.com/office/drawing/2014/main" id="{8117E0A1-8244-DB2F-58C6-403CD69A949A}"/>
+              </a:ext>
+            </a:extLst>
+          </p:cNvPr>
+          <p:cNvSpPr>
+            <a:spLocks noGrp="1"/>
+          </p:cNvSpPr>
+          <p:nvPr>
+            <p:ph type="sldNum" sz="quarter" idx="10"/>
+          </p:nvPr>
+        </p:nvSpPr>
+        <p:spPr/>
+        <p:txBody>
+          <a:bodyPr/>
+          <a:lstStyle/>
+          <a:p>
+            <a:fld id="{F7021451-1387-4CA6-816F-3879F97B5CBC}" type="slidenum">
+              <a:rPr lang="en-US"/>
+              <a:t>11</a:t>
+            </a:fld>
+            <a:endParaRPr lang="en-US"/>
+          </a:p>
+        </p:txBody>
+      </p:sp>
+    </p:spTree>
+    <p:extLst>
+      <p:ext uri="{BB962C8B-B14F-4D97-AF65-F5344CB8AC3E}">
+        <p14:creationId xmlns:p14="http://schemas.microsoft.com/office/powerpoint/2010/main" val="686952144"/>
+      </p:ext>
+    </p:extLst>
+  </p:cSld>
+  <p:clrMapOvr>
+    <a:masterClrMapping/>
+  </p:clrMapOvr>
+</p:notes>
+</file>
+
+<file path=ppt/notesSlides/notesSlide12.xml><?xml version="1.0" encoding="utf-8"?>
+<p:notes xmlns:a="http://schemas.openxmlformats.org/drawingml/2006/main" xmlns:r="http://schemas.openxmlformats.org/officeDocument/2006/relationships" xmlns:p="http://schemas.openxmlformats.org/presentationml/2006/main">
+  <p:cSld>
+    <p:spTree>
+      <p:nvGrpSpPr>
         <p:cNvPr id="1" name=""/>
         <p:cNvGrpSpPr/>
         <p:nvPr/>
@@ -899,7 +1117,7 @@
           <a:p>
             <a:fld id="{F7021451-1387-4CA6-816F-3879F97B5CBC}" type="slidenum">
               <a:rPr lang="en-US"/>
-              <a:t>10</a:t>
+              <a:t>12</a:t>
             </a:fld>
             <a:endParaRPr lang="en-US"/>
           </a:p>
@@ -2391,152 +2609,104 @@
       </p:sp>
       <p:sp>
         <p:nvSpPr>
-          <p:cNvPr id="15" name="Shape 13"/>
-          <p:cNvSpPr/>
-          <p:nvPr/>
-        </p:nvSpPr>
-        <p:spPr>
-          <a:xfrm>
-            <a:off x="7861300" y="2476500"/>
-            <a:ext cx="533400" cy="609600"/>
-          </a:xfrm>
-          <a:custGeom>
-            <a:avLst/>
-            <a:gdLst/>
-            <a:ahLst/>
-            <a:cxnLst/>
-            <a:rect l="l" t="t" r="r" b="b"/>
-            <a:pathLst>
-              <a:path w="533400" h="609600">
-                <a:moveTo>
-                  <a:pt x="266700" y="-38100"/>
-                </a:moveTo>
-                <a:cubicBezTo>
-                  <a:pt x="275034" y="-38100"/>
-                  <a:pt x="283012" y="-34409"/>
-                  <a:pt x="288488" y="-27980"/>
-                </a:cubicBezTo>
-                <a:lnTo>
-                  <a:pt x="450413" y="162520"/>
-                </a:lnTo>
-                <a:cubicBezTo>
-                  <a:pt x="457676" y="170974"/>
-                  <a:pt x="459224" y="182880"/>
-                  <a:pt x="454581" y="193000"/>
-                </a:cubicBezTo>
-                <a:cubicBezTo>
-                  <a:pt x="449937" y="203121"/>
-                  <a:pt x="439817" y="209550"/>
-                  <a:pt x="428625" y="209550"/>
-                </a:cubicBezTo>
-                <a:lnTo>
-                  <a:pt x="398978" y="209550"/>
-                </a:lnTo>
-                <a:lnTo>
-                  <a:pt x="488513" y="314920"/>
-                </a:lnTo>
-                <a:cubicBezTo>
-                  <a:pt x="495776" y="323374"/>
-                  <a:pt x="497324" y="335280"/>
-                  <a:pt x="492681" y="345400"/>
-                </a:cubicBezTo>
-                <a:cubicBezTo>
-                  <a:pt x="488037" y="355521"/>
-                  <a:pt x="477917" y="361950"/>
-                  <a:pt x="466725" y="361950"/>
-                </a:cubicBezTo>
-                <a:lnTo>
-                  <a:pt x="420886" y="361950"/>
-                </a:lnTo>
-                <a:lnTo>
-                  <a:pt x="526613" y="486370"/>
-                </a:lnTo>
-                <a:cubicBezTo>
-                  <a:pt x="533876" y="494824"/>
-                  <a:pt x="535424" y="506730"/>
-                  <a:pt x="530781" y="516850"/>
-                </a:cubicBezTo>
-                <a:cubicBezTo>
-                  <a:pt x="526137" y="526971"/>
-                  <a:pt x="516017" y="533400"/>
-                  <a:pt x="504825" y="533400"/>
-                </a:cubicBezTo>
-                <a:lnTo>
-                  <a:pt x="304800" y="533400"/>
-                </a:lnTo>
-                <a:lnTo>
-                  <a:pt x="304800" y="609600"/>
-                </a:lnTo>
-                <a:cubicBezTo>
-                  <a:pt x="304800" y="630674"/>
-                  <a:pt x="287774" y="647700"/>
-                  <a:pt x="266700" y="647700"/>
-                </a:cubicBezTo>
-                <a:cubicBezTo>
-                  <a:pt x="245626" y="647700"/>
-                  <a:pt x="228600" y="630674"/>
-                  <a:pt x="228600" y="609600"/>
-                </a:cubicBezTo>
-                <a:lnTo>
-                  <a:pt x="228600" y="533400"/>
-                </a:lnTo>
-                <a:lnTo>
-                  <a:pt x="28575" y="533400"/>
-                </a:lnTo>
-                <a:cubicBezTo>
-                  <a:pt x="17383" y="533400"/>
-                  <a:pt x="7263" y="526971"/>
-                  <a:pt x="2619" y="516850"/>
-                </a:cubicBezTo>
-                <a:cubicBezTo>
-                  <a:pt x="-2024" y="506730"/>
-                  <a:pt x="-476" y="494824"/>
-                  <a:pt x="6787" y="486370"/>
-                </a:cubicBezTo>
-                <a:lnTo>
-                  <a:pt x="112514" y="361950"/>
-                </a:lnTo>
-                <a:lnTo>
-                  <a:pt x="66675" y="361950"/>
-                </a:lnTo>
-                <a:cubicBezTo>
-                  <a:pt x="55483" y="361950"/>
-                  <a:pt x="45363" y="355521"/>
-                  <a:pt x="40719" y="345400"/>
-                </a:cubicBezTo>
-                <a:cubicBezTo>
-                  <a:pt x="36076" y="335280"/>
-                  <a:pt x="37624" y="323374"/>
-                  <a:pt x="44887" y="314920"/>
-                </a:cubicBezTo>
-                <a:lnTo>
-                  <a:pt x="134422" y="209550"/>
-                </a:lnTo>
-                <a:lnTo>
-                  <a:pt x="104775" y="209550"/>
-                </a:lnTo>
-                <a:cubicBezTo>
-                  <a:pt x="93583" y="209550"/>
-                  <a:pt x="83463" y="203121"/>
-                  <a:pt x="78819" y="193000"/>
-                </a:cubicBezTo>
-                <a:cubicBezTo>
-                  <a:pt x="74176" y="182880"/>
-                  <a:pt x="75724" y="170974"/>
-                  <a:pt x="82987" y="162520"/>
-                </a:cubicBezTo>
-                <a:lnTo>
-                  <a:pt x="244912" y="-27980"/>
-                </a:lnTo>
-                <a:cubicBezTo>
-                  <a:pt x="250388" y="-34409"/>
-                  <a:pt x="258366" y="-38100"/>
-                  <a:pt x="266700" y="-38100"/>
-                </a:cubicBezTo>
-                <a:close/>
-              </a:path>
-            </a:pathLst>
-          </a:custGeom>
+          <p:cNvPr id="16" name="Text 14"/>
+          <p:cNvSpPr/>
+          <p:nvPr/>
+        </p:nvSpPr>
+        <p:spPr>
+          <a:xfrm>
+            <a:off x="1778000" y="3302000"/>
+            <a:ext cx="12700000" cy="698500"/>
+          </a:xfrm>
+          <a:prstGeom prst="rect">
+            <a:avLst/>
+          </a:prstGeom>
+          <a:noFill/>
+          <a:ln/>
+        </p:spPr>
+        <p:txBody>
+          <a:bodyPr wrap="none" lIns="0" tIns="0" rIns="0" bIns="0" rtlCol="0" anchor="ctr"/>
+          <a:lstStyle/>
+          <a:p>
+            <a:pPr algn="ctr">
+              <a:lnSpc>
+                <a:spcPct val="120000"/>
+              </a:lnSpc>
+            </a:pPr>
+            <a:r>
+              <a:rPr lang="en-US" sz="4000" b="1" dirty="0">
+                <a:solidFill>
+                  <a:srgbClr val="FFFFFF"/>
+                </a:solidFill>
+                <a:latin typeface="Quattrocento Sans" panose="020B0502050000020003" pitchFamily="34" charset="0"/>
+                <a:ea typeface="QuattrocentoSans" pitchFamily="34" charset="-122"/>
+                <a:cs typeface="QuattrocentoSans" pitchFamily="34" charset="-120"/>
+              </a:rPr>
+              <a:t>YourTree</a:t>
+            </a:r>
+            <a:endParaRPr lang="en-US" sz="4000" dirty="0">
+              <a:latin typeface="Quattrocento Sans" panose="020B0502050000020003" pitchFamily="34" charset="0"/>
+            </a:endParaRPr>
+          </a:p>
+        </p:txBody>
+      </p:sp>
+      <p:sp>
+        <p:nvSpPr>
+          <p:cNvPr id="17" name="Text 15"/>
+          <p:cNvSpPr/>
+          <p:nvPr/>
+        </p:nvSpPr>
+        <p:spPr>
+          <a:xfrm>
+            <a:off x="2413000" y="4127500"/>
+            <a:ext cx="11430000" cy="444500"/>
+          </a:xfrm>
+          <a:prstGeom prst="rect">
+            <a:avLst/>
+          </a:prstGeom>
+          <a:noFill/>
+          <a:ln/>
+        </p:spPr>
+        <p:txBody>
+          <a:bodyPr wrap="none" lIns="0" tIns="0" rIns="0" bIns="0" rtlCol="0" anchor="ctr"/>
+          <a:lstStyle/>
+          <a:p>
+            <a:pPr algn="ctr">
+              <a:lnSpc>
+                <a:spcPct val="140000"/>
+              </a:lnSpc>
+            </a:pPr>
+            <a:r>
+              <a:rPr lang="en-US" sz="2000" dirty="0">
+                <a:solidFill>
+                  <a:srgbClr val="FFFFFF"/>
+                </a:solidFill>
+                <a:latin typeface="Quattrocento Sans" panose="020B0502050000020003" pitchFamily="34" charset="0"/>
+                <a:ea typeface="QuattrocentoSans" pitchFamily="34" charset="-122"/>
+                <a:cs typeface="QuattrocentoSans" pitchFamily="34" charset="-120"/>
+              </a:rPr>
+              <a:t>Ecosistema de Identidad y Comunidad Interactiva</a:t>
+            </a:r>
+            <a:endParaRPr lang="en-US" sz="2000" dirty="0">
+              <a:latin typeface="Quattrocento Sans" panose="020B0502050000020003" pitchFamily="34" charset="0"/>
+            </a:endParaRPr>
+          </a:p>
+        </p:txBody>
+      </p:sp>
+      <p:sp>
+        <p:nvSpPr>
+          <p:cNvPr id="18" name="Shape 16"/>
+          <p:cNvSpPr/>
+          <p:nvPr/>
+        </p:nvSpPr>
+        <p:spPr>
+          <a:xfrm>
+            <a:off x="6223000" y="4889500"/>
+            <a:ext cx="3810000" cy="25400"/>
+          </a:xfrm>
+          <a:prstGeom prst="rect">
+            <a:avLst/>
+          </a:prstGeom>
           <a:solidFill>
             <a:srgbClr val="2A9D8F"/>
           </a:solidFill>
@@ -2554,121 +2724,6 @@
       </p:sp>
       <p:sp>
         <p:nvSpPr>
-          <p:cNvPr id="16" name="Text 14"/>
-          <p:cNvSpPr/>
-          <p:nvPr/>
-        </p:nvSpPr>
-        <p:spPr>
-          <a:xfrm>
-            <a:off x="1778000" y="3302000"/>
-            <a:ext cx="12700000" cy="698500"/>
-          </a:xfrm>
-          <a:prstGeom prst="rect">
-            <a:avLst/>
-          </a:prstGeom>
-          <a:noFill/>
-          <a:ln/>
-        </p:spPr>
-        <p:txBody>
-          <a:bodyPr wrap="none" lIns="0" tIns="0" rIns="0" bIns="0" rtlCol="0" anchor="ctr"/>
-          <a:lstStyle/>
-          <a:p>
-            <a:pPr algn="ctr">
-              <a:lnSpc>
-                <a:spcPct val="120000"/>
-              </a:lnSpc>
-            </a:pPr>
-            <a:r>
-              <a:rPr lang="en-US" sz="4000" b="1" dirty="0">
-                <a:solidFill>
-                  <a:srgbClr val="FFFFFF"/>
-                </a:solidFill>
-                <a:latin typeface="Quattrocento Sans" panose="020B0502050000020003" pitchFamily="34" charset="0"/>
-                <a:ea typeface="QuattrocentoSans" pitchFamily="34" charset="-122"/>
-                <a:cs typeface="QuattrocentoSans" pitchFamily="34" charset="-120"/>
-              </a:rPr>
-              <a:t>YourTree</a:t>
-            </a:r>
-            <a:endParaRPr lang="en-US" sz="4000" dirty="0">
-              <a:latin typeface="Quattrocento Sans" panose="020B0502050000020003" pitchFamily="34" charset="0"/>
-            </a:endParaRPr>
-          </a:p>
-        </p:txBody>
-      </p:sp>
-      <p:sp>
-        <p:nvSpPr>
-          <p:cNvPr id="17" name="Text 15"/>
-          <p:cNvSpPr/>
-          <p:nvPr/>
-        </p:nvSpPr>
-        <p:spPr>
-          <a:xfrm>
-            <a:off x="2413000" y="4127500"/>
-            <a:ext cx="11430000" cy="444500"/>
-          </a:xfrm>
-          <a:prstGeom prst="rect">
-            <a:avLst/>
-          </a:prstGeom>
-          <a:noFill/>
-          <a:ln/>
-        </p:spPr>
-        <p:txBody>
-          <a:bodyPr wrap="none" lIns="0" tIns="0" rIns="0" bIns="0" rtlCol="0" anchor="ctr"/>
-          <a:lstStyle/>
-          <a:p>
-            <a:pPr algn="ctr">
-              <a:lnSpc>
-                <a:spcPct val="140000"/>
-              </a:lnSpc>
-            </a:pPr>
-            <a:r>
-              <a:rPr lang="en-US" sz="2000" dirty="0">
-                <a:solidFill>
-                  <a:srgbClr val="FFFFFF"/>
-                </a:solidFill>
-                <a:latin typeface="Quattrocento Sans" panose="020B0502050000020003" pitchFamily="34" charset="0"/>
-                <a:ea typeface="QuattrocentoSans" pitchFamily="34" charset="-122"/>
-                <a:cs typeface="QuattrocentoSans" pitchFamily="34" charset="-120"/>
-              </a:rPr>
-              <a:t>Ecosistema de Identidad y Comunidad Interactiva</a:t>
-            </a:r>
-            <a:endParaRPr lang="en-US" sz="2000" dirty="0">
-              <a:latin typeface="Quattrocento Sans" panose="020B0502050000020003" pitchFamily="34" charset="0"/>
-            </a:endParaRPr>
-          </a:p>
-        </p:txBody>
-      </p:sp>
-      <p:sp>
-        <p:nvSpPr>
-          <p:cNvPr id="18" name="Shape 16"/>
-          <p:cNvSpPr/>
-          <p:nvPr/>
-        </p:nvSpPr>
-        <p:spPr>
-          <a:xfrm>
-            <a:off x="6223000" y="4889500"/>
-            <a:ext cx="3810000" cy="25400"/>
-          </a:xfrm>
-          <a:prstGeom prst="rect">
-            <a:avLst/>
-          </a:prstGeom>
-          <a:solidFill>
-            <a:srgbClr val="2A9D8F"/>
-          </a:solidFill>
-          <a:ln/>
-        </p:spPr>
-        <p:txBody>
-          <a:bodyPr/>
-          <a:lstStyle/>
-          <a:p>
-            <a:endParaRPr lang="es-ES">
-              <a:latin typeface="Quattrocento Sans" panose="020B0502050000020003" pitchFamily="34" charset="0"/>
-            </a:endParaRPr>
-          </a:p>
-        </p:txBody>
-      </p:sp>
-      <p:sp>
-        <p:nvSpPr>
           <p:cNvPr id="19" name="Text 17"/>
           <p:cNvSpPr/>
           <p:nvPr/>
@@ -2793,6 +2848,42 @@
           </a:p>
         </p:txBody>
       </p:sp>
+      <p:pic>
+        <p:nvPicPr>
+          <p:cNvPr id="22" name="Gráfico 21">
+            <a:extLst>
+              <a:ext uri="{FF2B5EF4-FFF2-40B4-BE49-F238E27FC236}">
+                <a16:creationId xmlns:a16="http://schemas.microsoft.com/office/drawing/2014/main" id="{8C19F3E8-8EDB-0875-AA59-ABDBAA9D839D}"/>
+              </a:ext>
+            </a:extLst>
+          </p:cNvPr>
+          <p:cNvPicPr>
+            <a:picLocks noChangeAspect="1"/>
+          </p:cNvPicPr>
+          <p:nvPr/>
+        </p:nvPicPr>
+        <p:blipFill>
+          <a:blip>
+            <a:extLst>
+              <a:ext uri="{96DAC541-7B7A-43D3-8B79-37D633B846F1}">
+                <asvg:svgBlip xmlns:asvg="http://schemas.microsoft.com/office/drawing/2016/SVG/main" r:embed="rId3"/>
+              </a:ext>
+            </a:extLst>
+          </a:blip>
+          <a:stretch>
+            <a:fillRect/>
+          </a:stretch>
+        </p:blipFill>
+        <p:spPr>
+          <a:xfrm>
+            <a:off x="7429500" y="1011824"/>
+            <a:ext cx="2134441" cy="2445309"/>
+          </a:xfrm>
+          <a:prstGeom prst="rect">
+            <a:avLst/>
+          </a:prstGeom>
+        </p:spPr>
+      </p:pic>
     </p:spTree>
   </p:cSld>
   <p:clrMapOvr>
@@ -2805,6 +2896,4280 @@
 </file>
 
 <file path=ppt/slides/slide10.xml><?xml version="1.0" encoding="utf-8"?>
+<p:sld xmlns:a="http://schemas.openxmlformats.org/drawingml/2006/main" xmlns:r="http://schemas.openxmlformats.org/officeDocument/2006/relationships" xmlns:p="http://schemas.openxmlformats.org/presentationml/2006/main">
+  <p:cSld>
+    <p:bg>
+      <p:bgPr>
+        <a:solidFill>
+          <a:srgbClr val="F8F9FA"/>
+        </a:solidFill>
+        <a:effectLst/>
+      </p:bgPr>
+    </p:bg>
+    <p:spTree>
+      <p:nvGrpSpPr>
+        <p:cNvPr id="1" name="">
+          <a:extLst>
+            <a:ext uri="{FF2B5EF4-FFF2-40B4-BE49-F238E27FC236}">
+              <a16:creationId xmlns:a16="http://schemas.microsoft.com/office/drawing/2014/main" id="{F7A57194-ABC2-2931-3E7F-762AAFD986C1}"/>
+            </a:ext>
+          </a:extLst>
+        </p:cNvPr>
+        <p:cNvGrpSpPr/>
+        <p:nvPr/>
+      </p:nvGrpSpPr>
+      <p:grpSpPr>
+        <a:xfrm>
+          <a:off x="0" y="0"/>
+          <a:ext cx="0" cy="0"/>
+          <a:chOff x="0" y="0"/>
+          <a:chExt cx="0" cy="0"/>
+        </a:xfrm>
+      </p:grpSpPr>
+      <p:sp>
+        <p:nvSpPr>
+          <p:cNvPr id="3" name="Shape 1">
+            <a:extLst>
+              <a:ext uri="{FF2B5EF4-FFF2-40B4-BE49-F238E27FC236}">
+                <a16:creationId xmlns:a16="http://schemas.microsoft.com/office/drawing/2014/main" id="{92205B0A-7E61-EAD5-8B90-51C1E86D7BBD}"/>
+              </a:ext>
+            </a:extLst>
+          </p:cNvPr>
+          <p:cNvSpPr/>
+          <p:nvPr/>
+        </p:nvSpPr>
+        <p:spPr>
+          <a:xfrm>
+            <a:off x="77156" y="73082"/>
+            <a:ext cx="1879600" cy="355600"/>
+          </a:xfrm>
+          <a:prstGeom prst="roundRect">
+            <a:avLst>
+              <a:gd name="adj" fmla="val 8000"/>
+            </a:avLst>
+          </a:prstGeom>
+          <a:solidFill>
+            <a:srgbClr val="1B4332"/>
+          </a:solidFill>
+          <a:ln/>
+        </p:spPr>
+        <p:txBody>
+          <a:bodyPr/>
+          <a:lstStyle/>
+          <a:p>
+            <a:endParaRPr lang="es-ES">
+              <a:solidFill>
+                <a:schemeClr val="bg1"/>
+              </a:solidFill>
+              <a:latin typeface="Quattrocento Sans" panose="020B0502050000020003" pitchFamily="34" charset="0"/>
+            </a:endParaRPr>
+          </a:p>
+        </p:txBody>
+      </p:sp>
+      <p:sp>
+        <p:nvSpPr>
+          <p:cNvPr id="5" name="Text 3">
+            <a:extLst>
+              <a:ext uri="{FF2B5EF4-FFF2-40B4-BE49-F238E27FC236}">
+                <a16:creationId xmlns:a16="http://schemas.microsoft.com/office/drawing/2014/main" id="{99583990-7B6C-D4FE-0366-204D999F258B}"/>
+              </a:ext>
+            </a:extLst>
+          </p:cNvPr>
+          <p:cNvSpPr/>
+          <p:nvPr/>
+        </p:nvSpPr>
+        <p:spPr>
+          <a:xfrm>
+            <a:off x="956" y="-3118"/>
+            <a:ext cx="2032000" cy="508000"/>
+          </a:xfrm>
+          <a:prstGeom prst="rect">
+            <a:avLst/>
+          </a:prstGeom>
+          <a:solidFill>
+            <a:srgbClr val="1B4332"/>
+          </a:solidFill>
+          <a:ln/>
+        </p:spPr>
+        <p:txBody>
+          <a:bodyPr wrap="none" lIns="0" tIns="0" rIns="0" bIns="0" rtlCol="0" anchor="ctr"/>
+          <a:lstStyle/>
+          <a:p>
+            <a:pPr algn="ctr">
+              <a:lnSpc>
+                <a:spcPct val="100000"/>
+              </a:lnSpc>
+            </a:pPr>
+            <a:r>
+              <a:rPr lang="en-US" sz="1200" b="1" dirty="0">
+                <a:solidFill>
+                  <a:schemeClr val="bg1"/>
+                </a:solidFill>
+                <a:latin typeface="Quattrocento Sans" panose="020B0502050000020003" pitchFamily="34" charset="0"/>
+              </a:rPr>
+              <a:t>FUNCIONABILIDAD</a:t>
+            </a:r>
+          </a:p>
+        </p:txBody>
+      </p:sp>
+      <p:sp>
+        <p:nvSpPr>
+          <p:cNvPr id="12" name="Shape 10">
+            <a:extLst>
+              <a:ext uri="{FF2B5EF4-FFF2-40B4-BE49-F238E27FC236}">
+                <a16:creationId xmlns:a16="http://schemas.microsoft.com/office/drawing/2014/main" id="{03DACA46-B052-79FA-9E89-BBBE9C568ADB}"/>
+              </a:ext>
+            </a:extLst>
+          </p:cNvPr>
+          <p:cNvSpPr/>
+          <p:nvPr/>
+        </p:nvSpPr>
+        <p:spPr>
+          <a:xfrm>
+            <a:off x="762000" y="736600"/>
+            <a:ext cx="50800" cy="355600"/>
+          </a:xfrm>
+          <a:prstGeom prst="rect">
+            <a:avLst/>
+          </a:prstGeom>
+          <a:solidFill>
+            <a:srgbClr val="2A9D8F"/>
+          </a:solidFill>
+          <a:ln/>
+        </p:spPr>
+        <p:txBody>
+          <a:bodyPr/>
+          <a:lstStyle/>
+          <a:p>
+            <a:endParaRPr lang="es-ES">
+              <a:latin typeface="Quattrocento Sans" panose="020B0502050000020003" pitchFamily="34" charset="0"/>
+            </a:endParaRPr>
+          </a:p>
+        </p:txBody>
+      </p:sp>
+      <p:sp>
+        <p:nvSpPr>
+          <p:cNvPr id="13" name="Text 11">
+            <a:extLst>
+              <a:ext uri="{FF2B5EF4-FFF2-40B4-BE49-F238E27FC236}">
+                <a16:creationId xmlns:a16="http://schemas.microsoft.com/office/drawing/2014/main" id="{6A597BC5-FE00-6F23-C047-C992FE07D23C}"/>
+              </a:ext>
+            </a:extLst>
+          </p:cNvPr>
+          <p:cNvSpPr/>
+          <p:nvPr/>
+        </p:nvSpPr>
+        <p:spPr>
+          <a:xfrm>
+            <a:off x="965200" y="698500"/>
+            <a:ext cx="8890000" cy="482600"/>
+          </a:xfrm>
+          <a:prstGeom prst="rect">
+            <a:avLst/>
+          </a:prstGeom>
+          <a:noFill/>
+          <a:ln/>
+        </p:spPr>
+        <p:txBody>
+          <a:bodyPr wrap="none" lIns="0" tIns="0" rIns="0" bIns="0" rtlCol="0" anchor="ctr"/>
+          <a:lstStyle/>
+          <a:p>
+            <a:pPr>
+              <a:lnSpc>
+                <a:spcPct val="130000"/>
+              </a:lnSpc>
+            </a:pPr>
+            <a:r>
+              <a:rPr lang="en-US" sz="2800" b="1" dirty="0">
+                <a:solidFill>
+                  <a:srgbClr val="1B4332"/>
+                </a:solidFill>
+                <a:latin typeface="Quattrocento Sans" panose="020B0502050000020003" pitchFamily="34" charset="0"/>
+                <a:ea typeface="QuattrocentoSans" pitchFamily="34" charset="-122"/>
+                <a:cs typeface="QuattrocentoSans" pitchFamily="34" charset="-120"/>
+              </a:rPr>
+              <a:t>Metodologías de Gestión y Diseño</a:t>
+            </a:r>
+            <a:endParaRPr lang="en-US" sz="2800" dirty="0">
+              <a:latin typeface="Quattrocento Sans" panose="020B0502050000020003" pitchFamily="34" charset="0"/>
+            </a:endParaRPr>
+          </a:p>
+        </p:txBody>
+      </p:sp>
+      <p:sp>
+        <p:nvSpPr>
+          <p:cNvPr id="14" name="Shape 12">
+            <a:extLst>
+              <a:ext uri="{FF2B5EF4-FFF2-40B4-BE49-F238E27FC236}">
+                <a16:creationId xmlns:a16="http://schemas.microsoft.com/office/drawing/2014/main" id="{964893D5-013C-0F53-27EB-2B680166254B}"/>
+              </a:ext>
+            </a:extLst>
+          </p:cNvPr>
+          <p:cNvSpPr/>
+          <p:nvPr/>
+        </p:nvSpPr>
+        <p:spPr>
+          <a:xfrm>
+            <a:off x="762000" y="1397000"/>
+            <a:ext cx="4699000" cy="3556000"/>
+          </a:xfrm>
+          <a:prstGeom prst="roundRect">
+            <a:avLst>
+              <a:gd name="adj" fmla="val 6000"/>
+            </a:avLst>
+          </a:prstGeom>
+          <a:solidFill>
+            <a:srgbClr val="FFFFFF"/>
+          </a:solidFill>
+          <a:ln w="12700">
+            <a:solidFill>
+              <a:srgbClr val="E9ECEF"/>
+            </a:solidFill>
+            <a:prstDash val="solid"/>
+          </a:ln>
+        </p:spPr>
+        <p:txBody>
+          <a:bodyPr/>
+          <a:lstStyle/>
+          <a:p>
+            <a:endParaRPr lang="es-ES">
+              <a:latin typeface="Quattrocento Sans" panose="020B0502050000020003" pitchFamily="34" charset="0"/>
+            </a:endParaRPr>
+          </a:p>
+        </p:txBody>
+      </p:sp>
+      <p:sp>
+        <p:nvSpPr>
+          <p:cNvPr id="15" name="Shape 13">
+            <a:extLst>
+              <a:ext uri="{FF2B5EF4-FFF2-40B4-BE49-F238E27FC236}">
+                <a16:creationId xmlns:a16="http://schemas.microsoft.com/office/drawing/2014/main" id="{89E7D2CC-C1C2-6EA5-6E58-C1649B970F44}"/>
+              </a:ext>
+            </a:extLst>
+          </p:cNvPr>
+          <p:cNvSpPr/>
+          <p:nvPr/>
+        </p:nvSpPr>
+        <p:spPr>
+          <a:xfrm>
+            <a:off x="1044575" y="1587500"/>
+            <a:ext cx="400050" cy="457200"/>
+          </a:xfrm>
+          <a:custGeom>
+            <a:avLst/>
+            <a:gdLst/>
+            <a:ahLst/>
+            <a:cxnLst/>
+            <a:rect l="l" t="t" r="r" b="b"/>
+            <a:pathLst>
+              <a:path w="400050" h="457200">
+                <a:moveTo>
+                  <a:pt x="0" y="85725"/>
+                </a:moveTo>
+                <a:cubicBezTo>
+                  <a:pt x="0" y="54203"/>
+                  <a:pt x="25628" y="28575"/>
+                  <a:pt x="57150" y="28575"/>
+                </a:cubicBezTo>
+                <a:lnTo>
+                  <a:pt x="342900" y="28575"/>
+                </a:lnTo>
+                <a:cubicBezTo>
+                  <a:pt x="374422" y="28575"/>
+                  <a:pt x="400050" y="54203"/>
+                  <a:pt x="400050" y="85725"/>
+                </a:cubicBezTo>
+                <a:lnTo>
+                  <a:pt x="400050" y="371475"/>
+                </a:lnTo>
+                <a:cubicBezTo>
+                  <a:pt x="400050" y="402997"/>
+                  <a:pt x="374422" y="428625"/>
+                  <a:pt x="342900" y="428625"/>
+                </a:cubicBezTo>
+                <a:lnTo>
+                  <a:pt x="57150" y="428625"/>
+                </a:lnTo>
+                <a:cubicBezTo>
+                  <a:pt x="25628" y="428625"/>
+                  <a:pt x="0" y="402997"/>
+                  <a:pt x="0" y="371475"/>
+                </a:cubicBezTo>
+                <a:lnTo>
+                  <a:pt x="0" y="85725"/>
+                </a:lnTo>
+                <a:close/>
+                <a:moveTo>
+                  <a:pt x="57150" y="142875"/>
+                </a:moveTo>
+                <a:lnTo>
+                  <a:pt x="57150" y="371475"/>
+                </a:lnTo>
+                <a:lnTo>
+                  <a:pt x="171450" y="371475"/>
+                </a:lnTo>
+                <a:lnTo>
+                  <a:pt x="171450" y="142875"/>
+                </a:lnTo>
+                <a:lnTo>
+                  <a:pt x="57150" y="142875"/>
+                </a:lnTo>
+                <a:close/>
+                <a:moveTo>
+                  <a:pt x="342900" y="142875"/>
+                </a:moveTo>
+                <a:lnTo>
+                  <a:pt x="228600" y="142875"/>
+                </a:lnTo>
+                <a:lnTo>
+                  <a:pt x="228600" y="371475"/>
+                </a:lnTo>
+                <a:lnTo>
+                  <a:pt x="342900" y="371475"/>
+                </a:lnTo>
+                <a:lnTo>
+                  <a:pt x="342900" y="142875"/>
+                </a:lnTo>
+                <a:close/>
+              </a:path>
+            </a:pathLst>
+          </a:custGeom>
+          <a:solidFill>
+            <a:srgbClr val="2A9D8F"/>
+          </a:solidFill>
+          <a:ln/>
+        </p:spPr>
+        <p:txBody>
+          <a:bodyPr/>
+          <a:lstStyle/>
+          <a:p>
+            <a:endParaRPr lang="es-ES">
+              <a:latin typeface="Quattrocento Sans" panose="020B0502050000020003" pitchFamily="34" charset="0"/>
+            </a:endParaRPr>
+          </a:p>
+        </p:txBody>
+      </p:sp>
+      <p:sp>
+        <p:nvSpPr>
+          <p:cNvPr id="16" name="Text 14">
+            <a:extLst>
+              <a:ext uri="{FF2B5EF4-FFF2-40B4-BE49-F238E27FC236}">
+                <a16:creationId xmlns:a16="http://schemas.microsoft.com/office/drawing/2014/main" id="{93C36330-A7EC-AE4C-CECD-817D74F9F7B1}"/>
+              </a:ext>
+            </a:extLst>
+          </p:cNvPr>
+          <p:cNvSpPr/>
+          <p:nvPr/>
+        </p:nvSpPr>
+        <p:spPr>
+          <a:xfrm>
+            <a:off x="1016000" y="2159000"/>
+            <a:ext cx="4191000" cy="381000"/>
+          </a:xfrm>
+          <a:prstGeom prst="rect">
+            <a:avLst/>
+          </a:prstGeom>
+          <a:noFill/>
+          <a:ln/>
+        </p:spPr>
+        <p:txBody>
+          <a:bodyPr wrap="none" lIns="0" tIns="0" rIns="0" bIns="0" rtlCol="0" anchor="ctr"/>
+          <a:lstStyle/>
+          <a:p>
+            <a:pPr>
+              <a:lnSpc>
+                <a:spcPct val="100000"/>
+              </a:lnSpc>
+            </a:pPr>
+            <a:r>
+              <a:rPr lang="en-US" sz="2000" b="1" dirty="0">
+                <a:solidFill>
+                  <a:srgbClr val="1B4332"/>
+                </a:solidFill>
+                <a:latin typeface="Quattrocento Sans" panose="020B0502050000020003" pitchFamily="34" charset="0"/>
+                <a:ea typeface="Quattrocento Sans" pitchFamily="34" charset="-122"/>
+                <a:cs typeface="Quattrocento Sans" pitchFamily="34" charset="-120"/>
+              </a:rPr>
+              <a:t>Kanban &amp; Jira</a:t>
+            </a:r>
+            <a:endParaRPr lang="en-US" sz="1600" dirty="0">
+              <a:latin typeface="Quattrocento Sans" panose="020B0502050000020003" pitchFamily="34" charset="0"/>
+            </a:endParaRPr>
+          </a:p>
+        </p:txBody>
+      </p:sp>
+      <p:sp>
+        <p:nvSpPr>
+          <p:cNvPr id="17" name="Text 15">
+            <a:extLst>
+              <a:ext uri="{FF2B5EF4-FFF2-40B4-BE49-F238E27FC236}">
+                <a16:creationId xmlns:a16="http://schemas.microsoft.com/office/drawing/2014/main" id="{958020C1-A996-7463-A7FC-9459524302FA}"/>
+              </a:ext>
+            </a:extLst>
+          </p:cNvPr>
+          <p:cNvSpPr/>
+          <p:nvPr/>
+        </p:nvSpPr>
+        <p:spPr>
+          <a:xfrm>
+            <a:off x="1016000" y="2641600"/>
+            <a:ext cx="4191000" cy="2222500"/>
+          </a:xfrm>
+          <a:prstGeom prst="rect">
+            <a:avLst/>
+          </a:prstGeom>
+          <a:noFill/>
+          <a:ln/>
+        </p:spPr>
+        <p:txBody>
+          <a:bodyPr wrap="square" lIns="0" tIns="0" rIns="0" bIns="0" rtlCol="0" anchor="t"/>
+          <a:lstStyle/>
+          <a:p>
+            <a:pPr>
+              <a:lnSpc>
+                <a:spcPct val="145000"/>
+              </a:lnSpc>
+            </a:pPr>
+            <a:r>
+              <a:rPr lang="en-US" sz="1500" dirty="0">
+                <a:solidFill>
+                  <a:srgbClr val="212529"/>
+                </a:solidFill>
+                <a:latin typeface="Quattrocento Sans" panose="020B0502050000020003" pitchFamily="34" charset="0"/>
+                <a:ea typeface="QuattrocentoSans" pitchFamily="34" charset="-122"/>
+                <a:cs typeface="QuattrocentoSans" pitchFamily="34" charset="-120"/>
+              </a:rPr>
+              <a:t>Control del flujo mediante estados:</a:t>
+            </a:r>
+            <a:endParaRPr lang="en-US" sz="1800" dirty="0">
+              <a:latin typeface="Quattrocento Sans" panose="020B0502050000020003" pitchFamily="34" charset="0"/>
+            </a:endParaRPr>
+          </a:p>
+          <a:p>
+            <a:pPr marL="285750" indent="-285750">
+              <a:lnSpc>
+                <a:spcPct val="145000"/>
+              </a:lnSpc>
+              <a:spcBef>
+                <a:spcPts val="10"/>
+              </a:spcBef>
+              <a:buSzPct val="100000"/>
+              <a:buChar char="•"/>
+            </a:pPr>
+            <a:r>
+              <a:rPr lang="en-US" sz="1500" b="1" dirty="0">
+                <a:solidFill>
+                  <a:srgbClr val="212529"/>
+                </a:solidFill>
+                <a:latin typeface="Quattrocento Sans" panose="020B0502050000020003" pitchFamily="34" charset="0"/>
+                <a:ea typeface="QuattrocentoSans" pitchFamily="34" charset="-122"/>
+                <a:cs typeface="QuattrocentoSans" pitchFamily="34" charset="-120"/>
+              </a:rPr>
+              <a:t>To-Do</a:t>
+            </a:r>
+            <a:r>
+              <a:rPr lang="en-US" sz="1500" dirty="0">
+                <a:solidFill>
+                  <a:srgbClr val="212529"/>
+                </a:solidFill>
+                <a:latin typeface="Quattrocento Sans" panose="020B0502050000020003" pitchFamily="34" charset="0"/>
+                <a:ea typeface="QuattrocentoSans" pitchFamily="34" charset="-122"/>
+                <a:cs typeface="QuattrocentoSans" pitchFamily="34" charset="-120"/>
+              </a:rPr>
+              <a:t>: Por Hacer</a:t>
+            </a:r>
+            <a:endParaRPr lang="en-US" sz="1800" dirty="0">
+              <a:latin typeface="Quattrocento Sans" panose="020B0502050000020003" pitchFamily="34" charset="0"/>
+            </a:endParaRPr>
+          </a:p>
+          <a:p>
+            <a:pPr marL="285750" indent="-285750">
+              <a:lnSpc>
+                <a:spcPct val="145000"/>
+              </a:lnSpc>
+              <a:spcBef>
+                <a:spcPts val="10"/>
+              </a:spcBef>
+              <a:buSzPct val="100000"/>
+              <a:buChar char="•"/>
+            </a:pPr>
+            <a:r>
+              <a:rPr lang="en-US" sz="1500" b="1" dirty="0">
+                <a:solidFill>
+                  <a:srgbClr val="212529"/>
+                </a:solidFill>
+                <a:latin typeface="Quattrocento Sans" panose="020B0502050000020003" pitchFamily="34" charset="0"/>
+                <a:ea typeface="QuattrocentoSans" pitchFamily="34" charset="-122"/>
+                <a:cs typeface="QuattrocentoSans" pitchFamily="34" charset="-120"/>
+              </a:rPr>
+              <a:t>In Progress</a:t>
+            </a:r>
+            <a:r>
+              <a:rPr lang="en-US" sz="1500" dirty="0">
+                <a:solidFill>
+                  <a:srgbClr val="212529"/>
+                </a:solidFill>
+                <a:latin typeface="Quattrocento Sans" panose="020B0502050000020003" pitchFamily="34" charset="0"/>
+                <a:ea typeface="QuattrocentoSans" pitchFamily="34" charset="-122"/>
+                <a:cs typeface="QuattrocentoSans" pitchFamily="34" charset="-120"/>
+              </a:rPr>
+              <a:t>: En cursor</a:t>
+            </a:r>
+            <a:endParaRPr lang="en-US" sz="1800" dirty="0">
+              <a:latin typeface="Quattrocento Sans" panose="020B0502050000020003" pitchFamily="34" charset="0"/>
+            </a:endParaRPr>
+          </a:p>
+          <a:p>
+            <a:pPr marL="285750" indent="-285750">
+              <a:lnSpc>
+                <a:spcPct val="145000"/>
+              </a:lnSpc>
+              <a:spcBef>
+                <a:spcPts val="10"/>
+              </a:spcBef>
+              <a:buSzPct val="100000"/>
+              <a:buChar char="•"/>
+            </a:pPr>
+            <a:r>
+              <a:rPr lang="en-US" sz="1500" b="1" dirty="0">
+                <a:solidFill>
+                  <a:srgbClr val="212529"/>
+                </a:solidFill>
+                <a:latin typeface="Quattrocento Sans" panose="020B0502050000020003" pitchFamily="34" charset="0"/>
+                <a:ea typeface="QuattrocentoSans" pitchFamily="34" charset="-122"/>
+                <a:cs typeface="QuattrocentoSans" pitchFamily="34" charset="-120"/>
+              </a:rPr>
+              <a:t>Review</a:t>
+            </a:r>
+            <a:r>
+              <a:rPr lang="en-US" sz="1500" dirty="0">
+                <a:solidFill>
+                  <a:srgbClr val="212529"/>
+                </a:solidFill>
+                <a:latin typeface="Quattrocento Sans" panose="020B0502050000020003" pitchFamily="34" charset="0"/>
+                <a:ea typeface="QuattrocentoSans" pitchFamily="34" charset="-122"/>
+                <a:cs typeface="QuattrocentoSans" pitchFamily="34" charset="-120"/>
+              </a:rPr>
+              <a:t>: En revisión</a:t>
+            </a:r>
+            <a:endParaRPr lang="en-US" sz="1800" dirty="0">
+              <a:latin typeface="Quattrocento Sans" panose="020B0502050000020003" pitchFamily="34" charset="0"/>
+            </a:endParaRPr>
+          </a:p>
+          <a:p>
+            <a:pPr marL="285750" indent="-285750">
+              <a:lnSpc>
+                <a:spcPct val="145000"/>
+              </a:lnSpc>
+              <a:spcBef>
+                <a:spcPts val="10"/>
+              </a:spcBef>
+              <a:buSzPct val="100000"/>
+              <a:buChar char="•"/>
+            </a:pPr>
+            <a:r>
+              <a:rPr lang="en-US" sz="1500" b="1" dirty="0">
+                <a:solidFill>
+                  <a:srgbClr val="212529"/>
+                </a:solidFill>
+                <a:latin typeface="Quattrocento Sans" panose="020B0502050000020003" pitchFamily="34" charset="0"/>
+                <a:ea typeface="QuattrocentoSans" pitchFamily="34" charset="-122"/>
+                <a:cs typeface="QuattrocentoSans" pitchFamily="34" charset="-120"/>
+              </a:rPr>
+              <a:t>Done</a:t>
+            </a:r>
+            <a:r>
+              <a:rPr lang="en-US" sz="1500" dirty="0">
+                <a:solidFill>
+                  <a:srgbClr val="212529"/>
+                </a:solidFill>
+                <a:latin typeface="Quattrocento Sans" panose="020B0502050000020003" pitchFamily="34" charset="0"/>
+                <a:ea typeface="QuattrocentoSans" pitchFamily="34" charset="-122"/>
+                <a:cs typeface="QuattrocentoSans" pitchFamily="34" charset="-120"/>
+              </a:rPr>
+              <a:t>: </a:t>
+            </a:r>
+            <a:r>
+              <a:rPr lang="en-US" sz="1500" dirty="0" err="1">
+                <a:solidFill>
+                  <a:srgbClr val="212529"/>
+                </a:solidFill>
+                <a:latin typeface="Quattrocento Sans" panose="020B0502050000020003" pitchFamily="34" charset="0"/>
+                <a:ea typeface="QuattrocentoSans" pitchFamily="34" charset="-122"/>
+                <a:cs typeface="QuattrocentoSans" pitchFamily="34" charset="-120"/>
+              </a:rPr>
+              <a:t>Finalizado</a:t>
+            </a:r>
+            <a:endParaRPr lang="en-US" sz="1800" dirty="0">
+              <a:latin typeface="Quattrocento Sans" panose="020B0502050000020003" pitchFamily="34" charset="0"/>
+            </a:endParaRPr>
+          </a:p>
+          <a:p>
+            <a:pPr>
+              <a:lnSpc>
+                <a:spcPct val="145000"/>
+              </a:lnSpc>
+              <a:spcBef>
+                <a:spcPts val="400"/>
+              </a:spcBef>
+            </a:pPr>
+            <a:r>
+              <a:rPr lang="en-US" sz="1500" dirty="0">
+                <a:solidFill>
+                  <a:srgbClr val="212529"/>
+                </a:solidFill>
+                <a:latin typeface="Quattrocento Sans" panose="020B0502050000020003" pitchFamily="34" charset="0"/>
+                <a:ea typeface="QuattrocentoSans" pitchFamily="34" charset="-122"/>
+                <a:cs typeface="QuattrocentoSans" pitchFamily="34" charset="-120"/>
+              </a:rPr>
+              <a:t>Evita cuellos de botella.</a:t>
+            </a:r>
+            <a:endParaRPr lang="en-US" sz="1800" dirty="0">
+              <a:latin typeface="Quattrocento Sans" panose="020B0502050000020003" pitchFamily="34" charset="0"/>
+            </a:endParaRPr>
+          </a:p>
+        </p:txBody>
+      </p:sp>
+      <p:sp>
+        <p:nvSpPr>
+          <p:cNvPr id="18" name="Shape 16">
+            <a:extLst>
+              <a:ext uri="{FF2B5EF4-FFF2-40B4-BE49-F238E27FC236}">
+                <a16:creationId xmlns:a16="http://schemas.microsoft.com/office/drawing/2014/main" id="{C94AE360-760C-7CB8-B380-C4A0A268C5E6}"/>
+              </a:ext>
+            </a:extLst>
+          </p:cNvPr>
+          <p:cNvSpPr/>
+          <p:nvPr/>
+        </p:nvSpPr>
+        <p:spPr>
+          <a:xfrm>
+            <a:off x="5778500" y="1397000"/>
+            <a:ext cx="4699000" cy="3556000"/>
+          </a:xfrm>
+          <a:prstGeom prst="roundRect">
+            <a:avLst>
+              <a:gd name="adj" fmla="val 6000"/>
+            </a:avLst>
+          </a:prstGeom>
+          <a:solidFill>
+            <a:srgbClr val="FFFFFF"/>
+          </a:solidFill>
+          <a:ln w="12700">
+            <a:solidFill>
+              <a:srgbClr val="E9ECEF"/>
+            </a:solidFill>
+            <a:prstDash val="solid"/>
+          </a:ln>
+        </p:spPr>
+        <p:txBody>
+          <a:bodyPr/>
+          <a:lstStyle/>
+          <a:p>
+            <a:endParaRPr lang="es-ES">
+              <a:latin typeface="Quattrocento Sans" panose="020B0502050000020003" pitchFamily="34" charset="0"/>
+            </a:endParaRPr>
+          </a:p>
+        </p:txBody>
+      </p:sp>
+      <p:sp>
+        <p:nvSpPr>
+          <p:cNvPr id="19" name="Shape 17">
+            <a:extLst>
+              <a:ext uri="{FF2B5EF4-FFF2-40B4-BE49-F238E27FC236}">
+                <a16:creationId xmlns:a16="http://schemas.microsoft.com/office/drawing/2014/main" id="{4EBEF4C6-48B4-3508-7288-58274F512F5A}"/>
+              </a:ext>
+            </a:extLst>
+          </p:cNvPr>
+          <p:cNvSpPr/>
+          <p:nvPr/>
+        </p:nvSpPr>
+        <p:spPr>
+          <a:xfrm>
+            <a:off x="6032500" y="1587500"/>
+            <a:ext cx="457200" cy="457200"/>
+          </a:xfrm>
+          <a:custGeom>
+            <a:avLst/>
+            <a:gdLst/>
+            <a:ahLst/>
+            <a:cxnLst/>
+            <a:rect l="l" t="t" r="r" b="b"/>
+            <a:pathLst>
+              <a:path w="457200" h="457200">
+                <a:moveTo>
+                  <a:pt x="428714" y="171450"/>
+                </a:moveTo>
+                <a:lnTo>
+                  <a:pt x="435769" y="171450"/>
+                </a:lnTo>
+                <a:cubicBezTo>
+                  <a:pt x="447645" y="171450"/>
+                  <a:pt x="457200" y="161895"/>
+                  <a:pt x="457200" y="150019"/>
+                </a:cubicBezTo>
+                <a:lnTo>
+                  <a:pt x="457200" y="21431"/>
+                </a:lnTo>
+                <a:cubicBezTo>
+                  <a:pt x="457200" y="12769"/>
+                  <a:pt x="452021" y="4911"/>
+                  <a:pt x="443984" y="1607"/>
+                </a:cubicBezTo>
+                <a:cubicBezTo>
+                  <a:pt x="435947" y="-1697"/>
+                  <a:pt x="426750" y="179"/>
+                  <a:pt x="420588" y="6251"/>
+                </a:cubicBezTo>
+                <a:lnTo>
+                  <a:pt x="374422" y="52507"/>
+                </a:lnTo>
+                <a:cubicBezTo>
+                  <a:pt x="334863" y="19735"/>
+                  <a:pt x="283964" y="0"/>
+                  <a:pt x="228600" y="0"/>
+                </a:cubicBezTo>
+                <a:cubicBezTo>
+                  <a:pt x="113407" y="0"/>
+                  <a:pt x="18127" y="85189"/>
+                  <a:pt x="2322" y="196007"/>
+                </a:cubicBezTo>
+                <a:cubicBezTo>
+                  <a:pt x="89" y="211634"/>
+                  <a:pt x="10894" y="226100"/>
+                  <a:pt x="26521" y="228332"/>
+                </a:cubicBezTo>
+                <a:cubicBezTo>
+                  <a:pt x="42148" y="230565"/>
+                  <a:pt x="56614" y="219670"/>
+                  <a:pt x="58847" y="204133"/>
+                </a:cubicBezTo>
+                <a:cubicBezTo>
+                  <a:pt x="70723" y="120997"/>
+                  <a:pt x="142250" y="57150"/>
+                  <a:pt x="228600" y="57150"/>
+                </a:cubicBezTo>
+                <a:cubicBezTo>
+                  <a:pt x="268248" y="57150"/>
+                  <a:pt x="304681" y="70545"/>
+                  <a:pt x="333702" y="93137"/>
+                </a:cubicBezTo>
+                <a:lnTo>
+                  <a:pt x="292001" y="134838"/>
+                </a:lnTo>
+                <a:cubicBezTo>
+                  <a:pt x="285839" y="141000"/>
+                  <a:pt x="284053" y="150197"/>
+                  <a:pt x="287357" y="158234"/>
+                </a:cubicBezTo>
+                <a:cubicBezTo>
+                  <a:pt x="290661" y="166271"/>
+                  <a:pt x="298519" y="171450"/>
+                  <a:pt x="307181" y="171450"/>
+                </a:cubicBezTo>
+                <a:lnTo>
+                  <a:pt x="428714" y="171450"/>
+                </a:lnTo>
+                <a:close/>
+                <a:moveTo>
+                  <a:pt x="454968" y="261193"/>
+                </a:moveTo>
+                <a:cubicBezTo>
+                  <a:pt x="457200" y="245566"/>
+                  <a:pt x="446306" y="231100"/>
+                  <a:pt x="430768" y="228868"/>
+                </a:cubicBezTo>
+                <a:cubicBezTo>
+                  <a:pt x="415230" y="226635"/>
+                  <a:pt x="400675" y="237530"/>
+                  <a:pt x="398443" y="253067"/>
+                </a:cubicBezTo>
+                <a:cubicBezTo>
+                  <a:pt x="386566" y="336113"/>
+                  <a:pt x="315039" y="399961"/>
+                  <a:pt x="228689" y="399961"/>
+                </a:cubicBezTo>
+                <a:cubicBezTo>
+                  <a:pt x="189041" y="399961"/>
+                  <a:pt x="152608" y="386566"/>
+                  <a:pt x="123587" y="363974"/>
+                </a:cubicBezTo>
+                <a:lnTo>
+                  <a:pt x="165199" y="322362"/>
+                </a:lnTo>
+                <a:cubicBezTo>
+                  <a:pt x="171361" y="316200"/>
+                  <a:pt x="173147" y="307003"/>
+                  <a:pt x="169843" y="298966"/>
+                </a:cubicBezTo>
+                <a:cubicBezTo>
+                  <a:pt x="166539" y="290929"/>
+                  <a:pt x="158681" y="285750"/>
+                  <a:pt x="150019" y="285750"/>
+                </a:cubicBezTo>
+                <a:lnTo>
+                  <a:pt x="21431" y="285750"/>
+                </a:lnTo>
+                <a:cubicBezTo>
+                  <a:pt x="9555" y="285750"/>
+                  <a:pt x="0" y="295305"/>
+                  <a:pt x="0" y="307181"/>
+                </a:cubicBezTo>
+                <a:lnTo>
+                  <a:pt x="0" y="435769"/>
+                </a:lnTo>
+                <a:cubicBezTo>
+                  <a:pt x="0" y="444431"/>
+                  <a:pt x="5179" y="452289"/>
+                  <a:pt x="13216" y="455593"/>
+                </a:cubicBezTo>
+                <a:cubicBezTo>
+                  <a:pt x="21253" y="458897"/>
+                  <a:pt x="30450" y="457021"/>
+                  <a:pt x="36612" y="450949"/>
+                </a:cubicBezTo>
+                <a:lnTo>
+                  <a:pt x="82867" y="404693"/>
+                </a:lnTo>
+                <a:cubicBezTo>
+                  <a:pt x="122337" y="437465"/>
+                  <a:pt x="173236" y="457200"/>
+                  <a:pt x="228600" y="457200"/>
+                </a:cubicBezTo>
+                <a:cubicBezTo>
+                  <a:pt x="343793" y="457200"/>
+                  <a:pt x="439073" y="372011"/>
+                  <a:pt x="454878" y="261193"/>
+                </a:cubicBezTo>
+                <a:close/>
+              </a:path>
+            </a:pathLst>
+          </a:custGeom>
+          <a:solidFill>
+            <a:srgbClr val="2A9D8F"/>
+          </a:solidFill>
+          <a:ln/>
+        </p:spPr>
+        <p:txBody>
+          <a:bodyPr/>
+          <a:lstStyle/>
+          <a:p>
+            <a:endParaRPr lang="es-ES">
+              <a:latin typeface="Quattrocento Sans" panose="020B0502050000020003" pitchFamily="34" charset="0"/>
+            </a:endParaRPr>
+          </a:p>
+        </p:txBody>
+      </p:sp>
+      <p:sp>
+        <p:nvSpPr>
+          <p:cNvPr id="20" name="Text 18">
+            <a:extLst>
+              <a:ext uri="{FF2B5EF4-FFF2-40B4-BE49-F238E27FC236}">
+                <a16:creationId xmlns:a16="http://schemas.microsoft.com/office/drawing/2014/main" id="{C94FFA48-D46D-16F4-DACE-D11597BD96E5}"/>
+              </a:ext>
+            </a:extLst>
+          </p:cNvPr>
+          <p:cNvSpPr/>
+          <p:nvPr/>
+        </p:nvSpPr>
+        <p:spPr>
+          <a:xfrm>
+            <a:off x="6032500" y="2159000"/>
+            <a:ext cx="4191000" cy="381000"/>
+          </a:xfrm>
+          <a:prstGeom prst="rect">
+            <a:avLst/>
+          </a:prstGeom>
+          <a:noFill/>
+          <a:ln/>
+        </p:spPr>
+        <p:txBody>
+          <a:bodyPr wrap="none" lIns="0" tIns="0" rIns="0" bIns="0" rtlCol="0" anchor="ctr"/>
+          <a:lstStyle/>
+          <a:p>
+            <a:pPr>
+              <a:lnSpc>
+                <a:spcPct val="100000"/>
+              </a:lnSpc>
+            </a:pPr>
+            <a:r>
+              <a:rPr lang="en-US" sz="2000" b="1" dirty="0">
+                <a:solidFill>
+                  <a:srgbClr val="1B4332"/>
+                </a:solidFill>
+                <a:latin typeface="Quattrocento Sans" panose="020B0502050000020003" pitchFamily="34" charset="0"/>
+                <a:ea typeface="Quattrocento Sans" pitchFamily="34" charset="-122"/>
+                <a:cs typeface="Quattrocento Sans" pitchFamily="34" charset="-120"/>
+              </a:rPr>
+              <a:t>Scrum-Light</a:t>
+            </a:r>
+            <a:endParaRPr lang="en-US" sz="1600" dirty="0">
+              <a:latin typeface="Quattrocento Sans" panose="020B0502050000020003" pitchFamily="34" charset="0"/>
+            </a:endParaRPr>
+          </a:p>
+        </p:txBody>
+      </p:sp>
+      <p:sp>
+        <p:nvSpPr>
+          <p:cNvPr id="21" name="Text 19">
+            <a:extLst>
+              <a:ext uri="{FF2B5EF4-FFF2-40B4-BE49-F238E27FC236}">
+                <a16:creationId xmlns:a16="http://schemas.microsoft.com/office/drawing/2014/main" id="{31AF99EE-434D-96A6-F9BD-60031F4EAE2E}"/>
+              </a:ext>
+            </a:extLst>
+          </p:cNvPr>
+          <p:cNvSpPr/>
+          <p:nvPr/>
+        </p:nvSpPr>
+        <p:spPr>
+          <a:xfrm>
+            <a:off x="6032500" y="2641600"/>
+            <a:ext cx="4191000" cy="2222500"/>
+          </a:xfrm>
+          <a:prstGeom prst="rect">
+            <a:avLst/>
+          </a:prstGeom>
+          <a:noFill/>
+          <a:ln/>
+        </p:spPr>
+        <p:txBody>
+          <a:bodyPr wrap="square" lIns="0" tIns="0" rIns="0" bIns="0" rtlCol="0" anchor="t"/>
+          <a:lstStyle/>
+          <a:p>
+            <a:pPr>
+              <a:lnSpc>
+                <a:spcPct val="145000"/>
+              </a:lnSpc>
+            </a:pPr>
+            <a:r>
+              <a:rPr lang="en-US" sz="1500" dirty="0">
+                <a:solidFill>
+                  <a:srgbClr val="212529"/>
+                </a:solidFill>
+                <a:latin typeface="Quattrocento Sans" panose="020B0502050000020003" pitchFamily="34" charset="0"/>
+                <a:ea typeface="QuattrocentoSans" pitchFamily="34" charset="-122"/>
+                <a:cs typeface="QuattrocentoSans" pitchFamily="34" charset="-120"/>
+              </a:rPr>
+              <a:t>Ciclos de retroalimentación rápidos para validación de componentes.</a:t>
+            </a:r>
+            <a:endParaRPr lang="en-US" sz="1800" dirty="0">
+              <a:latin typeface="Quattrocento Sans" panose="020B0502050000020003" pitchFamily="34" charset="0"/>
+            </a:endParaRPr>
+          </a:p>
+          <a:p>
+            <a:pPr>
+              <a:lnSpc>
+                <a:spcPct val="145000"/>
+              </a:lnSpc>
+              <a:spcBef>
+                <a:spcPts val="400"/>
+              </a:spcBef>
+            </a:pPr>
+            <a:r>
+              <a:rPr lang="en-US" sz="1500" dirty="0">
+                <a:solidFill>
+                  <a:srgbClr val="212529"/>
+                </a:solidFill>
+                <a:latin typeface="Quattrocento Sans" panose="020B0502050000020003" pitchFamily="34" charset="0"/>
+                <a:ea typeface="QuattrocentoSans" pitchFamily="34" charset="-122"/>
+                <a:cs typeface="QuattrocentoSans" pitchFamily="34" charset="-120"/>
+              </a:rPr>
+              <a:t>Permiten:</a:t>
+            </a:r>
+            <a:endParaRPr lang="en-US" sz="1800" dirty="0">
+              <a:latin typeface="Quattrocento Sans" panose="020B0502050000020003" pitchFamily="34" charset="0"/>
+            </a:endParaRPr>
+          </a:p>
+          <a:p>
+            <a:pPr marL="285750" indent="-285750">
+              <a:lnSpc>
+                <a:spcPct val="145000"/>
+              </a:lnSpc>
+              <a:spcBef>
+                <a:spcPts val="10"/>
+              </a:spcBef>
+              <a:buSzPct val="100000"/>
+              <a:buChar char="•"/>
+            </a:pPr>
+            <a:r>
+              <a:rPr lang="en-US" sz="1500" dirty="0">
+                <a:solidFill>
+                  <a:srgbClr val="212529"/>
+                </a:solidFill>
+                <a:latin typeface="Quattrocento Sans" panose="020B0502050000020003" pitchFamily="34" charset="0"/>
+                <a:ea typeface="QuattrocentoSans" pitchFamily="34" charset="-122"/>
+                <a:cs typeface="QuattrocentoSans" pitchFamily="34" charset="-120"/>
+              </a:rPr>
+              <a:t>Detectar problemas temprano</a:t>
+            </a:r>
+            <a:endParaRPr lang="en-US" sz="1800" dirty="0">
+              <a:latin typeface="Quattrocento Sans" panose="020B0502050000020003" pitchFamily="34" charset="0"/>
+            </a:endParaRPr>
+          </a:p>
+          <a:p>
+            <a:pPr marL="285750" indent="-285750">
+              <a:lnSpc>
+                <a:spcPct val="145000"/>
+              </a:lnSpc>
+              <a:spcBef>
+                <a:spcPts val="10"/>
+              </a:spcBef>
+              <a:buSzPct val="100000"/>
+              <a:buChar char="•"/>
+            </a:pPr>
+            <a:r>
+              <a:rPr lang="en-US" sz="1500" dirty="0">
+                <a:solidFill>
+                  <a:srgbClr val="212529"/>
+                </a:solidFill>
+                <a:latin typeface="Quattrocento Sans" panose="020B0502050000020003" pitchFamily="34" charset="0"/>
+                <a:ea typeface="QuattrocentoSans" pitchFamily="34" charset="-122"/>
+                <a:cs typeface="QuattrocentoSans" pitchFamily="34" charset="-120"/>
+              </a:rPr>
+              <a:t>Adaptar requisitos</a:t>
+            </a:r>
+            <a:endParaRPr lang="en-US" sz="1800" dirty="0">
+              <a:latin typeface="Quattrocento Sans" panose="020B0502050000020003" pitchFamily="34" charset="0"/>
+            </a:endParaRPr>
+          </a:p>
+          <a:p>
+            <a:pPr marL="285750" indent="-285750">
+              <a:lnSpc>
+                <a:spcPct val="145000"/>
+              </a:lnSpc>
+              <a:spcBef>
+                <a:spcPts val="10"/>
+              </a:spcBef>
+              <a:buSzPct val="100000"/>
+              <a:buChar char="•"/>
+            </a:pPr>
+            <a:r>
+              <a:rPr lang="en-US" sz="1500" dirty="0">
+                <a:solidFill>
+                  <a:srgbClr val="212529"/>
+                </a:solidFill>
+                <a:latin typeface="Quattrocento Sans" panose="020B0502050000020003" pitchFamily="34" charset="0"/>
+                <a:ea typeface="QuattrocentoSans" pitchFamily="34" charset="-122"/>
+                <a:cs typeface="QuattrocentoSans" pitchFamily="34" charset="-120"/>
+              </a:rPr>
+              <a:t>Entregar valor incremental</a:t>
+            </a:r>
+            <a:endParaRPr lang="en-US" sz="1800" dirty="0">
+              <a:latin typeface="Quattrocento Sans" panose="020B0502050000020003" pitchFamily="34" charset="0"/>
+            </a:endParaRPr>
+          </a:p>
+        </p:txBody>
+      </p:sp>
+      <p:sp>
+        <p:nvSpPr>
+          <p:cNvPr id="22" name="Shape 20">
+            <a:extLst>
+              <a:ext uri="{FF2B5EF4-FFF2-40B4-BE49-F238E27FC236}">
+                <a16:creationId xmlns:a16="http://schemas.microsoft.com/office/drawing/2014/main" id="{F6EEFA40-36BA-2F30-0638-163D1918BA85}"/>
+              </a:ext>
+            </a:extLst>
+          </p:cNvPr>
+          <p:cNvSpPr/>
+          <p:nvPr/>
+        </p:nvSpPr>
+        <p:spPr>
+          <a:xfrm>
+            <a:off x="10795000" y="1397000"/>
+            <a:ext cx="4699000" cy="3556000"/>
+          </a:xfrm>
+          <a:prstGeom prst="roundRect">
+            <a:avLst>
+              <a:gd name="adj" fmla="val 6000"/>
+            </a:avLst>
+          </a:prstGeom>
+          <a:solidFill>
+            <a:srgbClr val="FFFFFF"/>
+          </a:solidFill>
+          <a:ln w="12700">
+            <a:solidFill>
+              <a:srgbClr val="E9ECEF"/>
+            </a:solidFill>
+            <a:prstDash val="solid"/>
+          </a:ln>
+        </p:spPr>
+        <p:txBody>
+          <a:bodyPr/>
+          <a:lstStyle/>
+          <a:p>
+            <a:endParaRPr lang="es-ES">
+              <a:latin typeface="Quattrocento Sans" panose="020B0502050000020003" pitchFamily="34" charset="0"/>
+            </a:endParaRPr>
+          </a:p>
+        </p:txBody>
+      </p:sp>
+      <p:sp>
+        <p:nvSpPr>
+          <p:cNvPr id="23" name="Shape 21">
+            <a:extLst>
+              <a:ext uri="{FF2B5EF4-FFF2-40B4-BE49-F238E27FC236}">
+                <a16:creationId xmlns:a16="http://schemas.microsoft.com/office/drawing/2014/main" id="{CDAAA348-D9E4-208B-A883-5A458F616C3A}"/>
+              </a:ext>
+            </a:extLst>
+          </p:cNvPr>
+          <p:cNvSpPr/>
+          <p:nvPr/>
+        </p:nvSpPr>
+        <p:spPr>
+          <a:xfrm>
+            <a:off x="11106150" y="1587500"/>
+            <a:ext cx="342900" cy="457200"/>
+          </a:xfrm>
+          <a:custGeom>
+            <a:avLst/>
+            <a:gdLst/>
+            <a:ahLst/>
+            <a:cxnLst/>
+            <a:rect l="l" t="t" r="r" b="b"/>
+            <a:pathLst>
+              <a:path w="342900" h="457200">
+                <a:moveTo>
+                  <a:pt x="14288" y="57150"/>
+                </a:moveTo>
+                <a:cubicBezTo>
+                  <a:pt x="14288" y="25628"/>
+                  <a:pt x="39916" y="0"/>
+                  <a:pt x="71438" y="0"/>
+                </a:cubicBezTo>
+                <a:lnTo>
+                  <a:pt x="271463" y="0"/>
+                </a:lnTo>
+                <a:cubicBezTo>
+                  <a:pt x="302984" y="0"/>
+                  <a:pt x="328613" y="25628"/>
+                  <a:pt x="328613" y="57150"/>
+                </a:cubicBezTo>
+                <a:lnTo>
+                  <a:pt x="328613" y="400050"/>
+                </a:lnTo>
+                <a:cubicBezTo>
+                  <a:pt x="328613" y="431572"/>
+                  <a:pt x="302984" y="457200"/>
+                  <a:pt x="271463" y="457200"/>
+                </a:cubicBezTo>
+                <a:lnTo>
+                  <a:pt x="71438" y="457200"/>
+                </a:lnTo>
+                <a:cubicBezTo>
+                  <a:pt x="39916" y="457200"/>
+                  <a:pt x="14288" y="431572"/>
+                  <a:pt x="14288" y="400050"/>
+                </a:cubicBezTo>
+                <a:lnTo>
+                  <a:pt x="14288" y="57150"/>
+                </a:lnTo>
+                <a:close/>
+                <a:moveTo>
+                  <a:pt x="114300" y="392906"/>
+                </a:moveTo>
+                <a:cubicBezTo>
+                  <a:pt x="114300" y="404783"/>
+                  <a:pt x="123855" y="414338"/>
+                  <a:pt x="135731" y="414338"/>
+                </a:cubicBezTo>
+                <a:lnTo>
+                  <a:pt x="207169" y="414338"/>
+                </a:lnTo>
+                <a:cubicBezTo>
+                  <a:pt x="219045" y="414338"/>
+                  <a:pt x="228600" y="404783"/>
+                  <a:pt x="228600" y="392906"/>
+                </a:cubicBezTo>
+                <a:cubicBezTo>
+                  <a:pt x="228600" y="381030"/>
+                  <a:pt x="219045" y="371475"/>
+                  <a:pt x="207169" y="371475"/>
+                </a:cubicBezTo>
+                <a:lnTo>
+                  <a:pt x="135731" y="371475"/>
+                </a:lnTo>
+                <a:cubicBezTo>
+                  <a:pt x="123855" y="371475"/>
+                  <a:pt x="114300" y="381030"/>
+                  <a:pt x="114300" y="392906"/>
+                </a:cubicBezTo>
+                <a:close/>
+                <a:moveTo>
+                  <a:pt x="271463" y="57150"/>
+                </a:moveTo>
+                <a:lnTo>
+                  <a:pt x="71438" y="57150"/>
+                </a:lnTo>
+                <a:lnTo>
+                  <a:pt x="71438" y="328613"/>
+                </a:lnTo>
+                <a:lnTo>
+                  <a:pt x="271463" y="328613"/>
+                </a:lnTo>
+                <a:lnTo>
+                  <a:pt x="271463" y="57150"/>
+                </a:lnTo>
+                <a:close/>
+              </a:path>
+            </a:pathLst>
+          </a:custGeom>
+          <a:solidFill>
+            <a:srgbClr val="2A9D8F"/>
+          </a:solidFill>
+          <a:ln/>
+        </p:spPr>
+        <p:txBody>
+          <a:bodyPr/>
+          <a:lstStyle/>
+          <a:p>
+            <a:endParaRPr lang="es-ES">
+              <a:latin typeface="Quattrocento Sans" panose="020B0502050000020003" pitchFamily="34" charset="0"/>
+            </a:endParaRPr>
+          </a:p>
+        </p:txBody>
+      </p:sp>
+      <p:sp>
+        <p:nvSpPr>
+          <p:cNvPr id="24" name="Text 22">
+            <a:extLst>
+              <a:ext uri="{FF2B5EF4-FFF2-40B4-BE49-F238E27FC236}">
+                <a16:creationId xmlns:a16="http://schemas.microsoft.com/office/drawing/2014/main" id="{F6918D49-5F86-A5FB-7449-67AFD0C9B205}"/>
+              </a:ext>
+            </a:extLst>
+          </p:cNvPr>
+          <p:cNvSpPr/>
+          <p:nvPr/>
+        </p:nvSpPr>
+        <p:spPr>
+          <a:xfrm>
+            <a:off x="11049000" y="2159000"/>
+            <a:ext cx="4191000" cy="381000"/>
+          </a:xfrm>
+          <a:prstGeom prst="rect">
+            <a:avLst/>
+          </a:prstGeom>
+          <a:noFill/>
+          <a:ln/>
+        </p:spPr>
+        <p:txBody>
+          <a:bodyPr wrap="none" lIns="0" tIns="0" rIns="0" bIns="0" rtlCol="0" anchor="ctr"/>
+          <a:lstStyle/>
+          <a:p>
+            <a:pPr>
+              <a:lnSpc>
+                <a:spcPct val="100000"/>
+              </a:lnSpc>
+            </a:pPr>
+            <a:r>
+              <a:rPr lang="en-US" sz="2000" b="1" dirty="0">
+                <a:solidFill>
+                  <a:srgbClr val="1B4332"/>
+                </a:solidFill>
+                <a:latin typeface="Quattrocento Sans" panose="020B0502050000020003" pitchFamily="34" charset="0"/>
+                <a:ea typeface="Quattrocento Sans" pitchFamily="34" charset="-122"/>
+                <a:cs typeface="Quattrocento Sans" pitchFamily="34" charset="-120"/>
+              </a:rPr>
+              <a:t>Mobile-First</a:t>
+            </a:r>
+            <a:endParaRPr lang="en-US" sz="1600" dirty="0">
+              <a:latin typeface="Quattrocento Sans" panose="020B0502050000020003" pitchFamily="34" charset="0"/>
+            </a:endParaRPr>
+          </a:p>
+        </p:txBody>
+      </p:sp>
+      <p:sp>
+        <p:nvSpPr>
+          <p:cNvPr id="25" name="Text 23">
+            <a:extLst>
+              <a:ext uri="{FF2B5EF4-FFF2-40B4-BE49-F238E27FC236}">
+                <a16:creationId xmlns:a16="http://schemas.microsoft.com/office/drawing/2014/main" id="{AC6F3EC0-6260-F995-4B8C-A3D0A4263896}"/>
+              </a:ext>
+            </a:extLst>
+          </p:cNvPr>
+          <p:cNvSpPr/>
+          <p:nvPr/>
+        </p:nvSpPr>
+        <p:spPr>
+          <a:xfrm>
+            <a:off x="11049000" y="2641600"/>
+            <a:ext cx="4191000" cy="2222500"/>
+          </a:xfrm>
+          <a:prstGeom prst="rect">
+            <a:avLst/>
+          </a:prstGeom>
+          <a:noFill/>
+          <a:ln/>
+        </p:spPr>
+        <p:txBody>
+          <a:bodyPr wrap="square" lIns="0" tIns="0" rIns="0" bIns="0" rtlCol="0" anchor="t"/>
+          <a:lstStyle/>
+          <a:p>
+            <a:pPr>
+              <a:lnSpc>
+                <a:spcPct val="145000"/>
+              </a:lnSpc>
+            </a:pPr>
+            <a:r>
+              <a:rPr lang="en-US" sz="1500" dirty="0">
+                <a:solidFill>
+                  <a:srgbClr val="212529"/>
+                </a:solidFill>
+                <a:latin typeface="Quattrocento Sans" panose="020B0502050000020003" pitchFamily="34" charset="0"/>
+                <a:ea typeface="QuattrocentoSans" pitchFamily="34" charset="-122"/>
+                <a:cs typeface="QuattrocentoSans" pitchFamily="34" charset="-120"/>
+              </a:rPr>
+              <a:t>Desarrollo desde la resolución más baja hacia escritorio.</a:t>
+            </a:r>
+            <a:endParaRPr lang="en-US" sz="1800" dirty="0">
+              <a:latin typeface="Quattrocento Sans" panose="020B0502050000020003" pitchFamily="34" charset="0"/>
+            </a:endParaRPr>
+          </a:p>
+          <a:p>
+            <a:pPr>
+              <a:lnSpc>
+                <a:spcPct val="145000"/>
+              </a:lnSpc>
+              <a:spcBef>
+                <a:spcPts val="400"/>
+              </a:spcBef>
+            </a:pPr>
+            <a:r>
+              <a:rPr lang="en-US" sz="1500" dirty="0">
+                <a:solidFill>
+                  <a:srgbClr val="212529"/>
+                </a:solidFill>
+                <a:latin typeface="Quattrocento Sans" panose="020B0502050000020003" pitchFamily="34" charset="0"/>
+                <a:ea typeface="QuattrocentoSans" pitchFamily="34" charset="-122"/>
+                <a:cs typeface="QuattrocentoSans" pitchFamily="34" charset="-120"/>
+              </a:rPr>
+              <a:t>Garantiza:</a:t>
+            </a:r>
+            <a:endParaRPr lang="en-US" sz="1800" dirty="0">
+              <a:latin typeface="Quattrocento Sans" panose="020B0502050000020003" pitchFamily="34" charset="0"/>
+            </a:endParaRPr>
+          </a:p>
+          <a:p>
+            <a:pPr marL="285750" indent="-285750">
+              <a:lnSpc>
+                <a:spcPct val="145000"/>
+              </a:lnSpc>
+              <a:spcBef>
+                <a:spcPts val="10"/>
+              </a:spcBef>
+              <a:buSzPct val="100000"/>
+              <a:buChar char="•"/>
+            </a:pPr>
+            <a:r>
+              <a:rPr lang="en-US" sz="1500" dirty="0">
+                <a:solidFill>
+                  <a:srgbClr val="212529"/>
+                </a:solidFill>
+                <a:latin typeface="Quattrocento Sans" panose="020B0502050000020003" pitchFamily="34" charset="0"/>
+                <a:ea typeface="QuattrocentoSans" pitchFamily="34" charset="-122"/>
+                <a:cs typeface="QuattrocentoSans" pitchFamily="34" charset="-120"/>
+              </a:rPr>
+              <a:t>Experiencia óptima en móviles</a:t>
+            </a:r>
+            <a:endParaRPr lang="en-US" sz="1800" dirty="0">
+              <a:latin typeface="Quattrocento Sans" panose="020B0502050000020003" pitchFamily="34" charset="0"/>
+            </a:endParaRPr>
+          </a:p>
+          <a:p>
+            <a:pPr marL="285750" indent="-285750">
+              <a:lnSpc>
+                <a:spcPct val="145000"/>
+              </a:lnSpc>
+              <a:spcBef>
+                <a:spcPts val="10"/>
+              </a:spcBef>
+              <a:buSzPct val="100000"/>
+              <a:buChar char="•"/>
+            </a:pPr>
+            <a:r>
+              <a:rPr lang="en-US" sz="1500" dirty="0">
+                <a:solidFill>
+                  <a:srgbClr val="212529"/>
+                </a:solidFill>
+                <a:latin typeface="Quattrocento Sans" panose="020B0502050000020003" pitchFamily="34" charset="0"/>
+                <a:ea typeface="QuattrocentoSans" pitchFamily="34" charset="-122"/>
+                <a:cs typeface="QuattrocentoSans" pitchFamily="34" charset="-120"/>
+              </a:rPr>
+              <a:t>Progressive enhancement</a:t>
+            </a:r>
+            <a:endParaRPr lang="en-US" sz="1800" dirty="0">
+              <a:latin typeface="Quattrocento Sans" panose="020B0502050000020003" pitchFamily="34" charset="0"/>
+            </a:endParaRPr>
+          </a:p>
+          <a:p>
+            <a:pPr marL="285750" indent="-285750">
+              <a:lnSpc>
+                <a:spcPct val="145000"/>
+              </a:lnSpc>
+              <a:spcBef>
+                <a:spcPts val="10"/>
+              </a:spcBef>
+              <a:buSzPct val="100000"/>
+              <a:buChar char="•"/>
+            </a:pPr>
+            <a:r>
+              <a:rPr lang="en-US" sz="1500" dirty="0">
+                <a:solidFill>
+                  <a:srgbClr val="212529"/>
+                </a:solidFill>
+                <a:latin typeface="Quattrocento Sans" panose="020B0502050000020003" pitchFamily="34" charset="0"/>
+                <a:ea typeface="QuattrocentoSans" pitchFamily="34" charset="-122"/>
+                <a:cs typeface="QuattrocentoSans" pitchFamily="34" charset="-120"/>
+              </a:rPr>
+              <a:t>Mayor cobertura de usuarios</a:t>
+            </a:r>
+            <a:endParaRPr lang="en-US" sz="1800" dirty="0">
+              <a:latin typeface="Quattrocento Sans" panose="020B0502050000020003" pitchFamily="34" charset="0"/>
+            </a:endParaRPr>
+          </a:p>
+        </p:txBody>
+      </p:sp>
+      <p:sp>
+        <p:nvSpPr>
+          <p:cNvPr id="26" name="Shape 24">
+            <a:extLst>
+              <a:ext uri="{FF2B5EF4-FFF2-40B4-BE49-F238E27FC236}">
+                <a16:creationId xmlns:a16="http://schemas.microsoft.com/office/drawing/2014/main" id="{3BFA88B3-324C-4DD1-1E78-17241449C43C}"/>
+              </a:ext>
+            </a:extLst>
+          </p:cNvPr>
+          <p:cNvSpPr/>
+          <p:nvPr/>
+        </p:nvSpPr>
+        <p:spPr>
+          <a:xfrm>
+            <a:off x="762000" y="5207000"/>
+            <a:ext cx="14732000" cy="25400"/>
+          </a:xfrm>
+          <a:prstGeom prst="rect">
+            <a:avLst/>
+          </a:prstGeom>
+          <a:solidFill>
+            <a:srgbClr val="E9ECEF"/>
+          </a:solidFill>
+          <a:ln/>
+        </p:spPr>
+        <p:txBody>
+          <a:bodyPr/>
+          <a:lstStyle/>
+          <a:p>
+            <a:endParaRPr lang="es-ES">
+              <a:latin typeface="Quattrocento Sans" panose="020B0502050000020003" pitchFamily="34" charset="0"/>
+            </a:endParaRPr>
+          </a:p>
+        </p:txBody>
+      </p:sp>
+      <p:sp>
+        <p:nvSpPr>
+          <p:cNvPr id="27" name="Text 25">
+            <a:extLst>
+              <a:ext uri="{FF2B5EF4-FFF2-40B4-BE49-F238E27FC236}">
+                <a16:creationId xmlns:a16="http://schemas.microsoft.com/office/drawing/2014/main" id="{1B0D8A24-0AB0-F7DD-0098-98906AB26809}"/>
+              </a:ext>
+            </a:extLst>
+          </p:cNvPr>
+          <p:cNvSpPr/>
+          <p:nvPr/>
+        </p:nvSpPr>
+        <p:spPr>
+          <a:xfrm>
+            <a:off x="762000" y="5397500"/>
+            <a:ext cx="5080000" cy="381000"/>
+          </a:xfrm>
+          <a:prstGeom prst="rect">
+            <a:avLst/>
+          </a:prstGeom>
+          <a:noFill/>
+          <a:ln/>
+        </p:spPr>
+        <p:txBody>
+          <a:bodyPr wrap="none" lIns="0" tIns="0" rIns="0" bIns="0" rtlCol="0" anchor="ctr"/>
+          <a:lstStyle/>
+          <a:p>
+            <a:pPr>
+              <a:lnSpc>
+                <a:spcPct val="140000"/>
+              </a:lnSpc>
+            </a:pPr>
+            <a:r>
+              <a:rPr lang="en-US" sz="2000" b="1" dirty="0">
+                <a:solidFill>
+                  <a:srgbClr val="6C757D"/>
+                </a:solidFill>
+                <a:latin typeface="Quattrocento Sans" panose="020B0502050000020003" pitchFamily="34" charset="0"/>
+                <a:ea typeface="QuattrocentoSans" pitchFamily="34" charset="-122"/>
+                <a:cs typeface="QuattrocentoSans" pitchFamily="34" charset="-120"/>
+              </a:rPr>
+              <a:t>Stack Tecnológico</a:t>
+            </a:r>
+            <a:endParaRPr lang="en-US" sz="2000" dirty="0">
+              <a:latin typeface="Quattrocento Sans" panose="020B0502050000020003" pitchFamily="34" charset="0"/>
+            </a:endParaRPr>
+          </a:p>
+        </p:txBody>
+      </p:sp>
+      <p:sp>
+        <p:nvSpPr>
+          <p:cNvPr id="28" name="Shape 26">
+            <a:extLst>
+              <a:ext uri="{FF2B5EF4-FFF2-40B4-BE49-F238E27FC236}">
+                <a16:creationId xmlns:a16="http://schemas.microsoft.com/office/drawing/2014/main" id="{6E2844BE-BD2E-368C-AE12-DA36187F909E}"/>
+              </a:ext>
+            </a:extLst>
+          </p:cNvPr>
+          <p:cNvSpPr/>
+          <p:nvPr/>
+        </p:nvSpPr>
+        <p:spPr>
+          <a:xfrm>
+            <a:off x="762000" y="5969000"/>
+            <a:ext cx="1651000" cy="457200"/>
+          </a:xfrm>
+          <a:prstGeom prst="roundRect">
+            <a:avLst>
+              <a:gd name="adj" fmla="val 16000"/>
+            </a:avLst>
+          </a:prstGeom>
+          <a:solidFill>
+            <a:srgbClr val="1B4332"/>
+          </a:solidFill>
+          <a:ln/>
+        </p:spPr>
+        <p:txBody>
+          <a:bodyPr/>
+          <a:lstStyle/>
+          <a:p>
+            <a:endParaRPr lang="es-ES">
+              <a:latin typeface="Quattrocento Sans" panose="020B0502050000020003" pitchFamily="34" charset="0"/>
+            </a:endParaRPr>
+          </a:p>
+        </p:txBody>
+      </p:sp>
+      <p:sp>
+        <p:nvSpPr>
+          <p:cNvPr id="29" name="Text 27">
+            <a:extLst>
+              <a:ext uri="{FF2B5EF4-FFF2-40B4-BE49-F238E27FC236}">
+                <a16:creationId xmlns:a16="http://schemas.microsoft.com/office/drawing/2014/main" id="{8D1C5ACA-ABE9-FD33-A25F-69AD758E682E}"/>
+              </a:ext>
+            </a:extLst>
+          </p:cNvPr>
+          <p:cNvSpPr/>
+          <p:nvPr/>
+        </p:nvSpPr>
+        <p:spPr>
+          <a:xfrm>
+            <a:off x="762000" y="5969000"/>
+            <a:ext cx="1651000" cy="457200"/>
+          </a:xfrm>
+          <a:prstGeom prst="rect">
+            <a:avLst/>
+          </a:prstGeom>
+          <a:noFill/>
+          <a:ln/>
+        </p:spPr>
+        <p:txBody>
+          <a:bodyPr wrap="none" lIns="0" tIns="0" rIns="0" bIns="0" rtlCol="0" anchor="ctr"/>
+          <a:lstStyle/>
+          <a:p>
+            <a:pPr algn="ctr">
+              <a:lnSpc>
+                <a:spcPct val="100000"/>
+              </a:lnSpc>
+            </a:pPr>
+            <a:r>
+              <a:rPr lang="en-US" sz="1400" b="1" dirty="0">
+                <a:solidFill>
+                  <a:srgbClr val="FFFFFF"/>
+                </a:solidFill>
+                <a:latin typeface="Quattrocento Sans" panose="020B0502050000020003" pitchFamily="34" charset="0"/>
+                <a:ea typeface="QuattrocentoSans" pitchFamily="34" charset="-122"/>
+                <a:cs typeface="QuattrocentoSans" pitchFamily="34" charset="-120"/>
+              </a:rPr>
+              <a:t>React</a:t>
+            </a:r>
+            <a:endParaRPr lang="en-US" sz="1400" dirty="0">
+              <a:latin typeface="Quattrocento Sans" panose="020B0502050000020003" pitchFamily="34" charset="0"/>
+            </a:endParaRPr>
+          </a:p>
+        </p:txBody>
+      </p:sp>
+      <p:sp>
+        <p:nvSpPr>
+          <p:cNvPr id="30" name="Shape 28">
+            <a:extLst>
+              <a:ext uri="{FF2B5EF4-FFF2-40B4-BE49-F238E27FC236}">
+                <a16:creationId xmlns:a16="http://schemas.microsoft.com/office/drawing/2014/main" id="{DC71FDBF-DBC6-B579-3EBA-DB8BCC66FFE2}"/>
+              </a:ext>
+            </a:extLst>
+          </p:cNvPr>
+          <p:cNvSpPr/>
+          <p:nvPr/>
+        </p:nvSpPr>
+        <p:spPr>
+          <a:xfrm>
+            <a:off x="2603500" y="5969000"/>
+            <a:ext cx="2286000" cy="457200"/>
+          </a:xfrm>
+          <a:prstGeom prst="roundRect">
+            <a:avLst>
+              <a:gd name="adj" fmla="val 16000"/>
+            </a:avLst>
+          </a:prstGeom>
+          <a:solidFill>
+            <a:srgbClr val="1B4332"/>
+          </a:solidFill>
+          <a:ln/>
+        </p:spPr>
+        <p:txBody>
+          <a:bodyPr/>
+          <a:lstStyle/>
+          <a:p>
+            <a:endParaRPr lang="es-ES">
+              <a:latin typeface="Quattrocento Sans" panose="020B0502050000020003" pitchFamily="34" charset="0"/>
+            </a:endParaRPr>
+          </a:p>
+        </p:txBody>
+      </p:sp>
+      <p:sp>
+        <p:nvSpPr>
+          <p:cNvPr id="31" name="Text 29">
+            <a:extLst>
+              <a:ext uri="{FF2B5EF4-FFF2-40B4-BE49-F238E27FC236}">
+                <a16:creationId xmlns:a16="http://schemas.microsoft.com/office/drawing/2014/main" id="{5CA5CA65-F90F-2741-9D9D-BAF36B228FE8}"/>
+              </a:ext>
+            </a:extLst>
+          </p:cNvPr>
+          <p:cNvSpPr/>
+          <p:nvPr/>
+        </p:nvSpPr>
+        <p:spPr>
+          <a:xfrm>
+            <a:off x="2603500" y="5969000"/>
+            <a:ext cx="2286000" cy="457200"/>
+          </a:xfrm>
+          <a:prstGeom prst="rect">
+            <a:avLst/>
+          </a:prstGeom>
+          <a:noFill/>
+          <a:ln/>
+        </p:spPr>
+        <p:txBody>
+          <a:bodyPr wrap="none" lIns="0" tIns="0" rIns="0" bIns="0" rtlCol="0" anchor="ctr"/>
+          <a:lstStyle/>
+          <a:p>
+            <a:pPr algn="ctr">
+              <a:lnSpc>
+                <a:spcPct val="100000"/>
+              </a:lnSpc>
+            </a:pPr>
+            <a:r>
+              <a:rPr lang="en-US" sz="1400" b="1" dirty="0">
+                <a:solidFill>
+                  <a:srgbClr val="FFFFFF"/>
+                </a:solidFill>
+                <a:latin typeface="Quattrocento Sans" panose="020B0502050000020003" pitchFamily="34" charset="0"/>
+                <a:ea typeface="QuattrocentoSans" pitchFamily="34" charset="-122"/>
+                <a:cs typeface="QuattrocentoSans" pitchFamily="34" charset="-120"/>
+              </a:rPr>
+              <a:t>Node.js</a:t>
+            </a:r>
+            <a:endParaRPr lang="en-US" sz="1400" dirty="0">
+              <a:latin typeface="Quattrocento Sans" panose="020B0502050000020003" pitchFamily="34" charset="0"/>
+            </a:endParaRPr>
+          </a:p>
+        </p:txBody>
+      </p:sp>
+      <p:sp>
+        <p:nvSpPr>
+          <p:cNvPr id="32" name="Shape 30">
+            <a:extLst>
+              <a:ext uri="{FF2B5EF4-FFF2-40B4-BE49-F238E27FC236}">
+                <a16:creationId xmlns:a16="http://schemas.microsoft.com/office/drawing/2014/main" id="{09F840B6-C22B-C1DB-3B14-175DA4E98C74}"/>
+              </a:ext>
+            </a:extLst>
+          </p:cNvPr>
+          <p:cNvSpPr/>
+          <p:nvPr/>
+        </p:nvSpPr>
+        <p:spPr>
+          <a:xfrm>
+            <a:off x="5080000" y="5969000"/>
+            <a:ext cx="1778000" cy="457200"/>
+          </a:xfrm>
+          <a:prstGeom prst="roundRect">
+            <a:avLst>
+              <a:gd name="adj" fmla="val 16000"/>
+            </a:avLst>
+          </a:prstGeom>
+          <a:solidFill>
+            <a:srgbClr val="1B4332"/>
+          </a:solidFill>
+          <a:ln/>
+        </p:spPr>
+        <p:txBody>
+          <a:bodyPr/>
+          <a:lstStyle/>
+          <a:p>
+            <a:endParaRPr lang="es-ES">
+              <a:latin typeface="Quattrocento Sans" panose="020B0502050000020003" pitchFamily="34" charset="0"/>
+            </a:endParaRPr>
+          </a:p>
+        </p:txBody>
+      </p:sp>
+      <p:sp>
+        <p:nvSpPr>
+          <p:cNvPr id="33" name="Text 31">
+            <a:extLst>
+              <a:ext uri="{FF2B5EF4-FFF2-40B4-BE49-F238E27FC236}">
+                <a16:creationId xmlns:a16="http://schemas.microsoft.com/office/drawing/2014/main" id="{2DA948F6-5353-2F16-5215-AA1D343678B3}"/>
+              </a:ext>
+            </a:extLst>
+          </p:cNvPr>
+          <p:cNvSpPr/>
+          <p:nvPr/>
+        </p:nvSpPr>
+        <p:spPr>
+          <a:xfrm>
+            <a:off x="5080000" y="5969000"/>
+            <a:ext cx="1778000" cy="457200"/>
+          </a:xfrm>
+          <a:prstGeom prst="rect">
+            <a:avLst/>
+          </a:prstGeom>
+          <a:noFill/>
+          <a:ln/>
+        </p:spPr>
+        <p:txBody>
+          <a:bodyPr wrap="none" lIns="0" tIns="0" rIns="0" bIns="0" rtlCol="0" anchor="ctr"/>
+          <a:lstStyle/>
+          <a:p>
+            <a:pPr algn="ctr">
+              <a:lnSpc>
+                <a:spcPct val="100000"/>
+              </a:lnSpc>
+            </a:pPr>
+            <a:r>
+              <a:rPr lang="en-US" sz="1400" b="1" dirty="0">
+                <a:solidFill>
+                  <a:srgbClr val="FFFFFF"/>
+                </a:solidFill>
+                <a:latin typeface="Quattrocento Sans" panose="020B0502050000020003" pitchFamily="34" charset="0"/>
+                <a:ea typeface="QuattrocentoSans" pitchFamily="34" charset="-122"/>
+                <a:cs typeface="QuattrocentoSans" pitchFamily="34" charset="-120"/>
+              </a:rPr>
+              <a:t>PostgreSQL</a:t>
+            </a:r>
+            <a:endParaRPr lang="en-US" sz="1400" dirty="0">
+              <a:latin typeface="Quattrocento Sans" panose="020B0502050000020003" pitchFamily="34" charset="0"/>
+            </a:endParaRPr>
+          </a:p>
+        </p:txBody>
+      </p:sp>
+      <p:sp>
+        <p:nvSpPr>
+          <p:cNvPr id="34" name="Shape 32">
+            <a:extLst>
+              <a:ext uri="{FF2B5EF4-FFF2-40B4-BE49-F238E27FC236}">
+                <a16:creationId xmlns:a16="http://schemas.microsoft.com/office/drawing/2014/main" id="{F8803D43-FE6B-9399-7A09-7161F025515E}"/>
+              </a:ext>
+            </a:extLst>
+          </p:cNvPr>
+          <p:cNvSpPr/>
+          <p:nvPr/>
+        </p:nvSpPr>
+        <p:spPr>
+          <a:xfrm>
+            <a:off x="7048500" y="5969000"/>
+            <a:ext cx="1651000" cy="457200"/>
+          </a:xfrm>
+          <a:prstGeom prst="roundRect">
+            <a:avLst>
+              <a:gd name="adj" fmla="val 16000"/>
+            </a:avLst>
+          </a:prstGeom>
+          <a:solidFill>
+            <a:srgbClr val="1B4332"/>
+          </a:solidFill>
+          <a:ln/>
+        </p:spPr>
+        <p:txBody>
+          <a:bodyPr/>
+          <a:lstStyle/>
+          <a:p>
+            <a:endParaRPr lang="es-ES">
+              <a:latin typeface="Quattrocento Sans" panose="020B0502050000020003" pitchFamily="34" charset="0"/>
+            </a:endParaRPr>
+          </a:p>
+        </p:txBody>
+      </p:sp>
+      <p:sp>
+        <p:nvSpPr>
+          <p:cNvPr id="35" name="Text 33">
+            <a:extLst>
+              <a:ext uri="{FF2B5EF4-FFF2-40B4-BE49-F238E27FC236}">
+                <a16:creationId xmlns:a16="http://schemas.microsoft.com/office/drawing/2014/main" id="{F94A14F6-752A-E7B6-69D2-1D6CCB29EAA3}"/>
+              </a:ext>
+            </a:extLst>
+          </p:cNvPr>
+          <p:cNvSpPr/>
+          <p:nvPr/>
+        </p:nvSpPr>
+        <p:spPr>
+          <a:xfrm>
+            <a:off x="7048500" y="5969000"/>
+            <a:ext cx="1651000" cy="457200"/>
+          </a:xfrm>
+          <a:prstGeom prst="rect">
+            <a:avLst/>
+          </a:prstGeom>
+          <a:noFill/>
+          <a:ln/>
+        </p:spPr>
+        <p:txBody>
+          <a:bodyPr wrap="none" lIns="0" tIns="0" rIns="0" bIns="0" rtlCol="0" anchor="ctr"/>
+          <a:lstStyle/>
+          <a:p>
+            <a:pPr algn="ctr">
+              <a:lnSpc>
+                <a:spcPct val="100000"/>
+              </a:lnSpc>
+            </a:pPr>
+            <a:r>
+              <a:rPr lang="en-US" sz="1400" b="1" dirty="0">
+                <a:solidFill>
+                  <a:srgbClr val="FFFFFF"/>
+                </a:solidFill>
+                <a:latin typeface="Quattrocento Sans" panose="020B0502050000020003" pitchFamily="34" charset="0"/>
+                <a:ea typeface="QuattrocentoSans" pitchFamily="34" charset="-122"/>
+                <a:cs typeface="QuattrocentoSans" pitchFamily="34" charset="-120"/>
+              </a:rPr>
+              <a:t>Docker</a:t>
+            </a:r>
+            <a:endParaRPr lang="en-US" sz="1400" dirty="0">
+              <a:latin typeface="Quattrocento Sans" panose="020B0502050000020003" pitchFamily="34" charset="0"/>
+            </a:endParaRPr>
+          </a:p>
+        </p:txBody>
+      </p:sp>
+      <p:sp>
+        <p:nvSpPr>
+          <p:cNvPr id="36" name="Text 34">
+            <a:extLst>
+              <a:ext uri="{FF2B5EF4-FFF2-40B4-BE49-F238E27FC236}">
+                <a16:creationId xmlns:a16="http://schemas.microsoft.com/office/drawing/2014/main" id="{D9B6445A-81D8-DA25-F2A8-0A440048D924}"/>
+              </a:ext>
+            </a:extLst>
+          </p:cNvPr>
+          <p:cNvSpPr/>
+          <p:nvPr/>
+        </p:nvSpPr>
+        <p:spPr>
+          <a:xfrm>
+            <a:off x="762000" y="6667500"/>
+            <a:ext cx="14732000" cy="1651000"/>
+          </a:xfrm>
+          <a:prstGeom prst="rect">
+            <a:avLst/>
+          </a:prstGeom>
+          <a:noFill/>
+          <a:ln/>
+        </p:spPr>
+        <p:txBody>
+          <a:bodyPr wrap="square" lIns="0" tIns="0" rIns="0" bIns="0" rtlCol="0" anchor="t"/>
+          <a:lstStyle/>
+          <a:p>
+            <a:pPr>
+              <a:lnSpc>
+                <a:spcPct val="150000"/>
+              </a:lnSpc>
+            </a:pPr>
+            <a:r>
+              <a:rPr lang="en-US" sz="1600" b="1" dirty="0">
+                <a:solidFill>
+                  <a:srgbClr val="212529"/>
+                </a:solidFill>
+                <a:latin typeface="Quattrocento Sans" panose="020B0502050000020003" pitchFamily="34" charset="0"/>
+                <a:ea typeface="QuattrocentoSans" pitchFamily="34" charset="-122"/>
+                <a:cs typeface="QuattrocentoSans" pitchFamily="34" charset="-120"/>
+              </a:rPr>
+              <a:t>Frontend:</a:t>
+            </a:r>
+            <a:r>
+              <a:rPr lang="en-US" sz="1600" dirty="0">
+                <a:solidFill>
+                  <a:srgbClr val="212529"/>
+                </a:solidFill>
+                <a:latin typeface="Quattrocento Sans" panose="020B0502050000020003" pitchFamily="34" charset="0"/>
+                <a:ea typeface="QuattrocentoSans" pitchFamily="34" charset="-122"/>
+                <a:cs typeface="QuattrocentoSans" pitchFamily="34" charset="-120"/>
+              </a:rPr>
+              <a:t> React + Vite — SPA de alto rendimiento con componentes reutilizables.</a:t>
+            </a:r>
+            <a:endParaRPr lang="en-US" sz="1800" dirty="0">
+              <a:latin typeface="Quattrocento Sans" panose="020B0502050000020003" pitchFamily="34" charset="0"/>
+            </a:endParaRPr>
+          </a:p>
+          <a:p>
+            <a:pPr>
+              <a:lnSpc>
+                <a:spcPct val="150000"/>
+              </a:lnSpc>
+              <a:spcBef>
+                <a:spcPts val="400"/>
+              </a:spcBef>
+            </a:pPr>
+            <a:r>
+              <a:rPr lang="en-US" sz="1600" b="1" dirty="0">
+                <a:solidFill>
+                  <a:srgbClr val="212529"/>
+                </a:solidFill>
+                <a:latin typeface="Quattrocento Sans" panose="020B0502050000020003" pitchFamily="34" charset="0"/>
+                <a:ea typeface="QuattrocentoSans" pitchFamily="34" charset="-122"/>
+                <a:cs typeface="QuattrocentoSans" pitchFamily="34" charset="-120"/>
+              </a:rPr>
+              <a:t>Backend:</a:t>
+            </a:r>
+            <a:r>
+              <a:rPr lang="en-US" sz="1600" dirty="0">
+                <a:solidFill>
+                  <a:srgbClr val="212529"/>
+                </a:solidFill>
+                <a:latin typeface="Quattrocento Sans" panose="020B0502050000020003" pitchFamily="34" charset="0"/>
+                <a:ea typeface="QuattrocentoSans" pitchFamily="34" charset="-122"/>
+                <a:cs typeface="QuattrocentoSans" pitchFamily="34" charset="-120"/>
+              </a:rPr>
+              <a:t> Node.js + Express.js — arquitectura ligera y escalable con eventos asíncronos.</a:t>
+            </a:r>
+            <a:endParaRPr lang="en-US" sz="1800" dirty="0">
+              <a:latin typeface="Quattrocento Sans" panose="020B0502050000020003" pitchFamily="34" charset="0"/>
+            </a:endParaRPr>
+          </a:p>
+          <a:p>
+            <a:pPr>
+              <a:lnSpc>
+                <a:spcPct val="150000"/>
+              </a:lnSpc>
+              <a:spcBef>
+                <a:spcPts val="400"/>
+              </a:spcBef>
+            </a:pPr>
+            <a:r>
+              <a:rPr lang="en-US" sz="1600" b="1" dirty="0">
+                <a:solidFill>
+                  <a:srgbClr val="212529"/>
+                </a:solidFill>
+                <a:latin typeface="Quattrocento Sans" panose="020B0502050000020003" pitchFamily="34" charset="0"/>
+                <a:ea typeface="QuattrocentoSans" pitchFamily="34" charset="-122"/>
+                <a:cs typeface="QuattrocentoSans" pitchFamily="34" charset="-120"/>
+              </a:rPr>
+              <a:t>Base de datos:</a:t>
+            </a:r>
+            <a:r>
+              <a:rPr lang="en-US" sz="1600" dirty="0">
+                <a:solidFill>
+                  <a:srgbClr val="212529"/>
+                </a:solidFill>
+                <a:latin typeface="Quattrocento Sans" panose="020B0502050000020003" pitchFamily="34" charset="0"/>
+                <a:ea typeface="QuattrocentoSans" pitchFamily="34" charset="-122"/>
+                <a:cs typeface="QuattrocentoSans" pitchFamily="34" charset="-120"/>
+              </a:rPr>
+              <a:t> PostgreSQL— modelo relacional robusto con migraciones automáticas.</a:t>
+            </a:r>
+            <a:endParaRPr lang="en-US" sz="1800" dirty="0">
+              <a:latin typeface="Quattrocento Sans" panose="020B0502050000020003" pitchFamily="34" charset="0"/>
+            </a:endParaRPr>
+          </a:p>
+          <a:p>
+            <a:pPr>
+              <a:lnSpc>
+                <a:spcPct val="150000"/>
+              </a:lnSpc>
+              <a:spcBef>
+                <a:spcPts val="400"/>
+              </a:spcBef>
+            </a:pPr>
+            <a:r>
+              <a:rPr lang="en-US" sz="1600" b="1" dirty="0">
+                <a:solidFill>
+                  <a:srgbClr val="212529"/>
+                </a:solidFill>
+                <a:latin typeface="Quattrocento Sans" panose="020B0502050000020003" pitchFamily="34" charset="0"/>
+                <a:ea typeface="QuattrocentoSans" pitchFamily="34" charset="-122"/>
+                <a:cs typeface="QuattrocentoSans" pitchFamily="34" charset="-120"/>
+              </a:rPr>
+              <a:t>Despliegue:</a:t>
+            </a:r>
+            <a:r>
+              <a:rPr lang="en-US" sz="1600" dirty="0">
+                <a:solidFill>
+                  <a:srgbClr val="212529"/>
+                </a:solidFill>
+                <a:latin typeface="Quattrocento Sans" panose="020B0502050000020003" pitchFamily="34" charset="0"/>
+                <a:ea typeface="QuattrocentoSans" pitchFamily="34" charset="-122"/>
+                <a:cs typeface="QuattrocentoSans" pitchFamily="34" charset="-120"/>
+              </a:rPr>
+              <a:t> Docker + Nginx — contenedores para entornos idénticos y proxy inverso.</a:t>
+            </a:r>
+            <a:endParaRPr lang="en-US" sz="1800" dirty="0">
+              <a:latin typeface="Quattrocento Sans" panose="020B0502050000020003" pitchFamily="34" charset="0"/>
+            </a:endParaRPr>
+          </a:p>
+        </p:txBody>
+      </p:sp>
+      <p:sp>
+        <p:nvSpPr>
+          <p:cNvPr id="37" name="Text 35">
+            <a:extLst>
+              <a:ext uri="{FF2B5EF4-FFF2-40B4-BE49-F238E27FC236}">
+                <a16:creationId xmlns:a16="http://schemas.microsoft.com/office/drawing/2014/main" id="{2BFFAD56-C223-7331-B8E7-F8405EA858B8}"/>
+              </a:ext>
+            </a:extLst>
+          </p:cNvPr>
+          <p:cNvSpPr/>
+          <p:nvPr/>
+        </p:nvSpPr>
+        <p:spPr>
+          <a:xfrm>
+            <a:off x="15240000" y="8763000"/>
+            <a:ext cx="762000" cy="254000"/>
+          </a:xfrm>
+          <a:prstGeom prst="rect">
+            <a:avLst/>
+          </a:prstGeom>
+          <a:noFill/>
+          <a:ln/>
+        </p:spPr>
+        <p:txBody>
+          <a:bodyPr wrap="none" lIns="0" tIns="0" rIns="0" bIns="0" rtlCol="0" anchor="ctr"/>
+          <a:lstStyle/>
+          <a:p>
+            <a:pPr algn="r">
+              <a:lnSpc>
+                <a:spcPct val="140000"/>
+              </a:lnSpc>
+            </a:pPr>
+            <a:r>
+              <a:rPr lang="en-US" sz="1400" dirty="0">
+                <a:solidFill>
+                  <a:srgbClr val="6C757D"/>
+                </a:solidFill>
+                <a:latin typeface="Quattrocento Sans" panose="020B0502050000020003" pitchFamily="34" charset="0"/>
+                <a:ea typeface="QuattrocentoSans" pitchFamily="34" charset="-122"/>
+                <a:cs typeface="QuattrocentoSans" pitchFamily="34" charset="-120"/>
+              </a:rPr>
+              <a:t>3 / 10</a:t>
+            </a:r>
+            <a:endParaRPr lang="en-US" sz="1400" dirty="0">
+              <a:latin typeface="Quattrocento Sans" panose="020B0502050000020003" pitchFamily="34" charset="0"/>
+            </a:endParaRPr>
+          </a:p>
+        </p:txBody>
+      </p:sp>
+      <p:pic>
+        <p:nvPicPr>
+          <p:cNvPr id="2" name="Picture 2" descr="Las funciones - Iconos gratis de diverso">
+            <a:extLst>
+              <a:ext uri="{FF2B5EF4-FFF2-40B4-BE49-F238E27FC236}">
+                <a16:creationId xmlns:a16="http://schemas.microsoft.com/office/drawing/2014/main" id="{B7640773-B64C-B627-A285-8DA0B9C54E22}"/>
+              </a:ext>
+            </a:extLst>
+          </p:cNvPr>
+          <p:cNvPicPr>
+            <a:picLocks noChangeAspect="1" noChangeArrowheads="1"/>
+          </p:cNvPicPr>
+          <p:nvPr/>
+        </p:nvPicPr>
+        <p:blipFill>
+          <a:blip r:embed="rId3">
+            <a:extLst>
+              <a:ext uri="{28A0092B-C50C-407E-A947-70E740481C1C}">
+                <a14:useLocalDpi xmlns:a14="http://schemas.microsoft.com/office/drawing/2010/main" val="0"/>
+              </a:ext>
+            </a:extLst>
+          </a:blip>
+          <a:srcRect/>
+          <a:stretch>
+            <a:fillRect/>
+          </a:stretch>
+        </p:blipFill>
+        <p:spPr bwMode="auto">
+          <a:xfrm>
+            <a:off x="317500" y="749300"/>
+            <a:ext cx="381000" cy="381000"/>
+          </a:xfrm>
+          <a:prstGeom prst="rect">
+            <a:avLst/>
+          </a:prstGeom>
+          <a:noFill/>
+          <a:extLst>
+            <a:ext uri="{909E8E84-426E-40DD-AFC4-6F175D3DCCD1}">
+              <a14:hiddenFill xmlns:a14="http://schemas.microsoft.com/office/drawing/2010/main">
+                <a:solidFill>
+                  <a:srgbClr val="FFFFFF"/>
+                </a:solidFill>
+              </a14:hiddenFill>
+            </a:ext>
+          </a:extLst>
+        </p:spPr>
+      </p:pic>
+    </p:spTree>
+    <p:extLst>
+      <p:ext uri="{BB962C8B-B14F-4D97-AF65-F5344CB8AC3E}">
+        <p14:creationId xmlns:p14="http://schemas.microsoft.com/office/powerpoint/2010/main" val="3157570118"/>
+      </p:ext>
+    </p:extLst>
+  </p:cSld>
+  <p:clrMapOvr>
+    <a:masterClrMapping/>
+  </p:clrMapOvr>
+  <p:transition>
+    <p:fade/>
+  </p:transition>
+</p:sld>
+</file>
+
+<file path=ppt/slides/slide11.xml><?xml version="1.0" encoding="utf-8"?>
+<p:sld xmlns:a="http://schemas.openxmlformats.org/drawingml/2006/main" xmlns:r="http://schemas.openxmlformats.org/officeDocument/2006/relationships" xmlns:p="http://schemas.openxmlformats.org/presentationml/2006/main">
+  <p:cSld>
+    <p:bg>
+      <p:bgPr>
+        <a:solidFill>
+          <a:srgbClr val="F8F9FA"/>
+        </a:solidFill>
+        <a:effectLst/>
+      </p:bgPr>
+    </p:bg>
+    <p:spTree>
+      <p:nvGrpSpPr>
+        <p:cNvPr id="1" name="">
+          <a:extLst>
+            <a:ext uri="{FF2B5EF4-FFF2-40B4-BE49-F238E27FC236}">
+              <a16:creationId xmlns:a16="http://schemas.microsoft.com/office/drawing/2014/main" id="{5E4E28D4-B553-C932-BE6B-14FE77E9996C}"/>
+            </a:ext>
+          </a:extLst>
+        </p:cNvPr>
+        <p:cNvGrpSpPr/>
+        <p:nvPr/>
+      </p:nvGrpSpPr>
+      <p:grpSpPr>
+        <a:xfrm>
+          <a:off x="0" y="0"/>
+          <a:ext cx="0" cy="0"/>
+          <a:chOff x="0" y="0"/>
+          <a:chExt cx="0" cy="0"/>
+        </a:xfrm>
+      </p:grpSpPr>
+      <p:sp>
+        <p:nvSpPr>
+          <p:cNvPr id="3" name="Shape 1">
+            <a:extLst>
+              <a:ext uri="{FF2B5EF4-FFF2-40B4-BE49-F238E27FC236}">
+                <a16:creationId xmlns:a16="http://schemas.microsoft.com/office/drawing/2014/main" id="{6C1A0434-76B0-04E2-CF5B-E02BA185FABD}"/>
+              </a:ext>
+            </a:extLst>
+          </p:cNvPr>
+          <p:cNvSpPr/>
+          <p:nvPr/>
+        </p:nvSpPr>
+        <p:spPr>
+          <a:xfrm>
+            <a:off x="77156" y="73082"/>
+            <a:ext cx="1879600" cy="355600"/>
+          </a:xfrm>
+          <a:prstGeom prst="roundRect">
+            <a:avLst>
+              <a:gd name="adj" fmla="val 8000"/>
+            </a:avLst>
+          </a:prstGeom>
+          <a:solidFill>
+            <a:srgbClr val="1B4332"/>
+          </a:solidFill>
+          <a:ln/>
+        </p:spPr>
+        <p:txBody>
+          <a:bodyPr/>
+          <a:lstStyle/>
+          <a:p>
+            <a:endParaRPr lang="es-ES">
+              <a:solidFill>
+                <a:schemeClr val="bg1"/>
+              </a:solidFill>
+              <a:latin typeface="Quattrocento Sans" panose="020B0502050000020003" pitchFamily="34" charset="0"/>
+            </a:endParaRPr>
+          </a:p>
+        </p:txBody>
+      </p:sp>
+      <p:sp>
+        <p:nvSpPr>
+          <p:cNvPr id="5" name="Text 3">
+            <a:extLst>
+              <a:ext uri="{FF2B5EF4-FFF2-40B4-BE49-F238E27FC236}">
+                <a16:creationId xmlns:a16="http://schemas.microsoft.com/office/drawing/2014/main" id="{E0B4F1DC-4F13-8949-9A44-E5E187CDA73E}"/>
+              </a:ext>
+            </a:extLst>
+          </p:cNvPr>
+          <p:cNvSpPr/>
+          <p:nvPr/>
+        </p:nvSpPr>
+        <p:spPr>
+          <a:xfrm>
+            <a:off x="956" y="-3118"/>
+            <a:ext cx="2032000" cy="508000"/>
+          </a:xfrm>
+          <a:prstGeom prst="rect">
+            <a:avLst/>
+          </a:prstGeom>
+          <a:solidFill>
+            <a:srgbClr val="1B4332"/>
+          </a:solidFill>
+          <a:ln/>
+        </p:spPr>
+        <p:txBody>
+          <a:bodyPr wrap="none" lIns="0" tIns="0" rIns="0" bIns="0" rtlCol="0" anchor="ctr"/>
+          <a:lstStyle/>
+          <a:p>
+            <a:pPr algn="ctr">
+              <a:lnSpc>
+                <a:spcPct val="100000"/>
+              </a:lnSpc>
+            </a:pPr>
+            <a:r>
+              <a:rPr lang="en-US" sz="1200" b="1" dirty="0">
+                <a:solidFill>
+                  <a:schemeClr val="bg1"/>
+                </a:solidFill>
+                <a:latin typeface="Quattrocento Sans" panose="020B0502050000020003" pitchFamily="34" charset="0"/>
+              </a:rPr>
+              <a:t>USOS</a:t>
+            </a:r>
+          </a:p>
+        </p:txBody>
+      </p:sp>
+      <p:sp>
+        <p:nvSpPr>
+          <p:cNvPr id="12" name="Shape 10">
+            <a:extLst>
+              <a:ext uri="{FF2B5EF4-FFF2-40B4-BE49-F238E27FC236}">
+                <a16:creationId xmlns:a16="http://schemas.microsoft.com/office/drawing/2014/main" id="{83241F25-FD0C-FB4E-CEBC-35AAACA3A108}"/>
+              </a:ext>
+            </a:extLst>
+          </p:cNvPr>
+          <p:cNvSpPr/>
+          <p:nvPr/>
+        </p:nvSpPr>
+        <p:spPr>
+          <a:xfrm>
+            <a:off x="762000" y="736600"/>
+            <a:ext cx="50800" cy="355600"/>
+          </a:xfrm>
+          <a:prstGeom prst="rect">
+            <a:avLst/>
+          </a:prstGeom>
+          <a:solidFill>
+            <a:srgbClr val="2A9D8F"/>
+          </a:solidFill>
+          <a:ln/>
+        </p:spPr>
+        <p:txBody>
+          <a:bodyPr/>
+          <a:lstStyle/>
+          <a:p>
+            <a:endParaRPr lang="es-ES">
+              <a:latin typeface="Quattrocento Sans" panose="020B0502050000020003" pitchFamily="34" charset="0"/>
+            </a:endParaRPr>
+          </a:p>
+        </p:txBody>
+      </p:sp>
+      <p:sp>
+        <p:nvSpPr>
+          <p:cNvPr id="13" name="Text 11">
+            <a:extLst>
+              <a:ext uri="{FF2B5EF4-FFF2-40B4-BE49-F238E27FC236}">
+                <a16:creationId xmlns:a16="http://schemas.microsoft.com/office/drawing/2014/main" id="{7F2AB070-322B-4602-BDBA-9041EDB68FF8}"/>
+              </a:ext>
+            </a:extLst>
+          </p:cNvPr>
+          <p:cNvSpPr/>
+          <p:nvPr/>
+        </p:nvSpPr>
+        <p:spPr>
+          <a:xfrm>
+            <a:off x="965200" y="698500"/>
+            <a:ext cx="8890000" cy="482600"/>
+          </a:xfrm>
+          <a:prstGeom prst="rect">
+            <a:avLst/>
+          </a:prstGeom>
+          <a:noFill/>
+          <a:ln/>
+        </p:spPr>
+        <p:txBody>
+          <a:bodyPr wrap="none" lIns="0" tIns="0" rIns="0" bIns="0" rtlCol="0" anchor="ctr"/>
+          <a:lstStyle/>
+          <a:p>
+            <a:pPr>
+              <a:lnSpc>
+                <a:spcPct val="130000"/>
+              </a:lnSpc>
+            </a:pPr>
+            <a:r>
+              <a:rPr lang="en-US" sz="2800" b="1" dirty="0">
+                <a:solidFill>
+                  <a:srgbClr val="1B4332"/>
+                </a:solidFill>
+                <a:latin typeface="Quattrocento Sans" panose="020B0502050000020003" pitchFamily="34" charset="0"/>
+                <a:ea typeface="QuattrocentoSans" pitchFamily="34" charset="-122"/>
+                <a:cs typeface="QuattrocentoSans" pitchFamily="34" charset="-120"/>
+              </a:rPr>
+              <a:t>Metodologías de Gestión y Diseño</a:t>
+            </a:r>
+            <a:endParaRPr lang="en-US" sz="2800" dirty="0">
+              <a:latin typeface="Quattrocento Sans" panose="020B0502050000020003" pitchFamily="34" charset="0"/>
+            </a:endParaRPr>
+          </a:p>
+        </p:txBody>
+      </p:sp>
+      <p:sp>
+        <p:nvSpPr>
+          <p:cNvPr id="14" name="Shape 12">
+            <a:extLst>
+              <a:ext uri="{FF2B5EF4-FFF2-40B4-BE49-F238E27FC236}">
+                <a16:creationId xmlns:a16="http://schemas.microsoft.com/office/drawing/2014/main" id="{80113D2F-2222-E69D-E351-7B88833BD0C4}"/>
+              </a:ext>
+            </a:extLst>
+          </p:cNvPr>
+          <p:cNvSpPr/>
+          <p:nvPr/>
+        </p:nvSpPr>
+        <p:spPr>
+          <a:xfrm>
+            <a:off x="762000" y="1397000"/>
+            <a:ext cx="4699000" cy="3556000"/>
+          </a:xfrm>
+          <a:prstGeom prst="roundRect">
+            <a:avLst>
+              <a:gd name="adj" fmla="val 6000"/>
+            </a:avLst>
+          </a:prstGeom>
+          <a:solidFill>
+            <a:srgbClr val="FFFFFF"/>
+          </a:solidFill>
+          <a:ln w="12700">
+            <a:solidFill>
+              <a:srgbClr val="E9ECEF"/>
+            </a:solidFill>
+            <a:prstDash val="solid"/>
+          </a:ln>
+        </p:spPr>
+        <p:txBody>
+          <a:bodyPr/>
+          <a:lstStyle/>
+          <a:p>
+            <a:endParaRPr lang="es-ES">
+              <a:latin typeface="Quattrocento Sans" panose="020B0502050000020003" pitchFamily="34" charset="0"/>
+            </a:endParaRPr>
+          </a:p>
+        </p:txBody>
+      </p:sp>
+      <p:sp>
+        <p:nvSpPr>
+          <p:cNvPr id="15" name="Shape 13">
+            <a:extLst>
+              <a:ext uri="{FF2B5EF4-FFF2-40B4-BE49-F238E27FC236}">
+                <a16:creationId xmlns:a16="http://schemas.microsoft.com/office/drawing/2014/main" id="{22444C52-908A-9156-A8A3-414F6A5E9AA3}"/>
+              </a:ext>
+            </a:extLst>
+          </p:cNvPr>
+          <p:cNvSpPr/>
+          <p:nvPr/>
+        </p:nvSpPr>
+        <p:spPr>
+          <a:xfrm>
+            <a:off x="1044575" y="1587500"/>
+            <a:ext cx="400050" cy="457200"/>
+          </a:xfrm>
+          <a:custGeom>
+            <a:avLst/>
+            <a:gdLst/>
+            <a:ahLst/>
+            <a:cxnLst/>
+            <a:rect l="l" t="t" r="r" b="b"/>
+            <a:pathLst>
+              <a:path w="400050" h="457200">
+                <a:moveTo>
+                  <a:pt x="0" y="85725"/>
+                </a:moveTo>
+                <a:cubicBezTo>
+                  <a:pt x="0" y="54203"/>
+                  <a:pt x="25628" y="28575"/>
+                  <a:pt x="57150" y="28575"/>
+                </a:cubicBezTo>
+                <a:lnTo>
+                  <a:pt x="342900" y="28575"/>
+                </a:lnTo>
+                <a:cubicBezTo>
+                  <a:pt x="374422" y="28575"/>
+                  <a:pt x="400050" y="54203"/>
+                  <a:pt x="400050" y="85725"/>
+                </a:cubicBezTo>
+                <a:lnTo>
+                  <a:pt x="400050" y="371475"/>
+                </a:lnTo>
+                <a:cubicBezTo>
+                  <a:pt x="400050" y="402997"/>
+                  <a:pt x="374422" y="428625"/>
+                  <a:pt x="342900" y="428625"/>
+                </a:cubicBezTo>
+                <a:lnTo>
+                  <a:pt x="57150" y="428625"/>
+                </a:lnTo>
+                <a:cubicBezTo>
+                  <a:pt x="25628" y="428625"/>
+                  <a:pt x="0" y="402997"/>
+                  <a:pt x="0" y="371475"/>
+                </a:cubicBezTo>
+                <a:lnTo>
+                  <a:pt x="0" y="85725"/>
+                </a:lnTo>
+                <a:close/>
+                <a:moveTo>
+                  <a:pt x="57150" y="142875"/>
+                </a:moveTo>
+                <a:lnTo>
+                  <a:pt x="57150" y="371475"/>
+                </a:lnTo>
+                <a:lnTo>
+                  <a:pt x="171450" y="371475"/>
+                </a:lnTo>
+                <a:lnTo>
+                  <a:pt x="171450" y="142875"/>
+                </a:lnTo>
+                <a:lnTo>
+                  <a:pt x="57150" y="142875"/>
+                </a:lnTo>
+                <a:close/>
+                <a:moveTo>
+                  <a:pt x="342900" y="142875"/>
+                </a:moveTo>
+                <a:lnTo>
+                  <a:pt x="228600" y="142875"/>
+                </a:lnTo>
+                <a:lnTo>
+                  <a:pt x="228600" y="371475"/>
+                </a:lnTo>
+                <a:lnTo>
+                  <a:pt x="342900" y="371475"/>
+                </a:lnTo>
+                <a:lnTo>
+                  <a:pt x="342900" y="142875"/>
+                </a:lnTo>
+                <a:close/>
+              </a:path>
+            </a:pathLst>
+          </a:custGeom>
+          <a:solidFill>
+            <a:srgbClr val="2A9D8F"/>
+          </a:solidFill>
+          <a:ln/>
+        </p:spPr>
+        <p:txBody>
+          <a:bodyPr/>
+          <a:lstStyle/>
+          <a:p>
+            <a:endParaRPr lang="es-ES">
+              <a:latin typeface="Quattrocento Sans" panose="020B0502050000020003" pitchFamily="34" charset="0"/>
+            </a:endParaRPr>
+          </a:p>
+        </p:txBody>
+      </p:sp>
+      <p:sp>
+        <p:nvSpPr>
+          <p:cNvPr id="16" name="Text 14">
+            <a:extLst>
+              <a:ext uri="{FF2B5EF4-FFF2-40B4-BE49-F238E27FC236}">
+                <a16:creationId xmlns:a16="http://schemas.microsoft.com/office/drawing/2014/main" id="{48D99429-B266-E429-E7BA-E71472A301DA}"/>
+              </a:ext>
+            </a:extLst>
+          </p:cNvPr>
+          <p:cNvSpPr/>
+          <p:nvPr/>
+        </p:nvSpPr>
+        <p:spPr>
+          <a:xfrm>
+            <a:off x="1016000" y="2159000"/>
+            <a:ext cx="4191000" cy="381000"/>
+          </a:xfrm>
+          <a:prstGeom prst="rect">
+            <a:avLst/>
+          </a:prstGeom>
+          <a:noFill/>
+          <a:ln/>
+        </p:spPr>
+        <p:txBody>
+          <a:bodyPr wrap="none" lIns="0" tIns="0" rIns="0" bIns="0" rtlCol="0" anchor="ctr"/>
+          <a:lstStyle/>
+          <a:p>
+            <a:pPr>
+              <a:lnSpc>
+                <a:spcPct val="100000"/>
+              </a:lnSpc>
+            </a:pPr>
+            <a:r>
+              <a:rPr lang="en-US" sz="2000" b="1" dirty="0">
+                <a:solidFill>
+                  <a:srgbClr val="1B4332"/>
+                </a:solidFill>
+                <a:latin typeface="Quattrocento Sans" panose="020B0502050000020003" pitchFamily="34" charset="0"/>
+                <a:ea typeface="Quattrocento Sans" pitchFamily="34" charset="-122"/>
+                <a:cs typeface="Quattrocento Sans" pitchFamily="34" charset="-120"/>
+              </a:rPr>
+              <a:t>Kanban &amp; Jira</a:t>
+            </a:r>
+            <a:endParaRPr lang="en-US" sz="1600" dirty="0">
+              <a:latin typeface="Quattrocento Sans" panose="020B0502050000020003" pitchFamily="34" charset="0"/>
+            </a:endParaRPr>
+          </a:p>
+        </p:txBody>
+      </p:sp>
+      <p:sp>
+        <p:nvSpPr>
+          <p:cNvPr id="17" name="Text 15">
+            <a:extLst>
+              <a:ext uri="{FF2B5EF4-FFF2-40B4-BE49-F238E27FC236}">
+                <a16:creationId xmlns:a16="http://schemas.microsoft.com/office/drawing/2014/main" id="{70363B1D-7B7F-7AE4-FD2F-20CB1D86BA33}"/>
+              </a:ext>
+            </a:extLst>
+          </p:cNvPr>
+          <p:cNvSpPr/>
+          <p:nvPr/>
+        </p:nvSpPr>
+        <p:spPr>
+          <a:xfrm>
+            <a:off x="1016000" y="2641600"/>
+            <a:ext cx="4191000" cy="2222500"/>
+          </a:xfrm>
+          <a:prstGeom prst="rect">
+            <a:avLst/>
+          </a:prstGeom>
+          <a:noFill/>
+          <a:ln/>
+        </p:spPr>
+        <p:txBody>
+          <a:bodyPr wrap="square" lIns="0" tIns="0" rIns="0" bIns="0" rtlCol="0" anchor="t"/>
+          <a:lstStyle/>
+          <a:p>
+            <a:pPr>
+              <a:lnSpc>
+                <a:spcPct val="145000"/>
+              </a:lnSpc>
+            </a:pPr>
+            <a:r>
+              <a:rPr lang="en-US" sz="1500" dirty="0">
+                <a:solidFill>
+                  <a:srgbClr val="212529"/>
+                </a:solidFill>
+                <a:latin typeface="Quattrocento Sans" panose="020B0502050000020003" pitchFamily="34" charset="0"/>
+                <a:ea typeface="QuattrocentoSans" pitchFamily="34" charset="-122"/>
+                <a:cs typeface="QuattrocentoSans" pitchFamily="34" charset="-120"/>
+              </a:rPr>
+              <a:t>Control del flujo mediante estados:</a:t>
+            </a:r>
+            <a:endParaRPr lang="en-US" sz="1800" dirty="0">
+              <a:latin typeface="Quattrocento Sans" panose="020B0502050000020003" pitchFamily="34" charset="0"/>
+            </a:endParaRPr>
+          </a:p>
+          <a:p>
+            <a:pPr marL="285750" indent="-285750">
+              <a:lnSpc>
+                <a:spcPct val="145000"/>
+              </a:lnSpc>
+              <a:spcBef>
+                <a:spcPts val="10"/>
+              </a:spcBef>
+              <a:buSzPct val="100000"/>
+              <a:buChar char="•"/>
+            </a:pPr>
+            <a:r>
+              <a:rPr lang="en-US" sz="1500" b="1" dirty="0">
+                <a:solidFill>
+                  <a:srgbClr val="212529"/>
+                </a:solidFill>
+                <a:latin typeface="Quattrocento Sans" panose="020B0502050000020003" pitchFamily="34" charset="0"/>
+                <a:ea typeface="QuattrocentoSans" pitchFamily="34" charset="-122"/>
+                <a:cs typeface="QuattrocentoSans" pitchFamily="34" charset="-120"/>
+              </a:rPr>
+              <a:t>To-Do</a:t>
+            </a:r>
+            <a:r>
+              <a:rPr lang="en-US" sz="1500" dirty="0">
+                <a:solidFill>
+                  <a:srgbClr val="212529"/>
+                </a:solidFill>
+                <a:latin typeface="Quattrocento Sans" panose="020B0502050000020003" pitchFamily="34" charset="0"/>
+                <a:ea typeface="QuattrocentoSans" pitchFamily="34" charset="-122"/>
+                <a:cs typeface="QuattrocentoSans" pitchFamily="34" charset="-120"/>
+              </a:rPr>
+              <a:t>: Por Hacer</a:t>
+            </a:r>
+            <a:endParaRPr lang="en-US" sz="1800" dirty="0">
+              <a:latin typeface="Quattrocento Sans" panose="020B0502050000020003" pitchFamily="34" charset="0"/>
+            </a:endParaRPr>
+          </a:p>
+          <a:p>
+            <a:pPr marL="285750" indent="-285750">
+              <a:lnSpc>
+                <a:spcPct val="145000"/>
+              </a:lnSpc>
+              <a:spcBef>
+                <a:spcPts val="10"/>
+              </a:spcBef>
+              <a:buSzPct val="100000"/>
+              <a:buChar char="•"/>
+            </a:pPr>
+            <a:r>
+              <a:rPr lang="en-US" sz="1500" b="1" dirty="0">
+                <a:solidFill>
+                  <a:srgbClr val="212529"/>
+                </a:solidFill>
+                <a:latin typeface="Quattrocento Sans" panose="020B0502050000020003" pitchFamily="34" charset="0"/>
+                <a:ea typeface="QuattrocentoSans" pitchFamily="34" charset="-122"/>
+                <a:cs typeface="QuattrocentoSans" pitchFamily="34" charset="-120"/>
+              </a:rPr>
+              <a:t>In Progress</a:t>
+            </a:r>
+            <a:r>
+              <a:rPr lang="en-US" sz="1500" dirty="0">
+                <a:solidFill>
+                  <a:srgbClr val="212529"/>
+                </a:solidFill>
+                <a:latin typeface="Quattrocento Sans" panose="020B0502050000020003" pitchFamily="34" charset="0"/>
+                <a:ea typeface="QuattrocentoSans" pitchFamily="34" charset="-122"/>
+                <a:cs typeface="QuattrocentoSans" pitchFamily="34" charset="-120"/>
+              </a:rPr>
+              <a:t>: En cursor</a:t>
+            </a:r>
+            <a:endParaRPr lang="en-US" sz="1800" dirty="0">
+              <a:latin typeface="Quattrocento Sans" panose="020B0502050000020003" pitchFamily="34" charset="0"/>
+            </a:endParaRPr>
+          </a:p>
+          <a:p>
+            <a:pPr marL="285750" indent="-285750">
+              <a:lnSpc>
+                <a:spcPct val="145000"/>
+              </a:lnSpc>
+              <a:spcBef>
+                <a:spcPts val="10"/>
+              </a:spcBef>
+              <a:buSzPct val="100000"/>
+              <a:buChar char="•"/>
+            </a:pPr>
+            <a:r>
+              <a:rPr lang="en-US" sz="1500" b="1" dirty="0">
+                <a:solidFill>
+                  <a:srgbClr val="212529"/>
+                </a:solidFill>
+                <a:latin typeface="Quattrocento Sans" panose="020B0502050000020003" pitchFamily="34" charset="0"/>
+                <a:ea typeface="QuattrocentoSans" pitchFamily="34" charset="-122"/>
+                <a:cs typeface="QuattrocentoSans" pitchFamily="34" charset="-120"/>
+              </a:rPr>
+              <a:t>Review</a:t>
+            </a:r>
+            <a:r>
+              <a:rPr lang="en-US" sz="1500" dirty="0">
+                <a:solidFill>
+                  <a:srgbClr val="212529"/>
+                </a:solidFill>
+                <a:latin typeface="Quattrocento Sans" panose="020B0502050000020003" pitchFamily="34" charset="0"/>
+                <a:ea typeface="QuattrocentoSans" pitchFamily="34" charset="-122"/>
+                <a:cs typeface="QuattrocentoSans" pitchFamily="34" charset="-120"/>
+              </a:rPr>
+              <a:t>: En revisión</a:t>
+            </a:r>
+            <a:endParaRPr lang="en-US" sz="1800" dirty="0">
+              <a:latin typeface="Quattrocento Sans" panose="020B0502050000020003" pitchFamily="34" charset="0"/>
+            </a:endParaRPr>
+          </a:p>
+          <a:p>
+            <a:pPr marL="285750" indent="-285750">
+              <a:lnSpc>
+                <a:spcPct val="145000"/>
+              </a:lnSpc>
+              <a:spcBef>
+                <a:spcPts val="10"/>
+              </a:spcBef>
+              <a:buSzPct val="100000"/>
+              <a:buChar char="•"/>
+            </a:pPr>
+            <a:r>
+              <a:rPr lang="en-US" sz="1500" b="1" dirty="0">
+                <a:solidFill>
+                  <a:srgbClr val="212529"/>
+                </a:solidFill>
+                <a:latin typeface="Quattrocento Sans" panose="020B0502050000020003" pitchFamily="34" charset="0"/>
+                <a:ea typeface="QuattrocentoSans" pitchFamily="34" charset="-122"/>
+                <a:cs typeface="QuattrocentoSans" pitchFamily="34" charset="-120"/>
+              </a:rPr>
+              <a:t>Done</a:t>
+            </a:r>
+            <a:r>
+              <a:rPr lang="en-US" sz="1500" dirty="0">
+                <a:solidFill>
+                  <a:srgbClr val="212529"/>
+                </a:solidFill>
+                <a:latin typeface="Quattrocento Sans" panose="020B0502050000020003" pitchFamily="34" charset="0"/>
+                <a:ea typeface="QuattrocentoSans" pitchFamily="34" charset="-122"/>
+                <a:cs typeface="QuattrocentoSans" pitchFamily="34" charset="-120"/>
+              </a:rPr>
+              <a:t>: </a:t>
+            </a:r>
+            <a:r>
+              <a:rPr lang="en-US" sz="1500" dirty="0" err="1">
+                <a:solidFill>
+                  <a:srgbClr val="212529"/>
+                </a:solidFill>
+                <a:latin typeface="Quattrocento Sans" panose="020B0502050000020003" pitchFamily="34" charset="0"/>
+                <a:ea typeface="QuattrocentoSans" pitchFamily="34" charset="-122"/>
+                <a:cs typeface="QuattrocentoSans" pitchFamily="34" charset="-120"/>
+              </a:rPr>
+              <a:t>Finalizado</a:t>
+            </a:r>
+            <a:endParaRPr lang="en-US" sz="1800" dirty="0">
+              <a:latin typeface="Quattrocento Sans" panose="020B0502050000020003" pitchFamily="34" charset="0"/>
+            </a:endParaRPr>
+          </a:p>
+          <a:p>
+            <a:pPr>
+              <a:lnSpc>
+                <a:spcPct val="145000"/>
+              </a:lnSpc>
+              <a:spcBef>
+                <a:spcPts val="400"/>
+              </a:spcBef>
+            </a:pPr>
+            <a:r>
+              <a:rPr lang="en-US" sz="1500" dirty="0">
+                <a:solidFill>
+                  <a:srgbClr val="212529"/>
+                </a:solidFill>
+                <a:latin typeface="Quattrocento Sans" panose="020B0502050000020003" pitchFamily="34" charset="0"/>
+                <a:ea typeface="QuattrocentoSans" pitchFamily="34" charset="-122"/>
+                <a:cs typeface="QuattrocentoSans" pitchFamily="34" charset="-120"/>
+              </a:rPr>
+              <a:t>Evita cuellos de botella.</a:t>
+            </a:r>
+            <a:endParaRPr lang="en-US" sz="1800" dirty="0">
+              <a:latin typeface="Quattrocento Sans" panose="020B0502050000020003" pitchFamily="34" charset="0"/>
+            </a:endParaRPr>
+          </a:p>
+        </p:txBody>
+      </p:sp>
+      <p:sp>
+        <p:nvSpPr>
+          <p:cNvPr id="18" name="Shape 16">
+            <a:extLst>
+              <a:ext uri="{FF2B5EF4-FFF2-40B4-BE49-F238E27FC236}">
+                <a16:creationId xmlns:a16="http://schemas.microsoft.com/office/drawing/2014/main" id="{7BA0E55D-583B-274D-9D01-0AA32A59BB40}"/>
+              </a:ext>
+            </a:extLst>
+          </p:cNvPr>
+          <p:cNvSpPr/>
+          <p:nvPr/>
+        </p:nvSpPr>
+        <p:spPr>
+          <a:xfrm>
+            <a:off x="5778500" y="1397000"/>
+            <a:ext cx="4699000" cy="3556000"/>
+          </a:xfrm>
+          <a:prstGeom prst="roundRect">
+            <a:avLst>
+              <a:gd name="adj" fmla="val 6000"/>
+            </a:avLst>
+          </a:prstGeom>
+          <a:solidFill>
+            <a:srgbClr val="FFFFFF"/>
+          </a:solidFill>
+          <a:ln w="12700">
+            <a:solidFill>
+              <a:srgbClr val="E9ECEF"/>
+            </a:solidFill>
+            <a:prstDash val="solid"/>
+          </a:ln>
+        </p:spPr>
+        <p:txBody>
+          <a:bodyPr/>
+          <a:lstStyle/>
+          <a:p>
+            <a:endParaRPr lang="es-ES">
+              <a:latin typeface="Quattrocento Sans" panose="020B0502050000020003" pitchFamily="34" charset="0"/>
+            </a:endParaRPr>
+          </a:p>
+        </p:txBody>
+      </p:sp>
+      <p:sp>
+        <p:nvSpPr>
+          <p:cNvPr id="19" name="Shape 17">
+            <a:extLst>
+              <a:ext uri="{FF2B5EF4-FFF2-40B4-BE49-F238E27FC236}">
+                <a16:creationId xmlns:a16="http://schemas.microsoft.com/office/drawing/2014/main" id="{A70C51B0-B5DD-92B5-AC53-4640513890B7}"/>
+              </a:ext>
+            </a:extLst>
+          </p:cNvPr>
+          <p:cNvSpPr/>
+          <p:nvPr/>
+        </p:nvSpPr>
+        <p:spPr>
+          <a:xfrm>
+            <a:off x="6032500" y="1587500"/>
+            <a:ext cx="457200" cy="457200"/>
+          </a:xfrm>
+          <a:custGeom>
+            <a:avLst/>
+            <a:gdLst/>
+            <a:ahLst/>
+            <a:cxnLst/>
+            <a:rect l="l" t="t" r="r" b="b"/>
+            <a:pathLst>
+              <a:path w="457200" h="457200">
+                <a:moveTo>
+                  <a:pt x="428714" y="171450"/>
+                </a:moveTo>
+                <a:lnTo>
+                  <a:pt x="435769" y="171450"/>
+                </a:lnTo>
+                <a:cubicBezTo>
+                  <a:pt x="447645" y="171450"/>
+                  <a:pt x="457200" y="161895"/>
+                  <a:pt x="457200" y="150019"/>
+                </a:cubicBezTo>
+                <a:lnTo>
+                  <a:pt x="457200" y="21431"/>
+                </a:lnTo>
+                <a:cubicBezTo>
+                  <a:pt x="457200" y="12769"/>
+                  <a:pt x="452021" y="4911"/>
+                  <a:pt x="443984" y="1607"/>
+                </a:cubicBezTo>
+                <a:cubicBezTo>
+                  <a:pt x="435947" y="-1697"/>
+                  <a:pt x="426750" y="179"/>
+                  <a:pt x="420588" y="6251"/>
+                </a:cubicBezTo>
+                <a:lnTo>
+                  <a:pt x="374422" y="52507"/>
+                </a:lnTo>
+                <a:cubicBezTo>
+                  <a:pt x="334863" y="19735"/>
+                  <a:pt x="283964" y="0"/>
+                  <a:pt x="228600" y="0"/>
+                </a:cubicBezTo>
+                <a:cubicBezTo>
+                  <a:pt x="113407" y="0"/>
+                  <a:pt x="18127" y="85189"/>
+                  <a:pt x="2322" y="196007"/>
+                </a:cubicBezTo>
+                <a:cubicBezTo>
+                  <a:pt x="89" y="211634"/>
+                  <a:pt x="10894" y="226100"/>
+                  <a:pt x="26521" y="228332"/>
+                </a:cubicBezTo>
+                <a:cubicBezTo>
+                  <a:pt x="42148" y="230565"/>
+                  <a:pt x="56614" y="219670"/>
+                  <a:pt x="58847" y="204133"/>
+                </a:cubicBezTo>
+                <a:cubicBezTo>
+                  <a:pt x="70723" y="120997"/>
+                  <a:pt x="142250" y="57150"/>
+                  <a:pt x="228600" y="57150"/>
+                </a:cubicBezTo>
+                <a:cubicBezTo>
+                  <a:pt x="268248" y="57150"/>
+                  <a:pt x="304681" y="70545"/>
+                  <a:pt x="333702" y="93137"/>
+                </a:cubicBezTo>
+                <a:lnTo>
+                  <a:pt x="292001" y="134838"/>
+                </a:lnTo>
+                <a:cubicBezTo>
+                  <a:pt x="285839" y="141000"/>
+                  <a:pt x="284053" y="150197"/>
+                  <a:pt x="287357" y="158234"/>
+                </a:cubicBezTo>
+                <a:cubicBezTo>
+                  <a:pt x="290661" y="166271"/>
+                  <a:pt x="298519" y="171450"/>
+                  <a:pt x="307181" y="171450"/>
+                </a:cubicBezTo>
+                <a:lnTo>
+                  <a:pt x="428714" y="171450"/>
+                </a:lnTo>
+                <a:close/>
+                <a:moveTo>
+                  <a:pt x="454968" y="261193"/>
+                </a:moveTo>
+                <a:cubicBezTo>
+                  <a:pt x="457200" y="245566"/>
+                  <a:pt x="446306" y="231100"/>
+                  <a:pt x="430768" y="228868"/>
+                </a:cubicBezTo>
+                <a:cubicBezTo>
+                  <a:pt x="415230" y="226635"/>
+                  <a:pt x="400675" y="237530"/>
+                  <a:pt x="398443" y="253067"/>
+                </a:cubicBezTo>
+                <a:cubicBezTo>
+                  <a:pt x="386566" y="336113"/>
+                  <a:pt x="315039" y="399961"/>
+                  <a:pt x="228689" y="399961"/>
+                </a:cubicBezTo>
+                <a:cubicBezTo>
+                  <a:pt x="189041" y="399961"/>
+                  <a:pt x="152608" y="386566"/>
+                  <a:pt x="123587" y="363974"/>
+                </a:cubicBezTo>
+                <a:lnTo>
+                  <a:pt x="165199" y="322362"/>
+                </a:lnTo>
+                <a:cubicBezTo>
+                  <a:pt x="171361" y="316200"/>
+                  <a:pt x="173147" y="307003"/>
+                  <a:pt x="169843" y="298966"/>
+                </a:cubicBezTo>
+                <a:cubicBezTo>
+                  <a:pt x="166539" y="290929"/>
+                  <a:pt x="158681" y="285750"/>
+                  <a:pt x="150019" y="285750"/>
+                </a:cubicBezTo>
+                <a:lnTo>
+                  <a:pt x="21431" y="285750"/>
+                </a:lnTo>
+                <a:cubicBezTo>
+                  <a:pt x="9555" y="285750"/>
+                  <a:pt x="0" y="295305"/>
+                  <a:pt x="0" y="307181"/>
+                </a:cubicBezTo>
+                <a:lnTo>
+                  <a:pt x="0" y="435769"/>
+                </a:lnTo>
+                <a:cubicBezTo>
+                  <a:pt x="0" y="444431"/>
+                  <a:pt x="5179" y="452289"/>
+                  <a:pt x="13216" y="455593"/>
+                </a:cubicBezTo>
+                <a:cubicBezTo>
+                  <a:pt x="21253" y="458897"/>
+                  <a:pt x="30450" y="457021"/>
+                  <a:pt x="36612" y="450949"/>
+                </a:cubicBezTo>
+                <a:lnTo>
+                  <a:pt x="82867" y="404693"/>
+                </a:lnTo>
+                <a:cubicBezTo>
+                  <a:pt x="122337" y="437465"/>
+                  <a:pt x="173236" y="457200"/>
+                  <a:pt x="228600" y="457200"/>
+                </a:cubicBezTo>
+                <a:cubicBezTo>
+                  <a:pt x="343793" y="457200"/>
+                  <a:pt x="439073" y="372011"/>
+                  <a:pt x="454878" y="261193"/>
+                </a:cubicBezTo>
+                <a:close/>
+              </a:path>
+            </a:pathLst>
+          </a:custGeom>
+          <a:solidFill>
+            <a:srgbClr val="2A9D8F"/>
+          </a:solidFill>
+          <a:ln/>
+        </p:spPr>
+        <p:txBody>
+          <a:bodyPr/>
+          <a:lstStyle/>
+          <a:p>
+            <a:endParaRPr lang="es-ES">
+              <a:latin typeface="Quattrocento Sans" panose="020B0502050000020003" pitchFamily="34" charset="0"/>
+            </a:endParaRPr>
+          </a:p>
+        </p:txBody>
+      </p:sp>
+      <p:sp>
+        <p:nvSpPr>
+          <p:cNvPr id="20" name="Text 18">
+            <a:extLst>
+              <a:ext uri="{FF2B5EF4-FFF2-40B4-BE49-F238E27FC236}">
+                <a16:creationId xmlns:a16="http://schemas.microsoft.com/office/drawing/2014/main" id="{E0515A42-1742-95B7-CD23-586718292623}"/>
+              </a:ext>
+            </a:extLst>
+          </p:cNvPr>
+          <p:cNvSpPr/>
+          <p:nvPr/>
+        </p:nvSpPr>
+        <p:spPr>
+          <a:xfrm>
+            <a:off x="6032500" y="2159000"/>
+            <a:ext cx="4191000" cy="381000"/>
+          </a:xfrm>
+          <a:prstGeom prst="rect">
+            <a:avLst/>
+          </a:prstGeom>
+          <a:noFill/>
+          <a:ln/>
+        </p:spPr>
+        <p:txBody>
+          <a:bodyPr wrap="none" lIns="0" tIns="0" rIns="0" bIns="0" rtlCol="0" anchor="ctr"/>
+          <a:lstStyle/>
+          <a:p>
+            <a:pPr>
+              <a:lnSpc>
+                <a:spcPct val="100000"/>
+              </a:lnSpc>
+            </a:pPr>
+            <a:r>
+              <a:rPr lang="en-US" sz="2000" b="1" dirty="0">
+                <a:solidFill>
+                  <a:srgbClr val="1B4332"/>
+                </a:solidFill>
+                <a:latin typeface="Quattrocento Sans" panose="020B0502050000020003" pitchFamily="34" charset="0"/>
+                <a:ea typeface="Quattrocento Sans" pitchFamily="34" charset="-122"/>
+                <a:cs typeface="Quattrocento Sans" pitchFamily="34" charset="-120"/>
+              </a:rPr>
+              <a:t>Scrum-Light</a:t>
+            </a:r>
+            <a:endParaRPr lang="en-US" sz="1600" dirty="0">
+              <a:latin typeface="Quattrocento Sans" panose="020B0502050000020003" pitchFamily="34" charset="0"/>
+            </a:endParaRPr>
+          </a:p>
+        </p:txBody>
+      </p:sp>
+      <p:sp>
+        <p:nvSpPr>
+          <p:cNvPr id="21" name="Text 19">
+            <a:extLst>
+              <a:ext uri="{FF2B5EF4-FFF2-40B4-BE49-F238E27FC236}">
+                <a16:creationId xmlns:a16="http://schemas.microsoft.com/office/drawing/2014/main" id="{6106F6FB-0A8D-D46A-C9ED-4F78FBD8CEAE}"/>
+              </a:ext>
+            </a:extLst>
+          </p:cNvPr>
+          <p:cNvSpPr/>
+          <p:nvPr/>
+        </p:nvSpPr>
+        <p:spPr>
+          <a:xfrm>
+            <a:off x="6032500" y="2641600"/>
+            <a:ext cx="4191000" cy="2222500"/>
+          </a:xfrm>
+          <a:prstGeom prst="rect">
+            <a:avLst/>
+          </a:prstGeom>
+          <a:noFill/>
+          <a:ln/>
+        </p:spPr>
+        <p:txBody>
+          <a:bodyPr wrap="square" lIns="0" tIns="0" rIns="0" bIns="0" rtlCol="0" anchor="t"/>
+          <a:lstStyle/>
+          <a:p>
+            <a:pPr>
+              <a:lnSpc>
+                <a:spcPct val="145000"/>
+              </a:lnSpc>
+            </a:pPr>
+            <a:r>
+              <a:rPr lang="en-US" sz="1500" dirty="0">
+                <a:solidFill>
+                  <a:srgbClr val="212529"/>
+                </a:solidFill>
+                <a:latin typeface="Quattrocento Sans" panose="020B0502050000020003" pitchFamily="34" charset="0"/>
+                <a:ea typeface="QuattrocentoSans" pitchFamily="34" charset="-122"/>
+                <a:cs typeface="QuattrocentoSans" pitchFamily="34" charset="-120"/>
+              </a:rPr>
+              <a:t>Ciclos de retroalimentación rápidos para validación de componentes.</a:t>
+            </a:r>
+            <a:endParaRPr lang="en-US" sz="1800" dirty="0">
+              <a:latin typeface="Quattrocento Sans" panose="020B0502050000020003" pitchFamily="34" charset="0"/>
+            </a:endParaRPr>
+          </a:p>
+          <a:p>
+            <a:pPr>
+              <a:lnSpc>
+                <a:spcPct val="145000"/>
+              </a:lnSpc>
+              <a:spcBef>
+                <a:spcPts val="400"/>
+              </a:spcBef>
+            </a:pPr>
+            <a:r>
+              <a:rPr lang="en-US" sz="1500" dirty="0">
+                <a:solidFill>
+                  <a:srgbClr val="212529"/>
+                </a:solidFill>
+                <a:latin typeface="Quattrocento Sans" panose="020B0502050000020003" pitchFamily="34" charset="0"/>
+                <a:ea typeface="QuattrocentoSans" pitchFamily="34" charset="-122"/>
+                <a:cs typeface="QuattrocentoSans" pitchFamily="34" charset="-120"/>
+              </a:rPr>
+              <a:t>Permiten:</a:t>
+            </a:r>
+            <a:endParaRPr lang="en-US" sz="1800" dirty="0">
+              <a:latin typeface="Quattrocento Sans" panose="020B0502050000020003" pitchFamily="34" charset="0"/>
+            </a:endParaRPr>
+          </a:p>
+          <a:p>
+            <a:pPr marL="285750" indent="-285750">
+              <a:lnSpc>
+                <a:spcPct val="145000"/>
+              </a:lnSpc>
+              <a:spcBef>
+                <a:spcPts val="10"/>
+              </a:spcBef>
+              <a:buSzPct val="100000"/>
+              <a:buChar char="•"/>
+            </a:pPr>
+            <a:r>
+              <a:rPr lang="en-US" sz="1500" dirty="0">
+                <a:solidFill>
+                  <a:srgbClr val="212529"/>
+                </a:solidFill>
+                <a:latin typeface="Quattrocento Sans" panose="020B0502050000020003" pitchFamily="34" charset="0"/>
+                <a:ea typeface="QuattrocentoSans" pitchFamily="34" charset="-122"/>
+                <a:cs typeface="QuattrocentoSans" pitchFamily="34" charset="-120"/>
+              </a:rPr>
+              <a:t>Detectar problemas temprano</a:t>
+            </a:r>
+            <a:endParaRPr lang="en-US" sz="1800" dirty="0">
+              <a:latin typeface="Quattrocento Sans" panose="020B0502050000020003" pitchFamily="34" charset="0"/>
+            </a:endParaRPr>
+          </a:p>
+          <a:p>
+            <a:pPr marL="285750" indent="-285750">
+              <a:lnSpc>
+                <a:spcPct val="145000"/>
+              </a:lnSpc>
+              <a:spcBef>
+                <a:spcPts val="10"/>
+              </a:spcBef>
+              <a:buSzPct val="100000"/>
+              <a:buChar char="•"/>
+            </a:pPr>
+            <a:r>
+              <a:rPr lang="en-US" sz="1500" dirty="0">
+                <a:solidFill>
+                  <a:srgbClr val="212529"/>
+                </a:solidFill>
+                <a:latin typeface="Quattrocento Sans" panose="020B0502050000020003" pitchFamily="34" charset="0"/>
+                <a:ea typeface="QuattrocentoSans" pitchFamily="34" charset="-122"/>
+                <a:cs typeface="QuattrocentoSans" pitchFamily="34" charset="-120"/>
+              </a:rPr>
+              <a:t>Adaptar requisitos</a:t>
+            </a:r>
+            <a:endParaRPr lang="en-US" sz="1800" dirty="0">
+              <a:latin typeface="Quattrocento Sans" panose="020B0502050000020003" pitchFamily="34" charset="0"/>
+            </a:endParaRPr>
+          </a:p>
+          <a:p>
+            <a:pPr marL="285750" indent="-285750">
+              <a:lnSpc>
+                <a:spcPct val="145000"/>
+              </a:lnSpc>
+              <a:spcBef>
+                <a:spcPts val="10"/>
+              </a:spcBef>
+              <a:buSzPct val="100000"/>
+              <a:buChar char="•"/>
+            </a:pPr>
+            <a:r>
+              <a:rPr lang="en-US" sz="1500" dirty="0">
+                <a:solidFill>
+                  <a:srgbClr val="212529"/>
+                </a:solidFill>
+                <a:latin typeface="Quattrocento Sans" panose="020B0502050000020003" pitchFamily="34" charset="0"/>
+                <a:ea typeface="QuattrocentoSans" pitchFamily="34" charset="-122"/>
+                <a:cs typeface="QuattrocentoSans" pitchFamily="34" charset="-120"/>
+              </a:rPr>
+              <a:t>Entregar valor incremental</a:t>
+            </a:r>
+            <a:endParaRPr lang="en-US" sz="1800" dirty="0">
+              <a:latin typeface="Quattrocento Sans" panose="020B0502050000020003" pitchFamily="34" charset="0"/>
+            </a:endParaRPr>
+          </a:p>
+        </p:txBody>
+      </p:sp>
+      <p:sp>
+        <p:nvSpPr>
+          <p:cNvPr id="22" name="Shape 20">
+            <a:extLst>
+              <a:ext uri="{FF2B5EF4-FFF2-40B4-BE49-F238E27FC236}">
+                <a16:creationId xmlns:a16="http://schemas.microsoft.com/office/drawing/2014/main" id="{746F5D09-0921-20BD-D97A-41FC9E1CBC79}"/>
+              </a:ext>
+            </a:extLst>
+          </p:cNvPr>
+          <p:cNvSpPr/>
+          <p:nvPr/>
+        </p:nvSpPr>
+        <p:spPr>
+          <a:xfrm>
+            <a:off x="10795000" y="1397000"/>
+            <a:ext cx="4699000" cy="3556000"/>
+          </a:xfrm>
+          <a:prstGeom prst="roundRect">
+            <a:avLst>
+              <a:gd name="adj" fmla="val 6000"/>
+            </a:avLst>
+          </a:prstGeom>
+          <a:solidFill>
+            <a:srgbClr val="FFFFFF"/>
+          </a:solidFill>
+          <a:ln w="12700">
+            <a:solidFill>
+              <a:srgbClr val="E9ECEF"/>
+            </a:solidFill>
+            <a:prstDash val="solid"/>
+          </a:ln>
+        </p:spPr>
+        <p:txBody>
+          <a:bodyPr/>
+          <a:lstStyle/>
+          <a:p>
+            <a:endParaRPr lang="es-ES">
+              <a:latin typeface="Quattrocento Sans" panose="020B0502050000020003" pitchFamily="34" charset="0"/>
+            </a:endParaRPr>
+          </a:p>
+        </p:txBody>
+      </p:sp>
+      <p:sp>
+        <p:nvSpPr>
+          <p:cNvPr id="23" name="Shape 21">
+            <a:extLst>
+              <a:ext uri="{FF2B5EF4-FFF2-40B4-BE49-F238E27FC236}">
+                <a16:creationId xmlns:a16="http://schemas.microsoft.com/office/drawing/2014/main" id="{AEF148E0-D8D5-2E1B-7726-E9AF1ACA081E}"/>
+              </a:ext>
+            </a:extLst>
+          </p:cNvPr>
+          <p:cNvSpPr/>
+          <p:nvPr/>
+        </p:nvSpPr>
+        <p:spPr>
+          <a:xfrm>
+            <a:off x="11106150" y="1587500"/>
+            <a:ext cx="342900" cy="457200"/>
+          </a:xfrm>
+          <a:custGeom>
+            <a:avLst/>
+            <a:gdLst/>
+            <a:ahLst/>
+            <a:cxnLst/>
+            <a:rect l="l" t="t" r="r" b="b"/>
+            <a:pathLst>
+              <a:path w="342900" h="457200">
+                <a:moveTo>
+                  <a:pt x="14288" y="57150"/>
+                </a:moveTo>
+                <a:cubicBezTo>
+                  <a:pt x="14288" y="25628"/>
+                  <a:pt x="39916" y="0"/>
+                  <a:pt x="71438" y="0"/>
+                </a:cubicBezTo>
+                <a:lnTo>
+                  <a:pt x="271463" y="0"/>
+                </a:lnTo>
+                <a:cubicBezTo>
+                  <a:pt x="302984" y="0"/>
+                  <a:pt x="328613" y="25628"/>
+                  <a:pt x="328613" y="57150"/>
+                </a:cubicBezTo>
+                <a:lnTo>
+                  <a:pt x="328613" y="400050"/>
+                </a:lnTo>
+                <a:cubicBezTo>
+                  <a:pt x="328613" y="431572"/>
+                  <a:pt x="302984" y="457200"/>
+                  <a:pt x="271463" y="457200"/>
+                </a:cubicBezTo>
+                <a:lnTo>
+                  <a:pt x="71438" y="457200"/>
+                </a:lnTo>
+                <a:cubicBezTo>
+                  <a:pt x="39916" y="457200"/>
+                  <a:pt x="14288" y="431572"/>
+                  <a:pt x="14288" y="400050"/>
+                </a:cubicBezTo>
+                <a:lnTo>
+                  <a:pt x="14288" y="57150"/>
+                </a:lnTo>
+                <a:close/>
+                <a:moveTo>
+                  <a:pt x="114300" y="392906"/>
+                </a:moveTo>
+                <a:cubicBezTo>
+                  <a:pt x="114300" y="404783"/>
+                  <a:pt x="123855" y="414338"/>
+                  <a:pt x="135731" y="414338"/>
+                </a:cubicBezTo>
+                <a:lnTo>
+                  <a:pt x="207169" y="414338"/>
+                </a:lnTo>
+                <a:cubicBezTo>
+                  <a:pt x="219045" y="414338"/>
+                  <a:pt x="228600" y="404783"/>
+                  <a:pt x="228600" y="392906"/>
+                </a:cubicBezTo>
+                <a:cubicBezTo>
+                  <a:pt x="228600" y="381030"/>
+                  <a:pt x="219045" y="371475"/>
+                  <a:pt x="207169" y="371475"/>
+                </a:cubicBezTo>
+                <a:lnTo>
+                  <a:pt x="135731" y="371475"/>
+                </a:lnTo>
+                <a:cubicBezTo>
+                  <a:pt x="123855" y="371475"/>
+                  <a:pt x="114300" y="381030"/>
+                  <a:pt x="114300" y="392906"/>
+                </a:cubicBezTo>
+                <a:close/>
+                <a:moveTo>
+                  <a:pt x="271463" y="57150"/>
+                </a:moveTo>
+                <a:lnTo>
+                  <a:pt x="71438" y="57150"/>
+                </a:lnTo>
+                <a:lnTo>
+                  <a:pt x="71438" y="328613"/>
+                </a:lnTo>
+                <a:lnTo>
+                  <a:pt x="271463" y="328613"/>
+                </a:lnTo>
+                <a:lnTo>
+                  <a:pt x="271463" y="57150"/>
+                </a:lnTo>
+                <a:close/>
+              </a:path>
+            </a:pathLst>
+          </a:custGeom>
+          <a:solidFill>
+            <a:srgbClr val="2A9D8F"/>
+          </a:solidFill>
+          <a:ln/>
+        </p:spPr>
+        <p:txBody>
+          <a:bodyPr/>
+          <a:lstStyle/>
+          <a:p>
+            <a:endParaRPr lang="es-ES">
+              <a:latin typeface="Quattrocento Sans" panose="020B0502050000020003" pitchFamily="34" charset="0"/>
+            </a:endParaRPr>
+          </a:p>
+        </p:txBody>
+      </p:sp>
+      <p:sp>
+        <p:nvSpPr>
+          <p:cNvPr id="24" name="Text 22">
+            <a:extLst>
+              <a:ext uri="{FF2B5EF4-FFF2-40B4-BE49-F238E27FC236}">
+                <a16:creationId xmlns:a16="http://schemas.microsoft.com/office/drawing/2014/main" id="{838C96D5-F0D2-84F4-6CF6-380F80D0EC62}"/>
+              </a:ext>
+            </a:extLst>
+          </p:cNvPr>
+          <p:cNvSpPr/>
+          <p:nvPr/>
+        </p:nvSpPr>
+        <p:spPr>
+          <a:xfrm>
+            <a:off x="11049000" y="2159000"/>
+            <a:ext cx="4191000" cy="381000"/>
+          </a:xfrm>
+          <a:prstGeom prst="rect">
+            <a:avLst/>
+          </a:prstGeom>
+          <a:noFill/>
+          <a:ln/>
+        </p:spPr>
+        <p:txBody>
+          <a:bodyPr wrap="none" lIns="0" tIns="0" rIns="0" bIns="0" rtlCol="0" anchor="ctr"/>
+          <a:lstStyle/>
+          <a:p>
+            <a:pPr>
+              <a:lnSpc>
+                <a:spcPct val="100000"/>
+              </a:lnSpc>
+            </a:pPr>
+            <a:r>
+              <a:rPr lang="en-US" sz="2000" b="1" dirty="0">
+                <a:solidFill>
+                  <a:srgbClr val="1B4332"/>
+                </a:solidFill>
+                <a:latin typeface="Quattrocento Sans" panose="020B0502050000020003" pitchFamily="34" charset="0"/>
+                <a:ea typeface="Quattrocento Sans" pitchFamily="34" charset="-122"/>
+                <a:cs typeface="Quattrocento Sans" pitchFamily="34" charset="-120"/>
+              </a:rPr>
+              <a:t>Mobile-First</a:t>
+            </a:r>
+            <a:endParaRPr lang="en-US" sz="1600" dirty="0">
+              <a:latin typeface="Quattrocento Sans" panose="020B0502050000020003" pitchFamily="34" charset="0"/>
+            </a:endParaRPr>
+          </a:p>
+        </p:txBody>
+      </p:sp>
+      <p:sp>
+        <p:nvSpPr>
+          <p:cNvPr id="25" name="Text 23">
+            <a:extLst>
+              <a:ext uri="{FF2B5EF4-FFF2-40B4-BE49-F238E27FC236}">
+                <a16:creationId xmlns:a16="http://schemas.microsoft.com/office/drawing/2014/main" id="{F94DF1C7-4502-BA5F-9BC6-1A550C815289}"/>
+              </a:ext>
+            </a:extLst>
+          </p:cNvPr>
+          <p:cNvSpPr/>
+          <p:nvPr/>
+        </p:nvSpPr>
+        <p:spPr>
+          <a:xfrm>
+            <a:off x="11049000" y="2641600"/>
+            <a:ext cx="4191000" cy="2222500"/>
+          </a:xfrm>
+          <a:prstGeom prst="rect">
+            <a:avLst/>
+          </a:prstGeom>
+          <a:noFill/>
+          <a:ln/>
+        </p:spPr>
+        <p:txBody>
+          <a:bodyPr wrap="square" lIns="0" tIns="0" rIns="0" bIns="0" rtlCol="0" anchor="t"/>
+          <a:lstStyle/>
+          <a:p>
+            <a:pPr>
+              <a:lnSpc>
+                <a:spcPct val="145000"/>
+              </a:lnSpc>
+            </a:pPr>
+            <a:r>
+              <a:rPr lang="en-US" sz="1500" dirty="0">
+                <a:solidFill>
+                  <a:srgbClr val="212529"/>
+                </a:solidFill>
+                <a:latin typeface="Quattrocento Sans" panose="020B0502050000020003" pitchFamily="34" charset="0"/>
+                <a:ea typeface="QuattrocentoSans" pitchFamily="34" charset="-122"/>
+                <a:cs typeface="QuattrocentoSans" pitchFamily="34" charset="-120"/>
+              </a:rPr>
+              <a:t>Desarrollo desde la resolución más baja hacia escritorio.</a:t>
+            </a:r>
+            <a:endParaRPr lang="en-US" sz="1800" dirty="0">
+              <a:latin typeface="Quattrocento Sans" panose="020B0502050000020003" pitchFamily="34" charset="0"/>
+            </a:endParaRPr>
+          </a:p>
+          <a:p>
+            <a:pPr>
+              <a:lnSpc>
+                <a:spcPct val="145000"/>
+              </a:lnSpc>
+              <a:spcBef>
+                <a:spcPts val="400"/>
+              </a:spcBef>
+            </a:pPr>
+            <a:r>
+              <a:rPr lang="en-US" sz="1500" dirty="0">
+                <a:solidFill>
+                  <a:srgbClr val="212529"/>
+                </a:solidFill>
+                <a:latin typeface="Quattrocento Sans" panose="020B0502050000020003" pitchFamily="34" charset="0"/>
+                <a:ea typeface="QuattrocentoSans" pitchFamily="34" charset="-122"/>
+                <a:cs typeface="QuattrocentoSans" pitchFamily="34" charset="-120"/>
+              </a:rPr>
+              <a:t>Garantiza:</a:t>
+            </a:r>
+            <a:endParaRPr lang="en-US" sz="1800" dirty="0">
+              <a:latin typeface="Quattrocento Sans" panose="020B0502050000020003" pitchFamily="34" charset="0"/>
+            </a:endParaRPr>
+          </a:p>
+          <a:p>
+            <a:pPr marL="285750" indent="-285750">
+              <a:lnSpc>
+                <a:spcPct val="145000"/>
+              </a:lnSpc>
+              <a:spcBef>
+                <a:spcPts val="10"/>
+              </a:spcBef>
+              <a:buSzPct val="100000"/>
+              <a:buChar char="•"/>
+            </a:pPr>
+            <a:r>
+              <a:rPr lang="en-US" sz="1500" dirty="0">
+                <a:solidFill>
+                  <a:srgbClr val="212529"/>
+                </a:solidFill>
+                <a:latin typeface="Quattrocento Sans" panose="020B0502050000020003" pitchFamily="34" charset="0"/>
+                <a:ea typeface="QuattrocentoSans" pitchFamily="34" charset="-122"/>
+                <a:cs typeface="QuattrocentoSans" pitchFamily="34" charset="-120"/>
+              </a:rPr>
+              <a:t>Experiencia óptima en móviles</a:t>
+            </a:r>
+            <a:endParaRPr lang="en-US" sz="1800" dirty="0">
+              <a:latin typeface="Quattrocento Sans" panose="020B0502050000020003" pitchFamily="34" charset="0"/>
+            </a:endParaRPr>
+          </a:p>
+          <a:p>
+            <a:pPr marL="285750" indent="-285750">
+              <a:lnSpc>
+                <a:spcPct val="145000"/>
+              </a:lnSpc>
+              <a:spcBef>
+                <a:spcPts val="10"/>
+              </a:spcBef>
+              <a:buSzPct val="100000"/>
+              <a:buChar char="•"/>
+            </a:pPr>
+            <a:r>
+              <a:rPr lang="en-US" sz="1500" dirty="0">
+                <a:solidFill>
+                  <a:srgbClr val="212529"/>
+                </a:solidFill>
+                <a:latin typeface="Quattrocento Sans" panose="020B0502050000020003" pitchFamily="34" charset="0"/>
+                <a:ea typeface="QuattrocentoSans" pitchFamily="34" charset="-122"/>
+                <a:cs typeface="QuattrocentoSans" pitchFamily="34" charset="-120"/>
+              </a:rPr>
+              <a:t>Progressive enhancement</a:t>
+            </a:r>
+            <a:endParaRPr lang="en-US" sz="1800" dirty="0">
+              <a:latin typeface="Quattrocento Sans" panose="020B0502050000020003" pitchFamily="34" charset="0"/>
+            </a:endParaRPr>
+          </a:p>
+          <a:p>
+            <a:pPr marL="285750" indent="-285750">
+              <a:lnSpc>
+                <a:spcPct val="145000"/>
+              </a:lnSpc>
+              <a:spcBef>
+                <a:spcPts val="10"/>
+              </a:spcBef>
+              <a:buSzPct val="100000"/>
+              <a:buChar char="•"/>
+            </a:pPr>
+            <a:r>
+              <a:rPr lang="en-US" sz="1500" dirty="0">
+                <a:solidFill>
+                  <a:srgbClr val="212529"/>
+                </a:solidFill>
+                <a:latin typeface="Quattrocento Sans" panose="020B0502050000020003" pitchFamily="34" charset="0"/>
+                <a:ea typeface="QuattrocentoSans" pitchFamily="34" charset="-122"/>
+                <a:cs typeface="QuattrocentoSans" pitchFamily="34" charset="-120"/>
+              </a:rPr>
+              <a:t>Mayor cobertura de usuarios</a:t>
+            </a:r>
+            <a:endParaRPr lang="en-US" sz="1800" dirty="0">
+              <a:latin typeface="Quattrocento Sans" panose="020B0502050000020003" pitchFamily="34" charset="0"/>
+            </a:endParaRPr>
+          </a:p>
+        </p:txBody>
+      </p:sp>
+      <p:sp>
+        <p:nvSpPr>
+          <p:cNvPr id="26" name="Shape 24">
+            <a:extLst>
+              <a:ext uri="{FF2B5EF4-FFF2-40B4-BE49-F238E27FC236}">
+                <a16:creationId xmlns:a16="http://schemas.microsoft.com/office/drawing/2014/main" id="{D1BADE1F-915E-D327-2161-C7F20A4ECE4E}"/>
+              </a:ext>
+            </a:extLst>
+          </p:cNvPr>
+          <p:cNvSpPr/>
+          <p:nvPr/>
+        </p:nvSpPr>
+        <p:spPr>
+          <a:xfrm>
+            <a:off x="762000" y="5207000"/>
+            <a:ext cx="14732000" cy="25400"/>
+          </a:xfrm>
+          <a:prstGeom prst="rect">
+            <a:avLst/>
+          </a:prstGeom>
+          <a:solidFill>
+            <a:srgbClr val="E9ECEF"/>
+          </a:solidFill>
+          <a:ln/>
+        </p:spPr>
+        <p:txBody>
+          <a:bodyPr/>
+          <a:lstStyle/>
+          <a:p>
+            <a:endParaRPr lang="es-ES">
+              <a:latin typeface="Quattrocento Sans" panose="020B0502050000020003" pitchFamily="34" charset="0"/>
+            </a:endParaRPr>
+          </a:p>
+        </p:txBody>
+      </p:sp>
+      <p:sp>
+        <p:nvSpPr>
+          <p:cNvPr id="27" name="Text 25">
+            <a:extLst>
+              <a:ext uri="{FF2B5EF4-FFF2-40B4-BE49-F238E27FC236}">
+                <a16:creationId xmlns:a16="http://schemas.microsoft.com/office/drawing/2014/main" id="{F82E9A3A-BE98-A184-729F-FE35F5AFD3EA}"/>
+              </a:ext>
+            </a:extLst>
+          </p:cNvPr>
+          <p:cNvSpPr/>
+          <p:nvPr/>
+        </p:nvSpPr>
+        <p:spPr>
+          <a:xfrm>
+            <a:off x="762000" y="5397500"/>
+            <a:ext cx="5080000" cy="381000"/>
+          </a:xfrm>
+          <a:prstGeom prst="rect">
+            <a:avLst/>
+          </a:prstGeom>
+          <a:noFill/>
+          <a:ln/>
+        </p:spPr>
+        <p:txBody>
+          <a:bodyPr wrap="none" lIns="0" tIns="0" rIns="0" bIns="0" rtlCol="0" anchor="ctr"/>
+          <a:lstStyle/>
+          <a:p>
+            <a:pPr>
+              <a:lnSpc>
+                <a:spcPct val="140000"/>
+              </a:lnSpc>
+            </a:pPr>
+            <a:r>
+              <a:rPr lang="en-US" sz="2000" b="1" dirty="0">
+                <a:solidFill>
+                  <a:srgbClr val="6C757D"/>
+                </a:solidFill>
+                <a:latin typeface="Quattrocento Sans" panose="020B0502050000020003" pitchFamily="34" charset="0"/>
+                <a:ea typeface="QuattrocentoSans" pitchFamily="34" charset="-122"/>
+                <a:cs typeface="QuattrocentoSans" pitchFamily="34" charset="-120"/>
+              </a:rPr>
+              <a:t>Stack Tecnológico</a:t>
+            </a:r>
+            <a:endParaRPr lang="en-US" sz="2000" dirty="0">
+              <a:latin typeface="Quattrocento Sans" panose="020B0502050000020003" pitchFamily="34" charset="0"/>
+            </a:endParaRPr>
+          </a:p>
+        </p:txBody>
+      </p:sp>
+      <p:sp>
+        <p:nvSpPr>
+          <p:cNvPr id="28" name="Shape 26">
+            <a:extLst>
+              <a:ext uri="{FF2B5EF4-FFF2-40B4-BE49-F238E27FC236}">
+                <a16:creationId xmlns:a16="http://schemas.microsoft.com/office/drawing/2014/main" id="{90720BDE-0B4F-91A6-FF82-5F17295E923C}"/>
+              </a:ext>
+            </a:extLst>
+          </p:cNvPr>
+          <p:cNvSpPr/>
+          <p:nvPr/>
+        </p:nvSpPr>
+        <p:spPr>
+          <a:xfrm>
+            <a:off x="762000" y="5969000"/>
+            <a:ext cx="1651000" cy="457200"/>
+          </a:xfrm>
+          <a:prstGeom prst="roundRect">
+            <a:avLst>
+              <a:gd name="adj" fmla="val 16000"/>
+            </a:avLst>
+          </a:prstGeom>
+          <a:solidFill>
+            <a:srgbClr val="1B4332"/>
+          </a:solidFill>
+          <a:ln/>
+        </p:spPr>
+        <p:txBody>
+          <a:bodyPr/>
+          <a:lstStyle/>
+          <a:p>
+            <a:endParaRPr lang="es-ES">
+              <a:latin typeface="Quattrocento Sans" panose="020B0502050000020003" pitchFamily="34" charset="0"/>
+            </a:endParaRPr>
+          </a:p>
+        </p:txBody>
+      </p:sp>
+      <p:sp>
+        <p:nvSpPr>
+          <p:cNvPr id="29" name="Text 27">
+            <a:extLst>
+              <a:ext uri="{FF2B5EF4-FFF2-40B4-BE49-F238E27FC236}">
+                <a16:creationId xmlns:a16="http://schemas.microsoft.com/office/drawing/2014/main" id="{762662A7-EEAE-D014-6C6B-463512DCD557}"/>
+              </a:ext>
+            </a:extLst>
+          </p:cNvPr>
+          <p:cNvSpPr/>
+          <p:nvPr/>
+        </p:nvSpPr>
+        <p:spPr>
+          <a:xfrm>
+            <a:off x="762000" y="5969000"/>
+            <a:ext cx="1651000" cy="457200"/>
+          </a:xfrm>
+          <a:prstGeom prst="rect">
+            <a:avLst/>
+          </a:prstGeom>
+          <a:noFill/>
+          <a:ln/>
+        </p:spPr>
+        <p:txBody>
+          <a:bodyPr wrap="none" lIns="0" tIns="0" rIns="0" bIns="0" rtlCol="0" anchor="ctr"/>
+          <a:lstStyle/>
+          <a:p>
+            <a:pPr algn="ctr">
+              <a:lnSpc>
+                <a:spcPct val="100000"/>
+              </a:lnSpc>
+            </a:pPr>
+            <a:r>
+              <a:rPr lang="en-US" sz="1400" b="1" dirty="0">
+                <a:solidFill>
+                  <a:srgbClr val="FFFFFF"/>
+                </a:solidFill>
+                <a:latin typeface="Quattrocento Sans" panose="020B0502050000020003" pitchFamily="34" charset="0"/>
+                <a:ea typeface="QuattrocentoSans" pitchFamily="34" charset="-122"/>
+                <a:cs typeface="QuattrocentoSans" pitchFamily="34" charset="-120"/>
+              </a:rPr>
+              <a:t>React</a:t>
+            </a:r>
+            <a:endParaRPr lang="en-US" sz="1400" dirty="0">
+              <a:latin typeface="Quattrocento Sans" panose="020B0502050000020003" pitchFamily="34" charset="0"/>
+            </a:endParaRPr>
+          </a:p>
+        </p:txBody>
+      </p:sp>
+      <p:sp>
+        <p:nvSpPr>
+          <p:cNvPr id="30" name="Shape 28">
+            <a:extLst>
+              <a:ext uri="{FF2B5EF4-FFF2-40B4-BE49-F238E27FC236}">
+                <a16:creationId xmlns:a16="http://schemas.microsoft.com/office/drawing/2014/main" id="{BC937F96-271C-8D96-61CD-98CD22001879}"/>
+              </a:ext>
+            </a:extLst>
+          </p:cNvPr>
+          <p:cNvSpPr/>
+          <p:nvPr/>
+        </p:nvSpPr>
+        <p:spPr>
+          <a:xfrm>
+            <a:off x="2603500" y="5969000"/>
+            <a:ext cx="2286000" cy="457200"/>
+          </a:xfrm>
+          <a:prstGeom prst="roundRect">
+            <a:avLst>
+              <a:gd name="adj" fmla="val 16000"/>
+            </a:avLst>
+          </a:prstGeom>
+          <a:solidFill>
+            <a:srgbClr val="1B4332"/>
+          </a:solidFill>
+          <a:ln/>
+        </p:spPr>
+        <p:txBody>
+          <a:bodyPr/>
+          <a:lstStyle/>
+          <a:p>
+            <a:endParaRPr lang="es-ES">
+              <a:latin typeface="Quattrocento Sans" panose="020B0502050000020003" pitchFamily="34" charset="0"/>
+            </a:endParaRPr>
+          </a:p>
+        </p:txBody>
+      </p:sp>
+      <p:sp>
+        <p:nvSpPr>
+          <p:cNvPr id="31" name="Text 29">
+            <a:extLst>
+              <a:ext uri="{FF2B5EF4-FFF2-40B4-BE49-F238E27FC236}">
+                <a16:creationId xmlns:a16="http://schemas.microsoft.com/office/drawing/2014/main" id="{AF02A601-2B00-D1D7-3709-EA4565A33B18}"/>
+              </a:ext>
+            </a:extLst>
+          </p:cNvPr>
+          <p:cNvSpPr/>
+          <p:nvPr/>
+        </p:nvSpPr>
+        <p:spPr>
+          <a:xfrm>
+            <a:off x="2603500" y="5969000"/>
+            <a:ext cx="2286000" cy="457200"/>
+          </a:xfrm>
+          <a:prstGeom prst="rect">
+            <a:avLst/>
+          </a:prstGeom>
+          <a:noFill/>
+          <a:ln/>
+        </p:spPr>
+        <p:txBody>
+          <a:bodyPr wrap="none" lIns="0" tIns="0" rIns="0" bIns="0" rtlCol="0" anchor="ctr"/>
+          <a:lstStyle/>
+          <a:p>
+            <a:pPr algn="ctr">
+              <a:lnSpc>
+                <a:spcPct val="100000"/>
+              </a:lnSpc>
+            </a:pPr>
+            <a:r>
+              <a:rPr lang="en-US" sz="1400" b="1" dirty="0">
+                <a:solidFill>
+                  <a:srgbClr val="FFFFFF"/>
+                </a:solidFill>
+                <a:latin typeface="Quattrocento Sans" panose="020B0502050000020003" pitchFamily="34" charset="0"/>
+                <a:ea typeface="QuattrocentoSans" pitchFamily="34" charset="-122"/>
+                <a:cs typeface="QuattrocentoSans" pitchFamily="34" charset="-120"/>
+              </a:rPr>
+              <a:t>Node.js</a:t>
+            </a:r>
+            <a:endParaRPr lang="en-US" sz="1400" dirty="0">
+              <a:latin typeface="Quattrocento Sans" panose="020B0502050000020003" pitchFamily="34" charset="0"/>
+            </a:endParaRPr>
+          </a:p>
+        </p:txBody>
+      </p:sp>
+      <p:sp>
+        <p:nvSpPr>
+          <p:cNvPr id="32" name="Shape 30">
+            <a:extLst>
+              <a:ext uri="{FF2B5EF4-FFF2-40B4-BE49-F238E27FC236}">
+                <a16:creationId xmlns:a16="http://schemas.microsoft.com/office/drawing/2014/main" id="{46B9323D-4B70-7417-06E7-26C63E36DED5}"/>
+              </a:ext>
+            </a:extLst>
+          </p:cNvPr>
+          <p:cNvSpPr/>
+          <p:nvPr/>
+        </p:nvSpPr>
+        <p:spPr>
+          <a:xfrm>
+            <a:off x="5080000" y="5969000"/>
+            <a:ext cx="1778000" cy="457200"/>
+          </a:xfrm>
+          <a:prstGeom prst="roundRect">
+            <a:avLst>
+              <a:gd name="adj" fmla="val 16000"/>
+            </a:avLst>
+          </a:prstGeom>
+          <a:solidFill>
+            <a:srgbClr val="1B4332"/>
+          </a:solidFill>
+          <a:ln/>
+        </p:spPr>
+        <p:txBody>
+          <a:bodyPr/>
+          <a:lstStyle/>
+          <a:p>
+            <a:endParaRPr lang="es-ES">
+              <a:latin typeface="Quattrocento Sans" panose="020B0502050000020003" pitchFamily="34" charset="0"/>
+            </a:endParaRPr>
+          </a:p>
+        </p:txBody>
+      </p:sp>
+      <p:sp>
+        <p:nvSpPr>
+          <p:cNvPr id="33" name="Text 31">
+            <a:extLst>
+              <a:ext uri="{FF2B5EF4-FFF2-40B4-BE49-F238E27FC236}">
+                <a16:creationId xmlns:a16="http://schemas.microsoft.com/office/drawing/2014/main" id="{5D8C4A49-7EBD-6B52-F108-74C7785B6431}"/>
+              </a:ext>
+            </a:extLst>
+          </p:cNvPr>
+          <p:cNvSpPr/>
+          <p:nvPr/>
+        </p:nvSpPr>
+        <p:spPr>
+          <a:xfrm>
+            <a:off x="5080000" y="5969000"/>
+            <a:ext cx="1778000" cy="457200"/>
+          </a:xfrm>
+          <a:prstGeom prst="rect">
+            <a:avLst/>
+          </a:prstGeom>
+          <a:noFill/>
+          <a:ln/>
+        </p:spPr>
+        <p:txBody>
+          <a:bodyPr wrap="none" lIns="0" tIns="0" rIns="0" bIns="0" rtlCol="0" anchor="ctr"/>
+          <a:lstStyle/>
+          <a:p>
+            <a:pPr algn="ctr">
+              <a:lnSpc>
+                <a:spcPct val="100000"/>
+              </a:lnSpc>
+            </a:pPr>
+            <a:r>
+              <a:rPr lang="en-US" sz="1400" b="1" dirty="0">
+                <a:solidFill>
+                  <a:srgbClr val="FFFFFF"/>
+                </a:solidFill>
+                <a:latin typeface="Quattrocento Sans" panose="020B0502050000020003" pitchFamily="34" charset="0"/>
+                <a:ea typeface="QuattrocentoSans" pitchFamily="34" charset="-122"/>
+                <a:cs typeface="QuattrocentoSans" pitchFamily="34" charset="-120"/>
+              </a:rPr>
+              <a:t>PostgreSQL</a:t>
+            </a:r>
+            <a:endParaRPr lang="en-US" sz="1400" dirty="0">
+              <a:latin typeface="Quattrocento Sans" panose="020B0502050000020003" pitchFamily="34" charset="0"/>
+            </a:endParaRPr>
+          </a:p>
+        </p:txBody>
+      </p:sp>
+      <p:sp>
+        <p:nvSpPr>
+          <p:cNvPr id="34" name="Shape 32">
+            <a:extLst>
+              <a:ext uri="{FF2B5EF4-FFF2-40B4-BE49-F238E27FC236}">
+                <a16:creationId xmlns:a16="http://schemas.microsoft.com/office/drawing/2014/main" id="{95E36640-A313-7741-2EA8-7030AAD717FF}"/>
+              </a:ext>
+            </a:extLst>
+          </p:cNvPr>
+          <p:cNvSpPr/>
+          <p:nvPr/>
+        </p:nvSpPr>
+        <p:spPr>
+          <a:xfrm>
+            <a:off x="7048500" y="5969000"/>
+            <a:ext cx="1651000" cy="457200"/>
+          </a:xfrm>
+          <a:prstGeom prst="roundRect">
+            <a:avLst>
+              <a:gd name="adj" fmla="val 16000"/>
+            </a:avLst>
+          </a:prstGeom>
+          <a:solidFill>
+            <a:srgbClr val="1B4332"/>
+          </a:solidFill>
+          <a:ln/>
+        </p:spPr>
+        <p:txBody>
+          <a:bodyPr/>
+          <a:lstStyle/>
+          <a:p>
+            <a:endParaRPr lang="es-ES">
+              <a:latin typeface="Quattrocento Sans" panose="020B0502050000020003" pitchFamily="34" charset="0"/>
+            </a:endParaRPr>
+          </a:p>
+        </p:txBody>
+      </p:sp>
+      <p:sp>
+        <p:nvSpPr>
+          <p:cNvPr id="35" name="Text 33">
+            <a:extLst>
+              <a:ext uri="{FF2B5EF4-FFF2-40B4-BE49-F238E27FC236}">
+                <a16:creationId xmlns:a16="http://schemas.microsoft.com/office/drawing/2014/main" id="{E78CE0DE-FD54-D6A3-A2EC-918E700B44E9}"/>
+              </a:ext>
+            </a:extLst>
+          </p:cNvPr>
+          <p:cNvSpPr/>
+          <p:nvPr/>
+        </p:nvSpPr>
+        <p:spPr>
+          <a:xfrm>
+            <a:off x="7048500" y="5969000"/>
+            <a:ext cx="1651000" cy="457200"/>
+          </a:xfrm>
+          <a:prstGeom prst="rect">
+            <a:avLst/>
+          </a:prstGeom>
+          <a:noFill/>
+          <a:ln/>
+        </p:spPr>
+        <p:txBody>
+          <a:bodyPr wrap="none" lIns="0" tIns="0" rIns="0" bIns="0" rtlCol="0" anchor="ctr"/>
+          <a:lstStyle/>
+          <a:p>
+            <a:pPr algn="ctr">
+              <a:lnSpc>
+                <a:spcPct val="100000"/>
+              </a:lnSpc>
+            </a:pPr>
+            <a:r>
+              <a:rPr lang="en-US" sz="1400" b="1" dirty="0">
+                <a:solidFill>
+                  <a:srgbClr val="FFFFFF"/>
+                </a:solidFill>
+                <a:latin typeface="Quattrocento Sans" panose="020B0502050000020003" pitchFamily="34" charset="0"/>
+                <a:ea typeface="QuattrocentoSans" pitchFamily="34" charset="-122"/>
+                <a:cs typeface="QuattrocentoSans" pitchFamily="34" charset="-120"/>
+              </a:rPr>
+              <a:t>Docker</a:t>
+            </a:r>
+            <a:endParaRPr lang="en-US" sz="1400" dirty="0">
+              <a:latin typeface="Quattrocento Sans" panose="020B0502050000020003" pitchFamily="34" charset="0"/>
+            </a:endParaRPr>
+          </a:p>
+        </p:txBody>
+      </p:sp>
+      <p:sp>
+        <p:nvSpPr>
+          <p:cNvPr id="36" name="Text 34">
+            <a:extLst>
+              <a:ext uri="{FF2B5EF4-FFF2-40B4-BE49-F238E27FC236}">
+                <a16:creationId xmlns:a16="http://schemas.microsoft.com/office/drawing/2014/main" id="{8B84F229-985D-F0F4-7E8B-46CA9100DB30}"/>
+              </a:ext>
+            </a:extLst>
+          </p:cNvPr>
+          <p:cNvSpPr/>
+          <p:nvPr/>
+        </p:nvSpPr>
+        <p:spPr>
+          <a:xfrm>
+            <a:off x="762000" y="6667500"/>
+            <a:ext cx="14732000" cy="1651000"/>
+          </a:xfrm>
+          <a:prstGeom prst="rect">
+            <a:avLst/>
+          </a:prstGeom>
+          <a:noFill/>
+          <a:ln/>
+        </p:spPr>
+        <p:txBody>
+          <a:bodyPr wrap="square" lIns="0" tIns="0" rIns="0" bIns="0" rtlCol="0" anchor="t"/>
+          <a:lstStyle/>
+          <a:p>
+            <a:pPr>
+              <a:lnSpc>
+                <a:spcPct val="150000"/>
+              </a:lnSpc>
+            </a:pPr>
+            <a:r>
+              <a:rPr lang="en-US" sz="1600" b="1" dirty="0">
+                <a:solidFill>
+                  <a:srgbClr val="212529"/>
+                </a:solidFill>
+                <a:latin typeface="Quattrocento Sans" panose="020B0502050000020003" pitchFamily="34" charset="0"/>
+                <a:ea typeface="QuattrocentoSans" pitchFamily="34" charset="-122"/>
+                <a:cs typeface="QuattrocentoSans" pitchFamily="34" charset="-120"/>
+              </a:rPr>
+              <a:t>Frontend:</a:t>
+            </a:r>
+            <a:r>
+              <a:rPr lang="en-US" sz="1600" dirty="0">
+                <a:solidFill>
+                  <a:srgbClr val="212529"/>
+                </a:solidFill>
+                <a:latin typeface="Quattrocento Sans" panose="020B0502050000020003" pitchFamily="34" charset="0"/>
+                <a:ea typeface="QuattrocentoSans" pitchFamily="34" charset="-122"/>
+                <a:cs typeface="QuattrocentoSans" pitchFamily="34" charset="-120"/>
+              </a:rPr>
+              <a:t> React + Vite — SPA de alto rendimiento con componentes reutilizables.</a:t>
+            </a:r>
+            <a:endParaRPr lang="en-US" sz="1800" dirty="0">
+              <a:latin typeface="Quattrocento Sans" panose="020B0502050000020003" pitchFamily="34" charset="0"/>
+            </a:endParaRPr>
+          </a:p>
+          <a:p>
+            <a:pPr>
+              <a:lnSpc>
+                <a:spcPct val="150000"/>
+              </a:lnSpc>
+              <a:spcBef>
+                <a:spcPts val="400"/>
+              </a:spcBef>
+            </a:pPr>
+            <a:r>
+              <a:rPr lang="en-US" sz="1600" b="1" dirty="0">
+                <a:solidFill>
+                  <a:srgbClr val="212529"/>
+                </a:solidFill>
+                <a:latin typeface="Quattrocento Sans" panose="020B0502050000020003" pitchFamily="34" charset="0"/>
+                <a:ea typeface="QuattrocentoSans" pitchFamily="34" charset="-122"/>
+                <a:cs typeface="QuattrocentoSans" pitchFamily="34" charset="-120"/>
+              </a:rPr>
+              <a:t>Backend:</a:t>
+            </a:r>
+            <a:r>
+              <a:rPr lang="en-US" sz="1600" dirty="0">
+                <a:solidFill>
+                  <a:srgbClr val="212529"/>
+                </a:solidFill>
+                <a:latin typeface="Quattrocento Sans" panose="020B0502050000020003" pitchFamily="34" charset="0"/>
+                <a:ea typeface="QuattrocentoSans" pitchFamily="34" charset="-122"/>
+                <a:cs typeface="QuattrocentoSans" pitchFamily="34" charset="-120"/>
+              </a:rPr>
+              <a:t> Node.js + Express.js — arquitectura ligera y escalable con eventos asíncronos.</a:t>
+            </a:r>
+            <a:endParaRPr lang="en-US" sz="1800" dirty="0">
+              <a:latin typeface="Quattrocento Sans" panose="020B0502050000020003" pitchFamily="34" charset="0"/>
+            </a:endParaRPr>
+          </a:p>
+          <a:p>
+            <a:pPr>
+              <a:lnSpc>
+                <a:spcPct val="150000"/>
+              </a:lnSpc>
+              <a:spcBef>
+                <a:spcPts val="400"/>
+              </a:spcBef>
+            </a:pPr>
+            <a:r>
+              <a:rPr lang="en-US" sz="1600" b="1" dirty="0">
+                <a:solidFill>
+                  <a:srgbClr val="212529"/>
+                </a:solidFill>
+                <a:latin typeface="Quattrocento Sans" panose="020B0502050000020003" pitchFamily="34" charset="0"/>
+                <a:ea typeface="QuattrocentoSans" pitchFamily="34" charset="-122"/>
+                <a:cs typeface="QuattrocentoSans" pitchFamily="34" charset="-120"/>
+              </a:rPr>
+              <a:t>Base de datos:</a:t>
+            </a:r>
+            <a:r>
+              <a:rPr lang="en-US" sz="1600" dirty="0">
+                <a:solidFill>
+                  <a:srgbClr val="212529"/>
+                </a:solidFill>
+                <a:latin typeface="Quattrocento Sans" panose="020B0502050000020003" pitchFamily="34" charset="0"/>
+                <a:ea typeface="QuattrocentoSans" pitchFamily="34" charset="-122"/>
+                <a:cs typeface="QuattrocentoSans" pitchFamily="34" charset="-120"/>
+              </a:rPr>
+              <a:t> PostgreSQL— modelo relacional robusto con migraciones automáticas.</a:t>
+            </a:r>
+            <a:endParaRPr lang="en-US" sz="1800" dirty="0">
+              <a:latin typeface="Quattrocento Sans" panose="020B0502050000020003" pitchFamily="34" charset="0"/>
+            </a:endParaRPr>
+          </a:p>
+          <a:p>
+            <a:pPr>
+              <a:lnSpc>
+                <a:spcPct val="150000"/>
+              </a:lnSpc>
+              <a:spcBef>
+                <a:spcPts val="400"/>
+              </a:spcBef>
+            </a:pPr>
+            <a:r>
+              <a:rPr lang="en-US" sz="1600" b="1" dirty="0">
+                <a:solidFill>
+                  <a:srgbClr val="212529"/>
+                </a:solidFill>
+                <a:latin typeface="Quattrocento Sans" panose="020B0502050000020003" pitchFamily="34" charset="0"/>
+                <a:ea typeface="QuattrocentoSans" pitchFamily="34" charset="-122"/>
+                <a:cs typeface="QuattrocentoSans" pitchFamily="34" charset="-120"/>
+              </a:rPr>
+              <a:t>Despliegue:</a:t>
+            </a:r>
+            <a:r>
+              <a:rPr lang="en-US" sz="1600" dirty="0">
+                <a:solidFill>
+                  <a:srgbClr val="212529"/>
+                </a:solidFill>
+                <a:latin typeface="Quattrocento Sans" panose="020B0502050000020003" pitchFamily="34" charset="0"/>
+                <a:ea typeface="QuattrocentoSans" pitchFamily="34" charset="-122"/>
+                <a:cs typeface="QuattrocentoSans" pitchFamily="34" charset="-120"/>
+              </a:rPr>
+              <a:t> Docker + Nginx — contenedores para entornos idénticos y proxy inverso.</a:t>
+            </a:r>
+            <a:endParaRPr lang="en-US" sz="1800" dirty="0">
+              <a:latin typeface="Quattrocento Sans" panose="020B0502050000020003" pitchFamily="34" charset="0"/>
+            </a:endParaRPr>
+          </a:p>
+        </p:txBody>
+      </p:sp>
+      <p:sp>
+        <p:nvSpPr>
+          <p:cNvPr id="37" name="Text 35">
+            <a:extLst>
+              <a:ext uri="{FF2B5EF4-FFF2-40B4-BE49-F238E27FC236}">
+                <a16:creationId xmlns:a16="http://schemas.microsoft.com/office/drawing/2014/main" id="{D689B158-AFB7-D6A3-83CB-57E6F662CC12}"/>
+              </a:ext>
+            </a:extLst>
+          </p:cNvPr>
+          <p:cNvSpPr/>
+          <p:nvPr/>
+        </p:nvSpPr>
+        <p:spPr>
+          <a:xfrm>
+            <a:off x="15240000" y="8763000"/>
+            <a:ext cx="762000" cy="254000"/>
+          </a:xfrm>
+          <a:prstGeom prst="rect">
+            <a:avLst/>
+          </a:prstGeom>
+          <a:noFill/>
+          <a:ln/>
+        </p:spPr>
+        <p:txBody>
+          <a:bodyPr wrap="none" lIns="0" tIns="0" rIns="0" bIns="0" rtlCol="0" anchor="ctr"/>
+          <a:lstStyle/>
+          <a:p>
+            <a:pPr algn="r">
+              <a:lnSpc>
+                <a:spcPct val="140000"/>
+              </a:lnSpc>
+            </a:pPr>
+            <a:r>
+              <a:rPr lang="en-US" sz="1400" dirty="0">
+                <a:solidFill>
+                  <a:srgbClr val="6C757D"/>
+                </a:solidFill>
+                <a:latin typeface="Quattrocento Sans" panose="020B0502050000020003" pitchFamily="34" charset="0"/>
+                <a:ea typeface="QuattrocentoSans" pitchFamily="34" charset="-122"/>
+                <a:cs typeface="QuattrocentoSans" pitchFamily="34" charset="-120"/>
+              </a:rPr>
+              <a:t>3 / 10</a:t>
+            </a:r>
+            <a:endParaRPr lang="en-US" sz="1400" dirty="0">
+              <a:latin typeface="Quattrocento Sans" panose="020B0502050000020003" pitchFamily="34" charset="0"/>
+            </a:endParaRPr>
+          </a:p>
+        </p:txBody>
+      </p:sp>
+      <p:pic>
+        <p:nvPicPr>
+          <p:cNvPr id="1028" name="Picture 4" descr="Instrucción - Iconos gratis de educación">
+            <a:extLst>
+              <a:ext uri="{FF2B5EF4-FFF2-40B4-BE49-F238E27FC236}">
+                <a16:creationId xmlns:a16="http://schemas.microsoft.com/office/drawing/2014/main" id="{CBA9E698-87E3-29B6-B397-8176F1BF060A}"/>
+              </a:ext>
+            </a:extLst>
+          </p:cNvPr>
+          <p:cNvPicPr>
+            <a:picLocks noChangeAspect="1" noChangeArrowheads="1"/>
+          </p:cNvPicPr>
+          <p:nvPr/>
+        </p:nvPicPr>
+        <p:blipFill>
+          <a:blip r:embed="rId3">
+            <a:extLst>
+              <a:ext uri="{28A0092B-C50C-407E-A947-70E740481C1C}">
+                <a14:useLocalDpi xmlns:a14="http://schemas.microsoft.com/office/drawing/2010/main" val="0"/>
+              </a:ext>
+            </a:extLst>
+          </a:blip>
+          <a:srcRect/>
+          <a:stretch>
+            <a:fillRect/>
+          </a:stretch>
+        </p:blipFill>
+        <p:spPr bwMode="auto">
+          <a:xfrm>
+            <a:off x="303048" y="749300"/>
+            <a:ext cx="382752" cy="382752"/>
+          </a:xfrm>
+          <a:prstGeom prst="rect">
+            <a:avLst/>
+          </a:prstGeom>
+          <a:noFill/>
+          <a:extLst>
+            <a:ext uri="{909E8E84-426E-40DD-AFC4-6F175D3DCCD1}">
+              <a14:hiddenFill xmlns:a14="http://schemas.microsoft.com/office/drawing/2010/main">
+                <a:solidFill>
+                  <a:srgbClr val="FFFFFF"/>
+                </a:solidFill>
+              </a14:hiddenFill>
+            </a:ext>
+          </a:extLst>
+        </p:spPr>
+      </p:pic>
+    </p:spTree>
+    <p:extLst>
+      <p:ext uri="{BB962C8B-B14F-4D97-AF65-F5344CB8AC3E}">
+        <p14:creationId xmlns:p14="http://schemas.microsoft.com/office/powerpoint/2010/main" val="77076146"/>
+      </p:ext>
+    </p:extLst>
+  </p:cSld>
+  <p:clrMapOvr>
+    <a:masterClrMapping/>
+  </p:clrMapOvr>
+  <p:transition>
+    <p:fade/>
+  </p:transition>
+</p:sld>
+</file>
+
+<file path=ppt/slides/slide12.xml><?xml version="1.0" encoding="utf-8"?>
 <p:sld xmlns:a="http://schemas.openxmlformats.org/drawingml/2006/main" xmlns:r="http://schemas.openxmlformats.org/officeDocument/2006/relationships" xmlns:p="http://schemas.openxmlformats.org/presentationml/2006/main">
   <p:cSld name="Slide 10">
     <p:bg>
@@ -3833,78 +8198,18 @@
       </p:grpSpPr>
       <p:sp>
         <p:nvSpPr>
-          <p:cNvPr id="2" name="Shape 0"/>
-          <p:cNvSpPr/>
-          <p:nvPr/>
-        </p:nvSpPr>
-        <p:spPr>
-          <a:xfrm>
-            <a:off x="0" y="0"/>
-            <a:ext cx="16256000" cy="508000"/>
+          <p:cNvPr id="4" name="Text 2"/>
+          <p:cNvSpPr/>
+          <p:nvPr/>
+        </p:nvSpPr>
+        <p:spPr>
+          <a:xfrm>
+            <a:off x="0" y="-76752"/>
+            <a:ext cx="2032000" cy="508000"/>
           </a:xfrm>
           <a:prstGeom prst="rect">
             <a:avLst/>
           </a:prstGeom>
-          <a:solidFill>
-            <a:srgbClr val="1B4332"/>
-          </a:solidFill>
-          <a:ln/>
-        </p:spPr>
-        <p:txBody>
-          <a:bodyPr/>
-          <a:lstStyle/>
-          <a:p>
-            <a:endParaRPr lang="es-ES">
-              <a:latin typeface="Quattrocento Sans" panose="020B0502050000020003" pitchFamily="34" charset="0"/>
-            </a:endParaRPr>
-          </a:p>
-        </p:txBody>
-      </p:sp>
-      <p:sp>
-        <p:nvSpPr>
-          <p:cNvPr id="3" name="Shape 1"/>
-          <p:cNvSpPr/>
-          <p:nvPr/>
-        </p:nvSpPr>
-        <p:spPr>
-          <a:xfrm>
-            <a:off x="0" y="76200"/>
-            <a:ext cx="2032000" cy="355600"/>
-          </a:xfrm>
-          <a:prstGeom prst="roundRect">
-            <a:avLst>
-              <a:gd name="adj" fmla="val 8000"/>
-            </a:avLst>
-          </a:prstGeom>
-          <a:solidFill>
-            <a:srgbClr val="FFFFFF"/>
-          </a:solidFill>
-          <a:ln/>
-        </p:spPr>
-        <p:txBody>
-          <a:bodyPr/>
-          <a:lstStyle/>
-          <a:p>
-            <a:endParaRPr lang="es-ES">
-              <a:latin typeface="Quattrocento Sans" panose="020B0502050000020003" pitchFamily="34" charset="0"/>
-            </a:endParaRPr>
-          </a:p>
-        </p:txBody>
-      </p:sp>
-      <p:sp>
-        <p:nvSpPr>
-          <p:cNvPr id="4" name="Text 2"/>
-          <p:cNvSpPr/>
-          <p:nvPr/>
-        </p:nvSpPr>
-        <p:spPr>
-          <a:xfrm>
-            <a:off x="0" y="0"/>
-            <a:ext cx="2032000" cy="508000"/>
-          </a:xfrm>
-          <a:prstGeom prst="rect">
-            <a:avLst/>
-          </a:prstGeom>
           <a:noFill/>
           <a:ln/>
         </p:spPr>
@@ -3920,7 +8225,7 @@
             <a:r>
               <a:rPr lang="en-US" sz="1200" b="1" dirty="0">
                 <a:solidFill>
-                  <a:srgbClr val="1B4332"/>
+                  <a:schemeClr val="bg1"/>
                 </a:solidFill>
                 <a:latin typeface="Quattrocento Sans" panose="020B0502050000020003" pitchFamily="34" charset="0"/>
                 <a:ea typeface="QuattrocentoSans" pitchFamily="34" charset="-122"/>
@@ -3929,307 +8234,9 @@
               <a:t>CONTEXTO</a:t>
             </a:r>
             <a:endParaRPr lang="en-US" sz="1200" dirty="0">
-              <a:latin typeface="Quattrocento Sans" panose="020B0502050000020003" pitchFamily="34" charset="0"/>
-            </a:endParaRPr>
-          </a:p>
-        </p:txBody>
-      </p:sp>
-      <p:sp>
-        <p:nvSpPr>
-          <p:cNvPr id="5" name="Text 3"/>
-          <p:cNvSpPr/>
-          <p:nvPr/>
-        </p:nvSpPr>
-        <p:spPr>
-          <a:xfrm>
-            <a:off x="2032000" y="0"/>
-            <a:ext cx="2032000" cy="508000"/>
-          </a:xfrm>
-          <a:prstGeom prst="rect">
-            <a:avLst/>
-          </a:prstGeom>
-          <a:noFill/>
-          <a:ln/>
-        </p:spPr>
-        <p:txBody>
-          <a:bodyPr wrap="none" lIns="0" tIns="0" rIns="0" bIns="0" rtlCol="0" anchor="ctr"/>
-          <a:lstStyle/>
-          <a:p>
-            <a:pPr algn="ctr">
-              <a:lnSpc>
-                <a:spcPct val="100000"/>
-              </a:lnSpc>
-            </a:pPr>
-            <a:r>
-              <a:rPr lang="en-US" sz="1200" dirty="0">
-                <a:solidFill>
-                  <a:srgbClr val="FFFFFF"/>
-                </a:solidFill>
-                <a:latin typeface="Quattrocento Sans" panose="020B0502050000020003" pitchFamily="34" charset="0"/>
-                <a:ea typeface="QuattrocentoSans" pitchFamily="34" charset="-122"/>
-                <a:cs typeface="QuattrocentoSans" pitchFamily="34" charset="-120"/>
-              </a:rPr>
-              <a:t>METODOLOGÍAS</a:t>
-            </a:r>
-            <a:endParaRPr lang="en-US" sz="1200" dirty="0">
-              <a:latin typeface="Quattrocento Sans" panose="020B0502050000020003" pitchFamily="34" charset="0"/>
-            </a:endParaRPr>
-          </a:p>
-        </p:txBody>
-      </p:sp>
-      <p:sp>
-        <p:nvSpPr>
-          <p:cNvPr id="6" name="Text 4"/>
-          <p:cNvSpPr/>
-          <p:nvPr/>
-        </p:nvSpPr>
-        <p:spPr>
-          <a:xfrm>
-            <a:off x="4064000" y="0"/>
-            <a:ext cx="2032000" cy="508000"/>
-          </a:xfrm>
-          <a:prstGeom prst="rect">
-            <a:avLst/>
-          </a:prstGeom>
-          <a:noFill/>
-          <a:ln/>
-        </p:spPr>
-        <p:txBody>
-          <a:bodyPr wrap="none" lIns="0" tIns="0" rIns="0" bIns="0" rtlCol="0" anchor="ctr"/>
-          <a:lstStyle/>
-          <a:p>
-            <a:pPr algn="ctr">
-              <a:lnSpc>
-                <a:spcPct val="100000"/>
-              </a:lnSpc>
-            </a:pPr>
-            <a:r>
-              <a:rPr lang="en-US" sz="1200" dirty="0">
-                <a:solidFill>
-                  <a:srgbClr val="FFFFFF"/>
-                </a:solidFill>
-                <a:latin typeface="Quattrocento Sans" panose="020B0502050000020003" pitchFamily="34" charset="0"/>
-                <a:ea typeface="QuattrocentoSans" pitchFamily="34" charset="-122"/>
-                <a:cs typeface="QuattrocentoSans" pitchFamily="34" charset="-120"/>
-              </a:rPr>
-              <a:t>BACKEND</a:t>
-            </a:r>
-            <a:endParaRPr lang="en-US" sz="1200" dirty="0">
-              <a:latin typeface="Quattrocento Sans" panose="020B0502050000020003" pitchFamily="34" charset="0"/>
-            </a:endParaRPr>
-          </a:p>
-        </p:txBody>
-      </p:sp>
-      <p:sp>
-        <p:nvSpPr>
-          <p:cNvPr id="7" name="Text 5"/>
-          <p:cNvSpPr/>
-          <p:nvPr/>
-        </p:nvSpPr>
-        <p:spPr>
-          <a:xfrm>
-            <a:off x="6096000" y="0"/>
-            <a:ext cx="2032000" cy="508000"/>
-          </a:xfrm>
-          <a:prstGeom prst="rect">
-            <a:avLst/>
-          </a:prstGeom>
-          <a:noFill/>
-          <a:ln/>
-        </p:spPr>
-        <p:txBody>
-          <a:bodyPr wrap="none" lIns="0" tIns="0" rIns="0" bIns="0" rtlCol="0" anchor="ctr"/>
-          <a:lstStyle/>
-          <a:p>
-            <a:pPr algn="ctr">
-              <a:lnSpc>
-                <a:spcPct val="100000"/>
-              </a:lnSpc>
-            </a:pPr>
-            <a:r>
-              <a:rPr lang="en-US" sz="1200" dirty="0">
-                <a:solidFill>
-                  <a:srgbClr val="FFFFFF"/>
-                </a:solidFill>
-                <a:latin typeface="Quattrocento Sans" panose="020B0502050000020003" pitchFamily="34" charset="0"/>
-                <a:ea typeface="QuattrocentoSans" pitchFamily="34" charset="-122"/>
-                <a:cs typeface="QuattrocentoSans" pitchFamily="34" charset="-120"/>
-              </a:rPr>
-              <a:t>FRONTEND</a:t>
-            </a:r>
-            <a:endParaRPr lang="en-US" sz="1200" dirty="0">
-              <a:latin typeface="Quattrocento Sans" panose="020B0502050000020003" pitchFamily="34" charset="0"/>
-            </a:endParaRPr>
-          </a:p>
-        </p:txBody>
-      </p:sp>
-      <p:sp>
-        <p:nvSpPr>
-          <p:cNvPr id="8" name="Text 6"/>
-          <p:cNvSpPr/>
-          <p:nvPr/>
-        </p:nvSpPr>
-        <p:spPr>
-          <a:xfrm>
-            <a:off x="8128000" y="0"/>
-            <a:ext cx="2032000" cy="508000"/>
-          </a:xfrm>
-          <a:prstGeom prst="rect">
-            <a:avLst/>
-          </a:prstGeom>
-          <a:noFill/>
-          <a:ln/>
-        </p:spPr>
-        <p:txBody>
-          <a:bodyPr wrap="none" lIns="0" tIns="0" rIns="0" bIns="0" rtlCol="0" anchor="ctr"/>
-          <a:lstStyle/>
-          <a:p>
-            <a:pPr algn="ctr">
-              <a:lnSpc>
-                <a:spcPct val="100000"/>
-              </a:lnSpc>
-            </a:pPr>
-            <a:r>
-              <a:rPr lang="en-US" sz="1200" dirty="0">
-                <a:solidFill>
-                  <a:srgbClr val="FFFFFF"/>
-                </a:solidFill>
-                <a:latin typeface="Quattrocento Sans" panose="020B0502050000020003" pitchFamily="34" charset="0"/>
-                <a:ea typeface="QuattrocentoSans" pitchFamily="34" charset="-122"/>
-                <a:cs typeface="QuattrocentoSans" pitchFamily="34" charset="-120"/>
-              </a:rPr>
-              <a:t>APIs</a:t>
-            </a:r>
-            <a:endParaRPr lang="en-US" sz="1200" dirty="0">
-              <a:latin typeface="Quattrocento Sans" panose="020B0502050000020003" pitchFamily="34" charset="0"/>
-            </a:endParaRPr>
-          </a:p>
-        </p:txBody>
-      </p:sp>
-      <p:sp>
-        <p:nvSpPr>
-          <p:cNvPr id="9" name="Text 7"/>
-          <p:cNvSpPr/>
-          <p:nvPr/>
-        </p:nvSpPr>
-        <p:spPr>
-          <a:xfrm>
-            <a:off x="10160000" y="0"/>
-            <a:ext cx="2032000" cy="508000"/>
-          </a:xfrm>
-          <a:prstGeom prst="rect">
-            <a:avLst/>
-          </a:prstGeom>
-          <a:noFill/>
-          <a:ln/>
-        </p:spPr>
-        <p:txBody>
-          <a:bodyPr wrap="none" lIns="0" tIns="0" rIns="0" bIns="0" rtlCol="0" anchor="ctr"/>
-          <a:lstStyle/>
-          <a:p>
-            <a:pPr algn="ctr">
-              <a:lnSpc>
-                <a:spcPct val="100000"/>
-              </a:lnSpc>
-            </a:pPr>
-            <a:r>
-              <a:rPr lang="en-US" sz="1200" dirty="0">
-                <a:solidFill>
-                  <a:srgbClr val="FFFFFF"/>
-                </a:solidFill>
-                <a:latin typeface="Quattrocento Sans" panose="020B0502050000020003" pitchFamily="34" charset="0"/>
-                <a:ea typeface="QuattrocentoSans" pitchFamily="34" charset="-122"/>
-                <a:cs typeface="QuattrocentoSans" pitchFamily="34" charset="-120"/>
-              </a:rPr>
-              <a:t>ARQUITECTURA</a:t>
-            </a:r>
-            <a:endParaRPr lang="en-US" sz="1200" dirty="0">
-              <a:latin typeface="Quattrocento Sans" panose="020B0502050000020003" pitchFamily="34" charset="0"/>
-            </a:endParaRPr>
-          </a:p>
-        </p:txBody>
-      </p:sp>
-      <p:sp>
-        <p:nvSpPr>
-          <p:cNvPr id="10" name="Text 8"/>
-          <p:cNvSpPr/>
-          <p:nvPr/>
-        </p:nvSpPr>
-        <p:spPr>
-          <a:xfrm>
-            <a:off x="12192000" y="0"/>
-            <a:ext cx="2032000" cy="508000"/>
-          </a:xfrm>
-          <a:prstGeom prst="rect">
-            <a:avLst/>
-          </a:prstGeom>
-          <a:noFill/>
-          <a:ln/>
-        </p:spPr>
-        <p:txBody>
-          <a:bodyPr wrap="none" lIns="0" tIns="0" rIns="0" bIns="0" rtlCol="0" anchor="ctr"/>
-          <a:lstStyle/>
-          <a:p>
-            <a:pPr algn="ctr">
-              <a:lnSpc>
-                <a:spcPct val="100000"/>
-              </a:lnSpc>
-            </a:pPr>
-            <a:r>
-              <a:rPr lang="en-US" sz="1200" dirty="0">
-                <a:solidFill>
-                  <a:srgbClr val="FFFFFF"/>
-                </a:solidFill>
-                <a:latin typeface="Quattrocento Sans" panose="020B0502050000020003" pitchFamily="34" charset="0"/>
-                <a:ea typeface="QuattrocentoSans" pitchFamily="34" charset="-122"/>
-                <a:cs typeface="QuattrocentoSans" pitchFamily="34" charset="-120"/>
-              </a:rPr>
-              <a:t>DEVOPS</a:t>
-            </a:r>
-            <a:endParaRPr lang="en-US" sz="1200" dirty="0">
-              <a:latin typeface="Quattrocento Sans" panose="020B0502050000020003" pitchFamily="34" charset="0"/>
-            </a:endParaRPr>
-          </a:p>
-        </p:txBody>
-      </p:sp>
-      <p:sp>
-        <p:nvSpPr>
-          <p:cNvPr id="11" name="Text 9"/>
-          <p:cNvSpPr/>
-          <p:nvPr/>
-        </p:nvSpPr>
-        <p:spPr>
-          <a:xfrm>
-            <a:off x="14224000" y="0"/>
-            <a:ext cx="2032000" cy="508000"/>
-          </a:xfrm>
-          <a:prstGeom prst="rect">
-            <a:avLst/>
-          </a:prstGeom>
-          <a:noFill/>
-          <a:ln/>
-        </p:spPr>
-        <p:txBody>
-          <a:bodyPr wrap="none" lIns="0" tIns="0" rIns="0" bIns="0" rtlCol="0" anchor="ctr"/>
-          <a:lstStyle/>
-          <a:p>
-            <a:pPr algn="ctr">
-              <a:lnSpc>
-                <a:spcPct val="100000"/>
-              </a:lnSpc>
-            </a:pPr>
-            <a:r>
-              <a:rPr lang="en-US" sz="1200" dirty="0">
-                <a:solidFill>
-                  <a:srgbClr val="FFFFFF"/>
-                </a:solidFill>
-                <a:latin typeface="Quattrocento Sans" panose="020B0502050000020003" pitchFamily="34" charset="0"/>
-                <a:ea typeface="QuattrocentoSans" pitchFamily="34" charset="-122"/>
-                <a:cs typeface="QuattrocentoSans" pitchFamily="34" charset="-120"/>
-              </a:rPr>
-              <a:t>VIABILIDAD</a:t>
-            </a:r>
-            <a:endParaRPr lang="en-US" sz="1200" dirty="0">
+              <a:solidFill>
+                <a:schemeClr val="bg1"/>
+              </a:solidFill>
               <a:latin typeface="Quattrocento Sans" panose="020B0502050000020003" pitchFamily="34" charset="0"/>
             </a:endParaRPr>
           </a:p>
@@ -6269,6 +10276,99 @@
             <a:endParaRPr lang="en-US" sz="1400" dirty="0">
               <a:latin typeface="Quattrocento Sans" panose="020B0502050000020003" pitchFamily="34" charset="0"/>
             </a:endParaRPr>
+          </a:p>
+        </p:txBody>
+      </p:sp>
+      <p:pic>
+        <p:nvPicPr>
+          <p:cNvPr id="1026" name="Picture 2" descr="Gui contenido - Icono gratis PNG, SVG">
+            <a:extLst>
+              <a:ext uri="{FF2B5EF4-FFF2-40B4-BE49-F238E27FC236}">
+                <a16:creationId xmlns:a16="http://schemas.microsoft.com/office/drawing/2014/main" id="{934A6ACB-EB53-312C-7DA7-FA89F029F0DB}"/>
+              </a:ext>
+            </a:extLst>
+          </p:cNvPr>
+          <p:cNvPicPr>
+            <a:picLocks noChangeAspect="1" noChangeArrowheads="1"/>
+          </p:cNvPicPr>
+          <p:nvPr/>
+        </p:nvPicPr>
+        <p:blipFill>
+          <a:blip r:embed="rId3">
+            <a:extLst>
+              <a:ext uri="{28A0092B-C50C-407E-A947-70E740481C1C}">
+                <a14:useLocalDpi xmlns:a14="http://schemas.microsoft.com/office/drawing/2010/main" val="0"/>
+              </a:ext>
+            </a:extLst>
+          </a:blip>
+          <a:srcRect/>
+          <a:stretch>
+            <a:fillRect/>
+          </a:stretch>
+        </p:blipFill>
+        <p:spPr bwMode="auto">
+          <a:xfrm>
+            <a:off x="217669" y="698500"/>
+            <a:ext cx="447554" cy="447554"/>
+          </a:xfrm>
+          <a:prstGeom prst="rect">
+            <a:avLst/>
+          </a:prstGeom>
+          <a:noFill/>
+          <a:extLst>
+            <a:ext uri="{909E8E84-426E-40DD-AFC4-6F175D3DCCD1}">
+              <a14:hiddenFill xmlns:a14="http://schemas.microsoft.com/office/drawing/2010/main">
+                <a:solidFill>
+                  <a:srgbClr val="FFFFFF"/>
+                </a:solidFill>
+              </a14:hiddenFill>
+            </a:ext>
+          </a:extLst>
+        </p:spPr>
+      </p:pic>
+      <p:sp>
+        <p:nvSpPr>
+          <p:cNvPr id="2" name="Text 3">
+            <a:extLst>
+              <a:ext uri="{FF2B5EF4-FFF2-40B4-BE49-F238E27FC236}">
+                <a16:creationId xmlns:a16="http://schemas.microsoft.com/office/drawing/2014/main" id="{1D0A1312-7A94-7248-A3AE-7D71FC9C3150}"/>
+              </a:ext>
+            </a:extLst>
+          </p:cNvPr>
+          <p:cNvSpPr/>
+          <p:nvPr/>
+        </p:nvSpPr>
+        <p:spPr>
+          <a:xfrm>
+            <a:off x="0" y="-552"/>
+            <a:ext cx="2032000" cy="508000"/>
+          </a:xfrm>
+          <a:prstGeom prst="rect">
+            <a:avLst/>
+          </a:prstGeom>
+          <a:solidFill>
+            <a:srgbClr val="1B4332"/>
+          </a:solidFill>
+          <a:ln/>
+        </p:spPr>
+        <p:txBody>
+          <a:bodyPr wrap="none" lIns="0" tIns="0" rIns="0" bIns="0" rtlCol="0" anchor="ctr"/>
+          <a:lstStyle/>
+          <a:p>
+            <a:pPr algn="ctr">
+              <a:lnSpc>
+                <a:spcPct val="100000"/>
+              </a:lnSpc>
+            </a:pPr>
+            <a:r>
+              <a:rPr lang="en-US" sz="1200" dirty="0">
+                <a:solidFill>
+                  <a:schemeClr val="bg1"/>
+                </a:solidFill>
+                <a:latin typeface="Quattrocento Sans" panose="020B0502050000020003" pitchFamily="34" charset="0"/>
+              </a:rPr>
+              <a:t>CONTEXTO</a:t>
+            </a:r>
           </a:p>
         </p:txBody>
       </p:sp>
@@ -6310,42 +10410,13 @@
       </p:grpSpPr>
       <p:sp>
         <p:nvSpPr>
-          <p:cNvPr id="2" name="Shape 0"/>
-          <p:cNvSpPr/>
-          <p:nvPr/>
-        </p:nvSpPr>
-        <p:spPr>
-          <a:xfrm>
-            <a:off x="0" y="0"/>
-            <a:ext cx="16256000" cy="508000"/>
-          </a:xfrm>
-          <a:prstGeom prst="rect">
-            <a:avLst/>
-          </a:prstGeom>
-          <a:solidFill>
-            <a:srgbClr val="1B4332"/>
-          </a:solidFill>
-          <a:ln/>
-        </p:spPr>
-        <p:txBody>
-          <a:bodyPr/>
-          <a:lstStyle/>
-          <a:p>
-            <a:endParaRPr lang="es-ES">
-              <a:latin typeface="Quattrocento Sans" panose="020B0502050000020003" pitchFamily="34" charset="0"/>
-            </a:endParaRPr>
-          </a:p>
-        </p:txBody>
-      </p:sp>
-      <p:sp>
-        <p:nvSpPr>
           <p:cNvPr id="3" name="Shape 1"/>
           <p:cNvSpPr/>
           <p:nvPr/>
         </p:nvSpPr>
         <p:spPr>
           <a:xfrm>
-            <a:off x="2108200" y="76200"/>
+            <a:off x="77156" y="73082"/>
             <a:ext cx="1879600" cy="355600"/>
           </a:xfrm>
           <a:prstGeom prst="roundRect">
@@ -6354,7 +10425,7 @@
             </a:avLst>
           </a:prstGeom>
           <a:solidFill>
-            <a:srgbClr val="FFFFFF"/>
+            <a:srgbClr val="1B4332"/>
           </a:solidFill>
           <a:ln/>
         </p:spPr>
@@ -6363,26 +10434,31 @@
           <a:lstStyle/>
           <a:p>
             <a:endParaRPr lang="es-ES">
-              <a:latin typeface="Quattrocento Sans" panose="020B0502050000020003" pitchFamily="34" charset="0"/>
-            </a:endParaRPr>
-          </a:p>
-        </p:txBody>
-      </p:sp>
-      <p:sp>
-        <p:nvSpPr>
-          <p:cNvPr id="4" name="Text 2"/>
-          <p:cNvSpPr/>
-          <p:nvPr/>
-        </p:nvSpPr>
-        <p:spPr>
-          <a:xfrm>
-            <a:off x="0" y="0"/>
+              <a:solidFill>
+                <a:schemeClr val="bg1"/>
+              </a:solidFill>
+              <a:latin typeface="Quattrocento Sans" panose="020B0502050000020003" pitchFamily="34" charset="0"/>
+            </a:endParaRPr>
+          </a:p>
+        </p:txBody>
+      </p:sp>
+      <p:sp>
+        <p:nvSpPr>
+          <p:cNvPr id="5" name="Text 3"/>
+          <p:cNvSpPr/>
+          <p:nvPr/>
+        </p:nvSpPr>
+        <p:spPr>
+          <a:xfrm>
+            <a:off x="956" y="-3118"/>
             <a:ext cx="2032000" cy="508000"/>
           </a:xfrm>
           <a:prstGeom prst="rect">
             <a:avLst/>
           </a:prstGeom>
-          <a:noFill/>
+          <a:solidFill>
+            <a:srgbClr val="1B4332"/>
+          </a:solidFill>
           <a:ln/>
         </p:spPr>
         <p:txBody>
@@ -6395,318 +10471,20 @@
               </a:lnSpc>
             </a:pPr>
             <a:r>
-              <a:rPr lang="en-US" sz="1200" dirty="0">
-                <a:solidFill>
-                  <a:srgbClr val="FFFFFF"/>
-                </a:solidFill>
-                <a:latin typeface="Quattrocento Sans" panose="020B0502050000020003" pitchFamily="34" charset="0"/>
-                <a:ea typeface="QuattrocentoSans" pitchFamily="34" charset="-122"/>
-                <a:cs typeface="QuattrocentoSans" pitchFamily="34" charset="-120"/>
-              </a:rPr>
-              <a:t>CONTEXTO</a:t>
+              <a:rPr lang="en-US" sz="1200" b="1" dirty="0">
+                <a:solidFill>
+                  <a:schemeClr val="bg1"/>
+                </a:solidFill>
+                <a:latin typeface="Quattrocento Sans" panose="020B0502050000020003" pitchFamily="34" charset="0"/>
+                <a:ea typeface="QuattrocentoSans" pitchFamily="34" charset="-122"/>
+                <a:cs typeface="QuattrocentoSans" pitchFamily="34" charset="-120"/>
+              </a:rPr>
+              <a:t>METODOLOGÍAS</a:t>
             </a:r>
             <a:endParaRPr lang="en-US" sz="1200" dirty="0">
-              <a:latin typeface="Quattrocento Sans" panose="020B0502050000020003" pitchFamily="34" charset="0"/>
-            </a:endParaRPr>
-          </a:p>
-        </p:txBody>
-      </p:sp>
-      <p:sp>
-        <p:nvSpPr>
-          <p:cNvPr id="5" name="Text 3"/>
-          <p:cNvSpPr/>
-          <p:nvPr/>
-        </p:nvSpPr>
-        <p:spPr>
-          <a:xfrm>
-            <a:off x="2032000" y="0"/>
-            <a:ext cx="2032000" cy="508000"/>
-          </a:xfrm>
-          <a:prstGeom prst="rect">
-            <a:avLst/>
-          </a:prstGeom>
-          <a:noFill/>
-          <a:ln/>
-        </p:spPr>
-        <p:txBody>
-          <a:bodyPr wrap="none" lIns="0" tIns="0" rIns="0" bIns="0" rtlCol="0" anchor="ctr"/>
-          <a:lstStyle/>
-          <a:p>
-            <a:pPr algn="ctr">
-              <a:lnSpc>
-                <a:spcPct val="100000"/>
-              </a:lnSpc>
-            </a:pPr>
-            <a:r>
-              <a:rPr lang="en-US" sz="1200" b="1" dirty="0">
-                <a:solidFill>
-                  <a:srgbClr val="1B4332"/>
-                </a:solidFill>
-                <a:latin typeface="Quattrocento Sans" panose="020B0502050000020003" pitchFamily="34" charset="0"/>
-                <a:ea typeface="QuattrocentoSans" pitchFamily="34" charset="-122"/>
-                <a:cs typeface="QuattrocentoSans" pitchFamily="34" charset="-120"/>
-              </a:rPr>
-              <a:t>METODOLOGÍAS</a:t>
-            </a:r>
-            <a:endParaRPr lang="en-US" sz="1200" dirty="0">
-              <a:latin typeface="Quattrocento Sans" panose="020B0502050000020003" pitchFamily="34" charset="0"/>
-            </a:endParaRPr>
-          </a:p>
-        </p:txBody>
-      </p:sp>
-      <p:sp>
-        <p:nvSpPr>
-          <p:cNvPr id="6" name="Text 4"/>
-          <p:cNvSpPr/>
-          <p:nvPr/>
-        </p:nvSpPr>
-        <p:spPr>
-          <a:xfrm>
-            <a:off x="4064000" y="0"/>
-            <a:ext cx="2032000" cy="508000"/>
-          </a:xfrm>
-          <a:prstGeom prst="rect">
-            <a:avLst/>
-          </a:prstGeom>
-          <a:noFill/>
-          <a:ln/>
-        </p:spPr>
-        <p:txBody>
-          <a:bodyPr wrap="none" lIns="0" tIns="0" rIns="0" bIns="0" rtlCol="0" anchor="ctr"/>
-          <a:lstStyle/>
-          <a:p>
-            <a:pPr algn="ctr">
-              <a:lnSpc>
-                <a:spcPct val="100000"/>
-              </a:lnSpc>
-            </a:pPr>
-            <a:r>
-              <a:rPr lang="en-US" sz="1200" dirty="0">
-                <a:solidFill>
-                  <a:srgbClr val="FFFFFF"/>
-                </a:solidFill>
-                <a:latin typeface="Quattrocento Sans" panose="020B0502050000020003" pitchFamily="34" charset="0"/>
-                <a:ea typeface="QuattrocentoSans" pitchFamily="34" charset="-122"/>
-                <a:cs typeface="QuattrocentoSans" pitchFamily="34" charset="-120"/>
-              </a:rPr>
-              <a:t>BACKEND</a:t>
-            </a:r>
-            <a:endParaRPr lang="en-US" sz="1200" dirty="0">
-              <a:latin typeface="Quattrocento Sans" panose="020B0502050000020003" pitchFamily="34" charset="0"/>
-            </a:endParaRPr>
-          </a:p>
-        </p:txBody>
-      </p:sp>
-      <p:sp>
-        <p:nvSpPr>
-          <p:cNvPr id="7" name="Text 5"/>
-          <p:cNvSpPr/>
-          <p:nvPr/>
-        </p:nvSpPr>
-        <p:spPr>
-          <a:xfrm>
-            <a:off x="6096000" y="0"/>
-            <a:ext cx="2032000" cy="508000"/>
-          </a:xfrm>
-          <a:prstGeom prst="rect">
-            <a:avLst/>
-          </a:prstGeom>
-          <a:noFill/>
-          <a:ln/>
-        </p:spPr>
-        <p:txBody>
-          <a:bodyPr wrap="none" lIns="0" tIns="0" rIns="0" bIns="0" rtlCol="0" anchor="ctr"/>
-          <a:lstStyle/>
-          <a:p>
-            <a:pPr algn="ctr">
-              <a:lnSpc>
-                <a:spcPct val="100000"/>
-              </a:lnSpc>
-            </a:pPr>
-            <a:r>
-              <a:rPr lang="en-US" sz="1200" dirty="0">
-                <a:solidFill>
-                  <a:srgbClr val="FFFFFF"/>
-                </a:solidFill>
-                <a:latin typeface="Quattrocento Sans" panose="020B0502050000020003" pitchFamily="34" charset="0"/>
-                <a:ea typeface="QuattrocentoSans" pitchFamily="34" charset="-122"/>
-                <a:cs typeface="QuattrocentoSans" pitchFamily="34" charset="-120"/>
-              </a:rPr>
-              <a:t>FRONTEND</a:t>
-            </a:r>
-            <a:endParaRPr lang="en-US" sz="1200" dirty="0">
-              <a:latin typeface="Quattrocento Sans" panose="020B0502050000020003" pitchFamily="34" charset="0"/>
-            </a:endParaRPr>
-          </a:p>
-        </p:txBody>
-      </p:sp>
-      <p:sp>
-        <p:nvSpPr>
-          <p:cNvPr id="8" name="Text 6"/>
-          <p:cNvSpPr/>
-          <p:nvPr/>
-        </p:nvSpPr>
-        <p:spPr>
-          <a:xfrm>
-            <a:off x="8128000" y="0"/>
-            <a:ext cx="2032000" cy="508000"/>
-          </a:xfrm>
-          <a:prstGeom prst="rect">
-            <a:avLst/>
-          </a:prstGeom>
-          <a:noFill/>
-          <a:ln/>
-        </p:spPr>
-        <p:txBody>
-          <a:bodyPr wrap="none" lIns="0" tIns="0" rIns="0" bIns="0" rtlCol="0" anchor="ctr"/>
-          <a:lstStyle/>
-          <a:p>
-            <a:pPr algn="ctr">
-              <a:lnSpc>
-                <a:spcPct val="100000"/>
-              </a:lnSpc>
-            </a:pPr>
-            <a:r>
-              <a:rPr lang="en-US" sz="1200" dirty="0">
-                <a:solidFill>
-                  <a:srgbClr val="FFFFFF"/>
-                </a:solidFill>
-                <a:latin typeface="Quattrocento Sans" panose="020B0502050000020003" pitchFamily="34" charset="0"/>
-                <a:ea typeface="QuattrocentoSans" pitchFamily="34" charset="-122"/>
-                <a:cs typeface="QuattrocentoSans" pitchFamily="34" charset="-120"/>
-              </a:rPr>
-              <a:t>APIs</a:t>
-            </a:r>
-            <a:endParaRPr lang="en-US" sz="1200" dirty="0">
-              <a:latin typeface="Quattrocento Sans" panose="020B0502050000020003" pitchFamily="34" charset="0"/>
-            </a:endParaRPr>
-          </a:p>
-        </p:txBody>
-      </p:sp>
-      <p:sp>
-        <p:nvSpPr>
-          <p:cNvPr id="9" name="Text 7"/>
-          <p:cNvSpPr/>
-          <p:nvPr/>
-        </p:nvSpPr>
-        <p:spPr>
-          <a:xfrm>
-            <a:off x="10160000" y="0"/>
-            <a:ext cx="2032000" cy="508000"/>
-          </a:xfrm>
-          <a:prstGeom prst="rect">
-            <a:avLst/>
-          </a:prstGeom>
-          <a:noFill/>
-          <a:ln/>
-        </p:spPr>
-        <p:txBody>
-          <a:bodyPr wrap="none" lIns="0" tIns="0" rIns="0" bIns="0" rtlCol="0" anchor="ctr"/>
-          <a:lstStyle/>
-          <a:p>
-            <a:pPr algn="ctr">
-              <a:lnSpc>
-                <a:spcPct val="100000"/>
-              </a:lnSpc>
-            </a:pPr>
-            <a:r>
-              <a:rPr lang="en-US" sz="1200" dirty="0">
-                <a:solidFill>
-                  <a:srgbClr val="FFFFFF"/>
-                </a:solidFill>
-                <a:latin typeface="Quattrocento Sans" panose="020B0502050000020003" pitchFamily="34" charset="0"/>
-                <a:ea typeface="QuattrocentoSans" pitchFamily="34" charset="-122"/>
-                <a:cs typeface="QuattrocentoSans" pitchFamily="34" charset="-120"/>
-              </a:rPr>
-              <a:t>ARQUITECTURA</a:t>
-            </a:r>
-            <a:endParaRPr lang="en-US" sz="1200" dirty="0">
-              <a:latin typeface="Quattrocento Sans" panose="020B0502050000020003" pitchFamily="34" charset="0"/>
-            </a:endParaRPr>
-          </a:p>
-        </p:txBody>
-      </p:sp>
-      <p:sp>
-        <p:nvSpPr>
-          <p:cNvPr id="10" name="Text 8"/>
-          <p:cNvSpPr/>
-          <p:nvPr/>
-        </p:nvSpPr>
-        <p:spPr>
-          <a:xfrm>
-            <a:off x="12192000" y="0"/>
-            <a:ext cx="2032000" cy="508000"/>
-          </a:xfrm>
-          <a:prstGeom prst="rect">
-            <a:avLst/>
-          </a:prstGeom>
-          <a:noFill/>
-          <a:ln/>
-        </p:spPr>
-        <p:txBody>
-          <a:bodyPr wrap="none" lIns="0" tIns="0" rIns="0" bIns="0" rtlCol="0" anchor="ctr"/>
-          <a:lstStyle/>
-          <a:p>
-            <a:pPr algn="ctr">
-              <a:lnSpc>
-                <a:spcPct val="100000"/>
-              </a:lnSpc>
-            </a:pPr>
-            <a:r>
-              <a:rPr lang="en-US" sz="1200" dirty="0">
-                <a:solidFill>
-                  <a:srgbClr val="FFFFFF"/>
-                </a:solidFill>
-                <a:latin typeface="Quattrocento Sans" panose="020B0502050000020003" pitchFamily="34" charset="0"/>
-                <a:ea typeface="QuattrocentoSans" pitchFamily="34" charset="-122"/>
-                <a:cs typeface="QuattrocentoSans" pitchFamily="34" charset="-120"/>
-              </a:rPr>
-              <a:t>DEVOPS</a:t>
-            </a:r>
-            <a:endParaRPr lang="en-US" sz="1200" dirty="0">
-              <a:latin typeface="Quattrocento Sans" panose="020B0502050000020003" pitchFamily="34" charset="0"/>
-            </a:endParaRPr>
-          </a:p>
-        </p:txBody>
-      </p:sp>
-      <p:sp>
-        <p:nvSpPr>
-          <p:cNvPr id="11" name="Text 9"/>
-          <p:cNvSpPr/>
-          <p:nvPr/>
-        </p:nvSpPr>
-        <p:spPr>
-          <a:xfrm>
-            <a:off x="14224000" y="0"/>
-            <a:ext cx="2032000" cy="508000"/>
-          </a:xfrm>
-          <a:prstGeom prst="rect">
-            <a:avLst/>
-          </a:prstGeom>
-          <a:noFill/>
-          <a:ln/>
-        </p:spPr>
-        <p:txBody>
-          <a:bodyPr wrap="none" lIns="0" tIns="0" rIns="0" bIns="0" rtlCol="0" anchor="ctr"/>
-          <a:lstStyle/>
-          <a:p>
-            <a:pPr algn="ctr">
-              <a:lnSpc>
-                <a:spcPct val="100000"/>
-              </a:lnSpc>
-            </a:pPr>
-            <a:r>
-              <a:rPr lang="en-US" sz="1200" dirty="0">
-                <a:solidFill>
-                  <a:srgbClr val="FFFFFF"/>
-                </a:solidFill>
-                <a:latin typeface="Quattrocento Sans" panose="020B0502050000020003" pitchFamily="34" charset="0"/>
-                <a:ea typeface="QuattrocentoSans" pitchFamily="34" charset="-122"/>
-                <a:cs typeface="QuattrocentoSans" pitchFamily="34" charset="-120"/>
-              </a:rPr>
-              <a:t>VIABILIDAD</a:t>
-            </a:r>
-            <a:endParaRPr lang="en-US" sz="1200" dirty="0">
+              <a:solidFill>
+                <a:schemeClr val="bg1"/>
+              </a:solidFill>
               <a:latin typeface="Quattrocento Sans" panose="020B0502050000020003" pitchFamily="34" charset="0"/>
             </a:endParaRPr>
           </a:p>
@@ -7132,7 +10910,7 @@
               <a:buChar char="•"/>
             </a:pPr>
             <a:r>
-              <a:rPr lang="en-US" sz="1500" b="1" dirty="0" err="1">
+              <a:rPr lang="en-US" sz="1500" b="1" dirty="0">
                 <a:solidFill>
                   <a:srgbClr val="212529"/>
                 </a:solidFill>
@@ -7143,6 +10921,17 @@
               <a:t>Done</a:t>
             </a:r>
             <a:r>
+              <a:rPr lang="en-US" sz="1500" dirty="0">
+                <a:solidFill>
+                  <a:srgbClr val="212529"/>
+                </a:solidFill>
+                <a:latin typeface="Quattrocento Sans" panose="020B0502050000020003" pitchFamily="34" charset="0"/>
+                <a:ea typeface="QuattrocentoSans" pitchFamily="34" charset="-122"/>
+                <a:cs typeface="QuattrocentoSans" pitchFamily="34" charset="-120"/>
+              </a:rPr>
+              <a:t>: </a:t>
+            </a:r>
+            <a:r>
               <a:rPr lang="en-US" sz="1500" dirty="0" err="1">
                 <a:solidFill>
                   <a:srgbClr val="212529"/>
@@ -7151,7 +10940,7 @@
                 <a:ea typeface="QuattrocentoSans" pitchFamily="34" charset="-122"/>
                 <a:cs typeface="QuattrocentoSans" pitchFamily="34" charset="-120"/>
               </a:rPr>
-              <a:t>:Finalizado</a:t>
+              <a:t>Finalizado</a:t>
             </a:r>
             <a:endParaRPr lang="en-US" sz="1800" dirty="0">
               <a:latin typeface="Quattrocento Sans" panose="020B0502050000020003" pitchFamily="34" charset="0"/>
@@ -8502,6 +12291,53 @@
           </a:p>
         </p:txBody>
       </p:sp>
+      <p:pic>
+        <p:nvPicPr>
+          <p:cNvPr id="2050" name="Picture 2" descr="Metodología - Iconos gratis de negocios y finanzas">
+            <a:extLst>
+              <a:ext uri="{FF2B5EF4-FFF2-40B4-BE49-F238E27FC236}">
+                <a16:creationId xmlns:a16="http://schemas.microsoft.com/office/drawing/2014/main" id="{ABA753C5-4F07-6FC1-71A9-6B24339921B6}"/>
+              </a:ext>
+            </a:extLst>
+          </p:cNvPr>
+          <p:cNvPicPr>
+            <a:picLocks noChangeAspect="1" noChangeArrowheads="1"/>
+          </p:cNvPicPr>
+          <p:nvPr/>
+        </p:nvPicPr>
+        <p:blipFill>
+          <a:blip r:embed="rId3">
+            <a:extLst>
+              <a:ext uri="{28A0092B-C50C-407E-A947-70E740481C1C}">
+                <a14:useLocalDpi xmlns:a14="http://schemas.microsoft.com/office/drawing/2010/main" val="0"/>
+              </a:ext>
+            </a:extLst>
+          </a:blip>
+          <a:srcRect/>
+          <a:stretch>
+            <a:fillRect/>
+          </a:stretch>
+        </p:blipFill>
+        <p:spPr bwMode="auto">
+          <a:xfrm>
+            <a:off x="203200" y="685800"/>
+            <a:ext cx="457200" cy="457200"/>
+          </a:xfrm>
+          <a:prstGeom prst="rect">
+            <a:avLst/>
+          </a:prstGeom>
+          <a:noFill/>
+          <a:extLst>
+            <a:ext uri="{909E8E84-426E-40DD-AFC4-6F175D3DCCD1}">
+              <a14:hiddenFill xmlns:a14="http://schemas.microsoft.com/office/drawing/2010/main">
+                <a:solidFill>
+                  <a:srgbClr val="FFFFFF"/>
+                </a:solidFill>
+              </a14:hiddenFill>
+            </a:ext>
+          </a:extLst>
+        </p:spPr>
+      </p:pic>
     </p:spTree>
   </p:cSld>
   <p:clrMapOvr>
@@ -8540,410 +12376,6 @@
       </p:grpSpPr>
       <p:sp>
         <p:nvSpPr>
-          <p:cNvPr id="2" name="Shape 0"/>
-          <p:cNvSpPr/>
-          <p:nvPr/>
-        </p:nvSpPr>
-        <p:spPr>
-          <a:xfrm>
-            <a:off x="0" y="0"/>
-            <a:ext cx="16256000" cy="508000"/>
-          </a:xfrm>
-          <a:prstGeom prst="rect">
-            <a:avLst/>
-          </a:prstGeom>
-          <a:solidFill>
-            <a:srgbClr val="1B4332"/>
-          </a:solidFill>
-          <a:ln/>
-        </p:spPr>
-        <p:txBody>
-          <a:bodyPr/>
-          <a:lstStyle/>
-          <a:p>
-            <a:endParaRPr lang="es-ES">
-              <a:latin typeface="Quattrocento Sans" panose="020B0502050000020003" pitchFamily="34" charset="0"/>
-            </a:endParaRPr>
-          </a:p>
-        </p:txBody>
-      </p:sp>
-      <p:sp>
-        <p:nvSpPr>
-          <p:cNvPr id="3" name="Shape 1"/>
-          <p:cNvSpPr/>
-          <p:nvPr/>
-        </p:nvSpPr>
-        <p:spPr>
-          <a:xfrm>
-            <a:off x="4140200" y="76200"/>
-            <a:ext cx="1879600" cy="355600"/>
-          </a:xfrm>
-          <a:prstGeom prst="roundRect">
-            <a:avLst>
-              <a:gd name="adj" fmla="val 8000"/>
-            </a:avLst>
-          </a:prstGeom>
-          <a:solidFill>
-            <a:srgbClr val="FFFFFF"/>
-          </a:solidFill>
-          <a:ln/>
-        </p:spPr>
-        <p:txBody>
-          <a:bodyPr/>
-          <a:lstStyle/>
-          <a:p>
-            <a:endParaRPr lang="es-ES">
-              <a:latin typeface="Quattrocento Sans" panose="020B0502050000020003" pitchFamily="34" charset="0"/>
-            </a:endParaRPr>
-          </a:p>
-        </p:txBody>
-      </p:sp>
-      <p:sp>
-        <p:nvSpPr>
-          <p:cNvPr id="4" name="Text 2"/>
-          <p:cNvSpPr/>
-          <p:nvPr/>
-        </p:nvSpPr>
-        <p:spPr>
-          <a:xfrm>
-            <a:off x="0" y="0"/>
-            <a:ext cx="2032000" cy="508000"/>
-          </a:xfrm>
-          <a:prstGeom prst="rect">
-            <a:avLst/>
-          </a:prstGeom>
-          <a:noFill/>
-          <a:ln/>
-        </p:spPr>
-        <p:txBody>
-          <a:bodyPr wrap="none" lIns="0" tIns="0" rIns="0" bIns="0" rtlCol="0" anchor="ctr"/>
-          <a:lstStyle/>
-          <a:p>
-            <a:pPr algn="ctr">
-              <a:lnSpc>
-                <a:spcPct val="100000"/>
-              </a:lnSpc>
-            </a:pPr>
-            <a:r>
-              <a:rPr lang="en-US" sz="1200" dirty="0">
-                <a:solidFill>
-                  <a:srgbClr val="FFFFFF"/>
-                </a:solidFill>
-                <a:latin typeface="Quattrocento Sans" panose="020B0502050000020003" pitchFamily="34" charset="0"/>
-                <a:ea typeface="QuattrocentoSans" pitchFamily="34" charset="-122"/>
-                <a:cs typeface="QuattrocentoSans" pitchFamily="34" charset="-120"/>
-              </a:rPr>
-              <a:t>CONTEXTO</a:t>
-            </a:r>
-            <a:endParaRPr lang="en-US" sz="1200" dirty="0">
-              <a:latin typeface="Quattrocento Sans" panose="020B0502050000020003" pitchFamily="34" charset="0"/>
-            </a:endParaRPr>
-          </a:p>
-        </p:txBody>
-      </p:sp>
-      <p:sp>
-        <p:nvSpPr>
-          <p:cNvPr id="5" name="Text 3"/>
-          <p:cNvSpPr/>
-          <p:nvPr/>
-        </p:nvSpPr>
-        <p:spPr>
-          <a:xfrm>
-            <a:off x="2032000" y="0"/>
-            <a:ext cx="2032000" cy="508000"/>
-          </a:xfrm>
-          <a:prstGeom prst="rect">
-            <a:avLst/>
-          </a:prstGeom>
-          <a:noFill/>
-          <a:ln/>
-        </p:spPr>
-        <p:txBody>
-          <a:bodyPr wrap="none" lIns="0" tIns="0" rIns="0" bIns="0" rtlCol="0" anchor="ctr"/>
-          <a:lstStyle/>
-          <a:p>
-            <a:pPr algn="ctr">
-              <a:lnSpc>
-                <a:spcPct val="100000"/>
-              </a:lnSpc>
-            </a:pPr>
-            <a:r>
-              <a:rPr lang="en-US" sz="1200" dirty="0">
-                <a:solidFill>
-                  <a:srgbClr val="FFFFFF"/>
-                </a:solidFill>
-                <a:latin typeface="Quattrocento Sans" panose="020B0502050000020003" pitchFamily="34" charset="0"/>
-                <a:ea typeface="QuattrocentoSans" pitchFamily="34" charset="-122"/>
-                <a:cs typeface="QuattrocentoSans" pitchFamily="34" charset="-120"/>
-              </a:rPr>
-              <a:t>METODOLOGÍAS</a:t>
-            </a:r>
-            <a:endParaRPr lang="en-US" sz="1200" dirty="0">
-              <a:latin typeface="Quattrocento Sans" panose="020B0502050000020003" pitchFamily="34" charset="0"/>
-            </a:endParaRPr>
-          </a:p>
-        </p:txBody>
-      </p:sp>
-      <p:sp>
-        <p:nvSpPr>
-          <p:cNvPr id="6" name="Text 4"/>
-          <p:cNvSpPr/>
-          <p:nvPr/>
-        </p:nvSpPr>
-        <p:spPr>
-          <a:xfrm>
-            <a:off x="4064000" y="0"/>
-            <a:ext cx="2032000" cy="508000"/>
-          </a:xfrm>
-          <a:prstGeom prst="rect">
-            <a:avLst/>
-          </a:prstGeom>
-          <a:noFill/>
-          <a:ln/>
-        </p:spPr>
-        <p:txBody>
-          <a:bodyPr wrap="none" lIns="0" tIns="0" rIns="0" bIns="0" rtlCol="0" anchor="ctr"/>
-          <a:lstStyle/>
-          <a:p>
-            <a:pPr algn="ctr">
-              <a:lnSpc>
-                <a:spcPct val="100000"/>
-              </a:lnSpc>
-            </a:pPr>
-            <a:r>
-              <a:rPr lang="en-US" sz="1200" b="1" dirty="0">
-                <a:solidFill>
-                  <a:srgbClr val="1B4332"/>
-                </a:solidFill>
-                <a:latin typeface="Quattrocento Sans" panose="020B0502050000020003" pitchFamily="34" charset="0"/>
-                <a:ea typeface="QuattrocentoSans" pitchFamily="34" charset="-122"/>
-                <a:cs typeface="QuattrocentoSans" pitchFamily="34" charset="-120"/>
-              </a:rPr>
-              <a:t>BACKEND</a:t>
-            </a:r>
-            <a:endParaRPr lang="en-US" sz="1200" dirty="0">
-              <a:latin typeface="Quattrocento Sans" panose="020B0502050000020003" pitchFamily="34" charset="0"/>
-            </a:endParaRPr>
-          </a:p>
-        </p:txBody>
-      </p:sp>
-      <p:sp>
-        <p:nvSpPr>
-          <p:cNvPr id="7" name="Text 5"/>
-          <p:cNvSpPr/>
-          <p:nvPr/>
-        </p:nvSpPr>
-        <p:spPr>
-          <a:xfrm>
-            <a:off x="6096000" y="0"/>
-            <a:ext cx="2032000" cy="508000"/>
-          </a:xfrm>
-          <a:prstGeom prst="rect">
-            <a:avLst/>
-          </a:prstGeom>
-          <a:noFill/>
-          <a:ln/>
-        </p:spPr>
-        <p:txBody>
-          <a:bodyPr wrap="none" lIns="0" tIns="0" rIns="0" bIns="0" rtlCol="0" anchor="ctr"/>
-          <a:lstStyle/>
-          <a:p>
-            <a:pPr algn="ctr">
-              <a:lnSpc>
-                <a:spcPct val="100000"/>
-              </a:lnSpc>
-            </a:pPr>
-            <a:r>
-              <a:rPr lang="en-US" sz="1200" dirty="0">
-                <a:solidFill>
-                  <a:srgbClr val="FFFFFF"/>
-                </a:solidFill>
-                <a:latin typeface="Quattrocento Sans" panose="020B0502050000020003" pitchFamily="34" charset="0"/>
-                <a:ea typeface="QuattrocentoSans" pitchFamily="34" charset="-122"/>
-                <a:cs typeface="QuattrocentoSans" pitchFamily="34" charset="-120"/>
-              </a:rPr>
-              <a:t>FRONTEND</a:t>
-            </a:r>
-            <a:endParaRPr lang="en-US" sz="1200" dirty="0">
-              <a:latin typeface="Quattrocento Sans" panose="020B0502050000020003" pitchFamily="34" charset="0"/>
-            </a:endParaRPr>
-          </a:p>
-        </p:txBody>
-      </p:sp>
-      <p:sp>
-        <p:nvSpPr>
-          <p:cNvPr id="8" name="Text 6"/>
-          <p:cNvSpPr/>
-          <p:nvPr/>
-        </p:nvSpPr>
-        <p:spPr>
-          <a:xfrm>
-            <a:off x="8128000" y="0"/>
-            <a:ext cx="2032000" cy="508000"/>
-          </a:xfrm>
-          <a:prstGeom prst="rect">
-            <a:avLst/>
-          </a:prstGeom>
-          <a:noFill/>
-          <a:ln/>
-        </p:spPr>
-        <p:txBody>
-          <a:bodyPr wrap="none" lIns="0" tIns="0" rIns="0" bIns="0" rtlCol="0" anchor="ctr"/>
-          <a:lstStyle/>
-          <a:p>
-            <a:pPr algn="ctr">
-              <a:lnSpc>
-                <a:spcPct val="100000"/>
-              </a:lnSpc>
-            </a:pPr>
-            <a:r>
-              <a:rPr lang="en-US" sz="1200" dirty="0">
-                <a:solidFill>
-                  <a:srgbClr val="FFFFFF"/>
-                </a:solidFill>
-                <a:latin typeface="Quattrocento Sans" panose="020B0502050000020003" pitchFamily="34" charset="0"/>
-                <a:ea typeface="QuattrocentoSans" pitchFamily="34" charset="-122"/>
-                <a:cs typeface="QuattrocentoSans" pitchFamily="34" charset="-120"/>
-              </a:rPr>
-              <a:t>APIs</a:t>
-            </a:r>
-            <a:endParaRPr lang="en-US" sz="1200" dirty="0">
-              <a:latin typeface="Quattrocento Sans" panose="020B0502050000020003" pitchFamily="34" charset="0"/>
-            </a:endParaRPr>
-          </a:p>
-        </p:txBody>
-      </p:sp>
-      <p:sp>
-        <p:nvSpPr>
-          <p:cNvPr id="9" name="Text 7"/>
-          <p:cNvSpPr/>
-          <p:nvPr/>
-        </p:nvSpPr>
-        <p:spPr>
-          <a:xfrm>
-            <a:off x="10160000" y="0"/>
-            <a:ext cx="2032000" cy="508000"/>
-          </a:xfrm>
-          <a:prstGeom prst="rect">
-            <a:avLst/>
-          </a:prstGeom>
-          <a:noFill/>
-          <a:ln/>
-        </p:spPr>
-        <p:txBody>
-          <a:bodyPr wrap="none" lIns="0" tIns="0" rIns="0" bIns="0" rtlCol="0" anchor="ctr"/>
-          <a:lstStyle/>
-          <a:p>
-            <a:pPr algn="ctr">
-              <a:lnSpc>
-                <a:spcPct val="100000"/>
-              </a:lnSpc>
-            </a:pPr>
-            <a:r>
-              <a:rPr lang="en-US" sz="1200" dirty="0">
-                <a:solidFill>
-                  <a:srgbClr val="FFFFFF"/>
-                </a:solidFill>
-                <a:latin typeface="Quattrocento Sans" panose="020B0502050000020003" pitchFamily="34" charset="0"/>
-                <a:ea typeface="QuattrocentoSans" pitchFamily="34" charset="-122"/>
-                <a:cs typeface="QuattrocentoSans" pitchFamily="34" charset="-120"/>
-              </a:rPr>
-              <a:t>ARQUITECTURA</a:t>
-            </a:r>
-            <a:endParaRPr lang="en-US" sz="1200" dirty="0">
-              <a:latin typeface="Quattrocento Sans" panose="020B0502050000020003" pitchFamily="34" charset="0"/>
-            </a:endParaRPr>
-          </a:p>
-        </p:txBody>
-      </p:sp>
-      <p:sp>
-        <p:nvSpPr>
-          <p:cNvPr id="10" name="Text 8"/>
-          <p:cNvSpPr/>
-          <p:nvPr/>
-        </p:nvSpPr>
-        <p:spPr>
-          <a:xfrm>
-            <a:off x="12192000" y="0"/>
-            <a:ext cx="2032000" cy="508000"/>
-          </a:xfrm>
-          <a:prstGeom prst="rect">
-            <a:avLst/>
-          </a:prstGeom>
-          <a:noFill/>
-          <a:ln/>
-        </p:spPr>
-        <p:txBody>
-          <a:bodyPr wrap="none" lIns="0" tIns="0" rIns="0" bIns="0" rtlCol="0" anchor="ctr"/>
-          <a:lstStyle/>
-          <a:p>
-            <a:pPr algn="ctr">
-              <a:lnSpc>
-                <a:spcPct val="100000"/>
-              </a:lnSpc>
-            </a:pPr>
-            <a:r>
-              <a:rPr lang="en-US" sz="1200" dirty="0">
-                <a:solidFill>
-                  <a:srgbClr val="FFFFFF"/>
-                </a:solidFill>
-                <a:latin typeface="Quattrocento Sans" panose="020B0502050000020003" pitchFamily="34" charset="0"/>
-                <a:ea typeface="QuattrocentoSans" pitchFamily="34" charset="-122"/>
-                <a:cs typeface="QuattrocentoSans" pitchFamily="34" charset="-120"/>
-              </a:rPr>
-              <a:t>DEVOPS</a:t>
-            </a:r>
-            <a:endParaRPr lang="en-US" sz="1200" dirty="0">
-              <a:latin typeface="Quattrocento Sans" panose="020B0502050000020003" pitchFamily="34" charset="0"/>
-            </a:endParaRPr>
-          </a:p>
-        </p:txBody>
-      </p:sp>
-      <p:sp>
-        <p:nvSpPr>
-          <p:cNvPr id="11" name="Text 9"/>
-          <p:cNvSpPr/>
-          <p:nvPr/>
-        </p:nvSpPr>
-        <p:spPr>
-          <a:xfrm>
-            <a:off x="14224000" y="0"/>
-            <a:ext cx="2032000" cy="508000"/>
-          </a:xfrm>
-          <a:prstGeom prst="rect">
-            <a:avLst/>
-          </a:prstGeom>
-          <a:noFill/>
-          <a:ln/>
-        </p:spPr>
-        <p:txBody>
-          <a:bodyPr wrap="none" lIns="0" tIns="0" rIns="0" bIns="0" rtlCol="0" anchor="ctr"/>
-          <a:lstStyle/>
-          <a:p>
-            <a:pPr algn="ctr">
-              <a:lnSpc>
-                <a:spcPct val="100000"/>
-              </a:lnSpc>
-            </a:pPr>
-            <a:r>
-              <a:rPr lang="en-US" sz="1200" dirty="0">
-                <a:solidFill>
-                  <a:srgbClr val="FFFFFF"/>
-                </a:solidFill>
-                <a:latin typeface="Quattrocento Sans" panose="020B0502050000020003" pitchFamily="34" charset="0"/>
-                <a:ea typeface="QuattrocentoSans" pitchFamily="34" charset="-122"/>
-                <a:cs typeface="QuattrocentoSans" pitchFamily="34" charset="-120"/>
-              </a:rPr>
-              <a:t>VIABILIDAD</a:t>
-            </a:r>
-            <a:endParaRPr lang="en-US" sz="1200" dirty="0">
-              <a:latin typeface="Quattrocento Sans" panose="020B0502050000020003" pitchFamily="34" charset="0"/>
-            </a:endParaRPr>
-          </a:p>
-        </p:txBody>
-      </p:sp>
-      <p:sp>
-        <p:nvSpPr>
           <p:cNvPr id="12" name="Shape 10"/>
           <p:cNvSpPr/>
           <p:nvPr/>
@@ -9948,6 +13380,147 @@
               <a:t>4 / 10</a:t>
             </a:r>
             <a:endParaRPr lang="en-US" sz="1400" dirty="0">
+              <a:latin typeface="Quattrocento Sans" panose="020B0502050000020003" pitchFamily="34" charset="0"/>
+            </a:endParaRPr>
+          </a:p>
+        </p:txBody>
+      </p:sp>
+      <p:pic>
+        <p:nvPicPr>
+          <p:cNvPr id="3074" name="Picture 2">
+            <a:extLst>
+              <a:ext uri="{FF2B5EF4-FFF2-40B4-BE49-F238E27FC236}">
+                <a16:creationId xmlns:a16="http://schemas.microsoft.com/office/drawing/2014/main" id="{EA3A637F-8CD1-CACB-5B99-F449B114E7F9}"/>
+              </a:ext>
+            </a:extLst>
+          </p:cNvPr>
+          <p:cNvPicPr>
+            <a:picLocks noChangeAspect="1" noChangeArrowheads="1"/>
+          </p:cNvPicPr>
+          <p:nvPr/>
+        </p:nvPicPr>
+        <p:blipFill>
+          <a:blip r:embed="rId3">
+            <a:extLst>
+              <a:ext uri="{28A0092B-C50C-407E-A947-70E740481C1C}">
+                <a14:useLocalDpi xmlns:a14="http://schemas.microsoft.com/office/drawing/2010/main" val="0"/>
+              </a:ext>
+            </a:extLst>
+          </a:blip>
+          <a:srcRect/>
+          <a:stretch>
+            <a:fillRect/>
+          </a:stretch>
+        </p:blipFill>
+        <p:spPr bwMode="auto">
+          <a:xfrm>
+            <a:off x="222250" y="647700"/>
+            <a:ext cx="444500" cy="444500"/>
+          </a:xfrm>
+          <a:prstGeom prst="rect">
+            <a:avLst/>
+          </a:prstGeom>
+          <a:noFill/>
+          <a:extLst>
+            <a:ext uri="{909E8E84-426E-40DD-AFC4-6F175D3DCCD1}">
+              <a14:hiddenFill xmlns:a14="http://schemas.microsoft.com/office/drawing/2010/main">
+                <a:solidFill>
+                  <a:srgbClr val="FFFFFF"/>
+                </a:solidFill>
+              </a14:hiddenFill>
+            </a:ext>
+          </a:extLst>
+        </p:spPr>
+      </p:pic>
+      <p:sp>
+        <p:nvSpPr>
+          <p:cNvPr id="5" name="Shape 1">
+            <a:extLst>
+              <a:ext uri="{FF2B5EF4-FFF2-40B4-BE49-F238E27FC236}">
+                <a16:creationId xmlns:a16="http://schemas.microsoft.com/office/drawing/2014/main" id="{F3D46686-65B7-B057-08B4-FC44506CD5D0}"/>
+              </a:ext>
+            </a:extLst>
+          </p:cNvPr>
+          <p:cNvSpPr/>
+          <p:nvPr/>
+        </p:nvSpPr>
+        <p:spPr>
+          <a:xfrm>
+            <a:off x="76200" y="76200"/>
+            <a:ext cx="1879600" cy="355600"/>
+          </a:xfrm>
+          <a:prstGeom prst="roundRect">
+            <a:avLst>
+              <a:gd name="adj" fmla="val 8000"/>
+            </a:avLst>
+          </a:prstGeom>
+          <a:solidFill>
+            <a:srgbClr val="1B4332"/>
+          </a:solidFill>
+          <a:ln/>
+        </p:spPr>
+        <p:txBody>
+          <a:bodyPr/>
+          <a:lstStyle/>
+          <a:p>
+            <a:endParaRPr lang="es-ES">
+              <a:solidFill>
+                <a:schemeClr val="bg1"/>
+              </a:solidFill>
+              <a:latin typeface="Quattrocento Sans" panose="020B0502050000020003" pitchFamily="34" charset="0"/>
+            </a:endParaRPr>
+          </a:p>
+        </p:txBody>
+      </p:sp>
+      <p:sp>
+        <p:nvSpPr>
+          <p:cNvPr id="7" name="Text 6">
+            <a:extLst>
+              <a:ext uri="{FF2B5EF4-FFF2-40B4-BE49-F238E27FC236}">
+                <a16:creationId xmlns:a16="http://schemas.microsoft.com/office/drawing/2014/main" id="{CC7ABED1-C88B-0964-0B5D-B06E19AE587D}"/>
+              </a:ext>
+            </a:extLst>
+          </p:cNvPr>
+          <p:cNvSpPr/>
+          <p:nvPr/>
+        </p:nvSpPr>
+        <p:spPr>
+          <a:xfrm>
+            <a:off x="0" y="0"/>
+            <a:ext cx="2032000" cy="508000"/>
+          </a:xfrm>
+          <a:prstGeom prst="rect">
+            <a:avLst/>
+          </a:prstGeom>
+          <a:solidFill>
+            <a:srgbClr val="1B4332"/>
+          </a:solidFill>
+          <a:ln/>
+        </p:spPr>
+        <p:txBody>
+          <a:bodyPr wrap="none" lIns="0" tIns="0" rIns="0" bIns="0" rtlCol="0" anchor="ctr"/>
+          <a:lstStyle/>
+          <a:p>
+            <a:pPr algn="ctr">
+              <a:lnSpc>
+                <a:spcPct val="100000"/>
+              </a:lnSpc>
+            </a:pPr>
+            <a:r>
+              <a:rPr lang="en-US" sz="1200" b="1" dirty="0">
+                <a:solidFill>
+                  <a:schemeClr val="bg1"/>
+                </a:solidFill>
+                <a:latin typeface="Quattrocento Sans" panose="020B0502050000020003" pitchFamily="34" charset="0"/>
+                <a:ea typeface="QuattrocentoSans" pitchFamily="34" charset="-122"/>
+                <a:cs typeface="QuattrocentoSans" pitchFamily="34" charset="-120"/>
+              </a:rPr>
+              <a:t>BACKEND</a:t>
+            </a:r>
+            <a:endParaRPr lang="en-US" sz="1200" dirty="0">
+              <a:solidFill>
+                <a:schemeClr val="bg1"/>
+              </a:solidFill>
               <a:latin typeface="Quattrocento Sans" panose="020B0502050000020003" pitchFamily="34" charset="0"/>
             </a:endParaRPr>
           </a:p>
@@ -9991,14 +13564,14 @@
       </p:grpSpPr>
       <p:sp>
         <p:nvSpPr>
-          <p:cNvPr id="2" name="Shape 0"/>
-          <p:cNvSpPr/>
-          <p:nvPr/>
-        </p:nvSpPr>
-        <p:spPr>
-          <a:xfrm>
-            <a:off x="0" y="0"/>
-            <a:ext cx="16256000" cy="508000"/>
+          <p:cNvPr id="3" name="Shape 1"/>
+          <p:cNvSpPr/>
+          <p:nvPr/>
+        </p:nvSpPr>
+        <p:spPr>
+          <a:xfrm>
+            <a:off x="76200" y="76200"/>
+            <a:ext cx="1879600" cy="355600"/>
           </a:xfrm>
           <a:prstGeom prst="rect">
             <a:avLst/>
@@ -10013,45 +13586,17 @@
           <a:lstStyle/>
           <a:p>
             <a:endParaRPr lang="es-ES">
-              <a:latin typeface="Quattrocento Sans" panose="020B0502050000020003" pitchFamily="34" charset="0"/>
-            </a:endParaRPr>
-          </a:p>
-        </p:txBody>
-      </p:sp>
-      <p:sp>
-        <p:nvSpPr>
-          <p:cNvPr id="3" name="Shape 1"/>
-          <p:cNvSpPr/>
-          <p:nvPr/>
-        </p:nvSpPr>
-        <p:spPr>
-          <a:xfrm>
-            <a:off x="6172200" y="76200"/>
-            <a:ext cx="1879600" cy="355600"/>
-          </a:xfrm>
-          <a:prstGeom prst="roundRect">
-            <a:avLst>
-              <a:gd name="adj" fmla="val 8000"/>
-            </a:avLst>
-          </a:prstGeom>
-          <a:solidFill>
-            <a:srgbClr val="FFFFFF"/>
-          </a:solidFill>
-          <a:ln/>
-        </p:spPr>
-        <p:txBody>
-          <a:bodyPr/>
-          <a:lstStyle/>
-          <a:p>
-            <a:endParaRPr lang="es-ES">
-              <a:latin typeface="Quattrocento Sans" panose="020B0502050000020003" pitchFamily="34" charset="0"/>
-            </a:endParaRPr>
-          </a:p>
-        </p:txBody>
-      </p:sp>
-      <p:sp>
-        <p:nvSpPr>
-          <p:cNvPr id="4" name="Text 2"/>
+              <a:solidFill>
+                <a:schemeClr val="bg1"/>
+              </a:solidFill>
+              <a:latin typeface="Quattrocento Sans" panose="020B0502050000020003" pitchFamily="34" charset="0"/>
+            </a:endParaRPr>
+          </a:p>
+        </p:txBody>
+      </p:sp>
+      <p:sp>
+        <p:nvSpPr>
+          <p:cNvPr id="7" name="Text 5"/>
           <p:cNvSpPr/>
           <p:nvPr/>
         </p:nvSpPr>
@@ -10063,7 +13608,9 @@
           <a:prstGeom prst="rect">
             <a:avLst/>
           </a:prstGeom>
-          <a:noFill/>
+          <a:solidFill>
+            <a:srgbClr val="1B4332"/>
+          </a:solidFill>
           <a:ln/>
         </p:spPr>
         <p:txBody>
@@ -10076,318 +13623,20 @@
               </a:lnSpc>
             </a:pPr>
             <a:r>
-              <a:rPr lang="en-US" sz="1200" dirty="0">
-                <a:solidFill>
-                  <a:srgbClr val="FFFFFF"/>
-                </a:solidFill>
-                <a:latin typeface="Quattrocento Sans" panose="020B0502050000020003" pitchFamily="34" charset="0"/>
-                <a:ea typeface="QuattrocentoSans" pitchFamily="34" charset="-122"/>
-                <a:cs typeface="QuattrocentoSans" pitchFamily="34" charset="-120"/>
-              </a:rPr>
-              <a:t>CONTEXTO</a:t>
+              <a:rPr lang="en-US" sz="1200" b="1" dirty="0">
+                <a:solidFill>
+                  <a:schemeClr val="bg1"/>
+                </a:solidFill>
+                <a:latin typeface="Quattrocento Sans" panose="020B0502050000020003" pitchFamily="34" charset="0"/>
+                <a:ea typeface="QuattrocentoSans" pitchFamily="34" charset="-122"/>
+                <a:cs typeface="QuattrocentoSans" pitchFamily="34" charset="-120"/>
+              </a:rPr>
+              <a:t>FRONTEND</a:t>
             </a:r>
             <a:endParaRPr lang="en-US" sz="1200" dirty="0">
-              <a:latin typeface="Quattrocento Sans" panose="020B0502050000020003" pitchFamily="34" charset="0"/>
-            </a:endParaRPr>
-          </a:p>
-        </p:txBody>
-      </p:sp>
-      <p:sp>
-        <p:nvSpPr>
-          <p:cNvPr id="5" name="Text 3"/>
-          <p:cNvSpPr/>
-          <p:nvPr/>
-        </p:nvSpPr>
-        <p:spPr>
-          <a:xfrm>
-            <a:off x="2032000" y="0"/>
-            <a:ext cx="2032000" cy="508000"/>
-          </a:xfrm>
-          <a:prstGeom prst="rect">
-            <a:avLst/>
-          </a:prstGeom>
-          <a:noFill/>
-          <a:ln/>
-        </p:spPr>
-        <p:txBody>
-          <a:bodyPr wrap="none" lIns="0" tIns="0" rIns="0" bIns="0" rtlCol="0" anchor="ctr"/>
-          <a:lstStyle/>
-          <a:p>
-            <a:pPr algn="ctr">
-              <a:lnSpc>
-                <a:spcPct val="100000"/>
-              </a:lnSpc>
-            </a:pPr>
-            <a:r>
-              <a:rPr lang="en-US" sz="1200" dirty="0">
-                <a:solidFill>
-                  <a:srgbClr val="FFFFFF"/>
-                </a:solidFill>
-                <a:latin typeface="Quattrocento Sans" panose="020B0502050000020003" pitchFamily="34" charset="0"/>
-                <a:ea typeface="QuattrocentoSans" pitchFamily="34" charset="-122"/>
-                <a:cs typeface="QuattrocentoSans" pitchFamily="34" charset="-120"/>
-              </a:rPr>
-              <a:t>METODOLOGÍAS</a:t>
-            </a:r>
-            <a:endParaRPr lang="en-US" sz="1200" dirty="0">
-              <a:latin typeface="Quattrocento Sans" panose="020B0502050000020003" pitchFamily="34" charset="0"/>
-            </a:endParaRPr>
-          </a:p>
-        </p:txBody>
-      </p:sp>
-      <p:sp>
-        <p:nvSpPr>
-          <p:cNvPr id="6" name="Text 4"/>
-          <p:cNvSpPr/>
-          <p:nvPr/>
-        </p:nvSpPr>
-        <p:spPr>
-          <a:xfrm>
-            <a:off x="4064000" y="0"/>
-            <a:ext cx="2032000" cy="508000"/>
-          </a:xfrm>
-          <a:prstGeom prst="rect">
-            <a:avLst/>
-          </a:prstGeom>
-          <a:noFill/>
-          <a:ln/>
-        </p:spPr>
-        <p:txBody>
-          <a:bodyPr wrap="none" lIns="0" tIns="0" rIns="0" bIns="0" rtlCol="0" anchor="ctr"/>
-          <a:lstStyle/>
-          <a:p>
-            <a:pPr algn="ctr">
-              <a:lnSpc>
-                <a:spcPct val="100000"/>
-              </a:lnSpc>
-            </a:pPr>
-            <a:r>
-              <a:rPr lang="en-US" sz="1200" dirty="0">
-                <a:solidFill>
-                  <a:srgbClr val="FFFFFF"/>
-                </a:solidFill>
-                <a:latin typeface="Quattrocento Sans" panose="020B0502050000020003" pitchFamily="34" charset="0"/>
-                <a:ea typeface="QuattrocentoSans" pitchFamily="34" charset="-122"/>
-                <a:cs typeface="QuattrocentoSans" pitchFamily="34" charset="-120"/>
-              </a:rPr>
-              <a:t>BACKEND</a:t>
-            </a:r>
-            <a:endParaRPr lang="en-US" sz="1200" dirty="0">
-              <a:latin typeface="Quattrocento Sans" panose="020B0502050000020003" pitchFamily="34" charset="0"/>
-            </a:endParaRPr>
-          </a:p>
-        </p:txBody>
-      </p:sp>
-      <p:sp>
-        <p:nvSpPr>
-          <p:cNvPr id="7" name="Text 5"/>
-          <p:cNvSpPr/>
-          <p:nvPr/>
-        </p:nvSpPr>
-        <p:spPr>
-          <a:xfrm>
-            <a:off x="6096000" y="0"/>
-            <a:ext cx="2032000" cy="508000"/>
-          </a:xfrm>
-          <a:prstGeom prst="rect">
-            <a:avLst/>
-          </a:prstGeom>
-          <a:noFill/>
-          <a:ln/>
-        </p:spPr>
-        <p:txBody>
-          <a:bodyPr wrap="none" lIns="0" tIns="0" rIns="0" bIns="0" rtlCol="0" anchor="ctr"/>
-          <a:lstStyle/>
-          <a:p>
-            <a:pPr algn="ctr">
-              <a:lnSpc>
-                <a:spcPct val="100000"/>
-              </a:lnSpc>
-            </a:pPr>
-            <a:r>
-              <a:rPr lang="en-US" sz="1200" b="1" dirty="0">
-                <a:solidFill>
-                  <a:srgbClr val="1B4332"/>
-                </a:solidFill>
-                <a:latin typeface="Quattrocento Sans" panose="020B0502050000020003" pitchFamily="34" charset="0"/>
-                <a:ea typeface="QuattrocentoSans" pitchFamily="34" charset="-122"/>
-                <a:cs typeface="QuattrocentoSans" pitchFamily="34" charset="-120"/>
-              </a:rPr>
-              <a:t>FRONTEND</a:t>
-            </a:r>
-            <a:endParaRPr lang="en-US" sz="1200" dirty="0">
-              <a:latin typeface="Quattrocento Sans" panose="020B0502050000020003" pitchFamily="34" charset="0"/>
-            </a:endParaRPr>
-          </a:p>
-        </p:txBody>
-      </p:sp>
-      <p:sp>
-        <p:nvSpPr>
-          <p:cNvPr id="8" name="Text 6"/>
-          <p:cNvSpPr/>
-          <p:nvPr/>
-        </p:nvSpPr>
-        <p:spPr>
-          <a:xfrm>
-            <a:off x="8128000" y="0"/>
-            <a:ext cx="2032000" cy="508000"/>
-          </a:xfrm>
-          <a:prstGeom prst="rect">
-            <a:avLst/>
-          </a:prstGeom>
-          <a:noFill/>
-          <a:ln/>
-        </p:spPr>
-        <p:txBody>
-          <a:bodyPr wrap="none" lIns="0" tIns="0" rIns="0" bIns="0" rtlCol="0" anchor="ctr"/>
-          <a:lstStyle/>
-          <a:p>
-            <a:pPr algn="ctr">
-              <a:lnSpc>
-                <a:spcPct val="100000"/>
-              </a:lnSpc>
-            </a:pPr>
-            <a:r>
-              <a:rPr lang="en-US" sz="1200" dirty="0">
-                <a:solidFill>
-                  <a:srgbClr val="FFFFFF"/>
-                </a:solidFill>
-                <a:latin typeface="Quattrocento Sans" panose="020B0502050000020003" pitchFamily="34" charset="0"/>
-                <a:ea typeface="QuattrocentoSans" pitchFamily="34" charset="-122"/>
-                <a:cs typeface="QuattrocentoSans" pitchFamily="34" charset="-120"/>
-              </a:rPr>
-              <a:t>APIs</a:t>
-            </a:r>
-            <a:endParaRPr lang="en-US" sz="1200" dirty="0">
-              <a:latin typeface="Quattrocento Sans" panose="020B0502050000020003" pitchFamily="34" charset="0"/>
-            </a:endParaRPr>
-          </a:p>
-        </p:txBody>
-      </p:sp>
-      <p:sp>
-        <p:nvSpPr>
-          <p:cNvPr id="9" name="Text 7"/>
-          <p:cNvSpPr/>
-          <p:nvPr/>
-        </p:nvSpPr>
-        <p:spPr>
-          <a:xfrm>
-            <a:off x="10160000" y="0"/>
-            <a:ext cx="2032000" cy="508000"/>
-          </a:xfrm>
-          <a:prstGeom prst="rect">
-            <a:avLst/>
-          </a:prstGeom>
-          <a:noFill/>
-          <a:ln/>
-        </p:spPr>
-        <p:txBody>
-          <a:bodyPr wrap="none" lIns="0" tIns="0" rIns="0" bIns="0" rtlCol="0" anchor="ctr"/>
-          <a:lstStyle/>
-          <a:p>
-            <a:pPr algn="ctr">
-              <a:lnSpc>
-                <a:spcPct val="100000"/>
-              </a:lnSpc>
-            </a:pPr>
-            <a:r>
-              <a:rPr lang="en-US" sz="1200" dirty="0">
-                <a:solidFill>
-                  <a:srgbClr val="FFFFFF"/>
-                </a:solidFill>
-                <a:latin typeface="Quattrocento Sans" panose="020B0502050000020003" pitchFamily="34" charset="0"/>
-                <a:ea typeface="QuattrocentoSans" pitchFamily="34" charset="-122"/>
-                <a:cs typeface="QuattrocentoSans" pitchFamily="34" charset="-120"/>
-              </a:rPr>
-              <a:t>ARQUITECTURA</a:t>
-            </a:r>
-            <a:endParaRPr lang="en-US" sz="1200" dirty="0">
-              <a:latin typeface="Quattrocento Sans" panose="020B0502050000020003" pitchFamily="34" charset="0"/>
-            </a:endParaRPr>
-          </a:p>
-        </p:txBody>
-      </p:sp>
-      <p:sp>
-        <p:nvSpPr>
-          <p:cNvPr id="10" name="Text 8"/>
-          <p:cNvSpPr/>
-          <p:nvPr/>
-        </p:nvSpPr>
-        <p:spPr>
-          <a:xfrm>
-            <a:off x="12192000" y="0"/>
-            <a:ext cx="2032000" cy="508000"/>
-          </a:xfrm>
-          <a:prstGeom prst="rect">
-            <a:avLst/>
-          </a:prstGeom>
-          <a:noFill/>
-          <a:ln/>
-        </p:spPr>
-        <p:txBody>
-          <a:bodyPr wrap="none" lIns="0" tIns="0" rIns="0" bIns="0" rtlCol="0" anchor="ctr"/>
-          <a:lstStyle/>
-          <a:p>
-            <a:pPr algn="ctr">
-              <a:lnSpc>
-                <a:spcPct val="100000"/>
-              </a:lnSpc>
-            </a:pPr>
-            <a:r>
-              <a:rPr lang="en-US" sz="1200" dirty="0">
-                <a:solidFill>
-                  <a:srgbClr val="FFFFFF"/>
-                </a:solidFill>
-                <a:latin typeface="Quattrocento Sans" panose="020B0502050000020003" pitchFamily="34" charset="0"/>
-                <a:ea typeface="QuattrocentoSans" pitchFamily="34" charset="-122"/>
-                <a:cs typeface="QuattrocentoSans" pitchFamily="34" charset="-120"/>
-              </a:rPr>
-              <a:t>DEVOPS</a:t>
-            </a:r>
-            <a:endParaRPr lang="en-US" sz="1200" dirty="0">
-              <a:latin typeface="Quattrocento Sans" panose="020B0502050000020003" pitchFamily="34" charset="0"/>
-            </a:endParaRPr>
-          </a:p>
-        </p:txBody>
-      </p:sp>
-      <p:sp>
-        <p:nvSpPr>
-          <p:cNvPr id="11" name="Text 9"/>
-          <p:cNvSpPr/>
-          <p:nvPr/>
-        </p:nvSpPr>
-        <p:spPr>
-          <a:xfrm>
-            <a:off x="14224000" y="0"/>
-            <a:ext cx="2032000" cy="508000"/>
-          </a:xfrm>
-          <a:prstGeom prst="rect">
-            <a:avLst/>
-          </a:prstGeom>
-          <a:noFill/>
-          <a:ln/>
-        </p:spPr>
-        <p:txBody>
-          <a:bodyPr wrap="none" lIns="0" tIns="0" rIns="0" bIns="0" rtlCol="0" anchor="ctr"/>
-          <a:lstStyle/>
-          <a:p>
-            <a:pPr algn="ctr">
-              <a:lnSpc>
-                <a:spcPct val="100000"/>
-              </a:lnSpc>
-            </a:pPr>
-            <a:r>
-              <a:rPr lang="en-US" sz="1200" dirty="0">
-                <a:solidFill>
-                  <a:srgbClr val="FFFFFF"/>
-                </a:solidFill>
-                <a:latin typeface="Quattrocento Sans" panose="020B0502050000020003" pitchFamily="34" charset="0"/>
-                <a:ea typeface="QuattrocentoSans" pitchFamily="34" charset="-122"/>
-                <a:cs typeface="QuattrocentoSans" pitchFamily="34" charset="-120"/>
-              </a:rPr>
-              <a:t>VIABILIDAD</a:t>
-            </a:r>
-            <a:endParaRPr lang="en-US" sz="1200" dirty="0">
+              <a:solidFill>
+                <a:schemeClr val="bg1"/>
+              </a:solidFill>
               <a:latin typeface="Quattrocento Sans" panose="020B0502050000020003" pitchFamily="34" charset="0"/>
             </a:endParaRPr>
           </a:p>
@@ -12015,6 +15264,53 @@
           </a:p>
         </p:txBody>
       </p:sp>
+      <p:pic>
+        <p:nvPicPr>
+          <p:cNvPr id="4098" name="Picture 2" descr="Front-End Icons - Free SVG &amp; PNG Front-End Images - Noun Project">
+            <a:extLst>
+              <a:ext uri="{FF2B5EF4-FFF2-40B4-BE49-F238E27FC236}">
+                <a16:creationId xmlns:a16="http://schemas.microsoft.com/office/drawing/2014/main" id="{7D355C38-EE55-4F29-13CE-4F5A0AB3ECC4}"/>
+              </a:ext>
+            </a:extLst>
+          </p:cNvPr>
+          <p:cNvPicPr>
+            <a:picLocks noChangeAspect="1" noChangeArrowheads="1"/>
+          </p:cNvPicPr>
+          <p:nvPr/>
+        </p:nvPicPr>
+        <p:blipFill>
+          <a:blip r:embed="rId3">
+            <a:extLst>
+              <a:ext uri="{28A0092B-C50C-407E-A947-70E740481C1C}">
+                <a14:useLocalDpi xmlns:a14="http://schemas.microsoft.com/office/drawing/2010/main" val="0"/>
+              </a:ext>
+            </a:extLst>
+          </a:blip>
+          <a:srcRect/>
+          <a:stretch>
+            <a:fillRect/>
+          </a:stretch>
+        </p:blipFill>
+        <p:spPr bwMode="auto">
+          <a:xfrm>
+            <a:off x="203200" y="673100"/>
+            <a:ext cx="482600" cy="482600"/>
+          </a:xfrm>
+          <a:prstGeom prst="rect">
+            <a:avLst/>
+          </a:prstGeom>
+          <a:noFill/>
+          <a:extLst>
+            <a:ext uri="{909E8E84-426E-40DD-AFC4-6F175D3DCCD1}">
+              <a14:hiddenFill xmlns:a14="http://schemas.microsoft.com/office/drawing/2010/main">
+                <a:solidFill>
+                  <a:srgbClr val="FFFFFF"/>
+                </a:solidFill>
+              </a14:hiddenFill>
+            </a:ext>
+          </a:extLst>
+        </p:spPr>
+      </p:pic>
     </p:spTree>
   </p:cSld>
   <p:clrMapOvr>
@@ -12053,42 +15349,13 @@
       </p:grpSpPr>
       <p:sp>
         <p:nvSpPr>
-          <p:cNvPr id="2" name="Shape 0"/>
-          <p:cNvSpPr/>
-          <p:nvPr/>
-        </p:nvSpPr>
-        <p:spPr>
-          <a:xfrm>
-            <a:off x="0" y="0"/>
-            <a:ext cx="16256000" cy="508000"/>
-          </a:xfrm>
-          <a:prstGeom prst="rect">
-            <a:avLst/>
-          </a:prstGeom>
-          <a:solidFill>
-            <a:srgbClr val="1B4332"/>
-          </a:solidFill>
-          <a:ln/>
-        </p:spPr>
-        <p:txBody>
-          <a:bodyPr/>
-          <a:lstStyle/>
-          <a:p>
-            <a:endParaRPr lang="es-ES">
-              <a:latin typeface="Quattrocento Sans" panose="020B0502050000020003" pitchFamily="34" charset="0"/>
-            </a:endParaRPr>
-          </a:p>
-        </p:txBody>
-      </p:sp>
-      <p:sp>
-        <p:nvSpPr>
           <p:cNvPr id="3" name="Shape 1"/>
           <p:cNvSpPr/>
           <p:nvPr/>
         </p:nvSpPr>
         <p:spPr>
           <a:xfrm>
-            <a:off x="8204200" y="76200"/>
+            <a:off x="76200" y="76200"/>
             <a:ext cx="1879600" cy="355600"/>
           </a:xfrm>
           <a:prstGeom prst="roundRect">
@@ -12097,7 +15364,7 @@
             </a:avLst>
           </a:prstGeom>
           <a:solidFill>
-            <a:srgbClr val="FFFFFF"/>
+            <a:srgbClr val="1B4332"/>
           </a:solidFill>
           <a:ln/>
         </p:spPr>
@@ -12106,14 +15373,17 @@
           <a:lstStyle/>
           <a:p>
             <a:endParaRPr lang="es-ES">
-              <a:latin typeface="Quattrocento Sans" panose="020B0502050000020003" pitchFamily="34" charset="0"/>
-            </a:endParaRPr>
-          </a:p>
-        </p:txBody>
-      </p:sp>
-      <p:sp>
-        <p:nvSpPr>
-          <p:cNvPr id="4" name="Text 2"/>
+              <a:solidFill>
+                <a:schemeClr val="bg1"/>
+              </a:solidFill>
+              <a:latin typeface="Quattrocento Sans" panose="020B0502050000020003" pitchFamily="34" charset="0"/>
+            </a:endParaRPr>
+          </a:p>
+        </p:txBody>
+      </p:sp>
+      <p:sp>
+        <p:nvSpPr>
+          <p:cNvPr id="8" name="Text 6"/>
           <p:cNvSpPr/>
           <p:nvPr/>
         </p:nvSpPr>
@@ -12125,7 +15395,9 @@
           <a:prstGeom prst="rect">
             <a:avLst/>
           </a:prstGeom>
-          <a:noFill/>
+          <a:solidFill>
+            <a:srgbClr val="1B4332"/>
+          </a:solidFill>
           <a:ln/>
         </p:spPr>
         <p:txBody>
@@ -12138,318 +15410,20 @@
               </a:lnSpc>
             </a:pPr>
             <a:r>
-              <a:rPr lang="en-US" sz="1200" dirty="0">
-                <a:solidFill>
-                  <a:srgbClr val="FFFFFF"/>
-                </a:solidFill>
-                <a:latin typeface="Quattrocento Sans" panose="020B0502050000020003" pitchFamily="34" charset="0"/>
-                <a:ea typeface="QuattrocentoSans" pitchFamily="34" charset="-122"/>
-                <a:cs typeface="QuattrocentoSans" pitchFamily="34" charset="-120"/>
-              </a:rPr>
-              <a:t>CONTEXTO</a:t>
+              <a:rPr lang="en-US" sz="1200" b="1" dirty="0">
+                <a:solidFill>
+                  <a:schemeClr val="bg1"/>
+                </a:solidFill>
+                <a:latin typeface="Quattrocento Sans" panose="020B0502050000020003" pitchFamily="34" charset="0"/>
+                <a:ea typeface="QuattrocentoSans" pitchFamily="34" charset="-122"/>
+                <a:cs typeface="QuattrocentoSans" pitchFamily="34" charset="-120"/>
+              </a:rPr>
+              <a:t>APIs</a:t>
             </a:r>
             <a:endParaRPr lang="en-US" sz="1200" dirty="0">
-              <a:latin typeface="Quattrocento Sans" panose="020B0502050000020003" pitchFamily="34" charset="0"/>
-            </a:endParaRPr>
-          </a:p>
-        </p:txBody>
-      </p:sp>
-      <p:sp>
-        <p:nvSpPr>
-          <p:cNvPr id="5" name="Text 3"/>
-          <p:cNvSpPr/>
-          <p:nvPr/>
-        </p:nvSpPr>
-        <p:spPr>
-          <a:xfrm>
-            <a:off x="2032000" y="0"/>
-            <a:ext cx="2032000" cy="508000"/>
-          </a:xfrm>
-          <a:prstGeom prst="rect">
-            <a:avLst/>
-          </a:prstGeom>
-          <a:noFill/>
-          <a:ln/>
-        </p:spPr>
-        <p:txBody>
-          <a:bodyPr wrap="none" lIns="0" tIns="0" rIns="0" bIns="0" rtlCol="0" anchor="ctr"/>
-          <a:lstStyle/>
-          <a:p>
-            <a:pPr algn="ctr">
-              <a:lnSpc>
-                <a:spcPct val="100000"/>
-              </a:lnSpc>
-            </a:pPr>
-            <a:r>
-              <a:rPr lang="en-US" sz="1200" dirty="0">
-                <a:solidFill>
-                  <a:srgbClr val="FFFFFF"/>
-                </a:solidFill>
-                <a:latin typeface="Quattrocento Sans" panose="020B0502050000020003" pitchFamily="34" charset="0"/>
-                <a:ea typeface="QuattrocentoSans" pitchFamily="34" charset="-122"/>
-                <a:cs typeface="QuattrocentoSans" pitchFamily="34" charset="-120"/>
-              </a:rPr>
-              <a:t>METODOLOGÍAS</a:t>
-            </a:r>
-            <a:endParaRPr lang="en-US" sz="1200" dirty="0">
-              <a:latin typeface="Quattrocento Sans" panose="020B0502050000020003" pitchFamily="34" charset="0"/>
-            </a:endParaRPr>
-          </a:p>
-        </p:txBody>
-      </p:sp>
-      <p:sp>
-        <p:nvSpPr>
-          <p:cNvPr id="6" name="Text 4"/>
-          <p:cNvSpPr/>
-          <p:nvPr/>
-        </p:nvSpPr>
-        <p:spPr>
-          <a:xfrm>
-            <a:off x="4064000" y="0"/>
-            <a:ext cx="2032000" cy="508000"/>
-          </a:xfrm>
-          <a:prstGeom prst="rect">
-            <a:avLst/>
-          </a:prstGeom>
-          <a:noFill/>
-          <a:ln/>
-        </p:spPr>
-        <p:txBody>
-          <a:bodyPr wrap="none" lIns="0" tIns="0" rIns="0" bIns="0" rtlCol="0" anchor="ctr"/>
-          <a:lstStyle/>
-          <a:p>
-            <a:pPr algn="ctr">
-              <a:lnSpc>
-                <a:spcPct val="100000"/>
-              </a:lnSpc>
-            </a:pPr>
-            <a:r>
-              <a:rPr lang="en-US" sz="1200" dirty="0">
-                <a:solidFill>
-                  <a:srgbClr val="FFFFFF"/>
-                </a:solidFill>
-                <a:latin typeface="Quattrocento Sans" panose="020B0502050000020003" pitchFamily="34" charset="0"/>
-                <a:ea typeface="QuattrocentoSans" pitchFamily="34" charset="-122"/>
-                <a:cs typeface="QuattrocentoSans" pitchFamily="34" charset="-120"/>
-              </a:rPr>
-              <a:t>BACKEND</a:t>
-            </a:r>
-            <a:endParaRPr lang="en-US" sz="1200" dirty="0">
-              <a:latin typeface="Quattrocento Sans" panose="020B0502050000020003" pitchFamily="34" charset="0"/>
-            </a:endParaRPr>
-          </a:p>
-        </p:txBody>
-      </p:sp>
-      <p:sp>
-        <p:nvSpPr>
-          <p:cNvPr id="7" name="Text 5"/>
-          <p:cNvSpPr/>
-          <p:nvPr/>
-        </p:nvSpPr>
-        <p:spPr>
-          <a:xfrm>
-            <a:off x="6096000" y="0"/>
-            <a:ext cx="2032000" cy="508000"/>
-          </a:xfrm>
-          <a:prstGeom prst="rect">
-            <a:avLst/>
-          </a:prstGeom>
-          <a:noFill/>
-          <a:ln/>
-        </p:spPr>
-        <p:txBody>
-          <a:bodyPr wrap="none" lIns="0" tIns="0" rIns="0" bIns="0" rtlCol="0" anchor="ctr"/>
-          <a:lstStyle/>
-          <a:p>
-            <a:pPr algn="ctr">
-              <a:lnSpc>
-                <a:spcPct val="100000"/>
-              </a:lnSpc>
-            </a:pPr>
-            <a:r>
-              <a:rPr lang="en-US" sz="1200" dirty="0">
-                <a:solidFill>
-                  <a:srgbClr val="FFFFFF"/>
-                </a:solidFill>
-                <a:latin typeface="Quattrocento Sans" panose="020B0502050000020003" pitchFamily="34" charset="0"/>
-                <a:ea typeface="QuattrocentoSans" pitchFamily="34" charset="-122"/>
-                <a:cs typeface="QuattrocentoSans" pitchFamily="34" charset="-120"/>
-              </a:rPr>
-              <a:t>FRONTEND</a:t>
-            </a:r>
-            <a:endParaRPr lang="en-US" sz="1200" dirty="0">
-              <a:latin typeface="Quattrocento Sans" panose="020B0502050000020003" pitchFamily="34" charset="0"/>
-            </a:endParaRPr>
-          </a:p>
-        </p:txBody>
-      </p:sp>
-      <p:sp>
-        <p:nvSpPr>
-          <p:cNvPr id="8" name="Text 6"/>
-          <p:cNvSpPr/>
-          <p:nvPr/>
-        </p:nvSpPr>
-        <p:spPr>
-          <a:xfrm>
-            <a:off x="8128000" y="0"/>
-            <a:ext cx="2032000" cy="508000"/>
-          </a:xfrm>
-          <a:prstGeom prst="rect">
-            <a:avLst/>
-          </a:prstGeom>
-          <a:noFill/>
-          <a:ln/>
-        </p:spPr>
-        <p:txBody>
-          <a:bodyPr wrap="none" lIns="0" tIns="0" rIns="0" bIns="0" rtlCol="0" anchor="ctr"/>
-          <a:lstStyle/>
-          <a:p>
-            <a:pPr algn="ctr">
-              <a:lnSpc>
-                <a:spcPct val="100000"/>
-              </a:lnSpc>
-            </a:pPr>
-            <a:r>
-              <a:rPr lang="en-US" sz="1200" b="1" dirty="0">
-                <a:solidFill>
-                  <a:srgbClr val="1B4332"/>
-                </a:solidFill>
-                <a:latin typeface="Quattrocento Sans" panose="020B0502050000020003" pitchFamily="34" charset="0"/>
-                <a:ea typeface="QuattrocentoSans" pitchFamily="34" charset="-122"/>
-                <a:cs typeface="QuattrocentoSans" pitchFamily="34" charset="-120"/>
-              </a:rPr>
-              <a:t>APIs</a:t>
-            </a:r>
-            <a:endParaRPr lang="en-US" sz="1200" dirty="0">
-              <a:latin typeface="Quattrocento Sans" panose="020B0502050000020003" pitchFamily="34" charset="0"/>
-            </a:endParaRPr>
-          </a:p>
-        </p:txBody>
-      </p:sp>
-      <p:sp>
-        <p:nvSpPr>
-          <p:cNvPr id="9" name="Text 7"/>
-          <p:cNvSpPr/>
-          <p:nvPr/>
-        </p:nvSpPr>
-        <p:spPr>
-          <a:xfrm>
-            <a:off x="10160000" y="0"/>
-            <a:ext cx="2032000" cy="508000"/>
-          </a:xfrm>
-          <a:prstGeom prst="rect">
-            <a:avLst/>
-          </a:prstGeom>
-          <a:noFill/>
-          <a:ln/>
-        </p:spPr>
-        <p:txBody>
-          <a:bodyPr wrap="none" lIns="0" tIns="0" rIns="0" bIns="0" rtlCol="0" anchor="ctr"/>
-          <a:lstStyle/>
-          <a:p>
-            <a:pPr algn="ctr">
-              <a:lnSpc>
-                <a:spcPct val="100000"/>
-              </a:lnSpc>
-            </a:pPr>
-            <a:r>
-              <a:rPr lang="en-US" sz="1200" dirty="0">
-                <a:solidFill>
-                  <a:srgbClr val="FFFFFF"/>
-                </a:solidFill>
-                <a:latin typeface="Quattrocento Sans" panose="020B0502050000020003" pitchFamily="34" charset="0"/>
-                <a:ea typeface="QuattrocentoSans" pitchFamily="34" charset="-122"/>
-                <a:cs typeface="QuattrocentoSans" pitchFamily="34" charset="-120"/>
-              </a:rPr>
-              <a:t>ARQUITECTURA</a:t>
-            </a:r>
-            <a:endParaRPr lang="en-US" sz="1200" dirty="0">
-              <a:latin typeface="Quattrocento Sans" panose="020B0502050000020003" pitchFamily="34" charset="0"/>
-            </a:endParaRPr>
-          </a:p>
-        </p:txBody>
-      </p:sp>
-      <p:sp>
-        <p:nvSpPr>
-          <p:cNvPr id="10" name="Text 8"/>
-          <p:cNvSpPr/>
-          <p:nvPr/>
-        </p:nvSpPr>
-        <p:spPr>
-          <a:xfrm>
-            <a:off x="12192000" y="0"/>
-            <a:ext cx="2032000" cy="508000"/>
-          </a:xfrm>
-          <a:prstGeom prst="rect">
-            <a:avLst/>
-          </a:prstGeom>
-          <a:noFill/>
-          <a:ln/>
-        </p:spPr>
-        <p:txBody>
-          <a:bodyPr wrap="none" lIns="0" tIns="0" rIns="0" bIns="0" rtlCol="0" anchor="ctr"/>
-          <a:lstStyle/>
-          <a:p>
-            <a:pPr algn="ctr">
-              <a:lnSpc>
-                <a:spcPct val="100000"/>
-              </a:lnSpc>
-            </a:pPr>
-            <a:r>
-              <a:rPr lang="en-US" sz="1200" dirty="0">
-                <a:solidFill>
-                  <a:srgbClr val="FFFFFF"/>
-                </a:solidFill>
-                <a:latin typeface="Quattrocento Sans" panose="020B0502050000020003" pitchFamily="34" charset="0"/>
-                <a:ea typeface="QuattrocentoSans" pitchFamily="34" charset="-122"/>
-                <a:cs typeface="QuattrocentoSans" pitchFamily="34" charset="-120"/>
-              </a:rPr>
-              <a:t>DEVOPS</a:t>
-            </a:r>
-            <a:endParaRPr lang="en-US" sz="1200" dirty="0">
-              <a:latin typeface="Quattrocento Sans" panose="020B0502050000020003" pitchFamily="34" charset="0"/>
-            </a:endParaRPr>
-          </a:p>
-        </p:txBody>
-      </p:sp>
-      <p:sp>
-        <p:nvSpPr>
-          <p:cNvPr id="11" name="Text 9"/>
-          <p:cNvSpPr/>
-          <p:nvPr/>
-        </p:nvSpPr>
-        <p:spPr>
-          <a:xfrm>
-            <a:off x="14224000" y="0"/>
-            <a:ext cx="2032000" cy="508000"/>
-          </a:xfrm>
-          <a:prstGeom prst="rect">
-            <a:avLst/>
-          </a:prstGeom>
-          <a:noFill/>
-          <a:ln/>
-        </p:spPr>
-        <p:txBody>
-          <a:bodyPr wrap="none" lIns="0" tIns="0" rIns="0" bIns="0" rtlCol="0" anchor="ctr"/>
-          <a:lstStyle/>
-          <a:p>
-            <a:pPr algn="ctr">
-              <a:lnSpc>
-                <a:spcPct val="100000"/>
-              </a:lnSpc>
-            </a:pPr>
-            <a:r>
-              <a:rPr lang="en-US" sz="1200" dirty="0">
-                <a:solidFill>
-                  <a:srgbClr val="FFFFFF"/>
-                </a:solidFill>
-                <a:latin typeface="Quattrocento Sans" panose="020B0502050000020003" pitchFamily="34" charset="0"/>
-                <a:ea typeface="QuattrocentoSans" pitchFamily="34" charset="-122"/>
-                <a:cs typeface="QuattrocentoSans" pitchFamily="34" charset="-120"/>
-              </a:rPr>
-              <a:t>VIABILIDAD</a:t>
-            </a:r>
-            <a:endParaRPr lang="en-US" sz="1200" dirty="0">
+              <a:solidFill>
+                <a:schemeClr val="bg1"/>
+              </a:solidFill>
               <a:latin typeface="Quattrocento Sans" panose="020B0502050000020003" pitchFamily="34" charset="0"/>
             </a:endParaRPr>
           </a:p>
@@ -14288,6 +17262,53 @@
           </a:p>
         </p:txBody>
       </p:sp>
+      <p:pic>
+        <p:nvPicPr>
+          <p:cNvPr id="5122" name="Picture 2" descr="API Icon SVG Vector &amp; PNG Free Download | UXWing">
+            <a:extLst>
+              <a:ext uri="{FF2B5EF4-FFF2-40B4-BE49-F238E27FC236}">
+                <a16:creationId xmlns:a16="http://schemas.microsoft.com/office/drawing/2014/main" id="{56CA0D44-81C1-4CAF-93AF-C06498A8B4C3}"/>
+              </a:ext>
+            </a:extLst>
+          </p:cNvPr>
+          <p:cNvPicPr>
+            <a:picLocks noChangeAspect="1" noChangeArrowheads="1"/>
+          </p:cNvPicPr>
+          <p:nvPr/>
+        </p:nvPicPr>
+        <p:blipFill>
+          <a:blip r:embed="rId3">
+            <a:extLst>
+              <a:ext uri="{28A0092B-C50C-407E-A947-70E740481C1C}">
+                <a14:useLocalDpi xmlns:a14="http://schemas.microsoft.com/office/drawing/2010/main" val="0"/>
+              </a:ext>
+            </a:extLst>
+          </a:blip>
+          <a:srcRect/>
+          <a:stretch>
+            <a:fillRect/>
+          </a:stretch>
+        </p:blipFill>
+        <p:spPr bwMode="auto">
+          <a:xfrm>
+            <a:off x="259787" y="711200"/>
+            <a:ext cx="406400" cy="406400"/>
+          </a:xfrm>
+          <a:prstGeom prst="rect">
+            <a:avLst/>
+          </a:prstGeom>
+          <a:noFill/>
+          <a:extLst>
+            <a:ext uri="{909E8E84-426E-40DD-AFC4-6F175D3DCCD1}">
+              <a14:hiddenFill xmlns:a14="http://schemas.microsoft.com/office/drawing/2010/main">
+                <a:solidFill>
+                  <a:srgbClr val="FFFFFF"/>
+                </a:solidFill>
+              </a14:hiddenFill>
+            </a:ext>
+          </a:extLst>
+        </p:spPr>
+      </p:pic>
     </p:spTree>
   </p:cSld>
   <p:clrMapOvr>
@@ -14326,42 +17347,13 @@
       </p:grpSpPr>
       <p:sp>
         <p:nvSpPr>
-          <p:cNvPr id="2" name="Shape 0"/>
-          <p:cNvSpPr/>
-          <p:nvPr/>
-        </p:nvSpPr>
-        <p:spPr>
-          <a:xfrm>
-            <a:off x="0" y="0"/>
-            <a:ext cx="16256000" cy="508000"/>
-          </a:xfrm>
-          <a:prstGeom prst="rect">
-            <a:avLst/>
-          </a:prstGeom>
-          <a:solidFill>
-            <a:srgbClr val="1B4332"/>
-          </a:solidFill>
-          <a:ln/>
-        </p:spPr>
-        <p:txBody>
-          <a:bodyPr/>
-          <a:lstStyle/>
-          <a:p>
-            <a:endParaRPr lang="es-ES">
-              <a:latin typeface="Quattrocento Sans" panose="020B0502050000020003" pitchFamily="34" charset="0"/>
-            </a:endParaRPr>
-          </a:p>
-        </p:txBody>
-      </p:sp>
-      <p:sp>
-        <p:nvSpPr>
           <p:cNvPr id="3" name="Shape 1"/>
           <p:cNvSpPr/>
           <p:nvPr/>
         </p:nvSpPr>
         <p:spPr>
           <a:xfrm>
-            <a:off x="10236200" y="76200"/>
+            <a:off x="76200" y="76200"/>
             <a:ext cx="1879600" cy="355600"/>
           </a:xfrm>
           <a:prstGeom prst="roundRect">
@@ -14370,7 +17362,7 @@
             </a:avLst>
           </a:prstGeom>
           <a:solidFill>
-            <a:srgbClr val="FFFFFF"/>
+            <a:srgbClr val="1B4332"/>
           </a:solidFill>
           <a:ln/>
         </p:spPr>
@@ -14379,14 +17371,17 @@
           <a:lstStyle/>
           <a:p>
             <a:endParaRPr lang="es-ES">
-              <a:latin typeface="Quattrocento Sans" panose="020B0502050000020003" pitchFamily="34" charset="0"/>
-            </a:endParaRPr>
-          </a:p>
-        </p:txBody>
-      </p:sp>
-      <p:sp>
-        <p:nvSpPr>
-          <p:cNvPr id="4" name="Text 2"/>
+              <a:solidFill>
+                <a:schemeClr val="bg1"/>
+              </a:solidFill>
+              <a:latin typeface="Quattrocento Sans" panose="020B0502050000020003" pitchFamily="34" charset="0"/>
+            </a:endParaRPr>
+          </a:p>
+        </p:txBody>
+      </p:sp>
+      <p:sp>
+        <p:nvSpPr>
+          <p:cNvPr id="9" name="Text 7"/>
           <p:cNvSpPr/>
           <p:nvPr/>
         </p:nvSpPr>
@@ -14398,7 +17393,9 @@
           <a:prstGeom prst="rect">
             <a:avLst/>
           </a:prstGeom>
-          <a:noFill/>
+          <a:solidFill>
+            <a:srgbClr val="1B4332"/>
+          </a:solidFill>
           <a:ln/>
         </p:spPr>
         <p:txBody>
@@ -14411,318 +17408,20 @@
               </a:lnSpc>
             </a:pPr>
             <a:r>
-              <a:rPr lang="en-US" sz="1200" dirty="0">
-                <a:solidFill>
-                  <a:srgbClr val="FFFFFF"/>
-                </a:solidFill>
-                <a:latin typeface="Quattrocento Sans" panose="020B0502050000020003" pitchFamily="34" charset="0"/>
-                <a:ea typeface="QuattrocentoSans" pitchFamily="34" charset="-122"/>
-                <a:cs typeface="QuattrocentoSans" pitchFamily="34" charset="-120"/>
-              </a:rPr>
-              <a:t>CONTEXTO</a:t>
+              <a:rPr lang="en-US" sz="1200" b="1" dirty="0">
+                <a:solidFill>
+                  <a:schemeClr val="bg1"/>
+                </a:solidFill>
+                <a:latin typeface="Quattrocento Sans" panose="020B0502050000020003" pitchFamily="34" charset="0"/>
+                <a:ea typeface="QuattrocentoSans" pitchFamily="34" charset="-122"/>
+                <a:cs typeface="QuattrocentoSans" pitchFamily="34" charset="-120"/>
+              </a:rPr>
+              <a:t>ARQUITECTURA</a:t>
             </a:r>
             <a:endParaRPr lang="en-US" sz="1200" dirty="0">
-              <a:latin typeface="Quattrocento Sans" panose="020B0502050000020003" pitchFamily="34" charset="0"/>
-            </a:endParaRPr>
-          </a:p>
-        </p:txBody>
-      </p:sp>
-      <p:sp>
-        <p:nvSpPr>
-          <p:cNvPr id="5" name="Text 3"/>
-          <p:cNvSpPr/>
-          <p:nvPr/>
-        </p:nvSpPr>
-        <p:spPr>
-          <a:xfrm>
-            <a:off x="2032000" y="0"/>
-            <a:ext cx="2032000" cy="508000"/>
-          </a:xfrm>
-          <a:prstGeom prst="rect">
-            <a:avLst/>
-          </a:prstGeom>
-          <a:noFill/>
-          <a:ln/>
-        </p:spPr>
-        <p:txBody>
-          <a:bodyPr wrap="none" lIns="0" tIns="0" rIns="0" bIns="0" rtlCol="0" anchor="ctr"/>
-          <a:lstStyle/>
-          <a:p>
-            <a:pPr algn="ctr">
-              <a:lnSpc>
-                <a:spcPct val="100000"/>
-              </a:lnSpc>
-            </a:pPr>
-            <a:r>
-              <a:rPr lang="en-US" sz="1200" dirty="0">
-                <a:solidFill>
-                  <a:srgbClr val="FFFFFF"/>
-                </a:solidFill>
-                <a:latin typeface="Quattrocento Sans" panose="020B0502050000020003" pitchFamily="34" charset="0"/>
-                <a:ea typeface="QuattrocentoSans" pitchFamily="34" charset="-122"/>
-                <a:cs typeface="QuattrocentoSans" pitchFamily="34" charset="-120"/>
-              </a:rPr>
-              <a:t>METODOLOGÍAS</a:t>
-            </a:r>
-            <a:endParaRPr lang="en-US" sz="1200" dirty="0">
-              <a:latin typeface="Quattrocento Sans" panose="020B0502050000020003" pitchFamily="34" charset="0"/>
-            </a:endParaRPr>
-          </a:p>
-        </p:txBody>
-      </p:sp>
-      <p:sp>
-        <p:nvSpPr>
-          <p:cNvPr id="6" name="Text 4"/>
-          <p:cNvSpPr/>
-          <p:nvPr/>
-        </p:nvSpPr>
-        <p:spPr>
-          <a:xfrm>
-            <a:off x="4064000" y="0"/>
-            <a:ext cx="2032000" cy="508000"/>
-          </a:xfrm>
-          <a:prstGeom prst="rect">
-            <a:avLst/>
-          </a:prstGeom>
-          <a:noFill/>
-          <a:ln/>
-        </p:spPr>
-        <p:txBody>
-          <a:bodyPr wrap="none" lIns="0" tIns="0" rIns="0" bIns="0" rtlCol="0" anchor="ctr"/>
-          <a:lstStyle/>
-          <a:p>
-            <a:pPr algn="ctr">
-              <a:lnSpc>
-                <a:spcPct val="100000"/>
-              </a:lnSpc>
-            </a:pPr>
-            <a:r>
-              <a:rPr lang="en-US" sz="1200" dirty="0">
-                <a:solidFill>
-                  <a:srgbClr val="FFFFFF"/>
-                </a:solidFill>
-                <a:latin typeface="Quattrocento Sans" panose="020B0502050000020003" pitchFamily="34" charset="0"/>
-                <a:ea typeface="QuattrocentoSans" pitchFamily="34" charset="-122"/>
-                <a:cs typeface="QuattrocentoSans" pitchFamily="34" charset="-120"/>
-              </a:rPr>
-              <a:t>BACKEND</a:t>
-            </a:r>
-            <a:endParaRPr lang="en-US" sz="1200" dirty="0">
-              <a:latin typeface="Quattrocento Sans" panose="020B0502050000020003" pitchFamily="34" charset="0"/>
-            </a:endParaRPr>
-          </a:p>
-        </p:txBody>
-      </p:sp>
-      <p:sp>
-        <p:nvSpPr>
-          <p:cNvPr id="7" name="Text 5"/>
-          <p:cNvSpPr/>
-          <p:nvPr/>
-        </p:nvSpPr>
-        <p:spPr>
-          <a:xfrm>
-            <a:off x="6096000" y="0"/>
-            <a:ext cx="2032000" cy="508000"/>
-          </a:xfrm>
-          <a:prstGeom prst="rect">
-            <a:avLst/>
-          </a:prstGeom>
-          <a:noFill/>
-          <a:ln/>
-        </p:spPr>
-        <p:txBody>
-          <a:bodyPr wrap="none" lIns="0" tIns="0" rIns="0" bIns="0" rtlCol="0" anchor="ctr"/>
-          <a:lstStyle/>
-          <a:p>
-            <a:pPr algn="ctr">
-              <a:lnSpc>
-                <a:spcPct val="100000"/>
-              </a:lnSpc>
-            </a:pPr>
-            <a:r>
-              <a:rPr lang="en-US" sz="1200" dirty="0">
-                <a:solidFill>
-                  <a:srgbClr val="FFFFFF"/>
-                </a:solidFill>
-                <a:latin typeface="Quattrocento Sans" panose="020B0502050000020003" pitchFamily="34" charset="0"/>
-                <a:ea typeface="QuattrocentoSans" pitchFamily="34" charset="-122"/>
-                <a:cs typeface="QuattrocentoSans" pitchFamily="34" charset="-120"/>
-              </a:rPr>
-              <a:t>FRONTEND</a:t>
-            </a:r>
-            <a:endParaRPr lang="en-US" sz="1200" dirty="0">
-              <a:latin typeface="Quattrocento Sans" panose="020B0502050000020003" pitchFamily="34" charset="0"/>
-            </a:endParaRPr>
-          </a:p>
-        </p:txBody>
-      </p:sp>
-      <p:sp>
-        <p:nvSpPr>
-          <p:cNvPr id="8" name="Text 6"/>
-          <p:cNvSpPr/>
-          <p:nvPr/>
-        </p:nvSpPr>
-        <p:spPr>
-          <a:xfrm>
-            <a:off x="8128000" y="0"/>
-            <a:ext cx="2032000" cy="508000"/>
-          </a:xfrm>
-          <a:prstGeom prst="rect">
-            <a:avLst/>
-          </a:prstGeom>
-          <a:noFill/>
-          <a:ln/>
-        </p:spPr>
-        <p:txBody>
-          <a:bodyPr wrap="none" lIns="0" tIns="0" rIns="0" bIns="0" rtlCol="0" anchor="ctr"/>
-          <a:lstStyle/>
-          <a:p>
-            <a:pPr algn="ctr">
-              <a:lnSpc>
-                <a:spcPct val="100000"/>
-              </a:lnSpc>
-            </a:pPr>
-            <a:r>
-              <a:rPr lang="en-US" sz="1200" dirty="0">
-                <a:solidFill>
-                  <a:srgbClr val="FFFFFF"/>
-                </a:solidFill>
-                <a:latin typeface="Quattrocento Sans" panose="020B0502050000020003" pitchFamily="34" charset="0"/>
-                <a:ea typeface="QuattrocentoSans" pitchFamily="34" charset="-122"/>
-                <a:cs typeface="QuattrocentoSans" pitchFamily="34" charset="-120"/>
-              </a:rPr>
-              <a:t>APIs</a:t>
-            </a:r>
-            <a:endParaRPr lang="en-US" sz="1200" dirty="0">
-              <a:latin typeface="Quattrocento Sans" panose="020B0502050000020003" pitchFamily="34" charset="0"/>
-            </a:endParaRPr>
-          </a:p>
-        </p:txBody>
-      </p:sp>
-      <p:sp>
-        <p:nvSpPr>
-          <p:cNvPr id="9" name="Text 7"/>
-          <p:cNvSpPr/>
-          <p:nvPr/>
-        </p:nvSpPr>
-        <p:spPr>
-          <a:xfrm>
-            <a:off x="10160000" y="0"/>
-            <a:ext cx="2032000" cy="508000"/>
-          </a:xfrm>
-          <a:prstGeom prst="rect">
-            <a:avLst/>
-          </a:prstGeom>
-          <a:noFill/>
-          <a:ln/>
-        </p:spPr>
-        <p:txBody>
-          <a:bodyPr wrap="none" lIns="0" tIns="0" rIns="0" bIns="0" rtlCol="0" anchor="ctr"/>
-          <a:lstStyle/>
-          <a:p>
-            <a:pPr algn="ctr">
-              <a:lnSpc>
-                <a:spcPct val="100000"/>
-              </a:lnSpc>
-            </a:pPr>
-            <a:r>
-              <a:rPr lang="en-US" sz="1200" b="1" dirty="0">
-                <a:solidFill>
-                  <a:srgbClr val="1B4332"/>
-                </a:solidFill>
-                <a:latin typeface="Quattrocento Sans" panose="020B0502050000020003" pitchFamily="34" charset="0"/>
-                <a:ea typeface="QuattrocentoSans" pitchFamily="34" charset="-122"/>
-                <a:cs typeface="QuattrocentoSans" pitchFamily="34" charset="-120"/>
-              </a:rPr>
-              <a:t>ARQUITECTURA</a:t>
-            </a:r>
-            <a:endParaRPr lang="en-US" sz="1200" dirty="0">
-              <a:latin typeface="Quattrocento Sans" panose="020B0502050000020003" pitchFamily="34" charset="0"/>
-            </a:endParaRPr>
-          </a:p>
-        </p:txBody>
-      </p:sp>
-      <p:sp>
-        <p:nvSpPr>
-          <p:cNvPr id="10" name="Text 8"/>
-          <p:cNvSpPr/>
-          <p:nvPr/>
-        </p:nvSpPr>
-        <p:spPr>
-          <a:xfrm>
-            <a:off x="12192000" y="0"/>
-            <a:ext cx="2032000" cy="508000"/>
-          </a:xfrm>
-          <a:prstGeom prst="rect">
-            <a:avLst/>
-          </a:prstGeom>
-          <a:noFill/>
-          <a:ln/>
-        </p:spPr>
-        <p:txBody>
-          <a:bodyPr wrap="none" lIns="0" tIns="0" rIns="0" bIns="0" rtlCol="0" anchor="ctr"/>
-          <a:lstStyle/>
-          <a:p>
-            <a:pPr algn="ctr">
-              <a:lnSpc>
-                <a:spcPct val="100000"/>
-              </a:lnSpc>
-            </a:pPr>
-            <a:r>
-              <a:rPr lang="en-US" sz="1200" dirty="0">
-                <a:solidFill>
-                  <a:srgbClr val="FFFFFF"/>
-                </a:solidFill>
-                <a:latin typeface="Quattrocento Sans" panose="020B0502050000020003" pitchFamily="34" charset="0"/>
-                <a:ea typeface="QuattrocentoSans" pitchFamily="34" charset="-122"/>
-                <a:cs typeface="QuattrocentoSans" pitchFamily="34" charset="-120"/>
-              </a:rPr>
-              <a:t>DEVOPS</a:t>
-            </a:r>
-            <a:endParaRPr lang="en-US" sz="1200" dirty="0">
-              <a:latin typeface="Quattrocento Sans" panose="020B0502050000020003" pitchFamily="34" charset="0"/>
-            </a:endParaRPr>
-          </a:p>
-        </p:txBody>
-      </p:sp>
-      <p:sp>
-        <p:nvSpPr>
-          <p:cNvPr id="11" name="Text 9"/>
-          <p:cNvSpPr/>
-          <p:nvPr/>
-        </p:nvSpPr>
-        <p:spPr>
-          <a:xfrm>
-            <a:off x="14224000" y="0"/>
-            <a:ext cx="2032000" cy="508000"/>
-          </a:xfrm>
-          <a:prstGeom prst="rect">
-            <a:avLst/>
-          </a:prstGeom>
-          <a:noFill/>
-          <a:ln/>
-        </p:spPr>
-        <p:txBody>
-          <a:bodyPr wrap="none" lIns="0" tIns="0" rIns="0" bIns="0" rtlCol="0" anchor="ctr"/>
-          <a:lstStyle/>
-          <a:p>
-            <a:pPr algn="ctr">
-              <a:lnSpc>
-                <a:spcPct val="100000"/>
-              </a:lnSpc>
-            </a:pPr>
-            <a:r>
-              <a:rPr lang="en-US" sz="1200" dirty="0">
-                <a:solidFill>
-                  <a:srgbClr val="FFFFFF"/>
-                </a:solidFill>
-                <a:latin typeface="Quattrocento Sans" panose="020B0502050000020003" pitchFamily="34" charset="0"/>
-                <a:ea typeface="QuattrocentoSans" pitchFamily="34" charset="-122"/>
-                <a:cs typeface="QuattrocentoSans" pitchFamily="34" charset="-120"/>
-              </a:rPr>
-              <a:t>VIABILIDAD</a:t>
-            </a:r>
-            <a:endParaRPr lang="en-US" sz="1200" dirty="0">
+              <a:solidFill>
+                <a:schemeClr val="bg1"/>
+              </a:solidFill>
               <a:latin typeface="Quattrocento Sans" panose="020B0502050000020003" pitchFamily="34" charset="0"/>
             </a:endParaRPr>
           </a:p>
@@ -18265,6 +20964,53 @@
           </a:p>
         </p:txBody>
       </p:sp>
+      <p:pic>
+        <p:nvPicPr>
+          <p:cNvPr id="4098" name="Picture 2" descr="Descarga iconos gratuitos de Arquitectura en PNG y SVG">
+            <a:extLst>
+              <a:ext uri="{FF2B5EF4-FFF2-40B4-BE49-F238E27FC236}">
+                <a16:creationId xmlns:a16="http://schemas.microsoft.com/office/drawing/2014/main" id="{13FF7D5D-7C33-EEE4-D96B-46CBEA86D7D5}"/>
+              </a:ext>
+            </a:extLst>
+          </p:cNvPr>
+          <p:cNvPicPr>
+            <a:picLocks noChangeAspect="1" noChangeArrowheads="1"/>
+          </p:cNvPicPr>
+          <p:nvPr/>
+        </p:nvPicPr>
+        <p:blipFill>
+          <a:blip r:embed="rId3">
+            <a:extLst>
+              <a:ext uri="{28A0092B-C50C-407E-A947-70E740481C1C}">
+                <a14:useLocalDpi xmlns:a14="http://schemas.microsoft.com/office/drawing/2010/main" val="0"/>
+              </a:ext>
+            </a:extLst>
+          </a:blip>
+          <a:srcRect/>
+          <a:stretch>
+            <a:fillRect/>
+          </a:stretch>
+        </p:blipFill>
+        <p:spPr bwMode="auto">
+          <a:xfrm>
+            <a:off x="191704" y="688318"/>
+            <a:ext cx="464864" cy="464864"/>
+          </a:xfrm>
+          <a:prstGeom prst="rect">
+            <a:avLst/>
+          </a:prstGeom>
+          <a:noFill/>
+          <a:extLst>
+            <a:ext uri="{909E8E84-426E-40DD-AFC4-6F175D3DCCD1}">
+              <a14:hiddenFill xmlns:a14="http://schemas.microsoft.com/office/drawing/2010/main">
+                <a:solidFill>
+                  <a:srgbClr val="FFFFFF"/>
+                </a:solidFill>
+              </a14:hiddenFill>
+            </a:ext>
+          </a:extLst>
+        </p:spPr>
+      </p:pic>
     </p:spTree>
   </p:cSld>
   <p:clrMapOvr>
@@ -18303,14 +21049,14 @@
       </p:grpSpPr>
       <p:sp>
         <p:nvSpPr>
-          <p:cNvPr id="2" name="Shape 0"/>
-          <p:cNvSpPr/>
-          <p:nvPr/>
-        </p:nvSpPr>
-        <p:spPr>
-          <a:xfrm>
-            <a:off x="0" y="0"/>
-            <a:ext cx="16256000" cy="508000"/>
+          <p:cNvPr id="3" name="Shape 1"/>
+          <p:cNvSpPr/>
+          <p:nvPr/>
+        </p:nvSpPr>
+        <p:spPr>
+          <a:xfrm>
+            <a:off x="76200" y="76200"/>
+            <a:ext cx="1879600" cy="355600"/>
           </a:xfrm>
           <a:prstGeom prst="rect">
             <a:avLst/>
@@ -18325,45 +21071,17 @@
           <a:lstStyle/>
           <a:p>
             <a:endParaRPr lang="es-ES">
-              <a:latin typeface="Quattrocento Sans" panose="020B0502050000020003" pitchFamily="34" charset="0"/>
-            </a:endParaRPr>
-          </a:p>
-        </p:txBody>
-      </p:sp>
-      <p:sp>
-        <p:nvSpPr>
-          <p:cNvPr id="3" name="Shape 1"/>
-          <p:cNvSpPr/>
-          <p:nvPr/>
-        </p:nvSpPr>
-        <p:spPr>
-          <a:xfrm>
-            <a:off x="12268200" y="76200"/>
-            <a:ext cx="1879600" cy="355600"/>
-          </a:xfrm>
-          <a:prstGeom prst="roundRect">
-            <a:avLst>
-              <a:gd name="adj" fmla="val 8000"/>
-            </a:avLst>
-          </a:prstGeom>
-          <a:solidFill>
-            <a:srgbClr val="FFFFFF"/>
-          </a:solidFill>
-          <a:ln/>
-        </p:spPr>
-        <p:txBody>
-          <a:bodyPr/>
-          <a:lstStyle/>
-          <a:p>
-            <a:endParaRPr lang="es-ES">
-              <a:latin typeface="Quattrocento Sans" panose="020B0502050000020003" pitchFamily="34" charset="0"/>
-            </a:endParaRPr>
-          </a:p>
-        </p:txBody>
-      </p:sp>
-      <p:sp>
-        <p:nvSpPr>
-          <p:cNvPr id="4" name="Text 2"/>
+              <a:solidFill>
+                <a:schemeClr val="bg1"/>
+              </a:solidFill>
+              <a:latin typeface="Quattrocento Sans" panose="020B0502050000020003" pitchFamily="34" charset="0"/>
+            </a:endParaRPr>
+          </a:p>
+        </p:txBody>
+      </p:sp>
+      <p:sp>
+        <p:nvSpPr>
+          <p:cNvPr id="10" name="Text 8"/>
           <p:cNvSpPr/>
           <p:nvPr/>
         </p:nvSpPr>
@@ -18375,7 +21093,9 @@
           <a:prstGeom prst="rect">
             <a:avLst/>
           </a:prstGeom>
-          <a:noFill/>
+          <a:solidFill>
+            <a:srgbClr val="1B4332"/>
+          </a:solidFill>
           <a:ln/>
         </p:spPr>
         <p:txBody>
@@ -18388,318 +21108,20 @@
               </a:lnSpc>
             </a:pPr>
             <a:r>
-              <a:rPr lang="en-US" sz="1200" dirty="0">
-                <a:solidFill>
-                  <a:srgbClr val="FFFFFF"/>
-                </a:solidFill>
-                <a:latin typeface="Quattrocento Sans" panose="020B0502050000020003" pitchFamily="34" charset="0"/>
-                <a:ea typeface="QuattrocentoSans" pitchFamily="34" charset="-122"/>
-                <a:cs typeface="QuattrocentoSans" pitchFamily="34" charset="-120"/>
-              </a:rPr>
-              <a:t>CONTEXTO</a:t>
+              <a:rPr lang="en-US" sz="1200" b="1" dirty="0">
+                <a:solidFill>
+                  <a:schemeClr val="bg1"/>
+                </a:solidFill>
+                <a:latin typeface="Quattrocento Sans" panose="020B0502050000020003" pitchFamily="34" charset="0"/>
+                <a:ea typeface="QuattrocentoSans" pitchFamily="34" charset="-122"/>
+                <a:cs typeface="QuattrocentoSans" pitchFamily="34" charset="-120"/>
+              </a:rPr>
+              <a:t>DEVOPS</a:t>
             </a:r>
             <a:endParaRPr lang="en-US" sz="1200" dirty="0">
-              <a:latin typeface="Quattrocento Sans" panose="020B0502050000020003" pitchFamily="34" charset="0"/>
-            </a:endParaRPr>
-          </a:p>
-        </p:txBody>
-      </p:sp>
-      <p:sp>
-        <p:nvSpPr>
-          <p:cNvPr id="5" name="Text 3"/>
-          <p:cNvSpPr/>
-          <p:nvPr/>
-        </p:nvSpPr>
-        <p:spPr>
-          <a:xfrm>
-            <a:off x="2032000" y="0"/>
-            <a:ext cx="2032000" cy="508000"/>
-          </a:xfrm>
-          <a:prstGeom prst="rect">
-            <a:avLst/>
-          </a:prstGeom>
-          <a:noFill/>
-          <a:ln/>
-        </p:spPr>
-        <p:txBody>
-          <a:bodyPr wrap="none" lIns="0" tIns="0" rIns="0" bIns="0" rtlCol="0" anchor="ctr"/>
-          <a:lstStyle/>
-          <a:p>
-            <a:pPr algn="ctr">
-              <a:lnSpc>
-                <a:spcPct val="100000"/>
-              </a:lnSpc>
-            </a:pPr>
-            <a:r>
-              <a:rPr lang="en-US" sz="1200" dirty="0">
-                <a:solidFill>
-                  <a:srgbClr val="FFFFFF"/>
-                </a:solidFill>
-                <a:latin typeface="Quattrocento Sans" panose="020B0502050000020003" pitchFamily="34" charset="0"/>
-                <a:ea typeface="QuattrocentoSans" pitchFamily="34" charset="-122"/>
-                <a:cs typeface="QuattrocentoSans" pitchFamily="34" charset="-120"/>
-              </a:rPr>
-              <a:t>METODOLOGÍAS</a:t>
-            </a:r>
-            <a:endParaRPr lang="en-US" sz="1200" dirty="0">
-              <a:latin typeface="Quattrocento Sans" panose="020B0502050000020003" pitchFamily="34" charset="0"/>
-            </a:endParaRPr>
-          </a:p>
-        </p:txBody>
-      </p:sp>
-      <p:sp>
-        <p:nvSpPr>
-          <p:cNvPr id="6" name="Text 4"/>
-          <p:cNvSpPr/>
-          <p:nvPr/>
-        </p:nvSpPr>
-        <p:spPr>
-          <a:xfrm>
-            <a:off x="4064000" y="0"/>
-            <a:ext cx="2032000" cy="508000"/>
-          </a:xfrm>
-          <a:prstGeom prst="rect">
-            <a:avLst/>
-          </a:prstGeom>
-          <a:noFill/>
-          <a:ln/>
-        </p:spPr>
-        <p:txBody>
-          <a:bodyPr wrap="none" lIns="0" tIns="0" rIns="0" bIns="0" rtlCol="0" anchor="ctr"/>
-          <a:lstStyle/>
-          <a:p>
-            <a:pPr algn="ctr">
-              <a:lnSpc>
-                <a:spcPct val="100000"/>
-              </a:lnSpc>
-            </a:pPr>
-            <a:r>
-              <a:rPr lang="en-US" sz="1200" dirty="0">
-                <a:solidFill>
-                  <a:srgbClr val="FFFFFF"/>
-                </a:solidFill>
-                <a:latin typeface="Quattrocento Sans" panose="020B0502050000020003" pitchFamily="34" charset="0"/>
-                <a:ea typeface="QuattrocentoSans" pitchFamily="34" charset="-122"/>
-                <a:cs typeface="QuattrocentoSans" pitchFamily="34" charset="-120"/>
-              </a:rPr>
-              <a:t>BACKEND</a:t>
-            </a:r>
-            <a:endParaRPr lang="en-US" sz="1200" dirty="0">
-              <a:latin typeface="Quattrocento Sans" panose="020B0502050000020003" pitchFamily="34" charset="0"/>
-            </a:endParaRPr>
-          </a:p>
-        </p:txBody>
-      </p:sp>
-      <p:sp>
-        <p:nvSpPr>
-          <p:cNvPr id="7" name="Text 5"/>
-          <p:cNvSpPr/>
-          <p:nvPr/>
-        </p:nvSpPr>
-        <p:spPr>
-          <a:xfrm>
-            <a:off x="6096000" y="0"/>
-            <a:ext cx="2032000" cy="508000"/>
-          </a:xfrm>
-          <a:prstGeom prst="rect">
-            <a:avLst/>
-          </a:prstGeom>
-          <a:noFill/>
-          <a:ln/>
-        </p:spPr>
-        <p:txBody>
-          <a:bodyPr wrap="none" lIns="0" tIns="0" rIns="0" bIns="0" rtlCol="0" anchor="ctr"/>
-          <a:lstStyle/>
-          <a:p>
-            <a:pPr algn="ctr">
-              <a:lnSpc>
-                <a:spcPct val="100000"/>
-              </a:lnSpc>
-            </a:pPr>
-            <a:r>
-              <a:rPr lang="en-US" sz="1200" dirty="0">
-                <a:solidFill>
-                  <a:srgbClr val="FFFFFF"/>
-                </a:solidFill>
-                <a:latin typeface="Quattrocento Sans" panose="020B0502050000020003" pitchFamily="34" charset="0"/>
-                <a:ea typeface="QuattrocentoSans" pitchFamily="34" charset="-122"/>
-                <a:cs typeface="QuattrocentoSans" pitchFamily="34" charset="-120"/>
-              </a:rPr>
-              <a:t>FRONTEND</a:t>
-            </a:r>
-            <a:endParaRPr lang="en-US" sz="1200" dirty="0">
-              <a:latin typeface="Quattrocento Sans" panose="020B0502050000020003" pitchFamily="34" charset="0"/>
-            </a:endParaRPr>
-          </a:p>
-        </p:txBody>
-      </p:sp>
-      <p:sp>
-        <p:nvSpPr>
-          <p:cNvPr id="8" name="Text 6"/>
-          <p:cNvSpPr/>
-          <p:nvPr/>
-        </p:nvSpPr>
-        <p:spPr>
-          <a:xfrm>
-            <a:off x="8128000" y="0"/>
-            <a:ext cx="2032000" cy="508000"/>
-          </a:xfrm>
-          <a:prstGeom prst="rect">
-            <a:avLst/>
-          </a:prstGeom>
-          <a:noFill/>
-          <a:ln/>
-        </p:spPr>
-        <p:txBody>
-          <a:bodyPr wrap="none" lIns="0" tIns="0" rIns="0" bIns="0" rtlCol="0" anchor="ctr"/>
-          <a:lstStyle/>
-          <a:p>
-            <a:pPr algn="ctr">
-              <a:lnSpc>
-                <a:spcPct val="100000"/>
-              </a:lnSpc>
-            </a:pPr>
-            <a:r>
-              <a:rPr lang="en-US" sz="1200" dirty="0">
-                <a:solidFill>
-                  <a:srgbClr val="FFFFFF"/>
-                </a:solidFill>
-                <a:latin typeface="Quattrocento Sans" panose="020B0502050000020003" pitchFamily="34" charset="0"/>
-                <a:ea typeface="QuattrocentoSans" pitchFamily="34" charset="-122"/>
-                <a:cs typeface="QuattrocentoSans" pitchFamily="34" charset="-120"/>
-              </a:rPr>
-              <a:t>APIs</a:t>
-            </a:r>
-            <a:endParaRPr lang="en-US" sz="1200" dirty="0">
-              <a:latin typeface="Quattrocento Sans" panose="020B0502050000020003" pitchFamily="34" charset="0"/>
-            </a:endParaRPr>
-          </a:p>
-        </p:txBody>
-      </p:sp>
-      <p:sp>
-        <p:nvSpPr>
-          <p:cNvPr id="9" name="Text 7"/>
-          <p:cNvSpPr/>
-          <p:nvPr/>
-        </p:nvSpPr>
-        <p:spPr>
-          <a:xfrm>
-            <a:off x="10160000" y="0"/>
-            <a:ext cx="2032000" cy="508000"/>
-          </a:xfrm>
-          <a:prstGeom prst="rect">
-            <a:avLst/>
-          </a:prstGeom>
-          <a:noFill/>
-          <a:ln/>
-        </p:spPr>
-        <p:txBody>
-          <a:bodyPr wrap="none" lIns="0" tIns="0" rIns="0" bIns="0" rtlCol="0" anchor="ctr"/>
-          <a:lstStyle/>
-          <a:p>
-            <a:pPr algn="ctr">
-              <a:lnSpc>
-                <a:spcPct val="100000"/>
-              </a:lnSpc>
-            </a:pPr>
-            <a:r>
-              <a:rPr lang="en-US" sz="1200" dirty="0">
-                <a:solidFill>
-                  <a:srgbClr val="FFFFFF"/>
-                </a:solidFill>
-                <a:latin typeface="Quattrocento Sans" panose="020B0502050000020003" pitchFamily="34" charset="0"/>
-                <a:ea typeface="QuattrocentoSans" pitchFamily="34" charset="-122"/>
-                <a:cs typeface="QuattrocentoSans" pitchFamily="34" charset="-120"/>
-              </a:rPr>
-              <a:t>ARQUITECTURA</a:t>
-            </a:r>
-            <a:endParaRPr lang="en-US" sz="1200" dirty="0">
-              <a:latin typeface="Quattrocento Sans" panose="020B0502050000020003" pitchFamily="34" charset="0"/>
-            </a:endParaRPr>
-          </a:p>
-        </p:txBody>
-      </p:sp>
-      <p:sp>
-        <p:nvSpPr>
-          <p:cNvPr id="10" name="Text 8"/>
-          <p:cNvSpPr/>
-          <p:nvPr/>
-        </p:nvSpPr>
-        <p:spPr>
-          <a:xfrm>
-            <a:off x="12192000" y="0"/>
-            <a:ext cx="2032000" cy="508000"/>
-          </a:xfrm>
-          <a:prstGeom prst="rect">
-            <a:avLst/>
-          </a:prstGeom>
-          <a:noFill/>
-          <a:ln/>
-        </p:spPr>
-        <p:txBody>
-          <a:bodyPr wrap="none" lIns="0" tIns="0" rIns="0" bIns="0" rtlCol="0" anchor="ctr"/>
-          <a:lstStyle/>
-          <a:p>
-            <a:pPr algn="ctr">
-              <a:lnSpc>
-                <a:spcPct val="100000"/>
-              </a:lnSpc>
-            </a:pPr>
-            <a:r>
-              <a:rPr lang="en-US" sz="1200" b="1" dirty="0">
-                <a:solidFill>
-                  <a:srgbClr val="1B4332"/>
-                </a:solidFill>
-                <a:latin typeface="Quattrocento Sans" panose="020B0502050000020003" pitchFamily="34" charset="0"/>
-                <a:ea typeface="QuattrocentoSans" pitchFamily="34" charset="-122"/>
-                <a:cs typeface="QuattrocentoSans" pitchFamily="34" charset="-120"/>
-              </a:rPr>
-              <a:t>DEVOPS</a:t>
-            </a:r>
-            <a:endParaRPr lang="en-US" sz="1200" dirty="0">
-              <a:latin typeface="Quattrocento Sans" panose="020B0502050000020003" pitchFamily="34" charset="0"/>
-            </a:endParaRPr>
-          </a:p>
-        </p:txBody>
-      </p:sp>
-      <p:sp>
-        <p:nvSpPr>
-          <p:cNvPr id="11" name="Text 9"/>
-          <p:cNvSpPr/>
-          <p:nvPr/>
-        </p:nvSpPr>
-        <p:spPr>
-          <a:xfrm>
-            <a:off x="14224000" y="0"/>
-            <a:ext cx="2032000" cy="508000"/>
-          </a:xfrm>
-          <a:prstGeom prst="rect">
-            <a:avLst/>
-          </a:prstGeom>
-          <a:noFill/>
-          <a:ln/>
-        </p:spPr>
-        <p:txBody>
-          <a:bodyPr wrap="none" lIns="0" tIns="0" rIns="0" bIns="0" rtlCol="0" anchor="ctr"/>
-          <a:lstStyle/>
-          <a:p>
-            <a:pPr algn="ctr">
-              <a:lnSpc>
-                <a:spcPct val="100000"/>
-              </a:lnSpc>
-            </a:pPr>
-            <a:r>
-              <a:rPr lang="en-US" sz="1200" dirty="0">
-                <a:solidFill>
-                  <a:srgbClr val="FFFFFF"/>
-                </a:solidFill>
-                <a:latin typeface="Quattrocento Sans" panose="020B0502050000020003" pitchFamily="34" charset="0"/>
-                <a:ea typeface="QuattrocentoSans" pitchFamily="34" charset="-122"/>
-                <a:cs typeface="QuattrocentoSans" pitchFamily="34" charset="-120"/>
-              </a:rPr>
-              <a:t>VIABILIDAD</a:t>
-            </a:r>
-            <a:endParaRPr lang="en-US" sz="1200" dirty="0">
+              <a:solidFill>
+                <a:schemeClr val="bg1"/>
+              </a:solidFill>
               <a:latin typeface="Quattrocento Sans" panose="020B0502050000020003" pitchFamily="34" charset="0"/>
             </a:endParaRPr>
           </a:p>
@@ -21327,6 +23749,53 @@
           </a:p>
         </p:txBody>
       </p:sp>
+      <p:pic>
+        <p:nvPicPr>
+          <p:cNvPr id="5122" name="Picture 2" descr="Devops - Iconos gratis de flechas">
+            <a:extLst>
+              <a:ext uri="{FF2B5EF4-FFF2-40B4-BE49-F238E27FC236}">
+                <a16:creationId xmlns:a16="http://schemas.microsoft.com/office/drawing/2014/main" id="{57DB2448-BE8B-FB0A-8CE4-C5DB43EDBEEF}"/>
+              </a:ext>
+            </a:extLst>
+          </p:cNvPr>
+          <p:cNvPicPr>
+            <a:picLocks noChangeAspect="1" noChangeArrowheads="1"/>
+          </p:cNvPicPr>
+          <p:nvPr/>
+        </p:nvPicPr>
+        <p:blipFill>
+          <a:blip r:embed="rId3">
+            <a:extLst>
+              <a:ext uri="{28A0092B-C50C-407E-A947-70E740481C1C}">
+                <a14:useLocalDpi xmlns:a14="http://schemas.microsoft.com/office/drawing/2010/main" val="0"/>
+              </a:ext>
+            </a:extLst>
+          </a:blip>
+          <a:srcRect/>
+          <a:stretch>
+            <a:fillRect/>
+          </a:stretch>
+        </p:blipFill>
+        <p:spPr bwMode="auto">
+          <a:xfrm>
+            <a:off x="260350" y="704850"/>
+            <a:ext cx="419100" cy="419100"/>
+          </a:xfrm>
+          <a:prstGeom prst="rect">
+            <a:avLst/>
+          </a:prstGeom>
+          <a:noFill/>
+          <a:extLst>
+            <a:ext uri="{909E8E84-426E-40DD-AFC4-6F175D3DCCD1}">
+              <a14:hiddenFill xmlns:a14="http://schemas.microsoft.com/office/drawing/2010/main">
+                <a:solidFill>
+                  <a:srgbClr val="FFFFFF"/>
+                </a:solidFill>
+              </a14:hiddenFill>
+            </a:ext>
+          </a:extLst>
+        </p:spPr>
+      </p:pic>
     </p:spTree>
   </p:cSld>
   <p:clrMapOvr>
@@ -21365,14 +23834,14 @@
       </p:grpSpPr>
       <p:sp>
         <p:nvSpPr>
-          <p:cNvPr id="2" name="Shape 0"/>
-          <p:cNvSpPr/>
-          <p:nvPr/>
-        </p:nvSpPr>
-        <p:spPr>
-          <a:xfrm>
-            <a:off x="0" y="0"/>
-            <a:ext cx="16256000" cy="508000"/>
+          <p:cNvPr id="3" name="Shape 1"/>
+          <p:cNvSpPr/>
+          <p:nvPr/>
+        </p:nvSpPr>
+        <p:spPr>
+          <a:xfrm>
+            <a:off x="76200" y="76200"/>
+            <a:ext cx="1879600" cy="355600"/>
           </a:xfrm>
           <a:prstGeom prst="rect">
             <a:avLst/>
@@ -21387,45 +23856,17 @@
           <a:lstStyle/>
           <a:p>
             <a:endParaRPr lang="es-ES">
-              <a:latin typeface="Quattrocento Sans" panose="020B0502050000020003" pitchFamily="34" charset="0"/>
-            </a:endParaRPr>
-          </a:p>
-        </p:txBody>
-      </p:sp>
-      <p:sp>
-        <p:nvSpPr>
-          <p:cNvPr id="3" name="Shape 1"/>
-          <p:cNvSpPr/>
-          <p:nvPr/>
-        </p:nvSpPr>
-        <p:spPr>
-          <a:xfrm>
-            <a:off x="14300200" y="76200"/>
-            <a:ext cx="1879600" cy="355600"/>
-          </a:xfrm>
-          <a:prstGeom prst="roundRect">
-            <a:avLst>
-              <a:gd name="adj" fmla="val 8000"/>
-            </a:avLst>
-          </a:prstGeom>
-          <a:solidFill>
-            <a:srgbClr val="FFFFFF"/>
-          </a:solidFill>
-          <a:ln/>
-        </p:spPr>
-        <p:txBody>
-          <a:bodyPr/>
-          <a:lstStyle/>
-          <a:p>
-            <a:endParaRPr lang="es-ES">
-              <a:latin typeface="Quattrocento Sans" panose="020B0502050000020003" pitchFamily="34" charset="0"/>
-            </a:endParaRPr>
-          </a:p>
-        </p:txBody>
-      </p:sp>
-      <p:sp>
-        <p:nvSpPr>
-          <p:cNvPr id="4" name="Text 2"/>
+              <a:solidFill>
+                <a:schemeClr val="bg1"/>
+              </a:solidFill>
+              <a:latin typeface="Quattrocento Sans" panose="020B0502050000020003" pitchFamily="34" charset="0"/>
+            </a:endParaRPr>
+          </a:p>
+        </p:txBody>
+      </p:sp>
+      <p:sp>
+        <p:nvSpPr>
+          <p:cNvPr id="11" name="Text 9"/>
           <p:cNvSpPr/>
           <p:nvPr/>
         </p:nvSpPr>
@@ -21437,7 +23878,9 @@
           <a:prstGeom prst="rect">
             <a:avLst/>
           </a:prstGeom>
-          <a:noFill/>
+          <a:solidFill>
+            <a:srgbClr val="1B4332"/>
+          </a:solidFill>
           <a:ln/>
         </p:spPr>
         <p:txBody>
@@ -21450,318 +23893,20 @@
               </a:lnSpc>
             </a:pPr>
             <a:r>
-              <a:rPr lang="en-US" sz="1200" dirty="0">
-                <a:solidFill>
-                  <a:srgbClr val="FFFFFF"/>
-                </a:solidFill>
-                <a:latin typeface="Quattrocento Sans" panose="020B0502050000020003" pitchFamily="34" charset="0"/>
-                <a:ea typeface="QuattrocentoSans" pitchFamily="34" charset="-122"/>
-                <a:cs typeface="QuattrocentoSans" pitchFamily="34" charset="-120"/>
-              </a:rPr>
-              <a:t>CONTEXTO</a:t>
+              <a:rPr lang="en-US" sz="1200" b="1" dirty="0">
+                <a:solidFill>
+                  <a:schemeClr val="bg1"/>
+                </a:solidFill>
+                <a:latin typeface="Quattrocento Sans" panose="020B0502050000020003" pitchFamily="34" charset="0"/>
+                <a:ea typeface="QuattrocentoSans" pitchFamily="34" charset="-122"/>
+                <a:cs typeface="QuattrocentoSans" pitchFamily="34" charset="-120"/>
+              </a:rPr>
+              <a:t>VIABILIDAD</a:t>
             </a:r>
             <a:endParaRPr lang="en-US" sz="1200" dirty="0">
-              <a:latin typeface="Quattrocento Sans" panose="020B0502050000020003" pitchFamily="34" charset="0"/>
-            </a:endParaRPr>
-          </a:p>
-        </p:txBody>
-      </p:sp>
-      <p:sp>
-        <p:nvSpPr>
-          <p:cNvPr id="5" name="Text 3"/>
-          <p:cNvSpPr/>
-          <p:nvPr/>
-        </p:nvSpPr>
-        <p:spPr>
-          <a:xfrm>
-            <a:off x="2032000" y="0"/>
-            <a:ext cx="2032000" cy="508000"/>
-          </a:xfrm>
-          <a:prstGeom prst="rect">
-            <a:avLst/>
-          </a:prstGeom>
-          <a:noFill/>
-          <a:ln/>
-        </p:spPr>
-        <p:txBody>
-          <a:bodyPr wrap="none" lIns="0" tIns="0" rIns="0" bIns="0" rtlCol="0" anchor="ctr"/>
-          <a:lstStyle/>
-          <a:p>
-            <a:pPr algn="ctr">
-              <a:lnSpc>
-                <a:spcPct val="100000"/>
-              </a:lnSpc>
-            </a:pPr>
-            <a:r>
-              <a:rPr lang="en-US" sz="1200" dirty="0">
-                <a:solidFill>
-                  <a:srgbClr val="FFFFFF"/>
-                </a:solidFill>
-                <a:latin typeface="Quattrocento Sans" panose="020B0502050000020003" pitchFamily="34" charset="0"/>
-                <a:ea typeface="QuattrocentoSans" pitchFamily="34" charset="-122"/>
-                <a:cs typeface="QuattrocentoSans" pitchFamily="34" charset="-120"/>
-              </a:rPr>
-              <a:t>METODOLOGÍAS</a:t>
-            </a:r>
-            <a:endParaRPr lang="en-US" sz="1200" dirty="0">
-              <a:latin typeface="Quattrocento Sans" panose="020B0502050000020003" pitchFamily="34" charset="0"/>
-            </a:endParaRPr>
-          </a:p>
-        </p:txBody>
-      </p:sp>
-      <p:sp>
-        <p:nvSpPr>
-          <p:cNvPr id="6" name="Text 4"/>
-          <p:cNvSpPr/>
-          <p:nvPr/>
-        </p:nvSpPr>
-        <p:spPr>
-          <a:xfrm>
-            <a:off x="4064000" y="0"/>
-            <a:ext cx="2032000" cy="508000"/>
-          </a:xfrm>
-          <a:prstGeom prst="rect">
-            <a:avLst/>
-          </a:prstGeom>
-          <a:noFill/>
-          <a:ln/>
-        </p:spPr>
-        <p:txBody>
-          <a:bodyPr wrap="none" lIns="0" tIns="0" rIns="0" bIns="0" rtlCol="0" anchor="ctr"/>
-          <a:lstStyle/>
-          <a:p>
-            <a:pPr algn="ctr">
-              <a:lnSpc>
-                <a:spcPct val="100000"/>
-              </a:lnSpc>
-            </a:pPr>
-            <a:r>
-              <a:rPr lang="en-US" sz="1200" dirty="0">
-                <a:solidFill>
-                  <a:srgbClr val="FFFFFF"/>
-                </a:solidFill>
-                <a:latin typeface="Quattrocento Sans" panose="020B0502050000020003" pitchFamily="34" charset="0"/>
-                <a:ea typeface="QuattrocentoSans" pitchFamily="34" charset="-122"/>
-                <a:cs typeface="QuattrocentoSans" pitchFamily="34" charset="-120"/>
-              </a:rPr>
-              <a:t>BACKEND</a:t>
-            </a:r>
-            <a:endParaRPr lang="en-US" sz="1200" dirty="0">
-              <a:latin typeface="Quattrocento Sans" panose="020B0502050000020003" pitchFamily="34" charset="0"/>
-            </a:endParaRPr>
-          </a:p>
-        </p:txBody>
-      </p:sp>
-      <p:sp>
-        <p:nvSpPr>
-          <p:cNvPr id="7" name="Text 5"/>
-          <p:cNvSpPr/>
-          <p:nvPr/>
-        </p:nvSpPr>
-        <p:spPr>
-          <a:xfrm>
-            <a:off x="6096000" y="0"/>
-            <a:ext cx="2032000" cy="508000"/>
-          </a:xfrm>
-          <a:prstGeom prst="rect">
-            <a:avLst/>
-          </a:prstGeom>
-          <a:noFill/>
-          <a:ln/>
-        </p:spPr>
-        <p:txBody>
-          <a:bodyPr wrap="none" lIns="0" tIns="0" rIns="0" bIns="0" rtlCol="0" anchor="ctr"/>
-          <a:lstStyle/>
-          <a:p>
-            <a:pPr algn="ctr">
-              <a:lnSpc>
-                <a:spcPct val="100000"/>
-              </a:lnSpc>
-            </a:pPr>
-            <a:r>
-              <a:rPr lang="en-US" sz="1200" dirty="0">
-                <a:solidFill>
-                  <a:srgbClr val="FFFFFF"/>
-                </a:solidFill>
-                <a:latin typeface="Quattrocento Sans" panose="020B0502050000020003" pitchFamily="34" charset="0"/>
-                <a:ea typeface="QuattrocentoSans" pitchFamily="34" charset="-122"/>
-                <a:cs typeface="QuattrocentoSans" pitchFamily="34" charset="-120"/>
-              </a:rPr>
-              <a:t>FRONTEND</a:t>
-            </a:r>
-            <a:endParaRPr lang="en-US" sz="1200" dirty="0">
-              <a:latin typeface="Quattrocento Sans" panose="020B0502050000020003" pitchFamily="34" charset="0"/>
-            </a:endParaRPr>
-          </a:p>
-        </p:txBody>
-      </p:sp>
-      <p:sp>
-        <p:nvSpPr>
-          <p:cNvPr id="8" name="Text 6"/>
-          <p:cNvSpPr/>
-          <p:nvPr/>
-        </p:nvSpPr>
-        <p:spPr>
-          <a:xfrm>
-            <a:off x="8128000" y="0"/>
-            <a:ext cx="2032000" cy="508000"/>
-          </a:xfrm>
-          <a:prstGeom prst="rect">
-            <a:avLst/>
-          </a:prstGeom>
-          <a:noFill/>
-          <a:ln/>
-        </p:spPr>
-        <p:txBody>
-          <a:bodyPr wrap="none" lIns="0" tIns="0" rIns="0" bIns="0" rtlCol="0" anchor="ctr"/>
-          <a:lstStyle/>
-          <a:p>
-            <a:pPr algn="ctr">
-              <a:lnSpc>
-                <a:spcPct val="100000"/>
-              </a:lnSpc>
-            </a:pPr>
-            <a:r>
-              <a:rPr lang="en-US" sz="1200" dirty="0">
-                <a:solidFill>
-                  <a:srgbClr val="FFFFFF"/>
-                </a:solidFill>
-                <a:latin typeface="Quattrocento Sans" panose="020B0502050000020003" pitchFamily="34" charset="0"/>
-                <a:ea typeface="QuattrocentoSans" pitchFamily="34" charset="-122"/>
-                <a:cs typeface="QuattrocentoSans" pitchFamily="34" charset="-120"/>
-              </a:rPr>
-              <a:t>APIs</a:t>
-            </a:r>
-            <a:endParaRPr lang="en-US" sz="1200" dirty="0">
-              <a:latin typeface="Quattrocento Sans" panose="020B0502050000020003" pitchFamily="34" charset="0"/>
-            </a:endParaRPr>
-          </a:p>
-        </p:txBody>
-      </p:sp>
-      <p:sp>
-        <p:nvSpPr>
-          <p:cNvPr id="9" name="Text 7"/>
-          <p:cNvSpPr/>
-          <p:nvPr/>
-        </p:nvSpPr>
-        <p:spPr>
-          <a:xfrm>
-            <a:off x="10160000" y="0"/>
-            <a:ext cx="2032000" cy="508000"/>
-          </a:xfrm>
-          <a:prstGeom prst="rect">
-            <a:avLst/>
-          </a:prstGeom>
-          <a:noFill/>
-          <a:ln/>
-        </p:spPr>
-        <p:txBody>
-          <a:bodyPr wrap="none" lIns="0" tIns="0" rIns="0" bIns="0" rtlCol="0" anchor="ctr"/>
-          <a:lstStyle/>
-          <a:p>
-            <a:pPr algn="ctr">
-              <a:lnSpc>
-                <a:spcPct val="100000"/>
-              </a:lnSpc>
-            </a:pPr>
-            <a:r>
-              <a:rPr lang="en-US" sz="1200" dirty="0">
-                <a:solidFill>
-                  <a:srgbClr val="FFFFFF"/>
-                </a:solidFill>
-                <a:latin typeface="Quattrocento Sans" panose="020B0502050000020003" pitchFamily="34" charset="0"/>
-                <a:ea typeface="QuattrocentoSans" pitchFamily="34" charset="-122"/>
-                <a:cs typeface="QuattrocentoSans" pitchFamily="34" charset="-120"/>
-              </a:rPr>
-              <a:t>ARQUITECTURA</a:t>
-            </a:r>
-            <a:endParaRPr lang="en-US" sz="1200" dirty="0">
-              <a:latin typeface="Quattrocento Sans" panose="020B0502050000020003" pitchFamily="34" charset="0"/>
-            </a:endParaRPr>
-          </a:p>
-        </p:txBody>
-      </p:sp>
-      <p:sp>
-        <p:nvSpPr>
-          <p:cNvPr id="10" name="Text 8"/>
-          <p:cNvSpPr/>
-          <p:nvPr/>
-        </p:nvSpPr>
-        <p:spPr>
-          <a:xfrm>
-            <a:off x="12192000" y="0"/>
-            <a:ext cx="2032000" cy="508000"/>
-          </a:xfrm>
-          <a:prstGeom prst="rect">
-            <a:avLst/>
-          </a:prstGeom>
-          <a:noFill/>
-          <a:ln/>
-        </p:spPr>
-        <p:txBody>
-          <a:bodyPr wrap="none" lIns="0" tIns="0" rIns="0" bIns="0" rtlCol="0" anchor="ctr"/>
-          <a:lstStyle/>
-          <a:p>
-            <a:pPr algn="ctr">
-              <a:lnSpc>
-                <a:spcPct val="100000"/>
-              </a:lnSpc>
-            </a:pPr>
-            <a:r>
-              <a:rPr lang="en-US" sz="1200" dirty="0">
-                <a:solidFill>
-                  <a:srgbClr val="FFFFFF"/>
-                </a:solidFill>
-                <a:latin typeface="Quattrocento Sans" panose="020B0502050000020003" pitchFamily="34" charset="0"/>
-                <a:ea typeface="QuattrocentoSans" pitchFamily="34" charset="-122"/>
-                <a:cs typeface="QuattrocentoSans" pitchFamily="34" charset="-120"/>
-              </a:rPr>
-              <a:t>DEVOPS</a:t>
-            </a:r>
-            <a:endParaRPr lang="en-US" sz="1200" dirty="0">
-              <a:latin typeface="Quattrocento Sans" panose="020B0502050000020003" pitchFamily="34" charset="0"/>
-            </a:endParaRPr>
-          </a:p>
-        </p:txBody>
-      </p:sp>
-      <p:sp>
-        <p:nvSpPr>
-          <p:cNvPr id="11" name="Text 9"/>
-          <p:cNvSpPr/>
-          <p:nvPr/>
-        </p:nvSpPr>
-        <p:spPr>
-          <a:xfrm>
-            <a:off x="14224000" y="0"/>
-            <a:ext cx="2032000" cy="508000"/>
-          </a:xfrm>
-          <a:prstGeom prst="rect">
-            <a:avLst/>
-          </a:prstGeom>
-          <a:noFill/>
-          <a:ln/>
-        </p:spPr>
-        <p:txBody>
-          <a:bodyPr wrap="none" lIns="0" tIns="0" rIns="0" bIns="0" rtlCol="0" anchor="ctr"/>
-          <a:lstStyle/>
-          <a:p>
-            <a:pPr algn="ctr">
-              <a:lnSpc>
-                <a:spcPct val="100000"/>
-              </a:lnSpc>
-            </a:pPr>
-            <a:r>
-              <a:rPr lang="en-US" sz="1200" b="1" dirty="0">
-                <a:solidFill>
-                  <a:srgbClr val="1B4332"/>
-                </a:solidFill>
-                <a:latin typeface="Quattrocento Sans" panose="020B0502050000020003" pitchFamily="34" charset="0"/>
-                <a:ea typeface="QuattrocentoSans" pitchFamily="34" charset="-122"/>
-                <a:cs typeface="QuattrocentoSans" pitchFamily="34" charset="-120"/>
-              </a:rPr>
-              <a:t>VIABILIDAD</a:t>
-            </a:r>
-            <a:endParaRPr lang="en-US" sz="1200" dirty="0">
+              <a:solidFill>
+                <a:schemeClr val="bg1"/>
+              </a:solidFill>
               <a:latin typeface="Quattrocento Sans" panose="020B0502050000020003" pitchFamily="34" charset="0"/>
             </a:endParaRPr>
           </a:p>
@@ -22681,6 +24826,53 @@
           </a:p>
         </p:txBody>
       </p:sp>
+      <p:pic>
+        <p:nvPicPr>
+          <p:cNvPr id="3074" name="Picture 2" descr="▷ Desarrollo de Proyectos Fotovoltaicos ☀️ Grupo RDS">
+            <a:extLst>
+              <a:ext uri="{FF2B5EF4-FFF2-40B4-BE49-F238E27FC236}">
+                <a16:creationId xmlns:a16="http://schemas.microsoft.com/office/drawing/2014/main" id="{054D788B-B9DB-35BB-64B1-EA33340B6449}"/>
+              </a:ext>
+            </a:extLst>
+          </p:cNvPr>
+          <p:cNvPicPr>
+            <a:picLocks noChangeAspect="1" noChangeArrowheads="1"/>
+          </p:cNvPicPr>
+          <p:nvPr/>
+        </p:nvPicPr>
+        <p:blipFill>
+          <a:blip r:embed="rId4">
+            <a:extLst>
+              <a:ext uri="{28A0092B-C50C-407E-A947-70E740481C1C}">
+                <a14:useLocalDpi xmlns:a14="http://schemas.microsoft.com/office/drawing/2010/main" val="0"/>
+              </a:ext>
+            </a:extLst>
+          </a:blip>
+          <a:srcRect/>
+          <a:stretch>
+            <a:fillRect/>
+          </a:stretch>
+        </p:blipFill>
+        <p:spPr bwMode="auto">
+          <a:xfrm>
+            <a:off x="304800" y="711200"/>
+            <a:ext cx="381000" cy="381000"/>
+          </a:xfrm>
+          <a:prstGeom prst="rect">
+            <a:avLst/>
+          </a:prstGeom>
+          <a:noFill/>
+          <a:extLst>
+            <a:ext uri="{909E8E84-426E-40DD-AFC4-6F175D3DCCD1}">
+              <a14:hiddenFill xmlns:a14="http://schemas.microsoft.com/office/drawing/2010/main">
+                <a:solidFill>
+                  <a:srgbClr val="FFFFFF"/>
+                </a:solidFill>
+              </a14:hiddenFill>
+            </a:ext>
+          </a:extLst>
+        </p:spPr>
+      </p:pic>
     </p:spTree>
   </p:cSld>
   <p:clrMapOvr>

--- a/documentos/YourTree.pptx
+++ b/documentos/YourTree.pptx
@@ -2957,7 +2957,7 @@
           <a:bodyPr/>
           <a:lstStyle/>
           <a:p>
-            <a:endParaRPr lang="es-ES">
+            <a:endParaRPr lang="es-ES" noProof="0" dirty="0">
               <a:solidFill>
                 <a:schemeClr val="bg1"/>
               </a:solidFill>
@@ -3001,13 +3001,13 @@
               </a:lnSpc>
             </a:pPr>
             <a:r>
-              <a:rPr lang="en-US" sz="1200" b="1" dirty="0">
+              <a:rPr lang="es-ES" sz="1200" b="1" noProof="0" dirty="0">
                 <a:solidFill>
                   <a:schemeClr val="bg1"/>
                 </a:solidFill>
                 <a:latin typeface="Quattrocento Sans" panose="020B0502050000020003" pitchFamily="34" charset="0"/>
               </a:rPr>
-              <a:t>FUNCIONABILIDAD</a:t>
+              <a:t>USOS Y FUNCIONABILIDAD</a:t>
             </a:r>
           </a:p>
         </p:txBody>
@@ -3041,7 +3041,7 @@
           <a:bodyPr/>
           <a:lstStyle/>
           <a:p>
-            <a:endParaRPr lang="es-ES">
+            <a:endParaRPr lang="es-ES" noProof="0" dirty="0">
               <a:latin typeface="Quattrocento Sans" panose="020B0502050000020003" pitchFamily="34" charset="0"/>
             </a:endParaRPr>
           </a:p>
@@ -3080,7 +3080,7 @@
               </a:lnSpc>
             </a:pPr>
             <a:r>
-              <a:rPr lang="en-US" sz="2800" b="1" dirty="0">
+              <a:rPr lang="es-ES" sz="2800" b="1" noProof="0" dirty="0">
                 <a:solidFill>
                   <a:srgbClr val="1B4332"/>
                 </a:solidFill>
@@ -3088,9 +3088,9 @@
                 <a:ea typeface="QuattrocentoSans" pitchFamily="34" charset="-122"/>
                 <a:cs typeface="QuattrocentoSans" pitchFamily="34" charset="-120"/>
               </a:rPr>
-              <a:t>Metodologías de Gestión y Diseño</a:t>
-            </a:r>
-            <a:endParaRPr lang="en-US" sz="2800" dirty="0">
+              <a:t>Usos de la aplicación</a:t>
+            </a:r>
+            <a:endParaRPr lang="es-ES" sz="2800" noProof="0" dirty="0">
               <a:latin typeface="Quattrocento Sans" panose="020B0502050000020003" pitchFamily="34" charset="0"/>
             </a:endParaRPr>
           </a:p>
@@ -3132,118 +3132,7 @@
           <a:bodyPr/>
           <a:lstStyle/>
           <a:p>
-            <a:endParaRPr lang="es-ES">
-              <a:latin typeface="Quattrocento Sans" panose="020B0502050000020003" pitchFamily="34" charset="0"/>
-            </a:endParaRPr>
-          </a:p>
-        </p:txBody>
-      </p:sp>
-      <p:sp>
-        <p:nvSpPr>
-          <p:cNvPr id="15" name="Shape 13">
-            <a:extLst>
-              <a:ext uri="{FF2B5EF4-FFF2-40B4-BE49-F238E27FC236}">
-                <a16:creationId xmlns:a16="http://schemas.microsoft.com/office/drawing/2014/main" id="{89E7D2CC-C1C2-6EA5-6E58-C1649B970F44}"/>
-              </a:ext>
-            </a:extLst>
-          </p:cNvPr>
-          <p:cNvSpPr/>
-          <p:nvPr/>
-        </p:nvSpPr>
-        <p:spPr>
-          <a:xfrm>
-            <a:off x="1044575" y="1587500"/>
-            <a:ext cx="400050" cy="457200"/>
-          </a:xfrm>
-          <a:custGeom>
-            <a:avLst/>
-            <a:gdLst/>
-            <a:ahLst/>
-            <a:cxnLst/>
-            <a:rect l="l" t="t" r="r" b="b"/>
-            <a:pathLst>
-              <a:path w="400050" h="457200">
-                <a:moveTo>
-                  <a:pt x="0" y="85725"/>
-                </a:moveTo>
-                <a:cubicBezTo>
-                  <a:pt x="0" y="54203"/>
-                  <a:pt x="25628" y="28575"/>
-                  <a:pt x="57150" y="28575"/>
-                </a:cubicBezTo>
-                <a:lnTo>
-                  <a:pt x="342900" y="28575"/>
-                </a:lnTo>
-                <a:cubicBezTo>
-                  <a:pt x="374422" y="28575"/>
-                  <a:pt x="400050" y="54203"/>
-                  <a:pt x="400050" y="85725"/>
-                </a:cubicBezTo>
-                <a:lnTo>
-                  <a:pt x="400050" y="371475"/>
-                </a:lnTo>
-                <a:cubicBezTo>
-                  <a:pt x="400050" y="402997"/>
-                  <a:pt x="374422" y="428625"/>
-                  <a:pt x="342900" y="428625"/>
-                </a:cubicBezTo>
-                <a:lnTo>
-                  <a:pt x="57150" y="428625"/>
-                </a:lnTo>
-                <a:cubicBezTo>
-                  <a:pt x="25628" y="428625"/>
-                  <a:pt x="0" y="402997"/>
-                  <a:pt x="0" y="371475"/>
-                </a:cubicBezTo>
-                <a:lnTo>
-                  <a:pt x="0" y="85725"/>
-                </a:lnTo>
-                <a:close/>
-                <a:moveTo>
-                  <a:pt x="57150" y="142875"/>
-                </a:moveTo>
-                <a:lnTo>
-                  <a:pt x="57150" y="371475"/>
-                </a:lnTo>
-                <a:lnTo>
-                  <a:pt x="171450" y="371475"/>
-                </a:lnTo>
-                <a:lnTo>
-                  <a:pt x="171450" y="142875"/>
-                </a:lnTo>
-                <a:lnTo>
-                  <a:pt x="57150" y="142875"/>
-                </a:lnTo>
-                <a:close/>
-                <a:moveTo>
-                  <a:pt x="342900" y="142875"/>
-                </a:moveTo>
-                <a:lnTo>
-                  <a:pt x="228600" y="142875"/>
-                </a:lnTo>
-                <a:lnTo>
-                  <a:pt x="228600" y="371475"/>
-                </a:lnTo>
-                <a:lnTo>
-                  <a:pt x="342900" y="371475"/>
-                </a:lnTo>
-                <a:lnTo>
-                  <a:pt x="342900" y="142875"/>
-                </a:lnTo>
-                <a:close/>
-              </a:path>
-            </a:pathLst>
-          </a:custGeom>
-          <a:solidFill>
-            <a:srgbClr val="2A9D8F"/>
-          </a:solidFill>
-          <a:ln/>
-        </p:spPr>
-        <p:txBody>
-          <a:bodyPr/>
-          <a:lstStyle/>
-          <a:p>
-            <a:endParaRPr lang="es-ES">
+            <a:endParaRPr lang="es-ES" noProof="0" dirty="0">
               <a:latin typeface="Quattrocento Sans" panose="020B0502050000020003" pitchFamily="34" charset="0"/>
             </a:endParaRPr>
           </a:p>
@@ -3282,7 +3171,7 @@
               </a:lnSpc>
             </a:pPr>
             <a:r>
-              <a:rPr lang="en-US" sz="2000" b="1" dirty="0">
+              <a:rPr lang="es-ES" sz="2000" b="1" noProof="0" dirty="0">
                 <a:solidFill>
                   <a:srgbClr val="1B4332"/>
                 </a:solidFill>
@@ -3290,9 +3179,9 @@
                 <a:ea typeface="Quattrocento Sans" pitchFamily="34" charset="-122"/>
                 <a:cs typeface="Quattrocento Sans" pitchFamily="34" charset="-120"/>
               </a:rPr>
-              <a:t>Kanban &amp; Jira</a:t>
-            </a:r>
-            <a:endParaRPr lang="en-US" sz="1600" dirty="0">
+              <a:t>Difusión</a:t>
+            </a:r>
+            <a:endParaRPr lang="es-ES" sz="1600" noProof="0" dirty="0">
               <a:latin typeface="Quattrocento Sans" panose="020B0502050000020003" pitchFamily="34" charset="0"/>
             </a:endParaRPr>
           </a:p>
@@ -3331,7 +3220,7 @@
               </a:lnSpc>
             </a:pPr>
             <a:r>
-              <a:rPr lang="en-US" sz="1500" dirty="0">
+              <a:rPr lang="es-ES" sz="1500" noProof="0" dirty="0">
                 <a:solidFill>
                   <a:srgbClr val="212529"/>
                 </a:solidFill>
@@ -3339,9 +3228,27 @@
                 <a:ea typeface="QuattrocentoSans" pitchFamily="34" charset="-122"/>
                 <a:cs typeface="QuattrocentoSans" pitchFamily="34" charset="-120"/>
               </a:rPr>
-              <a:t>Control del flujo mediante estados:</a:t>
-            </a:r>
-            <a:endParaRPr lang="en-US" sz="1800" dirty="0">
+              <a:t>Darse a conocer mediante distintos lugares.</a:t>
+            </a:r>
+          </a:p>
+          <a:p>
+            <a:pPr>
+              <a:lnSpc>
+                <a:spcPct val="145000"/>
+              </a:lnSpc>
+            </a:pPr>
+            <a:r>
+              <a:rPr lang="es-ES" sz="1500" noProof="0" dirty="0">
+                <a:solidFill>
+                  <a:srgbClr val="212529"/>
+                </a:solidFill>
+                <a:latin typeface="Quattrocento Sans" panose="020B0502050000020003" pitchFamily="34" charset="0"/>
+                <a:ea typeface="QuattrocentoSans" pitchFamily="34" charset="-122"/>
+                <a:cs typeface="QuattrocentoSans" pitchFamily="34" charset="-120"/>
+              </a:rPr>
+              <a:t>Permite:</a:t>
+            </a:r>
+            <a:endParaRPr lang="es-ES" sz="1800" noProof="0" dirty="0">
               <a:latin typeface="Quattrocento Sans" panose="020B0502050000020003" pitchFamily="34" charset="0"/>
             </a:endParaRPr>
           </a:p>
@@ -3357,30 +3264,15 @@
               <a:buChar char="•"/>
             </a:pPr>
             <a:r>
-              <a:rPr lang="en-US" sz="1500" b="1" dirty="0">
+              <a:rPr lang="es-ES" sz="1500" noProof="0" dirty="0">
                 <a:solidFill>
                   <a:srgbClr val="212529"/>
                 </a:solidFill>
                 <a:latin typeface="Quattrocento Sans" panose="020B0502050000020003" pitchFamily="34" charset="0"/>
                 <a:ea typeface="QuattrocentoSans" pitchFamily="34" charset="-122"/>
-                <a:cs typeface="QuattrocentoSans" pitchFamily="34" charset="-120"/>
-              </a:rPr>
-              <a:t>To-Do</a:t>
-            </a:r>
-            <a:r>
-              <a:rPr lang="en-US" sz="1500" dirty="0">
-                <a:solidFill>
-                  <a:srgbClr val="212529"/>
-                </a:solidFill>
-                <a:latin typeface="Quattrocento Sans" panose="020B0502050000020003" pitchFamily="34" charset="0"/>
-                <a:ea typeface="QuattrocentoSans" pitchFamily="34" charset="-122"/>
-                <a:cs typeface="QuattrocentoSans" pitchFamily="34" charset="-120"/>
-              </a:rPr>
-              <a:t>: Por Hacer</a:t>
-            </a:r>
-            <a:endParaRPr lang="en-US" sz="1800" dirty="0">
-              <a:latin typeface="Quattrocento Sans" panose="020B0502050000020003" pitchFamily="34" charset="0"/>
-            </a:endParaRPr>
+              </a:rPr>
+              <a:t>Dar a conocer tu perfil</a:t>
+            </a:r>
           </a:p>
           <a:p>
             <a:pPr marL="285750" indent="-285750">
@@ -3394,30 +3286,15 @@
               <a:buChar char="•"/>
             </a:pPr>
             <a:r>
-              <a:rPr lang="en-US" sz="1500" b="1" dirty="0">
+              <a:rPr lang="es-ES" sz="1500" noProof="0" dirty="0">
                 <a:solidFill>
                   <a:srgbClr val="212529"/>
                 </a:solidFill>
                 <a:latin typeface="Quattrocento Sans" panose="020B0502050000020003" pitchFamily="34" charset="0"/>
                 <a:ea typeface="QuattrocentoSans" pitchFamily="34" charset="-122"/>
-                <a:cs typeface="QuattrocentoSans" pitchFamily="34" charset="-120"/>
-              </a:rPr>
-              <a:t>In Progress</a:t>
-            </a:r>
-            <a:r>
-              <a:rPr lang="en-US" sz="1500" dirty="0">
-                <a:solidFill>
-                  <a:srgbClr val="212529"/>
-                </a:solidFill>
-                <a:latin typeface="Quattrocento Sans" panose="020B0502050000020003" pitchFamily="34" charset="0"/>
-                <a:ea typeface="QuattrocentoSans" pitchFamily="34" charset="-122"/>
-                <a:cs typeface="QuattrocentoSans" pitchFamily="34" charset="-120"/>
-              </a:rPr>
-              <a:t>: En cursor</a:t>
-            </a:r>
-            <a:endParaRPr lang="en-US" sz="1800" dirty="0">
-              <a:latin typeface="Quattrocento Sans" panose="020B0502050000020003" pitchFamily="34" charset="0"/>
-            </a:endParaRPr>
+              </a:rPr>
+              <a:t>Estar presente en distintas redes sociales.</a:t>
+            </a:r>
           </a:p>
           <a:p>
             <a:pPr marL="285750" indent="-285750">
@@ -3431,100 +3308,16 @@
               <a:buChar char="•"/>
             </a:pPr>
             <a:r>
-              <a:rPr lang="en-US" sz="1500" b="1" dirty="0">
+              <a:rPr lang="es-ES" sz="1500" noProof="0" dirty="0">
                 <a:solidFill>
                   <a:srgbClr val="212529"/>
                 </a:solidFill>
                 <a:latin typeface="Quattrocento Sans" panose="020B0502050000020003" pitchFamily="34" charset="0"/>
                 <a:ea typeface="QuattrocentoSans" pitchFamily="34" charset="-122"/>
-                <a:cs typeface="QuattrocentoSans" pitchFamily="34" charset="-120"/>
-              </a:rPr>
-              <a:t>Review</a:t>
-            </a:r>
-            <a:r>
-              <a:rPr lang="en-US" sz="1500" dirty="0">
-                <a:solidFill>
-                  <a:srgbClr val="212529"/>
-                </a:solidFill>
-                <a:latin typeface="Quattrocento Sans" panose="020B0502050000020003" pitchFamily="34" charset="0"/>
-                <a:ea typeface="QuattrocentoSans" pitchFamily="34" charset="-122"/>
-                <a:cs typeface="QuattrocentoSans" pitchFamily="34" charset="-120"/>
-              </a:rPr>
-              <a:t>: En revisión</a:t>
-            </a:r>
-            <a:endParaRPr lang="en-US" sz="1800" dirty="0">
-              <a:latin typeface="Quattrocento Sans" panose="020B0502050000020003" pitchFamily="34" charset="0"/>
-            </a:endParaRPr>
-          </a:p>
-          <a:p>
-            <a:pPr marL="285750" indent="-285750">
-              <a:lnSpc>
-                <a:spcPct val="145000"/>
-              </a:lnSpc>
-              <a:spcBef>
-                <a:spcPts val="10"/>
-              </a:spcBef>
-              <a:buSzPct val="100000"/>
-              <a:buChar char="•"/>
-            </a:pPr>
-            <a:r>
-              <a:rPr lang="en-US" sz="1500" b="1" dirty="0">
-                <a:solidFill>
-                  <a:srgbClr val="212529"/>
-                </a:solidFill>
-                <a:latin typeface="Quattrocento Sans" panose="020B0502050000020003" pitchFamily="34" charset="0"/>
-                <a:ea typeface="QuattrocentoSans" pitchFamily="34" charset="-122"/>
-                <a:cs typeface="QuattrocentoSans" pitchFamily="34" charset="-120"/>
-              </a:rPr>
-              <a:t>Done</a:t>
-            </a:r>
-            <a:r>
-              <a:rPr lang="en-US" sz="1500" dirty="0">
-                <a:solidFill>
-                  <a:srgbClr val="212529"/>
-                </a:solidFill>
-                <a:latin typeface="Quattrocento Sans" panose="020B0502050000020003" pitchFamily="34" charset="0"/>
-                <a:ea typeface="QuattrocentoSans" pitchFamily="34" charset="-122"/>
-                <a:cs typeface="QuattrocentoSans" pitchFamily="34" charset="-120"/>
-              </a:rPr>
-              <a:t>: </a:t>
-            </a:r>
-            <a:r>
-              <a:rPr lang="en-US" sz="1500" dirty="0" err="1">
-                <a:solidFill>
-                  <a:srgbClr val="212529"/>
-                </a:solidFill>
-                <a:latin typeface="Quattrocento Sans" panose="020B0502050000020003" pitchFamily="34" charset="0"/>
-                <a:ea typeface="QuattrocentoSans" pitchFamily="34" charset="-122"/>
-                <a:cs typeface="QuattrocentoSans" pitchFamily="34" charset="-120"/>
-              </a:rPr>
-              <a:t>Finalizado</a:t>
-            </a:r>
-            <a:endParaRPr lang="en-US" sz="1800" dirty="0">
-              <a:latin typeface="Quattrocento Sans" panose="020B0502050000020003" pitchFamily="34" charset="0"/>
-            </a:endParaRPr>
-          </a:p>
-          <a:p>
-            <a:pPr>
-              <a:lnSpc>
-                <a:spcPct val="145000"/>
-              </a:lnSpc>
-              <a:spcBef>
-                <a:spcPts val="400"/>
-              </a:spcBef>
-            </a:pPr>
-            <a:r>
-              <a:rPr lang="en-US" sz="1500" dirty="0">
-                <a:solidFill>
-                  <a:srgbClr val="212529"/>
-                </a:solidFill>
-                <a:latin typeface="Quattrocento Sans" panose="020B0502050000020003" pitchFamily="34" charset="0"/>
-                <a:ea typeface="QuattrocentoSans" pitchFamily="34" charset="-122"/>
-                <a:cs typeface="QuattrocentoSans" pitchFamily="34" charset="-120"/>
-              </a:rPr>
-              <a:t>Evita cuellos de botella.</a:t>
-            </a:r>
-            <a:endParaRPr lang="en-US" sz="1800" dirty="0">
+              </a:rPr>
+              <a:t>Redirecciona tu trafico a un solo lugar</a:t>
+            </a:r>
+            <a:endParaRPr lang="es-ES" sz="1800" noProof="0" dirty="0">
               <a:latin typeface="Quattrocento Sans" panose="020B0502050000020003" pitchFamily="34" charset="0"/>
             </a:endParaRPr>
           </a:p>
@@ -3566,195 +3359,7 @@
           <a:bodyPr/>
           <a:lstStyle/>
           <a:p>
-            <a:endParaRPr lang="es-ES">
-              <a:latin typeface="Quattrocento Sans" panose="020B0502050000020003" pitchFamily="34" charset="0"/>
-            </a:endParaRPr>
-          </a:p>
-        </p:txBody>
-      </p:sp>
-      <p:sp>
-        <p:nvSpPr>
-          <p:cNvPr id="19" name="Shape 17">
-            <a:extLst>
-              <a:ext uri="{FF2B5EF4-FFF2-40B4-BE49-F238E27FC236}">
-                <a16:creationId xmlns:a16="http://schemas.microsoft.com/office/drawing/2014/main" id="{4EBEF4C6-48B4-3508-7288-58274F512F5A}"/>
-              </a:ext>
-            </a:extLst>
-          </p:cNvPr>
-          <p:cNvSpPr/>
-          <p:nvPr/>
-        </p:nvSpPr>
-        <p:spPr>
-          <a:xfrm>
-            <a:off x="6032500" y="1587500"/>
-            <a:ext cx="457200" cy="457200"/>
-          </a:xfrm>
-          <a:custGeom>
-            <a:avLst/>
-            <a:gdLst/>
-            <a:ahLst/>
-            <a:cxnLst/>
-            <a:rect l="l" t="t" r="r" b="b"/>
-            <a:pathLst>
-              <a:path w="457200" h="457200">
-                <a:moveTo>
-                  <a:pt x="428714" y="171450"/>
-                </a:moveTo>
-                <a:lnTo>
-                  <a:pt x="435769" y="171450"/>
-                </a:lnTo>
-                <a:cubicBezTo>
-                  <a:pt x="447645" y="171450"/>
-                  <a:pt x="457200" y="161895"/>
-                  <a:pt x="457200" y="150019"/>
-                </a:cubicBezTo>
-                <a:lnTo>
-                  <a:pt x="457200" y="21431"/>
-                </a:lnTo>
-                <a:cubicBezTo>
-                  <a:pt x="457200" y="12769"/>
-                  <a:pt x="452021" y="4911"/>
-                  <a:pt x="443984" y="1607"/>
-                </a:cubicBezTo>
-                <a:cubicBezTo>
-                  <a:pt x="435947" y="-1697"/>
-                  <a:pt x="426750" y="179"/>
-                  <a:pt x="420588" y="6251"/>
-                </a:cubicBezTo>
-                <a:lnTo>
-                  <a:pt x="374422" y="52507"/>
-                </a:lnTo>
-                <a:cubicBezTo>
-                  <a:pt x="334863" y="19735"/>
-                  <a:pt x="283964" y="0"/>
-                  <a:pt x="228600" y="0"/>
-                </a:cubicBezTo>
-                <a:cubicBezTo>
-                  <a:pt x="113407" y="0"/>
-                  <a:pt x="18127" y="85189"/>
-                  <a:pt x="2322" y="196007"/>
-                </a:cubicBezTo>
-                <a:cubicBezTo>
-                  <a:pt x="89" y="211634"/>
-                  <a:pt x="10894" y="226100"/>
-                  <a:pt x="26521" y="228332"/>
-                </a:cubicBezTo>
-                <a:cubicBezTo>
-                  <a:pt x="42148" y="230565"/>
-                  <a:pt x="56614" y="219670"/>
-                  <a:pt x="58847" y="204133"/>
-                </a:cubicBezTo>
-                <a:cubicBezTo>
-                  <a:pt x="70723" y="120997"/>
-                  <a:pt x="142250" y="57150"/>
-                  <a:pt x="228600" y="57150"/>
-                </a:cubicBezTo>
-                <a:cubicBezTo>
-                  <a:pt x="268248" y="57150"/>
-                  <a:pt x="304681" y="70545"/>
-                  <a:pt x="333702" y="93137"/>
-                </a:cubicBezTo>
-                <a:lnTo>
-                  <a:pt x="292001" y="134838"/>
-                </a:lnTo>
-                <a:cubicBezTo>
-                  <a:pt x="285839" y="141000"/>
-                  <a:pt x="284053" y="150197"/>
-                  <a:pt x="287357" y="158234"/>
-                </a:cubicBezTo>
-                <a:cubicBezTo>
-                  <a:pt x="290661" y="166271"/>
-                  <a:pt x="298519" y="171450"/>
-                  <a:pt x="307181" y="171450"/>
-                </a:cubicBezTo>
-                <a:lnTo>
-                  <a:pt x="428714" y="171450"/>
-                </a:lnTo>
-                <a:close/>
-                <a:moveTo>
-                  <a:pt x="454968" y="261193"/>
-                </a:moveTo>
-                <a:cubicBezTo>
-                  <a:pt x="457200" y="245566"/>
-                  <a:pt x="446306" y="231100"/>
-                  <a:pt x="430768" y="228868"/>
-                </a:cubicBezTo>
-                <a:cubicBezTo>
-                  <a:pt x="415230" y="226635"/>
-                  <a:pt x="400675" y="237530"/>
-                  <a:pt x="398443" y="253067"/>
-                </a:cubicBezTo>
-                <a:cubicBezTo>
-                  <a:pt x="386566" y="336113"/>
-                  <a:pt x="315039" y="399961"/>
-                  <a:pt x="228689" y="399961"/>
-                </a:cubicBezTo>
-                <a:cubicBezTo>
-                  <a:pt x="189041" y="399961"/>
-                  <a:pt x="152608" y="386566"/>
-                  <a:pt x="123587" y="363974"/>
-                </a:cubicBezTo>
-                <a:lnTo>
-                  <a:pt x="165199" y="322362"/>
-                </a:lnTo>
-                <a:cubicBezTo>
-                  <a:pt x="171361" y="316200"/>
-                  <a:pt x="173147" y="307003"/>
-                  <a:pt x="169843" y="298966"/>
-                </a:cubicBezTo>
-                <a:cubicBezTo>
-                  <a:pt x="166539" y="290929"/>
-                  <a:pt x="158681" y="285750"/>
-                  <a:pt x="150019" y="285750"/>
-                </a:cubicBezTo>
-                <a:lnTo>
-                  <a:pt x="21431" y="285750"/>
-                </a:lnTo>
-                <a:cubicBezTo>
-                  <a:pt x="9555" y="285750"/>
-                  <a:pt x="0" y="295305"/>
-                  <a:pt x="0" y="307181"/>
-                </a:cubicBezTo>
-                <a:lnTo>
-                  <a:pt x="0" y="435769"/>
-                </a:lnTo>
-                <a:cubicBezTo>
-                  <a:pt x="0" y="444431"/>
-                  <a:pt x="5179" y="452289"/>
-                  <a:pt x="13216" y="455593"/>
-                </a:cubicBezTo>
-                <a:cubicBezTo>
-                  <a:pt x="21253" y="458897"/>
-                  <a:pt x="30450" y="457021"/>
-                  <a:pt x="36612" y="450949"/>
-                </a:cubicBezTo>
-                <a:lnTo>
-                  <a:pt x="82867" y="404693"/>
-                </a:lnTo>
-                <a:cubicBezTo>
-                  <a:pt x="122337" y="437465"/>
-                  <a:pt x="173236" y="457200"/>
-                  <a:pt x="228600" y="457200"/>
-                </a:cubicBezTo>
-                <a:cubicBezTo>
-                  <a:pt x="343793" y="457200"/>
-                  <a:pt x="439073" y="372011"/>
-                  <a:pt x="454878" y="261193"/>
-                </a:cubicBezTo>
-                <a:close/>
-              </a:path>
-            </a:pathLst>
-          </a:custGeom>
-          <a:solidFill>
-            <a:srgbClr val="2A9D8F"/>
-          </a:solidFill>
-          <a:ln/>
-        </p:spPr>
-        <p:txBody>
-          <a:bodyPr/>
-          <a:lstStyle/>
-          <a:p>
-            <a:endParaRPr lang="es-ES">
+            <a:endParaRPr lang="es-ES" noProof="0" dirty="0">
               <a:latin typeface="Quattrocento Sans" panose="020B0502050000020003" pitchFamily="34" charset="0"/>
             </a:endParaRPr>
           </a:p>
@@ -3793,7 +3398,7 @@
               </a:lnSpc>
             </a:pPr>
             <a:r>
-              <a:rPr lang="en-US" sz="2000" b="1" dirty="0">
+              <a:rPr lang="es-ES" sz="2000" b="1" noProof="0" dirty="0">
                 <a:solidFill>
                   <a:srgbClr val="1B4332"/>
                 </a:solidFill>
@@ -3801,9 +3406,9 @@
                 <a:ea typeface="Quattrocento Sans" pitchFamily="34" charset="-122"/>
                 <a:cs typeface="Quattrocento Sans" pitchFamily="34" charset="-120"/>
               </a:rPr>
-              <a:t>Scrum-Light</a:t>
-            </a:r>
-            <a:endParaRPr lang="en-US" sz="1600" dirty="0">
+              <a:t>Centralizar</a:t>
+            </a:r>
+            <a:endParaRPr lang="es-ES" sz="1600" noProof="0" dirty="0">
               <a:latin typeface="Quattrocento Sans" panose="020B0502050000020003" pitchFamily="34" charset="0"/>
             </a:endParaRPr>
           </a:p>
@@ -3842,7 +3447,7 @@
               </a:lnSpc>
             </a:pPr>
             <a:r>
-              <a:rPr lang="en-US" sz="1500" dirty="0">
+              <a:rPr lang="es-ES" sz="1500" noProof="0" dirty="0">
                 <a:solidFill>
                   <a:srgbClr val="212529"/>
                 </a:solidFill>
@@ -3850,9 +3455,9 @@
                 <a:ea typeface="QuattrocentoSans" pitchFamily="34" charset="-122"/>
                 <a:cs typeface="QuattrocentoSans" pitchFamily="34" charset="-120"/>
               </a:rPr>
-              <a:t>Ciclos de retroalimentación rápidos para validación de componentes.</a:t>
-            </a:r>
-            <a:endParaRPr lang="en-US" sz="1800" dirty="0">
+              <a:t>Mantener los recursos importantes en un solo lugar.</a:t>
+            </a:r>
+            <a:endParaRPr lang="es-ES" sz="1800" noProof="0" dirty="0">
               <a:latin typeface="Quattrocento Sans" panose="020B0502050000020003" pitchFamily="34" charset="0"/>
             </a:endParaRPr>
           </a:p>
@@ -3866,7 +3471,7 @@
               </a:spcBef>
             </a:pPr>
             <a:r>
-              <a:rPr lang="en-US" sz="1500" dirty="0">
+              <a:rPr lang="es-ES" sz="1500" noProof="0" dirty="0">
                 <a:solidFill>
                   <a:srgbClr val="212529"/>
                 </a:solidFill>
@@ -3874,9 +3479,9 @@
                 <a:ea typeface="QuattrocentoSans" pitchFamily="34" charset="-122"/>
                 <a:cs typeface="QuattrocentoSans" pitchFamily="34" charset="-120"/>
               </a:rPr>
-              <a:t>Permiten:</a:t>
-            </a:r>
-            <a:endParaRPr lang="en-US" sz="1800" dirty="0">
+              <a:t>Permite:</a:t>
+            </a:r>
+            <a:endParaRPr lang="es-ES" sz="1800" noProof="0" dirty="0">
               <a:latin typeface="Quattrocento Sans" panose="020B0502050000020003" pitchFamily="34" charset="0"/>
             </a:endParaRPr>
           </a:p>
@@ -3892,7 +3497,7 @@
               <a:buChar char="•"/>
             </a:pPr>
             <a:r>
-              <a:rPr lang="en-US" sz="1500" dirty="0">
+              <a:rPr lang="es-ES" sz="1500" noProof="0" dirty="0">
                 <a:solidFill>
                   <a:srgbClr val="212529"/>
                 </a:solidFill>
@@ -3900,9 +3505,9 @@
                 <a:ea typeface="QuattrocentoSans" pitchFamily="34" charset="-122"/>
                 <a:cs typeface="QuattrocentoSans" pitchFamily="34" charset="-120"/>
               </a:rPr>
-              <a:t>Detectar problemas temprano</a:t>
-            </a:r>
-            <a:endParaRPr lang="en-US" sz="1800" dirty="0">
+              <a:t>Agrupar los recursos online</a:t>
+            </a:r>
+            <a:endParaRPr lang="es-ES" sz="1800" noProof="0" dirty="0">
               <a:latin typeface="Quattrocento Sans" panose="020B0502050000020003" pitchFamily="34" charset="0"/>
             </a:endParaRPr>
           </a:p>
@@ -3918,7 +3523,7 @@
               <a:buChar char="•"/>
             </a:pPr>
             <a:r>
-              <a:rPr lang="en-US" sz="1500" dirty="0">
+              <a:rPr lang="es-ES" sz="1500" noProof="0" dirty="0">
                 <a:solidFill>
                   <a:srgbClr val="212529"/>
                 </a:solidFill>
@@ -3926,9 +3531,9 @@
                 <a:ea typeface="QuattrocentoSans" pitchFamily="34" charset="-122"/>
                 <a:cs typeface="QuattrocentoSans" pitchFamily="34" charset="-120"/>
               </a:rPr>
-              <a:t>Adaptar requisitos</a:t>
-            </a:r>
-            <a:endParaRPr lang="en-US" sz="1800" dirty="0">
+              <a:t>Definir como se visualizarán</a:t>
+            </a:r>
+            <a:endParaRPr lang="es-ES" sz="1800" noProof="0" dirty="0">
               <a:latin typeface="Quattrocento Sans" panose="020B0502050000020003" pitchFamily="34" charset="0"/>
             </a:endParaRPr>
           </a:p>
@@ -3944,7 +3549,7 @@
               <a:buChar char="•"/>
             </a:pPr>
             <a:r>
-              <a:rPr lang="en-US" sz="1500" dirty="0">
+              <a:rPr lang="es-ES" sz="1500" noProof="0" dirty="0">
                 <a:solidFill>
                   <a:srgbClr val="212529"/>
                 </a:solidFill>
@@ -3952,9 +3557,9 @@
                 <a:ea typeface="QuattrocentoSans" pitchFamily="34" charset="-122"/>
                 <a:cs typeface="QuattrocentoSans" pitchFamily="34" charset="-120"/>
               </a:rPr>
-              <a:t>Entregar valor incremental</a:t>
-            </a:r>
-            <a:endParaRPr lang="en-US" sz="1800" dirty="0">
+              <a:t>Mantener una marca personal</a:t>
+            </a:r>
+            <a:endParaRPr lang="es-ES" sz="1800" noProof="0" dirty="0">
               <a:latin typeface="Quattrocento Sans" panose="020B0502050000020003" pitchFamily="34" charset="0"/>
             </a:endParaRPr>
           </a:p>
@@ -3996,132 +3601,7 @@
           <a:bodyPr/>
           <a:lstStyle/>
           <a:p>
-            <a:endParaRPr lang="es-ES">
-              <a:latin typeface="Quattrocento Sans" panose="020B0502050000020003" pitchFamily="34" charset="0"/>
-            </a:endParaRPr>
-          </a:p>
-        </p:txBody>
-      </p:sp>
-      <p:sp>
-        <p:nvSpPr>
-          <p:cNvPr id="23" name="Shape 21">
-            <a:extLst>
-              <a:ext uri="{FF2B5EF4-FFF2-40B4-BE49-F238E27FC236}">
-                <a16:creationId xmlns:a16="http://schemas.microsoft.com/office/drawing/2014/main" id="{CDAAA348-D9E4-208B-A883-5A458F616C3A}"/>
-              </a:ext>
-            </a:extLst>
-          </p:cNvPr>
-          <p:cNvSpPr/>
-          <p:nvPr/>
-        </p:nvSpPr>
-        <p:spPr>
-          <a:xfrm>
-            <a:off x="11106150" y="1587500"/>
-            <a:ext cx="342900" cy="457200"/>
-          </a:xfrm>
-          <a:custGeom>
-            <a:avLst/>
-            <a:gdLst/>
-            <a:ahLst/>
-            <a:cxnLst/>
-            <a:rect l="l" t="t" r="r" b="b"/>
-            <a:pathLst>
-              <a:path w="342900" h="457200">
-                <a:moveTo>
-                  <a:pt x="14288" y="57150"/>
-                </a:moveTo>
-                <a:cubicBezTo>
-                  <a:pt x="14288" y="25628"/>
-                  <a:pt x="39916" y="0"/>
-                  <a:pt x="71438" y="0"/>
-                </a:cubicBezTo>
-                <a:lnTo>
-                  <a:pt x="271463" y="0"/>
-                </a:lnTo>
-                <a:cubicBezTo>
-                  <a:pt x="302984" y="0"/>
-                  <a:pt x="328613" y="25628"/>
-                  <a:pt x="328613" y="57150"/>
-                </a:cubicBezTo>
-                <a:lnTo>
-                  <a:pt x="328613" y="400050"/>
-                </a:lnTo>
-                <a:cubicBezTo>
-                  <a:pt x="328613" y="431572"/>
-                  <a:pt x="302984" y="457200"/>
-                  <a:pt x="271463" y="457200"/>
-                </a:cubicBezTo>
-                <a:lnTo>
-                  <a:pt x="71438" y="457200"/>
-                </a:lnTo>
-                <a:cubicBezTo>
-                  <a:pt x="39916" y="457200"/>
-                  <a:pt x="14288" y="431572"/>
-                  <a:pt x="14288" y="400050"/>
-                </a:cubicBezTo>
-                <a:lnTo>
-                  <a:pt x="14288" y="57150"/>
-                </a:lnTo>
-                <a:close/>
-                <a:moveTo>
-                  <a:pt x="114300" y="392906"/>
-                </a:moveTo>
-                <a:cubicBezTo>
-                  <a:pt x="114300" y="404783"/>
-                  <a:pt x="123855" y="414338"/>
-                  <a:pt x="135731" y="414338"/>
-                </a:cubicBezTo>
-                <a:lnTo>
-                  <a:pt x="207169" y="414338"/>
-                </a:lnTo>
-                <a:cubicBezTo>
-                  <a:pt x="219045" y="414338"/>
-                  <a:pt x="228600" y="404783"/>
-                  <a:pt x="228600" y="392906"/>
-                </a:cubicBezTo>
-                <a:cubicBezTo>
-                  <a:pt x="228600" y="381030"/>
-                  <a:pt x="219045" y="371475"/>
-                  <a:pt x="207169" y="371475"/>
-                </a:cubicBezTo>
-                <a:lnTo>
-                  <a:pt x="135731" y="371475"/>
-                </a:lnTo>
-                <a:cubicBezTo>
-                  <a:pt x="123855" y="371475"/>
-                  <a:pt x="114300" y="381030"/>
-                  <a:pt x="114300" y="392906"/>
-                </a:cubicBezTo>
-                <a:close/>
-                <a:moveTo>
-                  <a:pt x="271463" y="57150"/>
-                </a:moveTo>
-                <a:lnTo>
-                  <a:pt x="71438" y="57150"/>
-                </a:lnTo>
-                <a:lnTo>
-                  <a:pt x="71438" y="328613"/>
-                </a:lnTo>
-                <a:lnTo>
-                  <a:pt x="271463" y="328613"/>
-                </a:lnTo>
-                <a:lnTo>
-                  <a:pt x="271463" y="57150"/>
-                </a:lnTo>
-                <a:close/>
-              </a:path>
-            </a:pathLst>
-          </a:custGeom>
-          <a:solidFill>
-            <a:srgbClr val="2A9D8F"/>
-          </a:solidFill>
-          <a:ln/>
-        </p:spPr>
-        <p:txBody>
-          <a:bodyPr/>
-          <a:lstStyle/>
-          <a:p>
-            <a:endParaRPr lang="es-ES">
+            <a:endParaRPr lang="es-ES" noProof="0" dirty="0">
               <a:latin typeface="Quattrocento Sans" panose="020B0502050000020003" pitchFamily="34" charset="0"/>
             </a:endParaRPr>
           </a:p>
@@ -4160,7 +3640,7 @@
               </a:lnSpc>
             </a:pPr>
             <a:r>
-              <a:rPr lang="en-US" sz="2000" b="1" dirty="0">
+              <a:rPr lang="es-ES" sz="2000" b="1" noProof="0" dirty="0">
                 <a:solidFill>
                   <a:srgbClr val="1B4332"/>
                 </a:solidFill>
@@ -4168,9 +3648,9 @@
                 <a:ea typeface="Quattrocento Sans" pitchFamily="34" charset="-122"/>
                 <a:cs typeface="Quattrocento Sans" pitchFamily="34" charset="-120"/>
               </a:rPr>
-              <a:t>Mobile-First</a:t>
-            </a:r>
-            <a:endParaRPr lang="en-US" sz="1600" dirty="0">
+              <a:t>Comunidad</a:t>
+            </a:r>
+            <a:endParaRPr lang="es-ES" sz="1600" noProof="0" dirty="0">
               <a:latin typeface="Quattrocento Sans" panose="020B0502050000020003" pitchFamily="34" charset="0"/>
             </a:endParaRPr>
           </a:p>
@@ -4209,7 +3689,7 @@
               </a:lnSpc>
             </a:pPr>
             <a:r>
-              <a:rPr lang="en-US" sz="1500" dirty="0">
+              <a:rPr lang="es-ES" sz="1500" noProof="0" dirty="0">
                 <a:solidFill>
                   <a:srgbClr val="212529"/>
                 </a:solidFill>
@@ -4217,9 +3697,9 @@
                 <a:ea typeface="QuattrocentoSans" pitchFamily="34" charset="-122"/>
                 <a:cs typeface="QuattrocentoSans" pitchFamily="34" charset="-120"/>
               </a:rPr>
-              <a:t>Desarrollo desde la resolución más baja hacia escritorio.</a:t>
-            </a:r>
-            <a:endParaRPr lang="en-US" sz="1800" dirty="0">
+              <a:t>Creación de comunidades para distintos ámbitos.</a:t>
+            </a:r>
+            <a:endParaRPr lang="es-ES" sz="1800" noProof="0" dirty="0">
               <a:latin typeface="Quattrocento Sans" panose="020B0502050000020003" pitchFamily="34" charset="0"/>
             </a:endParaRPr>
           </a:p>
@@ -4233,7 +3713,7 @@
               </a:spcBef>
             </a:pPr>
             <a:r>
-              <a:rPr lang="en-US" sz="1500" dirty="0">
+              <a:rPr lang="es-ES" sz="1500" noProof="0" dirty="0">
                 <a:solidFill>
                   <a:srgbClr val="212529"/>
                 </a:solidFill>
@@ -4241,9 +3721,9 @@
                 <a:ea typeface="QuattrocentoSans" pitchFamily="34" charset="-122"/>
                 <a:cs typeface="QuattrocentoSans" pitchFamily="34" charset="-120"/>
               </a:rPr>
-              <a:t>Garantiza:</a:t>
-            </a:r>
-            <a:endParaRPr lang="en-US" sz="1800" dirty="0">
+              <a:t>Permite:</a:t>
+            </a:r>
+            <a:endParaRPr lang="es-ES" sz="1800" noProof="0" dirty="0">
               <a:latin typeface="Quattrocento Sans" panose="020B0502050000020003" pitchFamily="34" charset="0"/>
             </a:endParaRPr>
           </a:p>
@@ -4259,7 +3739,7 @@
               <a:buChar char="•"/>
             </a:pPr>
             <a:r>
-              <a:rPr lang="en-US" sz="1500" dirty="0">
+              <a:rPr lang="es-ES" sz="1500" noProof="0" dirty="0">
                 <a:solidFill>
                   <a:srgbClr val="212529"/>
                 </a:solidFill>
@@ -4267,9 +3747,9 @@
                 <a:ea typeface="QuattrocentoSans" pitchFamily="34" charset="-122"/>
                 <a:cs typeface="QuattrocentoSans" pitchFamily="34" charset="-120"/>
               </a:rPr>
-              <a:t>Experiencia óptima en móviles</a:t>
-            </a:r>
-            <a:endParaRPr lang="en-US" sz="1800" dirty="0">
+              <a:t>Encontrar usuarios con los mismos gustos</a:t>
+            </a:r>
+            <a:endParaRPr lang="es-ES" sz="1800" noProof="0" dirty="0">
               <a:latin typeface="Quattrocento Sans" panose="020B0502050000020003" pitchFamily="34" charset="0"/>
             </a:endParaRPr>
           </a:p>
@@ -4285,7 +3765,7 @@
               <a:buChar char="•"/>
             </a:pPr>
             <a:r>
-              <a:rPr lang="en-US" sz="1500" dirty="0">
+              <a:rPr lang="es-ES" sz="1500" noProof="0" dirty="0">
                 <a:solidFill>
                   <a:srgbClr val="212529"/>
                 </a:solidFill>
@@ -4293,9 +3773,9 @@
                 <a:ea typeface="QuattrocentoSans" pitchFamily="34" charset="-122"/>
                 <a:cs typeface="QuattrocentoSans" pitchFamily="34" charset="-120"/>
               </a:rPr>
-              <a:t>Progressive enhancement</a:t>
-            </a:r>
-            <a:endParaRPr lang="en-US" sz="1800" dirty="0">
+              <a:t>Crecimiento de marca personal</a:t>
+            </a:r>
+            <a:endParaRPr lang="es-ES" sz="1800" noProof="0" dirty="0">
               <a:latin typeface="Quattrocento Sans" panose="020B0502050000020003" pitchFamily="34" charset="0"/>
             </a:endParaRPr>
           </a:p>
@@ -4311,610 +3791,16 @@
               <a:buChar char="•"/>
             </a:pPr>
             <a:r>
-              <a:rPr lang="en-US" sz="1500" dirty="0">
+              <a:rPr lang="es-ES" sz="1500" noProof="0" dirty="0">
                 <a:solidFill>
                   <a:srgbClr val="212529"/>
                 </a:solidFill>
                 <a:latin typeface="Quattrocento Sans" panose="020B0502050000020003" pitchFamily="34" charset="0"/>
                 <a:ea typeface="QuattrocentoSans" pitchFamily="34" charset="-122"/>
-                <a:cs typeface="QuattrocentoSans" pitchFamily="34" charset="-120"/>
-              </a:rPr>
-              <a:t>Mayor cobertura de usuarios</a:t>
-            </a:r>
-            <a:endParaRPr lang="en-US" sz="1800" dirty="0">
-              <a:latin typeface="Quattrocento Sans" panose="020B0502050000020003" pitchFamily="34" charset="0"/>
-            </a:endParaRPr>
-          </a:p>
-        </p:txBody>
-      </p:sp>
-      <p:sp>
-        <p:nvSpPr>
-          <p:cNvPr id="26" name="Shape 24">
-            <a:extLst>
-              <a:ext uri="{FF2B5EF4-FFF2-40B4-BE49-F238E27FC236}">
-                <a16:creationId xmlns:a16="http://schemas.microsoft.com/office/drawing/2014/main" id="{3BFA88B3-324C-4DD1-1E78-17241449C43C}"/>
-              </a:ext>
-            </a:extLst>
-          </p:cNvPr>
-          <p:cNvSpPr/>
-          <p:nvPr/>
-        </p:nvSpPr>
-        <p:spPr>
-          <a:xfrm>
-            <a:off x="762000" y="5207000"/>
-            <a:ext cx="14732000" cy="25400"/>
-          </a:xfrm>
-          <a:prstGeom prst="rect">
-            <a:avLst/>
-          </a:prstGeom>
-          <a:solidFill>
-            <a:srgbClr val="E9ECEF"/>
-          </a:solidFill>
-          <a:ln/>
-        </p:spPr>
-        <p:txBody>
-          <a:bodyPr/>
-          <a:lstStyle/>
-          <a:p>
-            <a:endParaRPr lang="es-ES">
-              <a:latin typeface="Quattrocento Sans" panose="020B0502050000020003" pitchFamily="34" charset="0"/>
-            </a:endParaRPr>
-          </a:p>
-        </p:txBody>
-      </p:sp>
-      <p:sp>
-        <p:nvSpPr>
-          <p:cNvPr id="27" name="Text 25">
-            <a:extLst>
-              <a:ext uri="{FF2B5EF4-FFF2-40B4-BE49-F238E27FC236}">
-                <a16:creationId xmlns:a16="http://schemas.microsoft.com/office/drawing/2014/main" id="{1B0D8A24-0AB0-F7DD-0098-98906AB26809}"/>
-              </a:ext>
-            </a:extLst>
-          </p:cNvPr>
-          <p:cNvSpPr/>
-          <p:nvPr/>
-        </p:nvSpPr>
-        <p:spPr>
-          <a:xfrm>
-            <a:off x="762000" y="5397500"/>
-            <a:ext cx="5080000" cy="381000"/>
-          </a:xfrm>
-          <a:prstGeom prst="rect">
-            <a:avLst/>
-          </a:prstGeom>
-          <a:noFill/>
-          <a:ln/>
-        </p:spPr>
-        <p:txBody>
-          <a:bodyPr wrap="none" lIns="0" tIns="0" rIns="0" bIns="0" rtlCol="0" anchor="ctr"/>
-          <a:lstStyle/>
-          <a:p>
-            <a:pPr>
-              <a:lnSpc>
-                <a:spcPct val="140000"/>
-              </a:lnSpc>
-            </a:pPr>
-            <a:r>
-              <a:rPr lang="en-US" sz="2000" b="1" dirty="0">
-                <a:solidFill>
-                  <a:srgbClr val="6C757D"/>
-                </a:solidFill>
-                <a:latin typeface="Quattrocento Sans" panose="020B0502050000020003" pitchFamily="34" charset="0"/>
-                <a:ea typeface="QuattrocentoSans" pitchFamily="34" charset="-122"/>
-                <a:cs typeface="QuattrocentoSans" pitchFamily="34" charset="-120"/>
-              </a:rPr>
-              <a:t>Stack Tecnológico</a:t>
-            </a:r>
-            <a:endParaRPr lang="en-US" sz="2000" dirty="0">
-              <a:latin typeface="Quattrocento Sans" panose="020B0502050000020003" pitchFamily="34" charset="0"/>
-            </a:endParaRPr>
-          </a:p>
-        </p:txBody>
-      </p:sp>
-      <p:sp>
-        <p:nvSpPr>
-          <p:cNvPr id="28" name="Shape 26">
-            <a:extLst>
-              <a:ext uri="{FF2B5EF4-FFF2-40B4-BE49-F238E27FC236}">
-                <a16:creationId xmlns:a16="http://schemas.microsoft.com/office/drawing/2014/main" id="{6E2844BE-BD2E-368C-AE12-DA36187F909E}"/>
-              </a:ext>
-            </a:extLst>
-          </p:cNvPr>
-          <p:cNvSpPr/>
-          <p:nvPr/>
-        </p:nvSpPr>
-        <p:spPr>
-          <a:xfrm>
-            <a:off x="762000" y="5969000"/>
-            <a:ext cx="1651000" cy="457200"/>
-          </a:xfrm>
-          <a:prstGeom prst="roundRect">
-            <a:avLst>
-              <a:gd name="adj" fmla="val 16000"/>
-            </a:avLst>
-          </a:prstGeom>
-          <a:solidFill>
-            <a:srgbClr val="1B4332"/>
-          </a:solidFill>
-          <a:ln/>
-        </p:spPr>
-        <p:txBody>
-          <a:bodyPr/>
-          <a:lstStyle/>
-          <a:p>
-            <a:endParaRPr lang="es-ES">
-              <a:latin typeface="Quattrocento Sans" panose="020B0502050000020003" pitchFamily="34" charset="0"/>
-            </a:endParaRPr>
-          </a:p>
-        </p:txBody>
-      </p:sp>
-      <p:sp>
-        <p:nvSpPr>
-          <p:cNvPr id="29" name="Text 27">
-            <a:extLst>
-              <a:ext uri="{FF2B5EF4-FFF2-40B4-BE49-F238E27FC236}">
-                <a16:creationId xmlns:a16="http://schemas.microsoft.com/office/drawing/2014/main" id="{8D1C5ACA-ABE9-FD33-A25F-69AD758E682E}"/>
-              </a:ext>
-            </a:extLst>
-          </p:cNvPr>
-          <p:cNvSpPr/>
-          <p:nvPr/>
-        </p:nvSpPr>
-        <p:spPr>
-          <a:xfrm>
-            <a:off x="762000" y="5969000"/>
-            <a:ext cx="1651000" cy="457200"/>
-          </a:xfrm>
-          <a:prstGeom prst="rect">
-            <a:avLst/>
-          </a:prstGeom>
-          <a:noFill/>
-          <a:ln/>
-        </p:spPr>
-        <p:txBody>
-          <a:bodyPr wrap="none" lIns="0" tIns="0" rIns="0" bIns="0" rtlCol="0" anchor="ctr"/>
-          <a:lstStyle/>
-          <a:p>
-            <a:pPr algn="ctr">
-              <a:lnSpc>
-                <a:spcPct val="100000"/>
-              </a:lnSpc>
-            </a:pPr>
-            <a:r>
-              <a:rPr lang="en-US" sz="1400" b="1" dirty="0">
-                <a:solidFill>
-                  <a:srgbClr val="FFFFFF"/>
-                </a:solidFill>
-                <a:latin typeface="Quattrocento Sans" panose="020B0502050000020003" pitchFamily="34" charset="0"/>
-                <a:ea typeface="QuattrocentoSans" pitchFamily="34" charset="-122"/>
-                <a:cs typeface="QuattrocentoSans" pitchFamily="34" charset="-120"/>
-              </a:rPr>
-              <a:t>React</a:t>
-            </a:r>
-            <a:endParaRPr lang="en-US" sz="1400" dirty="0">
-              <a:latin typeface="Quattrocento Sans" panose="020B0502050000020003" pitchFamily="34" charset="0"/>
-            </a:endParaRPr>
-          </a:p>
-        </p:txBody>
-      </p:sp>
-      <p:sp>
-        <p:nvSpPr>
-          <p:cNvPr id="30" name="Shape 28">
-            <a:extLst>
-              <a:ext uri="{FF2B5EF4-FFF2-40B4-BE49-F238E27FC236}">
-                <a16:creationId xmlns:a16="http://schemas.microsoft.com/office/drawing/2014/main" id="{DC71FDBF-DBC6-B579-3EBA-DB8BCC66FFE2}"/>
-              </a:ext>
-            </a:extLst>
-          </p:cNvPr>
-          <p:cNvSpPr/>
-          <p:nvPr/>
-        </p:nvSpPr>
-        <p:spPr>
-          <a:xfrm>
-            <a:off x="2603500" y="5969000"/>
-            <a:ext cx="2286000" cy="457200"/>
-          </a:xfrm>
-          <a:prstGeom prst="roundRect">
-            <a:avLst>
-              <a:gd name="adj" fmla="val 16000"/>
-            </a:avLst>
-          </a:prstGeom>
-          <a:solidFill>
-            <a:srgbClr val="1B4332"/>
-          </a:solidFill>
-          <a:ln/>
-        </p:spPr>
-        <p:txBody>
-          <a:bodyPr/>
-          <a:lstStyle/>
-          <a:p>
-            <a:endParaRPr lang="es-ES">
-              <a:latin typeface="Quattrocento Sans" panose="020B0502050000020003" pitchFamily="34" charset="0"/>
-            </a:endParaRPr>
-          </a:p>
-        </p:txBody>
-      </p:sp>
-      <p:sp>
-        <p:nvSpPr>
-          <p:cNvPr id="31" name="Text 29">
-            <a:extLst>
-              <a:ext uri="{FF2B5EF4-FFF2-40B4-BE49-F238E27FC236}">
-                <a16:creationId xmlns:a16="http://schemas.microsoft.com/office/drawing/2014/main" id="{5CA5CA65-F90F-2741-9D9D-BAF36B228FE8}"/>
-              </a:ext>
-            </a:extLst>
-          </p:cNvPr>
-          <p:cNvSpPr/>
-          <p:nvPr/>
-        </p:nvSpPr>
-        <p:spPr>
-          <a:xfrm>
-            <a:off x="2603500" y="5969000"/>
-            <a:ext cx="2286000" cy="457200"/>
-          </a:xfrm>
-          <a:prstGeom prst="rect">
-            <a:avLst/>
-          </a:prstGeom>
-          <a:noFill/>
-          <a:ln/>
-        </p:spPr>
-        <p:txBody>
-          <a:bodyPr wrap="none" lIns="0" tIns="0" rIns="0" bIns="0" rtlCol="0" anchor="ctr"/>
-          <a:lstStyle/>
-          <a:p>
-            <a:pPr algn="ctr">
-              <a:lnSpc>
-                <a:spcPct val="100000"/>
-              </a:lnSpc>
-            </a:pPr>
-            <a:r>
-              <a:rPr lang="en-US" sz="1400" b="1" dirty="0">
-                <a:solidFill>
-                  <a:srgbClr val="FFFFFF"/>
-                </a:solidFill>
-                <a:latin typeface="Quattrocento Sans" panose="020B0502050000020003" pitchFamily="34" charset="0"/>
-                <a:ea typeface="QuattrocentoSans" pitchFamily="34" charset="-122"/>
-                <a:cs typeface="QuattrocentoSans" pitchFamily="34" charset="-120"/>
-              </a:rPr>
-              <a:t>Node.js</a:t>
-            </a:r>
-            <a:endParaRPr lang="en-US" sz="1400" dirty="0">
-              <a:latin typeface="Quattrocento Sans" panose="020B0502050000020003" pitchFamily="34" charset="0"/>
-            </a:endParaRPr>
-          </a:p>
-        </p:txBody>
-      </p:sp>
-      <p:sp>
-        <p:nvSpPr>
-          <p:cNvPr id="32" name="Shape 30">
-            <a:extLst>
-              <a:ext uri="{FF2B5EF4-FFF2-40B4-BE49-F238E27FC236}">
-                <a16:creationId xmlns:a16="http://schemas.microsoft.com/office/drawing/2014/main" id="{09F840B6-C22B-C1DB-3B14-175DA4E98C74}"/>
-              </a:ext>
-            </a:extLst>
-          </p:cNvPr>
-          <p:cNvSpPr/>
-          <p:nvPr/>
-        </p:nvSpPr>
-        <p:spPr>
-          <a:xfrm>
-            <a:off x="5080000" y="5969000"/>
-            <a:ext cx="1778000" cy="457200"/>
-          </a:xfrm>
-          <a:prstGeom prst="roundRect">
-            <a:avLst>
-              <a:gd name="adj" fmla="val 16000"/>
-            </a:avLst>
-          </a:prstGeom>
-          <a:solidFill>
-            <a:srgbClr val="1B4332"/>
-          </a:solidFill>
-          <a:ln/>
-        </p:spPr>
-        <p:txBody>
-          <a:bodyPr/>
-          <a:lstStyle/>
-          <a:p>
-            <a:endParaRPr lang="es-ES">
-              <a:latin typeface="Quattrocento Sans" panose="020B0502050000020003" pitchFamily="34" charset="0"/>
-            </a:endParaRPr>
-          </a:p>
-        </p:txBody>
-      </p:sp>
-      <p:sp>
-        <p:nvSpPr>
-          <p:cNvPr id="33" name="Text 31">
-            <a:extLst>
-              <a:ext uri="{FF2B5EF4-FFF2-40B4-BE49-F238E27FC236}">
-                <a16:creationId xmlns:a16="http://schemas.microsoft.com/office/drawing/2014/main" id="{2DA948F6-5353-2F16-5215-AA1D343678B3}"/>
-              </a:ext>
-            </a:extLst>
-          </p:cNvPr>
-          <p:cNvSpPr/>
-          <p:nvPr/>
-        </p:nvSpPr>
-        <p:spPr>
-          <a:xfrm>
-            <a:off x="5080000" y="5969000"/>
-            <a:ext cx="1778000" cy="457200"/>
-          </a:xfrm>
-          <a:prstGeom prst="rect">
-            <a:avLst/>
-          </a:prstGeom>
-          <a:noFill/>
-          <a:ln/>
-        </p:spPr>
-        <p:txBody>
-          <a:bodyPr wrap="none" lIns="0" tIns="0" rIns="0" bIns="0" rtlCol="0" anchor="ctr"/>
-          <a:lstStyle/>
-          <a:p>
-            <a:pPr algn="ctr">
-              <a:lnSpc>
-                <a:spcPct val="100000"/>
-              </a:lnSpc>
-            </a:pPr>
-            <a:r>
-              <a:rPr lang="en-US" sz="1400" b="1" dirty="0">
-                <a:solidFill>
-                  <a:srgbClr val="FFFFFF"/>
-                </a:solidFill>
-                <a:latin typeface="Quattrocento Sans" panose="020B0502050000020003" pitchFamily="34" charset="0"/>
-                <a:ea typeface="QuattrocentoSans" pitchFamily="34" charset="-122"/>
-                <a:cs typeface="QuattrocentoSans" pitchFamily="34" charset="-120"/>
-              </a:rPr>
-              <a:t>PostgreSQL</a:t>
-            </a:r>
-            <a:endParaRPr lang="en-US" sz="1400" dirty="0">
-              <a:latin typeface="Quattrocento Sans" panose="020B0502050000020003" pitchFamily="34" charset="0"/>
-            </a:endParaRPr>
-          </a:p>
-        </p:txBody>
-      </p:sp>
-      <p:sp>
-        <p:nvSpPr>
-          <p:cNvPr id="34" name="Shape 32">
-            <a:extLst>
-              <a:ext uri="{FF2B5EF4-FFF2-40B4-BE49-F238E27FC236}">
-                <a16:creationId xmlns:a16="http://schemas.microsoft.com/office/drawing/2014/main" id="{F8803D43-FE6B-9399-7A09-7161F025515E}"/>
-              </a:ext>
-            </a:extLst>
-          </p:cNvPr>
-          <p:cNvSpPr/>
-          <p:nvPr/>
-        </p:nvSpPr>
-        <p:spPr>
-          <a:xfrm>
-            <a:off x="7048500" y="5969000"/>
-            <a:ext cx="1651000" cy="457200"/>
-          </a:xfrm>
-          <a:prstGeom prst="roundRect">
-            <a:avLst>
-              <a:gd name="adj" fmla="val 16000"/>
-            </a:avLst>
-          </a:prstGeom>
-          <a:solidFill>
-            <a:srgbClr val="1B4332"/>
-          </a:solidFill>
-          <a:ln/>
-        </p:spPr>
-        <p:txBody>
-          <a:bodyPr/>
-          <a:lstStyle/>
-          <a:p>
-            <a:endParaRPr lang="es-ES">
-              <a:latin typeface="Quattrocento Sans" panose="020B0502050000020003" pitchFamily="34" charset="0"/>
-            </a:endParaRPr>
-          </a:p>
-        </p:txBody>
-      </p:sp>
-      <p:sp>
-        <p:nvSpPr>
-          <p:cNvPr id="35" name="Text 33">
-            <a:extLst>
-              <a:ext uri="{FF2B5EF4-FFF2-40B4-BE49-F238E27FC236}">
-                <a16:creationId xmlns:a16="http://schemas.microsoft.com/office/drawing/2014/main" id="{F94A14F6-752A-E7B6-69D2-1D6CCB29EAA3}"/>
-              </a:ext>
-            </a:extLst>
-          </p:cNvPr>
-          <p:cNvSpPr/>
-          <p:nvPr/>
-        </p:nvSpPr>
-        <p:spPr>
-          <a:xfrm>
-            <a:off x="7048500" y="5969000"/>
-            <a:ext cx="1651000" cy="457200"/>
-          </a:xfrm>
-          <a:prstGeom prst="rect">
-            <a:avLst/>
-          </a:prstGeom>
-          <a:noFill/>
-          <a:ln/>
-        </p:spPr>
-        <p:txBody>
-          <a:bodyPr wrap="none" lIns="0" tIns="0" rIns="0" bIns="0" rtlCol="0" anchor="ctr"/>
-          <a:lstStyle/>
-          <a:p>
-            <a:pPr algn="ctr">
-              <a:lnSpc>
-                <a:spcPct val="100000"/>
-              </a:lnSpc>
-            </a:pPr>
-            <a:r>
-              <a:rPr lang="en-US" sz="1400" b="1" dirty="0">
-                <a:solidFill>
-                  <a:srgbClr val="FFFFFF"/>
-                </a:solidFill>
-                <a:latin typeface="Quattrocento Sans" panose="020B0502050000020003" pitchFamily="34" charset="0"/>
-                <a:ea typeface="QuattrocentoSans" pitchFamily="34" charset="-122"/>
-                <a:cs typeface="QuattrocentoSans" pitchFamily="34" charset="-120"/>
-              </a:rPr>
-              <a:t>Docker</a:t>
-            </a:r>
-            <a:endParaRPr lang="en-US" sz="1400" dirty="0">
-              <a:latin typeface="Quattrocento Sans" panose="020B0502050000020003" pitchFamily="34" charset="0"/>
-            </a:endParaRPr>
-          </a:p>
-        </p:txBody>
-      </p:sp>
-      <p:sp>
-        <p:nvSpPr>
-          <p:cNvPr id="36" name="Text 34">
-            <a:extLst>
-              <a:ext uri="{FF2B5EF4-FFF2-40B4-BE49-F238E27FC236}">
-                <a16:creationId xmlns:a16="http://schemas.microsoft.com/office/drawing/2014/main" id="{D9B6445A-81D8-DA25-F2A8-0A440048D924}"/>
-              </a:ext>
-            </a:extLst>
-          </p:cNvPr>
-          <p:cNvSpPr/>
-          <p:nvPr/>
-        </p:nvSpPr>
-        <p:spPr>
-          <a:xfrm>
-            <a:off x="762000" y="6667500"/>
-            <a:ext cx="14732000" cy="1651000"/>
-          </a:xfrm>
-          <a:prstGeom prst="rect">
-            <a:avLst/>
-          </a:prstGeom>
-          <a:noFill/>
-          <a:ln/>
-        </p:spPr>
-        <p:txBody>
-          <a:bodyPr wrap="square" lIns="0" tIns="0" rIns="0" bIns="0" rtlCol="0" anchor="t"/>
-          <a:lstStyle/>
-          <a:p>
-            <a:pPr>
-              <a:lnSpc>
-                <a:spcPct val="150000"/>
-              </a:lnSpc>
-            </a:pPr>
-            <a:r>
-              <a:rPr lang="en-US" sz="1600" b="1" dirty="0">
-                <a:solidFill>
-                  <a:srgbClr val="212529"/>
-                </a:solidFill>
-                <a:latin typeface="Quattrocento Sans" panose="020B0502050000020003" pitchFamily="34" charset="0"/>
-                <a:ea typeface="QuattrocentoSans" pitchFamily="34" charset="-122"/>
-                <a:cs typeface="QuattrocentoSans" pitchFamily="34" charset="-120"/>
-              </a:rPr>
-              <a:t>Frontend:</a:t>
-            </a:r>
-            <a:r>
-              <a:rPr lang="en-US" sz="1600" dirty="0">
-                <a:solidFill>
-                  <a:srgbClr val="212529"/>
-                </a:solidFill>
-                <a:latin typeface="Quattrocento Sans" panose="020B0502050000020003" pitchFamily="34" charset="0"/>
-                <a:ea typeface="QuattrocentoSans" pitchFamily="34" charset="-122"/>
-                <a:cs typeface="QuattrocentoSans" pitchFamily="34" charset="-120"/>
-              </a:rPr>
-              <a:t> React + Vite — SPA de alto rendimiento con componentes reutilizables.</a:t>
-            </a:r>
-            <a:endParaRPr lang="en-US" sz="1800" dirty="0">
-              <a:latin typeface="Quattrocento Sans" panose="020B0502050000020003" pitchFamily="34" charset="0"/>
-            </a:endParaRPr>
-          </a:p>
-          <a:p>
-            <a:pPr>
-              <a:lnSpc>
-                <a:spcPct val="150000"/>
-              </a:lnSpc>
-              <a:spcBef>
-                <a:spcPts val="400"/>
-              </a:spcBef>
-            </a:pPr>
-            <a:r>
-              <a:rPr lang="en-US" sz="1600" b="1" dirty="0">
-                <a:solidFill>
-                  <a:srgbClr val="212529"/>
-                </a:solidFill>
-                <a:latin typeface="Quattrocento Sans" panose="020B0502050000020003" pitchFamily="34" charset="0"/>
-                <a:ea typeface="QuattrocentoSans" pitchFamily="34" charset="-122"/>
-                <a:cs typeface="QuattrocentoSans" pitchFamily="34" charset="-120"/>
-              </a:rPr>
-              <a:t>Backend:</a:t>
-            </a:r>
-            <a:r>
-              <a:rPr lang="en-US" sz="1600" dirty="0">
-                <a:solidFill>
-                  <a:srgbClr val="212529"/>
-                </a:solidFill>
-                <a:latin typeface="Quattrocento Sans" panose="020B0502050000020003" pitchFamily="34" charset="0"/>
-                <a:ea typeface="QuattrocentoSans" pitchFamily="34" charset="-122"/>
-                <a:cs typeface="QuattrocentoSans" pitchFamily="34" charset="-120"/>
-              </a:rPr>
-              <a:t> Node.js + Express.js — arquitectura ligera y escalable con eventos asíncronos.</a:t>
-            </a:r>
-            <a:endParaRPr lang="en-US" sz="1800" dirty="0">
-              <a:latin typeface="Quattrocento Sans" panose="020B0502050000020003" pitchFamily="34" charset="0"/>
-            </a:endParaRPr>
-          </a:p>
-          <a:p>
-            <a:pPr>
-              <a:lnSpc>
-                <a:spcPct val="150000"/>
-              </a:lnSpc>
-              <a:spcBef>
-                <a:spcPts val="400"/>
-              </a:spcBef>
-            </a:pPr>
-            <a:r>
-              <a:rPr lang="en-US" sz="1600" b="1" dirty="0">
-                <a:solidFill>
-                  <a:srgbClr val="212529"/>
-                </a:solidFill>
-                <a:latin typeface="Quattrocento Sans" panose="020B0502050000020003" pitchFamily="34" charset="0"/>
-                <a:ea typeface="QuattrocentoSans" pitchFamily="34" charset="-122"/>
-                <a:cs typeface="QuattrocentoSans" pitchFamily="34" charset="-120"/>
-              </a:rPr>
-              <a:t>Base de datos:</a:t>
-            </a:r>
-            <a:r>
-              <a:rPr lang="en-US" sz="1600" dirty="0">
-                <a:solidFill>
-                  <a:srgbClr val="212529"/>
-                </a:solidFill>
-                <a:latin typeface="Quattrocento Sans" panose="020B0502050000020003" pitchFamily="34" charset="0"/>
-                <a:ea typeface="QuattrocentoSans" pitchFamily="34" charset="-122"/>
-                <a:cs typeface="QuattrocentoSans" pitchFamily="34" charset="-120"/>
-              </a:rPr>
-              <a:t> PostgreSQL— modelo relacional robusto con migraciones automáticas.</a:t>
-            </a:r>
-            <a:endParaRPr lang="en-US" sz="1800" dirty="0">
-              <a:latin typeface="Quattrocento Sans" panose="020B0502050000020003" pitchFamily="34" charset="0"/>
-            </a:endParaRPr>
-          </a:p>
-          <a:p>
-            <a:pPr>
-              <a:lnSpc>
-                <a:spcPct val="150000"/>
-              </a:lnSpc>
-              <a:spcBef>
-                <a:spcPts val="400"/>
-              </a:spcBef>
-            </a:pPr>
-            <a:r>
-              <a:rPr lang="en-US" sz="1600" b="1" dirty="0">
-                <a:solidFill>
-                  <a:srgbClr val="212529"/>
-                </a:solidFill>
-                <a:latin typeface="Quattrocento Sans" panose="020B0502050000020003" pitchFamily="34" charset="0"/>
-                <a:ea typeface="QuattrocentoSans" pitchFamily="34" charset="-122"/>
-                <a:cs typeface="QuattrocentoSans" pitchFamily="34" charset="-120"/>
-              </a:rPr>
-              <a:t>Despliegue:</a:t>
-            </a:r>
-            <a:r>
-              <a:rPr lang="en-US" sz="1600" dirty="0">
-                <a:solidFill>
-                  <a:srgbClr val="212529"/>
-                </a:solidFill>
-                <a:latin typeface="Quattrocento Sans" panose="020B0502050000020003" pitchFamily="34" charset="0"/>
-                <a:ea typeface="QuattrocentoSans" pitchFamily="34" charset="-122"/>
-                <a:cs typeface="QuattrocentoSans" pitchFamily="34" charset="-120"/>
-              </a:rPr>
-              <a:t> Docker + Nginx — contenedores para entornos idénticos y proxy inverso.</a:t>
-            </a:r>
-            <a:endParaRPr lang="en-US" sz="1800" dirty="0">
+              </a:rPr>
+              <a:t>Generar un ambiente sano</a:t>
+            </a:r>
+            <a:endParaRPr lang="es-ES" sz="1800" noProof="0" dirty="0">
               <a:latin typeface="Quattrocento Sans" panose="020B0502050000020003" pitchFamily="34" charset="0"/>
             </a:endParaRPr>
           </a:p>
@@ -4953,7 +3839,7 @@
               </a:lnSpc>
             </a:pPr>
             <a:r>
-              <a:rPr lang="en-US" sz="1400" dirty="0">
+              <a:rPr lang="es-ES" sz="1400" noProof="0" dirty="0">
                 <a:solidFill>
                   <a:srgbClr val="6C757D"/>
                 </a:solidFill>
@@ -4961,9 +3847,9 @@
                 <a:ea typeface="QuattrocentoSans" pitchFamily="34" charset="-122"/>
                 <a:cs typeface="QuattrocentoSans" pitchFamily="34" charset="-120"/>
               </a:rPr>
-              <a:t>3 / 10</a:t>
-            </a:r>
-            <a:endParaRPr lang="en-US" sz="1400" dirty="0">
+              <a:t>10 / 12</a:t>
+            </a:r>
+            <a:endParaRPr lang="es-ES" sz="1400" noProof="0" dirty="0">
               <a:latin typeface="Quattrocento Sans" panose="020B0502050000020003" pitchFamily="34" charset="0"/>
             </a:endParaRPr>
           </a:p>
@@ -5014,6 +3900,219 @@
               </a14:hiddenFill>
             </a:ext>
           </a:extLst>
+        </p:spPr>
+      </p:pic>
+      <p:pic>
+        <p:nvPicPr>
+          <p:cNvPr id="10" name="Imagen 9">
+            <a:extLst>
+              <a:ext uri="{FF2B5EF4-FFF2-40B4-BE49-F238E27FC236}">
+                <a16:creationId xmlns:a16="http://schemas.microsoft.com/office/drawing/2014/main" id="{6C1FAA25-EF0E-B6C0-AA80-84A531FB0DAF}"/>
+              </a:ext>
+            </a:extLst>
+          </p:cNvPr>
+          <p:cNvPicPr>
+            <a:picLocks noChangeAspect="1"/>
+          </p:cNvPicPr>
+          <p:nvPr/>
+        </p:nvPicPr>
+        <p:blipFill>
+          <a:blip r:embed="rId4"/>
+          <a:stretch>
+            <a:fillRect/>
+          </a:stretch>
+        </p:blipFill>
+        <p:spPr>
+          <a:xfrm>
+            <a:off x="812800" y="6148580"/>
+            <a:ext cx="4648200" cy="2043841"/>
+          </a:xfrm>
+          <a:prstGeom prst="roundRect">
+            <a:avLst>
+              <a:gd name="adj" fmla="val 8594"/>
+            </a:avLst>
+          </a:prstGeom>
+          <a:solidFill>
+            <a:srgbClr val="FFFFFF">
+              <a:shade val="85000"/>
+            </a:srgbClr>
+          </a:solidFill>
+          <a:ln>
+            <a:noFill/>
+          </a:ln>
+          <a:effectLst/>
+        </p:spPr>
+      </p:pic>
+      <p:pic>
+        <p:nvPicPr>
+          <p:cNvPr id="38" name="Imagen 37">
+            <a:extLst>
+              <a:ext uri="{FF2B5EF4-FFF2-40B4-BE49-F238E27FC236}">
+                <a16:creationId xmlns:a16="http://schemas.microsoft.com/office/drawing/2014/main" id="{A78F80C8-85C5-0846-04F0-F4446E732FA9}"/>
+              </a:ext>
+            </a:extLst>
+          </p:cNvPr>
+          <p:cNvPicPr>
+            <a:picLocks noChangeAspect="1"/>
+          </p:cNvPicPr>
+          <p:nvPr/>
+        </p:nvPicPr>
+        <p:blipFill>
+          <a:blip r:embed="rId5"/>
+          <a:stretch>
+            <a:fillRect/>
+          </a:stretch>
+        </p:blipFill>
+        <p:spPr>
+          <a:xfrm>
+            <a:off x="5829300" y="5257800"/>
+            <a:ext cx="4648200" cy="3825401"/>
+          </a:xfrm>
+          <a:prstGeom prst="roundRect">
+            <a:avLst>
+              <a:gd name="adj" fmla="val 8594"/>
+            </a:avLst>
+          </a:prstGeom>
+          <a:solidFill>
+            <a:srgbClr val="FFFFFF">
+              <a:shade val="85000"/>
+            </a:srgbClr>
+          </a:solidFill>
+          <a:ln>
+            <a:noFill/>
+          </a:ln>
+          <a:effectLst/>
+        </p:spPr>
+      </p:pic>
+      <p:pic>
+        <p:nvPicPr>
+          <p:cNvPr id="40" name="Imagen 39">
+            <a:extLst>
+              <a:ext uri="{FF2B5EF4-FFF2-40B4-BE49-F238E27FC236}">
+                <a16:creationId xmlns:a16="http://schemas.microsoft.com/office/drawing/2014/main" id="{116EF135-B1E9-443E-D9D9-ED0BD88588A6}"/>
+              </a:ext>
+            </a:extLst>
+          </p:cNvPr>
+          <p:cNvPicPr>
+            <a:picLocks noChangeAspect="1"/>
+          </p:cNvPicPr>
+          <p:nvPr/>
+        </p:nvPicPr>
+        <p:blipFill>
+          <a:blip r:embed="rId6"/>
+          <a:stretch>
+            <a:fillRect/>
+          </a:stretch>
+        </p:blipFill>
+        <p:spPr>
+          <a:xfrm>
+            <a:off x="10845800" y="5630359"/>
+            <a:ext cx="4648200" cy="3080282"/>
+          </a:xfrm>
+          <a:prstGeom prst="roundRect">
+            <a:avLst>
+              <a:gd name="adj" fmla="val 8594"/>
+            </a:avLst>
+          </a:prstGeom>
+          <a:solidFill>
+            <a:srgbClr val="FFFFFF">
+              <a:shade val="85000"/>
+            </a:srgbClr>
+          </a:solidFill>
+          <a:ln>
+            <a:noFill/>
+          </a:ln>
+          <a:effectLst/>
+        </p:spPr>
+      </p:pic>
+      <p:pic>
+        <p:nvPicPr>
+          <p:cNvPr id="44" name="Imagen 43">
+            <a:extLst>
+              <a:ext uri="{FF2B5EF4-FFF2-40B4-BE49-F238E27FC236}">
+                <a16:creationId xmlns:a16="http://schemas.microsoft.com/office/drawing/2014/main" id="{090BD52D-FDEA-642E-7271-E8FF795E278C}"/>
+              </a:ext>
+            </a:extLst>
+          </p:cNvPr>
+          <p:cNvPicPr>
+            <a:picLocks noChangeAspect="1"/>
+          </p:cNvPicPr>
+          <p:nvPr/>
+        </p:nvPicPr>
+        <p:blipFill>
+          <a:blip r:embed="rId7"/>
+          <a:stretch>
+            <a:fillRect/>
+          </a:stretch>
+        </p:blipFill>
+        <p:spPr>
+          <a:xfrm>
+            <a:off x="5829300" y="1387418"/>
+            <a:ext cx="962082" cy="962082"/>
+          </a:xfrm>
+          <a:prstGeom prst="rect">
+            <a:avLst/>
+          </a:prstGeom>
+        </p:spPr>
+      </p:pic>
+      <p:pic>
+        <p:nvPicPr>
+          <p:cNvPr id="46" name="Imagen 45">
+            <a:extLst>
+              <a:ext uri="{FF2B5EF4-FFF2-40B4-BE49-F238E27FC236}">
+                <a16:creationId xmlns:a16="http://schemas.microsoft.com/office/drawing/2014/main" id="{6F56A227-CF1D-C86F-3ACA-EBA25ECF569B}"/>
+              </a:ext>
+            </a:extLst>
+          </p:cNvPr>
+          <p:cNvPicPr>
+            <a:picLocks noChangeAspect="1"/>
+          </p:cNvPicPr>
+          <p:nvPr/>
+        </p:nvPicPr>
+        <p:blipFill>
+          <a:blip r:embed="rId8"/>
+          <a:stretch>
+            <a:fillRect/>
+          </a:stretch>
+        </p:blipFill>
+        <p:spPr>
+          <a:xfrm>
+            <a:off x="11049000" y="1566612"/>
+            <a:ext cx="648926" cy="648926"/>
+          </a:xfrm>
+          <a:prstGeom prst="rect">
+            <a:avLst/>
+          </a:prstGeom>
+        </p:spPr>
+      </p:pic>
+      <p:pic>
+        <p:nvPicPr>
+          <p:cNvPr id="48" name="Imagen 47">
+            <a:extLst>
+              <a:ext uri="{FF2B5EF4-FFF2-40B4-BE49-F238E27FC236}">
+                <a16:creationId xmlns:a16="http://schemas.microsoft.com/office/drawing/2014/main" id="{FE8652F1-BF56-5748-B13F-9EFD229516C6}"/>
+              </a:ext>
+            </a:extLst>
+          </p:cNvPr>
+          <p:cNvPicPr>
+            <a:picLocks noChangeAspect="1"/>
+          </p:cNvPicPr>
+          <p:nvPr/>
+        </p:nvPicPr>
+        <p:blipFill>
+          <a:blip r:embed="rId9"/>
+          <a:stretch>
+            <a:fillRect/>
+          </a:stretch>
+        </p:blipFill>
+        <p:spPr>
+          <a:xfrm>
+            <a:off x="1016000" y="1612900"/>
+            <a:ext cx="482600" cy="482600"/>
+          </a:xfrm>
+          <a:prstGeom prst="rect">
+            <a:avLst/>
+          </a:prstGeom>
         </p:spPr>
       </p:pic>
     </p:spTree>
@@ -5094,7 +4193,7 @@
           <a:bodyPr/>
           <a:lstStyle/>
           <a:p>
-            <a:endParaRPr lang="es-ES">
+            <a:endParaRPr lang="es-ES" noProof="0" dirty="0">
               <a:solidFill>
                 <a:schemeClr val="bg1"/>
               </a:solidFill>
@@ -5138,13 +4237,13 @@
               </a:lnSpc>
             </a:pPr>
             <a:r>
-              <a:rPr lang="en-US" sz="1200" b="1" dirty="0">
+              <a:rPr lang="es-ES" sz="1200" b="1" noProof="0" dirty="0">
                 <a:solidFill>
                   <a:schemeClr val="bg1"/>
                 </a:solidFill>
                 <a:latin typeface="Quattrocento Sans" panose="020B0502050000020003" pitchFamily="34" charset="0"/>
               </a:rPr>
-              <a:t>USOS</a:t>
+              <a:t>USOS Y FUNCIONALIDAD</a:t>
             </a:r>
           </a:p>
         </p:txBody>
@@ -5178,7 +4277,7 @@
           <a:bodyPr/>
           <a:lstStyle/>
           <a:p>
-            <a:endParaRPr lang="es-ES">
+            <a:endParaRPr lang="es-ES" noProof="0" dirty="0">
               <a:latin typeface="Quattrocento Sans" panose="020B0502050000020003" pitchFamily="34" charset="0"/>
             </a:endParaRPr>
           </a:p>
@@ -5217,7 +4316,7 @@
               </a:lnSpc>
             </a:pPr>
             <a:r>
-              <a:rPr lang="en-US" sz="2800" b="1" dirty="0">
+              <a:rPr lang="es-ES" sz="2800" b="1" noProof="0" dirty="0">
                 <a:solidFill>
                   <a:srgbClr val="1B4332"/>
                 </a:solidFill>
@@ -5225,9 +4324,9 @@
                 <a:ea typeface="QuattrocentoSans" pitchFamily="34" charset="-122"/>
                 <a:cs typeface="QuattrocentoSans" pitchFamily="34" charset="-120"/>
               </a:rPr>
-              <a:t>Metodologías de Gestión y Diseño</a:t>
-            </a:r>
-            <a:endParaRPr lang="en-US" sz="2800" dirty="0">
+              <a:t>Funcionalidad de la aplicación </a:t>
+            </a:r>
+            <a:endParaRPr lang="es-ES" sz="2800" noProof="0" dirty="0">
               <a:latin typeface="Quattrocento Sans" panose="020B0502050000020003" pitchFamily="34" charset="0"/>
             </a:endParaRPr>
           </a:p>
@@ -5247,8 +4346,8 @@
         </p:nvSpPr>
         <p:spPr>
           <a:xfrm>
-            <a:off x="762000" y="1397000"/>
-            <a:ext cx="4699000" cy="3556000"/>
+            <a:off x="5778500" y="1402692"/>
+            <a:ext cx="4699000" cy="3862989"/>
           </a:xfrm>
           <a:prstGeom prst="roundRect">
             <a:avLst>
@@ -5269,118 +4368,7 @@
           <a:bodyPr/>
           <a:lstStyle/>
           <a:p>
-            <a:endParaRPr lang="es-ES">
-              <a:latin typeface="Quattrocento Sans" panose="020B0502050000020003" pitchFamily="34" charset="0"/>
-            </a:endParaRPr>
-          </a:p>
-        </p:txBody>
-      </p:sp>
-      <p:sp>
-        <p:nvSpPr>
-          <p:cNvPr id="15" name="Shape 13">
-            <a:extLst>
-              <a:ext uri="{FF2B5EF4-FFF2-40B4-BE49-F238E27FC236}">
-                <a16:creationId xmlns:a16="http://schemas.microsoft.com/office/drawing/2014/main" id="{22444C52-908A-9156-A8A3-414F6A5E9AA3}"/>
-              </a:ext>
-            </a:extLst>
-          </p:cNvPr>
-          <p:cNvSpPr/>
-          <p:nvPr/>
-        </p:nvSpPr>
-        <p:spPr>
-          <a:xfrm>
-            <a:off x="1044575" y="1587500"/>
-            <a:ext cx="400050" cy="457200"/>
-          </a:xfrm>
-          <a:custGeom>
-            <a:avLst/>
-            <a:gdLst/>
-            <a:ahLst/>
-            <a:cxnLst/>
-            <a:rect l="l" t="t" r="r" b="b"/>
-            <a:pathLst>
-              <a:path w="400050" h="457200">
-                <a:moveTo>
-                  <a:pt x="0" y="85725"/>
-                </a:moveTo>
-                <a:cubicBezTo>
-                  <a:pt x="0" y="54203"/>
-                  <a:pt x="25628" y="28575"/>
-                  <a:pt x="57150" y="28575"/>
-                </a:cubicBezTo>
-                <a:lnTo>
-                  <a:pt x="342900" y="28575"/>
-                </a:lnTo>
-                <a:cubicBezTo>
-                  <a:pt x="374422" y="28575"/>
-                  <a:pt x="400050" y="54203"/>
-                  <a:pt x="400050" y="85725"/>
-                </a:cubicBezTo>
-                <a:lnTo>
-                  <a:pt x="400050" y="371475"/>
-                </a:lnTo>
-                <a:cubicBezTo>
-                  <a:pt x="400050" y="402997"/>
-                  <a:pt x="374422" y="428625"/>
-                  <a:pt x="342900" y="428625"/>
-                </a:cubicBezTo>
-                <a:lnTo>
-                  <a:pt x="57150" y="428625"/>
-                </a:lnTo>
-                <a:cubicBezTo>
-                  <a:pt x="25628" y="428625"/>
-                  <a:pt x="0" y="402997"/>
-                  <a:pt x="0" y="371475"/>
-                </a:cubicBezTo>
-                <a:lnTo>
-                  <a:pt x="0" y="85725"/>
-                </a:lnTo>
-                <a:close/>
-                <a:moveTo>
-                  <a:pt x="57150" y="142875"/>
-                </a:moveTo>
-                <a:lnTo>
-                  <a:pt x="57150" y="371475"/>
-                </a:lnTo>
-                <a:lnTo>
-                  <a:pt x="171450" y="371475"/>
-                </a:lnTo>
-                <a:lnTo>
-                  <a:pt x="171450" y="142875"/>
-                </a:lnTo>
-                <a:lnTo>
-                  <a:pt x="57150" y="142875"/>
-                </a:lnTo>
-                <a:close/>
-                <a:moveTo>
-                  <a:pt x="342900" y="142875"/>
-                </a:moveTo>
-                <a:lnTo>
-                  <a:pt x="228600" y="142875"/>
-                </a:lnTo>
-                <a:lnTo>
-                  <a:pt x="228600" y="371475"/>
-                </a:lnTo>
-                <a:lnTo>
-                  <a:pt x="342900" y="371475"/>
-                </a:lnTo>
-                <a:lnTo>
-                  <a:pt x="342900" y="142875"/>
-                </a:lnTo>
-                <a:close/>
-              </a:path>
-            </a:pathLst>
-          </a:custGeom>
-          <a:solidFill>
-            <a:srgbClr val="2A9D8F"/>
-          </a:solidFill>
-          <a:ln/>
-        </p:spPr>
-        <p:txBody>
-          <a:bodyPr/>
-          <a:lstStyle/>
-          <a:p>
-            <a:endParaRPr lang="es-ES">
+            <a:endParaRPr lang="es-ES" noProof="0" dirty="0">
               <a:latin typeface="Quattrocento Sans" panose="020B0502050000020003" pitchFamily="34" charset="0"/>
             </a:endParaRPr>
           </a:p>
@@ -5400,7 +4388,7 @@
         </p:nvSpPr>
         <p:spPr>
           <a:xfrm>
-            <a:off x="1016000" y="2159000"/>
+            <a:off x="6032500" y="2164693"/>
             <a:ext cx="4191000" cy="381000"/>
           </a:xfrm>
           <a:prstGeom prst="rect">
@@ -5419,7 +4407,7 @@
               </a:lnSpc>
             </a:pPr>
             <a:r>
-              <a:rPr lang="en-US" sz="2000" b="1" dirty="0">
+              <a:rPr lang="es-ES" sz="2000" b="1" noProof="0" dirty="0">
                 <a:solidFill>
                   <a:srgbClr val="1B4332"/>
                 </a:solidFill>
@@ -5427,9 +4415,9 @@
                 <a:ea typeface="Quattrocento Sans" pitchFamily="34" charset="-122"/>
                 <a:cs typeface="Quattrocento Sans" pitchFamily="34" charset="-120"/>
               </a:rPr>
-              <a:t>Kanban &amp; Jira</a:t>
-            </a:r>
-            <a:endParaRPr lang="en-US" sz="1600" dirty="0">
+              <a:t>Gestión de enlaces</a:t>
+            </a:r>
+            <a:endParaRPr lang="es-ES" sz="1600" noProof="0" dirty="0">
               <a:latin typeface="Quattrocento Sans" panose="020B0502050000020003" pitchFamily="34" charset="0"/>
             </a:endParaRPr>
           </a:p>
@@ -5449,7 +4437,7 @@
         </p:nvSpPr>
         <p:spPr>
           <a:xfrm>
-            <a:off x="1016000" y="2641600"/>
+            <a:off x="6032500" y="2647293"/>
             <a:ext cx="4191000" cy="2222500"/>
           </a:xfrm>
           <a:prstGeom prst="rect">
@@ -5468,7 +4456,7 @@
               </a:lnSpc>
             </a:pPr>
             <a:r>
-              <a:rPr lang="en-US" sz="1500" dirty="0">
+              <a:rPr lang="es-ES" sz="1500" noProof="0" dirty="0">
                 <a:solidFill>
                   <a:srgbClr val="212529"/>
                 </a:solidFill>
@@ -5476,9 +4464,27 @@
                 <a:ea typeface="QuattrocentoSans" pitchFamily="34" charset="-122"/>
                 <a:cs typeface="QuattrocentoSans" pitchFamily="34" charset="-120"/>
               </a:rPr>
-              <a:t>Control del flujo mediante estados:</a:t>
-            </a:r>
-            <a:endParaRPr lang="en-US" sz="1800" dirty="0">
+              <a:t>Funcionalidad que permite centralizar de forma correcta los enlaces. </a:t>
+            </a:r>
+          </a:p>
+          <a:p>
+            <a:pPr>
+              <a:lnSpc>
+                <a:spcPct val="145000"/>
+              </a:lnSpc>
+            </a:pPr>
+            <a:r>
+              <a:rPr lang="es-ES" sz="1500" noProof="0" dirty="0">
+                <a:solidFill>
+                  <a:srgbClr val="212529"/>
+                </a:solidFill>
+                <a:latin typeface="Quattrocento Sans" panose="020B0502050000020003" pitchFamily="34" charset="0"/>
+                <a:ea typeface="QuattrocentoSans" pitchFamily="34" charset="-122"/>
+                <a:cs typeface="QuattrocentoSans" pitchFamily="34" charset="-120"/>
+              </a:rPr>
+              <a:t>Permiten:</a:t>
+            </a:r>
+            <a:endParaRPr lang="es-ES" sz="1800" noProof="0" dirty="0">
               <a:latin typeface="Quattrocento Sans" panose="020B0502050000020003" pitchFamily="34" charset="0"/>
             </a:endParaRPr>
           </a:p>
@@ -5494,30 +4500,15 @@
               <a:buChar char="•"/>
             </a:pPr>
             <a:r>
-              <a:rPr lang="en-US" sz="1500" b="1" dirty="0">
+              <a:rPr lang="es-ES" sz="1500" dirty="0">
                 <a:solidFill>
                   <a:srgbClr val="212529"/>
                 </a:solidFill>
                 <a:latin typeface="Quattrocento Sans" panose="020B0502050000020003" pitchFamily="34" charset="0"/>
                 <a:ea typeface="QuattrocentoSans" pitchFamily="34" charset="-122"/>
-                <a:cs typeface="QuattrocentoSans" pitchFamily="34" charset="-120"/>
-              </a:rPr>
-              <a:t>To-Do</a:t>
-            </a:r>
-            <a:r>
-              <a:rPr lang="en-US" sz="1500" dirty="0">
-                <a:solidFill>
-                  <a:srgbClr val="212529"/>
-                </a:solidFill>
-                <a:latin typeface="Quattrocento Sans" panose="020B0502050000020003" pitchFamily="34" charset="0"/>
-                <a:ea typeface="QuattrocentoSans" pitchFamily="34" charset="-122"/>
-                <a:cs typeface="QuattrocentoSans" pitchFamily="34" charset="-120"/>
-              </a:rPr>
-              <a:t>: Por Hacer</a:t>
-            </a:r>
-            <a:endParaRPr lang="en-US" sz="1800" dirty="0">
-              <a:latin typeface="Quattrocento Sans" panose="020B0502050000020003" pitchFamily="34" charset="0"/>
-            </a:endParaRPr>
+              </a:rPr>
+              <a:t>Administración de enlaces personalizados</a:t>
+            </a:r>
           </a:p>
           <a:p>
             <a:pPr marL="285750" indent="-285750">
@@ -5531,30 +4522,15 @@
               <a:buChar char="•"/>
             </a:pPr>
             <a:r>
-              <a:rPr lang="en-US" sz="1500" b="1" dirty="0">
+              <a:rPr lang="es-ES" sz="1500" dirty="0">
                 <a:solidFill>
                   <a:srgbClr val="212529"/>
                 </a:solidFill>
                 <a:latin typeface="Quattrocento Sans" panose="020B0502050000020003" pitchFamily="34" charset="0"/>
                 <a:ea typeface="QuattrocentoSans" pitchFamily="34" charset="-122"/>
-                <a:cs typeface="QuattrocentoSans" pitchFamily="34" charset="-120"/>
-              </a:rPr>
-              <a:t>In Progress</a:t>
-            </a:r>
-            <a:r>
-              <a:rPr lang="en-US" sz="1500" dirty="0">
-                <a:solidFill>
-                  <a:srgbClr val="212529"/>
-                </a:solidFill>
-                <a:latin typeface="Quattrocento Sans" panose="020B0502050000020003" pitchFamily="34" charset="0"/>
-                <a:ea typeface="QuattrocentoSans" pitchFamily="34" charset="-122"/>
-                <a:cs typeface="QuattrocentoSans" pitchFamily="34" charset="-120"/>
-              </a:rPr>
-              <a:t>: En cursor</a:t>
-            </a:r>
-            <a:endParaRPr lang="en-US" sz="1800" dirty="0">
-              <a:latin typeface="Quattrocento Sans" panose="020B0502050000020003" pitchFamily="34" charset="0"/>
-            </a:endParaRPr>
+              </a:rPr>
+              <a:t>Control de visibilidad de enlaces </a:t>
+            </a:r>
           </a:p>
           <a:p>
             <a:pPr marL="285750" indent="-285750">
@@ -5568,102 +4544,15 @@
               <a:buChar char="•"/>
             </a:pPr>
             <a:r>
-              <a:rPr lang="en-US" sz="1500" b="1" dirty="0">
+              <a:rPr lang="es-ES" sz="1500" dirty="0">
                 <a:solidFill>
                   <a:srgbClr val="212529"/>
                 </a:solidFill>
                 <a:latin typeface="Quattrocento Sans" panose="020B0502050000020003" pitchFamily="34" charset="0"/>
                 <a:ea typeface="QuattrocentoSans" pitchFamily="34" charset="-122"/>
-                <a:cs typeface="QuattrocentoSans" pitchFamily="34" charset="-120"/>
-              </a:rPr>
-              <a:t>Review</a:t>
-            </a:r>
-            <a:r>
-              <a:rPr lang="en-US" sz="1500" dirty="0">
-                <a:solidFill>
-                  <a:srgbClr val="212529"/>
-                </a:solidFill>
-                <a:latin typeface="Quattrocento Sans" panose="020B0502050000020003" pitchFamily="34" charset="0"/>
-                <a:ea typeface="QuattrocentoSans" pitchFamily="34" charset="-122"/>
-                <a:cs typeface="QuattrocentoSans" pitchFamily="34" charset="-120"/>
-              </a:rPr>
-              <a:t>: En revisión</a:t>
-            </a:r>
-            <a:endParaRPr lang="en-US" sz="1800" dirty="0">
-              <a:latin typeface="Quattrocento Sans" panose="020B0502050000020003" pitchFamily="34" charset="0"/>
-            </a:endParaRPr>
-          </a:p>
-          <a:p>
-            <a:pPr marL="285750" indent="-285750">
-              <a:lnSpc>
-                <a:spcPct val="145000"/>
-              </a:lnSpc>
-              <a:spcBef>
-                <a:spcPts val="10"/>
-              </a:spcBef>
-              <a:buSzPct val="100000"/>
-              <a:buChar char="•"/>
-            </a:pPr>
-            <a:r>
-              <a:rPr lang="en-US" sz="1500" b="1" dirty="0">
-                <a:solidFill>
-                  <a:srgbClr val="212529"/>
-                </a:solidFill>
-                <a:latin typeface="Quattrocento Sans" panose="020B0502050000020003" pitchFamily="34" charset="0"/>
-                <a:ea typeface="QuattrocentoSans" pitchFamily="34" charset="-122"/>
-                <a:cs typeface="QuattrocentoSans" pitchFamily="34" charset="-120"/>
-              </a:rPr>
-              <a:t>Done</a:t>
-            </a:r>
-            <a:r>
-              <a:rPr lang="en-US" sz="1500" dirty="0">
-                <a:solidFill>
-                  <a:srgbClr val="212529"/>
-                </a:solidFill>
-                <a:latin typeface="Quattrocento Sans" panose="020B0502050000020003" pitchFamily="34" charset="0"/>
-                <a:ea typeface="QuattrocentoSans" pitchFamily="34" charset="-122"/>
-                <a:cs typeface="QuattrocentoSans" pitchFamily="34" charset="-120"/>
-              </a:rPr>
-              <a:t>: </a:t>
-            </a:r>
-            <a:r>
-              <a:rPr lang="en-US" sz="1500" dirty="0" err="1">
-                <a:solidFill>
-                  <a:srgbClr val="212529"/>
-                </a:solidFill>
-                <a:latin typeface="Quattrocento Sans" panose="020B0502050000020003" pitchFamily="34" charset="0"/>
-                <a:ea typeface="QuattrocentoSans" pitchFamily="34" charset="-122"/>
-                <a:cs typeface="QuattrocentoSans" pitchFamily="34" charset="-120"/>
-              </a:rPr>
-              <a:t>Finalizado</a:t>
-            </a:r>
-            <a:endParaRPr lang="en-US" sz="1800" dirty="0">
-              <a:latin typeface="Quattrocento Sans" panose="020B0502050000020003" pitchFamily="34" charset="0"/>
-            </a:endParaRPr>
-          </a:p>
-          <a:p>
-            <a:pPr>
-              <a:lnSpc>
-                <a:spcPct val="145000"/>
-              </a:lnSpc>
-              <a:spcBef>
-                <a:spcPts val="400"/>
-              </a:spcBef>
-            </a:pPr>
-            <a:r>
-              <a:rPr lang="en-US" sz="1500" dirty="0">
-                <a:solidFill>
-                  <a:srgbClr val="212529"/>
-                </a:solidFill>
-                <a:latin typeface="Quattrocento Sans" panose="020B0502050000020003" pitchFamily="34" charset="0"/>
-                <a:ea typeface="QuattrocentoSans" pitchFamily="34" charset="-122"/>
-                <a:cs typeface="QuattrocentoSans" pitchFamily="34" charset="-120"/>
-              </a:rPr>
-              <a:t>Evita cuellos de botella.</a:t>
-            </a:r>
-            <a:endParaRPr lang="en-US" sz="1800" dirty="0">
-              <a:latin typeface="Quattrocento Sans" panose="020B0502050000020003" pitchFamily="34" charset="0"/>
-            </a:endParaRPr>
+              </a:rPr>
+              <a:t>Organización mediante interfaz intuitiva</a:t>
+            </a:r>
           </a:p>
         </p:txBody>
       </p:sp>
@@ -5681,8 +4570,8 @@
         </p:nvSpPr>
         <p:spPr>
           <a:xfrm>
-            <a:off x="5778500" y="1397000"/>
-            <a:ext cx="4699000" cy="3556000"/>
+            <a:off x="10794999" y="1402693"/>
+            <a:ext cx="4699000" cy="3862990"/>
           </a:xfrm>
           <a:prstGeom prst="roundRect">
             <a:avLst>
@@ -5703,7 +4592,7 @@
           <a:bodyPr/>
           <a:lstStyle/>
           <a:p>
-            <a:endParaRPr lang="es-ES">
+            <a:endParaRPr lang="es-ES" noProof="0" dirty="0">
               <a:latin typeface="Quattrocento Sans" panose="020B0502050000020003" pitchFamily="34" charset="0"/>
             </a:endParaRPr>
           </a:p>
@@ -5723,7 +4612,7 @@
         </p:nvSpPr>
         <p:spPr>
           <a:xfrm>
-            <a:off x="6032500" y="1587500"/>
+            <a:off x="11048999" y="1593193"/>
             <a:ext cx="457200" cy="457200"/>
           </a:xfrm>
           <a:custGeom>
@@ -5891,7 +4780,7 @@
           <a:bodyPr/>
           <a:lstStyle/>
           <a:p>
-            <a:endParaRPr lang="es-ES">
+            <a:endParaRPr lang="es-ES" noProof="0" dirty="0">
               <a:latin typeface="Quattrocento Sans" panose="020B0502050000020003" pitchFamily="34" charset="0"/>
             </a:endParaRPr>
           </a:p>
@@ -5911,7 +4800,7 @@
         </p:nvSpPr>
         <p:spPr>
           <a:xfrm>
-            <a:off x="6032500" y="2159000"/>
+            <a:off x="11048999" y="2164693"/>
             <a:ext cx="4191000" cy="381000"/>
           </a:xfrm>
           <a:prstGeom prst="rect">
@@ -5930,7 +4819,7 @@
               </a:lnSpc>
             </a:pPr>
             <a:r>
-              <a:rPr lang="en-US" sz="2000" b="1" dirty="0">
+              <a:rPr lang="es-ES" sz="2000" b="1" noProof="0" dirty="0">
                 <a:solidFill>
                   <a:srgbClr val="1B4332"/>
                 </a:solidFill>
@@ -5938,9 +4827,9 @@
                 <a:ea typeface="Quattrocento Sans" pitchFamily="34" charset="-122"/>
                 <a:cs typeface="Quattrocento Sans" pitchFamily="34" charset="-120"/>
               </a:rPr>
-              <a:t>Scrum-Light</a:t>
-            </a:r>
-            <a:endParaRPr lang="en-US" sz="1600" dirty="0">
+              <a:t>Sistema de interacción</a:t>
+            </a:r>
+            <a:endParaRPr lang="es-ES" sz="1600" noProof="0" dirty="0">
               <a:latin typeface="Quattrocento Sans" panose="020B0502050000020003" pitchFamily="34" charset="0"/>
             </a:endParaRPr>
           </a:p>
@@ -5960,7 +4849,7 @@
         </p:nvSpPr>
         <p:spPr>
           <a:xfrm>
-            <a:off x="6032500" y="2641600"/>
+            <a:off x="11048999" y="2647293"/>
             <a:ext cx="4191000" cy="2222500"/>
           </a:xfrm>
           <a:prstGeom prst="rect">
@@ -5979,7 +4868,7 @@
               </a:lnSpc>
             </a:pPr>
             <a:r>
-              <a:rPr lang="en-US" sz="1500" dirty="0">
+              <a:rPr lang="es-ES" sz="1500" noProof="0" dirty="0">
                 <a:solidFill>
                   <a:srgbClr val="212529"/>
                 </a:solidFill>
@@ -5987,9 +4876,9 @@
                 <a:ea typeface="QuattrocentoSans" pitchFamily="34" charset="-122"/>
                 <a:cs typeface="QuattrocentoSans" pitchFamily="34" charset="-120"/>
               </a:rPr>
-              <a:t>Ciclos de retroalimentación rápidos para validación de componentes.</a:t>
-            </a:r>
-            <a:endParaRPr lang="en-US" sz="1800" dirty="0">
+              <a:t>Funcionalidad que permite la interacción de una comunidad.</a:t>
+            </a:r>
+            <a:endParaRPr lang="es-ES" sz="1800" noProof="0" dirty="0">
               <a:latin typeface="Quattrocento Sans" panose="020B0502050000020003" pitchFamily="34" charset="0"/>
             </a:endParaRPr>
           </a:p>
@@ -6003,19 +4892,15 @@
               </a:spcBef>
             </a:pPr>
             <a:r>
-              <a:rPr lang="en-US" sz="1500" dirty="0">
+              <a:rPr lang="es-ES" sz="1500" dirty="0">
                 <a:solidFill>
                   <a:srgbClr val="212529"/>
                 </a:solidFill>
                 <a:latin typeface="Quattrocento Sans" panose="020B0502050000020003" pitchFamily="34" charset="0"/>
                 <a:ea typeface="QuattrocentoSans" pitchFamily="34" charset="-122"/>
-                <a:cs typeface="QuattrocentoSans" pitchFamily="34" charset="-120"/>
               </a:rPr>
               <a:t>Permiten:</a:t>
             </a:r>
-            <a:endParaRPr lang="en-US" sz="1800" dirty="0">
-              <a:latin typeface="Quattrocento Sans" panose="020B0502050000020003" pitchFamily="34" charset="0"/>
-            </a:endParaRPr>
           </a:p>
           <a:p>
             <a:pPr marL="285750" indent="-285750">
@@ -6029,19 +4914,15 @@
               <a:buChar char="•"/>
             </a:pPr>
             <a:r>
-              <a:rPr lang="en-US" sz="1500" dirty="0">
+              <a:rPr lang="es-ES" sz="1500" dirty="0">
                 <a:solidFill>
                   <a:srgbClr val="212529"/>
                 </a:solidFill>
                 <a:latin typeface="Quattrocento Sans" panose="020B0502050000020003" pitchFamily="34" charset="0"/>
                 <a:ea typeface="QuattrocentoSans" pitchFamily="34" charset="-122"/>
-                <a:cs typeface="QuattrocentoSans" pitchFamily="34" charset="-120"/>
-              </a:rPr>
-              <a:t>Detectar problemas temprano</a:t>
-            </a:r>
-            <a:endParaRPr lang="en-US" sz="1800" dirty="0">
-              <a:latin typeface="Quattrocento Sans" panose="020B0502050000020003" pitchFamily="34" charset="0"/>
-            </a:endParaRPr>
+              </a:rPr>
+              <a:t>Creación de hilos de discusión por temáticas</a:t>
+            </a:r>
           </a:p>
           <a:p>
             <a:pPr marL="285750" indent="-285750">
@@ -6055,19 +4936,15 @@
               <a:buChar char="•"/>
             </a:pPr>
             <a:r>
-              <a:rPr lang="en-US" sz="1500" dirty="0">
+              <a:rPr lang="es-ES" sz="1500" dirty="0">
                 <a:solidFill>
                   <a:srgbClr val="212529"/>
                 </a:solidFill>
                 <a:latin typeface="Quattrocento Sans" panose="020B0502050000020003" pitchFamily="34" charset="0"/>
                 <a:ea typeface="QuattrocentoSans" pitchFamily="34" charset="-122"/>
-                <a:cs typeface="QuattrocentoSans" pitchFamily="34" charset="-120"/>
-              </a:rPr>
-              <a:t>Adaptar requisitos</a:t>
-            </a:r>
-            <a:endParaRPr lang="en-US" sz="1800" dirty="0">
-              <a:latin typeface="Quattrocento Sans" panose="020B0502050000020003" pitchFamily="34" charset="0"/>
-            </a:endParaRPr>
+              </a:rPr>
+              <a:t>Anidación de respuestas para el flujo de la conversación</a:t>
+            </a:r>
           </a:p>
           <a:p>
             <a:pPr marL="285750" indent="-285750">
@@ -6081,7 +4958,7 @@
               <a:buChar char="•"/>
             </a:pPr>
             <a:r>
-              <a:rPr lang="en-US" sz="1500" dirty="0">
+              <a:rPr lang="es-ES" sz="1500" noProof="0" dirty="0">
                 <a:solidFill>
                   <a:srgbClr val="212529"/>
                 </a:solidFill>
@@ -6089,9 +4966,9 @@
                 <a:ea typeface="QuattrocentoSans" pitchFamily="34" charset="-122"/>
                 <a:cs typeface="QuattrocentoSans" pitchFamily="34" charset="-120"/>
               </a:rPr>
-              <a:t>Entregar valor incremental</a:t>
-            </a:r>
-            <a:endParaRPr lang="en-US" sz="1800" dirty="0">
+              <a:t>Pre visualización del foro</a:t>
+            </a:r>
+            <a:endParaRPr lang="es-ES" sz="1800" noProof="0" dirty="0">
               <a:latin typeface="Quattrocento Sans" panose="020B0502050000020003" pitchFamily="34" charset="0"/>
             </a:endParaRPr>
           </a:p>
@@ -6111,8 +4988,8 @@
         </p:nvSpPr>
         <p:spPr>
           <a:xfrm>
-            <a:off x="10795000" y="1397000"/>
-            <a:ext cx="4699000" cy="3556000"/>
+            <a:off x="762001" y="1465325"/>
+            <a:ext cx="4699000" cy="3800357"/>
           </a:xfrm>
           <a:prstGeom prst="roundRect">
             <a:avLst>
@@ -6133,7 +5010,7 @@
           <a:bodyPr/>
           <a:lstStyle/>
           <a:p>
-            <a:endParaRPr lang="es-ES">
+            <a:endParaRPr lang="es-ES" noProof="0" dirty="0">
               <a:latin typeface="Quattrocento Sans" panose="020B0502050000020003" pitchFamily="34" charset="0"/>
             </a:endParaRPr>
           </a:p>
@@ -6153,7 +5030,7 @@
         </p:nvSpPr>
         <p:spPr>
           <a:xfrm>
-            <a:off x="11106150" y="1587500"/>
+            <a:off x="1073151" y="1655826"/>
             <a:ext cx="342900" cy="457200"/>
           </a:xfrm>
           <a:custGeom>
@@ -6258,7 +5135,7 @@
           <a:bodyPr/>
           <a:lstStyle/>
           <a:p>
-            <a:endParaRPr lang="es-ES">
+            <a:endParaRPr lang="es-ES" noProof="0" dirty="0">
               <a:latin typeface="Quattrocento Sans" panose="020B0502050000020003" pitchFamily="34" charset="0"/>
             </a:endParaRPr>
           </a:p>
@@ -6278,7 +5155,7 @@
         </p:nvSpPr>
         <p:spPr>
           <a:xfrm>
-            <a:off x="11049000" y="2159000"/>
+            <a:off x="1016001" y="2227326"/>
             <a:ext cx="4191000" cy="381000"/>
           </a:xfrm>
           <a:prstGeom prst="rect">
@@ -6297,7 +5174,7 @@
               </a:lnSpc>
             </a:pPr>
             <a:r>
-              <a:rPr lang="en-US" sz="2000" b="1" dirty="0">
+              <a:rPr lang="es-ES" sz="2000" b="1" noProof="0" dirty="0">
                 <a:solidFill>
                   <a:srgbClr val="1B4332"/>
                 </a:solidFill>
@@ -6305,9 +5182,9 @@
                 <a:ea typeface="Quattrocento Sans" pitchFamily="34" charset="-122"/>
                 <a:cs typeface="Quattrocento Sans" pitchFamily="34" charset="-120"/>
               </a:rPr>
-              <a:t>Mobile-First</a:t>
-            </a:r>
-            <a:endParaRPr lang="en-US" sz="1600" dirty="0">
+              <a:t>Panel de personalización</a:t>
+            </a:r>
+            <a:endParaRPr lang="es-ES" sz="1600" noProof="0" dirty="0">
               <a:latin typeface="Quattrocento Sans" panose="020B0502050000020003" pitchFamily="34" charset="0"/>
             </a:endParaRPr>
           </a:p>
@@ -6327,7 +5204,7 @@
         </p:nvSpPr>
         <p:spPr>
           <a:xfrm>
-            <a:off x="11049000" y="2641600"/>
+            <a:off x="1016001" y="2709926"/>
             <a:ext cx="4191000" cy="2222500"/>
           </a:xfrm>
           <a:prstGeom prst="rect">
@@ -6346,7 +5223,7 @@
               </a:lnSpc>
             </a:pPr>
             <a:r>
-              <a:rPr lang="en-US" sz="1500" dirty="0">
+              <a:rPr lang="es-ES" sz="1500" noProof="0" dirty="0">
                 <a:solidFill>
                   <a:srgbClr val="212529"/>
                 </a:solidFill>
@@ -6354,9 +5231,9 @@
                 <a:ea typeface="QuattrocentoSans" pitchFamily="34" charset="-122"/>
                 <a:cs typeface="QuattrocentoSans" pitchFamily="34" charset="-120"/>
               </a:rPr>
-              <a:t>Desarrollo desde la resolución más baja hacia escritorio.</a:t>
-            </a:r>
-            <a:endParaRPr lang="en-US" sz="1800" dirty="0">
+              <a:t>Función que permite realizar de forma llamativa la difusión del perfil.</a:t>
+            </a:r>
+            <a:endParaRPr lang="es-ES" sz="1800" noProof="0" dirty="0">
               <a:latin typeface="Quattrocento Sans" panose="020B0502050000020003" pitchFamily="34" charset="0"/>
             </a:endParaRPr>
           </a:p>
@@ -6370,7 +5247,7 @@
               </a:spcBef>
             </a:pPr>
             <a:r>
-              <a:rPr lang="en-US" sz="1500" dirty="0">
+              <a:rPr lang="es-ES" sz="1500" noProof="0" dirty="0">
                 <a:solidFill>
                   <a:srgbClr val="212529"/>
                 </a:solidFill>
@@ -6378,9 +5255,9 @@
                 <a:ea typeface="QuattrocentoSans" pitchFamily="34" charset="-122"/>
                 <a:cs typeface="QuattrocentoSans" pitchFamily="34" charset="-120"/>
               </a:rPr>
-              <a:t>Garantiza:</a:t>
-            </a:r>
-            <a:endParaRPr lang="en-US" sz="1800" dirty="0">
+              <a:t>Permite:</a:t>
+            </a:r>
+            <a:endParaRPr lang="es-ES" sz="1800" noProof="0" dirty="0">
               <a:latin typeface="Quattrocento Sans" panose="020B0502050000020003" pitchFamily="34" charset="0"/>
             </a:endParaRPr>
           </a:p>
@@ -6396,19 +5273,15 @@
               <a:buChar char="•"/>
             </a:pPr>
             <a:r>
-              <a:rPr lang="en-US" sz="1500" dirty="0">
+              <a:rPr lang="es-ES" sz="1500" dirty="0">
                 <a:solidFill>
                   <a:srgbClr val="212529"/>
                 </a:solidFill>
                 <a:latin typeface="Quattrocento Sans" panose="020B0502050000020003" pitchFamily="34" charset="0"/>
                 <a:ea typeface="QuattrocentoSans" pitchFamily="34" charset="-122"/>
-                <a:cs typeface="QuattrocentoSans" pitchFamily="34" charset="-120"/>
-              </a:rPr>
-              <a:t>Experiencia óptima en móviles</a:t>
-            </a:r>
-            <a:endParaRPr lang="en-US" sz="1800" dirty="0">
-              <a:latin typeface="Quattrocento Sans" panose="020B0502050000020003" pitchFamily="34" charset="0"/>
-            </a:endParaRPr>
+              </a:rPr>
+              <a:t>Edición dinámica de perfil</a:t>
+            </a:r>
           </a:p>
           <a:p>
             <a:pPr marL="285750" indent="-285750">
@@ -6422,19 +5295,15 @@
               <a:buChar char="•"/>
             </a:pPr>
             <a:r>
-              <a:rPr lang="en-US" sz="1500" dirty="0">
+              <a:rPr lang="es-ES" sz="1500" dirty="0">
                 <a:solidFill>
                   <a:srgbClr val="212529"/>
                 </a:solidFill>
                 <a:latin typeface="Quattrocento Sans" panose="020B0502050000020003" pitchFamily="34" charset="0"/>
                 <a:ea typeface="QuattrocentoSans" pitchFamily="34" charset="-122"/>
-                <a:cs typeface="QuattrocentoSans" pitchFamily="34" charset="-120"/>
-              </a:rPr>
-              <a:t>Progressive enhancement</a:t>
-            </a:r>
-            <a:endParaRPr lang="en-US" sz="1800" dirty="0">
-              <a:latin typeface="Quattrocento Sans" panose="020B0502050000020003" pitchFamily="34" charset="0"/>
-            </a:endParaRPr>
+              </a:rPr>
+              <a:t>Pre visualización en tiempo real de los cambios</a:t>
+            </a:r>
           </a:p>
           <a:p>
             <a:pPr marL="285750" indent="-285750">
@@ -6448,659 +5317,16 @@
               <a:buChar char="•"/>
             </a:pPr>
             <a:r>
-              <a:rPr lang="en-US" sz="1500" dirty="0">
+              <a:rPr lang="es-ES" sz="1500" dirty="0">
                 <a:solidFill>
                   <a:srgbClr val="212529"/>
                 </a:solidFill>
                 <a:latin typeface="Quattrocento Sans" panose="020B0502050000020003" pitchFamily="34" charset="0"/>
                 <a:ea typeface="QuattrocentoSans" pitchFamily="34" charset="-122"/>
-                <a:cs typeface="QuattrocentoSans" pitchFamily="34" charset="-120"/>
-              </a:rPr>
-              <a:t>Mayor cobertura de usuarios</a:t>
-            </a:r>
-            <a:endParaRPr lang="en-US" sz="1800" dirty="0">
-              <a:latin typeface="Quattrocento Sans" panose="020B0502050000020003" pitchFamily="34" charset="0"/>
-            </a:endParaRPr>
-          </a:p>
-        </p:txBody>
-      </p:sp>
-      <p:sp>
-        <p:nvSpPr>
-          <p:cNvPr id="26" name="Shape 24">
-            <a:extLst>
-              <a:ext uri="{FF2B5EF4-FFF2-40B4-BE49-F238E27FC236}">
-                <a16:creationId xmlns:a16="http://schemas.microsoft.com/office/drawing/2014/main" id="{D1BADE1F-915E-D327-2161-C7F20A4ECE4E}"/>
-              </a:ext>
-            </a:extLst>
-          </p:cNvPr>
-          <p:cNvSpPr/>
-          <p:nvPr/>
-        </p:nvSpPr>
-        <p:spPr>
-          <a:xfrm>
-            <a:off x="762000" y="5207000"/>
-            <a:ext cx="14732000" cy="25400"/>
-          </a:xfrm>
-          <a:prstGeom prst="rect">
-            <a:avLst/>
-          </a:prstGeom>
-          <a:solidFill>
-            <a:srgbClr val="E9ECEF"/>
-          </a:solidFill>
-          <a:ln/>
-        </p:spPr>
-        <p:txBody>
-          <a:bodyPr/>
-          <a:lstStyle/>
-          <a:p>
-            <a:endParaRPr lang="es-ES">
-              <a:latin typeface="Quattrocento Sans" panose="020B0502050000020003" pitchFamily="34" charset="0"/>
-            </a:endParaRPr>
-          </a:p>
-        </p:txBody>
-      </p:sp>
-      <p:sp>
-        <p:nvSpPr>
-          <p:cNvPr id="27" name="Text 25">
-            <a:extLst>
-              <a:ext uri="{FF2B5EF4-FFF2-40B4-BE49-F238E27FC236}">
-                <a16:creationId xmlns:a16="http://schemas.microsoft.com/office/drawing/2014/main" id="{F82E9A3A-BE98-A184-729F-FE35F5AFD3EA}"/>
-              </a:ext>
-            </a:extLst>
-          </p:cNvPr>
-          <p:cNvSpPr/>
-          <p:nvPr/>
-        </p:nvSpPr>
-        <p:spPr>
-          <a:xfrm>
-            <a:off x="762000" y="5397500"/>
-            <a:ext cx="5080000" cy="381000"/>
-          </a:xfrm>
-          <a:prstGeom prst="rect">
-            <a:avLst/>
-          </a:prstGeom>
-          <a:noFill/>
-          <a:ln/>
-        </p:spPr>
-        <p:txBody>
-          <a:bodyPr wrap="none" lIns="0" tIns="0" rIns="0" bIns="0" rtlCol="0" anchor="ctr"/>
-          <a:lstStyle/>
-          <a:p>
-            <a:pPr>
-              <a:lnSpc>
-                <a:spcPct val="140000"/>
-              </a:lnSpc>
-            </a:pPr>
-            <a:r>
-              <a:rPr lang="en-US" sz="2000" b="1" dirty="0">
-                <a:solidFill>
-                  <a:srgbClr val="6C757D"/>
-                </a:solidFill>
-                <a:latin typeface="Quattrocento Sans" panose="020B0502050000020003" pitchFamily="34" charset="0"/>
-                <a:ea typeface="QuattrocentoSans" pitchFamily="34" charset="-122"/>
-                <a:cs typeface="QuattrocentoSans" pitchFamily="34" charset="-120"/>
-              </a:rPr>
-              <a:t>Stack Tecnológico</a:t>
-            </a:r>
-            <a:endParaRPr lang="en-US" sz="2000" dirty="0">
-              <a:latin typeface="Quattrocento Sans" panose="020B0502050000020003" pitchFamily="34" charset="0"/>
-            </a:endParaRPr>
-          </a:p>
-        </p:txBody>
-      </p:sp>
-      <p:sp>
-        <p:nvSpPr>
-          <p:cNvPr id="28" name="Shape 26">
-            <a:extLst>
-              <a:ext uri="{FF2B5EF4-FFF2-40B4-BE49-F238E27FC236}">
-                <a16:creationId xmlns:a16="http://schemas.microsoft.com/office/drawing/2014/main" id="{90720BDE-0B4F-91A6-FF82-5F17295E923C}"/>
-              </a:ext>
-            </a:extLst>
-          </p:cNvPr>
-          <p:cNvSpPr/>
-          <p:nvPr/>
-        </p:nvSpPr>
-        <p:spPr>
-          <a:xfrm>
-            <a:off x="762000" y="5969000"/>
-            <a:ext cx="1651000" cy="457200"/>
-          </a:xfrm>
-          <a:prstGeom prst="roundRect">
-            <a:avLst>
-              <a:gd name="adj" fmla="val 16000"/>
-            </a:avLst>
-          </a:prstGeom>
-          <a:solidFill>
-            <a:srgbClr val="1B4332"/>
-          </a:solidFill>
-          <a:ln/>
-        </p:spPr>
-        <p:txBody>
-          <a:bodyPr/>
-          <a:lstStyle/>
-          <a:p>
-            <a:endParaRPr lang="es-ES">
-              <a:latin typeface="Quattrocento Sans" panose="020B0502050000020003" pitchFamily="34" charset="0"/>
-            </a:endParaRPr>
-          </a:p>
-        </p:txBody>
-      </p:sp>
-      <p:sp>
-        <p:nvSpPr>
-          <p:cNvPr id="29" name="Text 27">
-            <a:extLst>
-              <a:ext uri="{FF2B5EF4-FFF2-40B4-BE49-F238E27FC236}">
-                <a16:creationId xmlns:a16="http://schemas.microsoft.com/office/drawing/2014/main" id="{762662A7-EEAE-D014-6C6B-463512DCD557}"/>
-              </a:ext>
-            </a:extLst>
-          </p:cNvPr>
-          <p:cNvSpPr/>
-          <p:nvPr/>
-        </p:nvSpPr>
-        <p:spPr>
-          <a:xfrm>
-            <a:off x="762000" y="5969000"/>
-            <a:ext cx="1651000" cy="457200"/>
-          </a:xfrm>
-          <a:prstGeom prst="rect">
-            <a:avLst/>
-          </a:prstGeom>
-          <a:noFill/>
-          <a:ln/>
-        </p:spPr>
-        <p:txBody>
-          <a:bodyPr wrap="none" lIns="0" tIns="0" rIns="0" bIns="0" rtlCol="0" anchor="ctr"/>
-          <a:lstStyle/>
-          <a:p>
-            <a:pPr algn="ctr">
-              <a:lnSpc>
-                <a:spcPct val="100000"/>
-              </a:lnSpc>
-            </a:pPr>
-            <a:r>
-              <a:rPr lang="en-US" sz="1400" b="1" dirty="0">
-                <a:solidFill>
-                  <a:srgbClr val="FFFFFF"/>
-                </a:solidFill>
-                <a:latin typeface="Quattrocento Sans" panose="020B0502050000020003" pitchFamily="34" charset="0"/>
-                <a:ea typeface="QuattrocentoSans" pitchFamily="34" charset="-122"/>
-                <a:cs typeface="QuattrocentoSans" pitchFamily="34" charset="-120"/>
-              </a:rPr>
-              <a:t>React</a:t>
-            </a:r>
-            <a:endParaRPr lang="en-US" sz="1400" dirty="0">
-              <a:latin typeface="Quattrocento Sans" panose="020B0502050000020003" pitchFamily="34" charset="0"/>
-            </a:endParaRPr>
-          </a:p>
-        </p:txBody>
-      </p:sp>
-      <p:sp>
-        <p:nvSpPr>
-          <p:cNvPr id="30" name="Shape 28">
-            <a:extLst>
-              <a:ext uri="{FF2B5EF4-FFF2-40B4-BE49-F238E27FC236}">
-                <a16:creationId xmlns:a16="http://schemas.microsoft.com/office/drawing/2014/main" id="{BC937F96-271C-8D96-61CD-98CD22001879}"/>
-              </a:ext>
-            </a:extLst>
-          </p:cNvPr>
-          <p:cNvSpPr/>
-          <p:nvPr/>
-        </p:nvSpPr>
-        <p:spPr>
-          <a:xfrm>
-            <a:off x="2603500" y="5969000"/>
-            <a:ext cx="2286000" cy="457200"/>
-          </a:xfrm>
-          <a:prstGeom prst="roundRect">
-            <a:avLst>
-              <a:gd name="adj" fmla="val 16000"/>
-            </a:avLst>
-          </a:prstGeom>
-          <a:solidFill>
-            <a:srgbClr val="1B4332"/>
-          </a:solidFill>
-          <a:ln/>
-        </p:spPr>
-        <p:txBody>
-          <a:bodyPr/>
-          <a:lstStyle/>
-          <a:p>
-            <a:endParaRPr lang="es-ES">
-              <a:latin typeface="Quattrocento Sans" panose="020B0502050000020003" pitchFamily="34" charset="0"/>
-            </a:endParaRPr>
-          </a:p>
-        </p:txBody>
-      </p:sp>
-      <p:sp>
-        <p:nvSpPr>
-          <p:cNvPr id="31" name="Text 29">
-            <a:extLst>
-              <a:ext uri="{FF2B5EF4-FFF2-40B4-BE49-F238E27FC236}">
-                <a16:creationId xmlns:a16="http://schemas.microsoft.com/office/drawing/2014/main" id="{AF02A601-2B00-D1D7-3709-EA4565A33B18}"/>
-              </a:ext>
-            </a:extLst>
-          </p:cNvPr>
-          <p:cNvSpPr/>
-          <p:nvPr/>
-        </p:nvSpPr>
-        <p:spPr>
-          <a:xfrm>
-            <a:off x="2603500" y="5969000"/>
-            <a:ext cx="2286000" cy="457200"/>
-          </a:xfrm>
-          <a:prstGeom prst="rect">
-            <a:avLst/>
-          </a:prstGeom>
-          <a:noFill/>
-          <a:ln/>
-        </p:spPr>
-        <p:txBody>
-          <a:bodyPr wrap="none" lIns="0" tIns="0" rIns="0" bIns="0" rtlCol="0" anchor="ctr"/>
-          <a:lstStyle/>
-          <a:p>
-            <a:pPr algn="ctr">
-              <a:lnSpc>
-                <a:spcPct val="100000"/>
-              </a:lnSpc>
-            </a:pPr>
-            <a:r>
-              <a:rPr lang="en-US" sz="1400" b="1" dirty="0">
-                <a:solidFill>
-                  <a:srgbClr val="FFFFFF"/>
-                </a:solidFill>
-                <a:latin typeface="Quattrocento Sans" panose="020B0502050000020003" pitchFamily="34" charset="0"/>
-                <a:ea typeface="QuattrocentoSans" pitchFamily="34" charset="-122"/>
-                <a:cs typeface="QuattrocentoSans" pitchFamily="34" charset="-120"/>
-              </a:rPr>
-              <a:t>Node.js</a:t>
-            </a:r>
-            <a:endParaRPr lang="en-US" sz="1400" dirty="0">
-              <a:latin typeface="Quattrocento Sans" panose="020B0502050000020003" pitchFamily="34" charset="0"/>
-            </a:endParaRPr>
-          </a:p>
-        </p:txBody>
-      </p:sp>
-      <p:sp>
-        <p:nvSpPr>
-          <p:cNvPr id="32" name="Shape 30">
-            <a:extLst>
-              <a:ext uri="{FF2B5EF4-FFF2-40B4-BE49-F238E27FC236}">
-                <a16:creationId xmlns:a16="http://schemas.microsoft.com/office/drawing/2014/main" id="{46B9323D-4B70-7417-06E7-26C63E36DED5}"/>
-              </a:ext>
-            </a:extLst>
-          </p:cNvPr>
-          <p:cNvSpPr/>
-          <p:nvPr/>
-        </p:nvSpPr>
-        <p:spPr>
-          <a:xfrm>
-            <a:off x="5080000" y="5969000"/>
-            <a:ext cx="1778000" cy="457200"/>
-          </a:xfrm>
-          <a:prstGeom prst="roundRect">
-            <a:avLst>
-              <a:gd name="adj" fmla="val 16000"/>
-            </a:avLst>
-          </a:prstGeom>
-          <a:solidFill>
-            <a:srgbClr val="1B4332"/>
-          </a:solidFill>
-          <a:ln/>
-        </p:spPr>
-        <p:txBody>
-          <a:bodyPr/>
-          <a:lstStyle/>
-          <a:p>
-            <a:endParaRPr lang="es-ES">
-              <a:latin typeface="Quattrocento Sans" panose="020B0502050000020003" pitchFamily="34" charset="0"/>
-            </a:endParaRPr>
-          </a:p>
-        </p:txBody>
-      </p:sp>
-      <p:sp>
-        <p:nvSpPr>
-          <p:cNvPr id="33" name="Text 31">
-            <a:extLst>
-              <a:ext uri="{FF2B5EF4-FFF2-40B4-BE49-F238E27FC236}">
-                <a16:creationId xmlns:a16="http://schemas.microsoft.com/office/drawing/2014/main" id="{5D8C4A49-7EBD-6B52-F108-74C7785B6431}"/>
-              </a:ext>
-            </a:extLst>
-          </p:cNvPr>
-          <p:cNvSpPr/>
-          <p:nvPr/>
-        </p:nvSpPr>
-        <p:spPr>
-          <a:xfrm>
-            <a:off x="5080000" y="5969000"/>
-            <a:ext cx="1778000" cy="457200"/>
-          </a:xfrm>
-          <a:prstGeom prst="rect">
-            <a:avLst/>
-          </a:prstGeom>
-          <a:noFill/>
-          <a:ln/>
-        </p:spPr>
-        <p:txBody>
-          <a:bodyPr wrap="none" lIns="0" tIns="0" rIns="0" bIns="0" rtlCol="0" anchor="ctr"/>
-          <a:lstStyle/>
-          <a:p>
-            <a:pPr algn="ctr">
-              <a:lnSpc>
-                <a:spcPct val="100000"/>
-              </a:lnSpc>
-            </a:pPr>
-            <a:r>
-              <a:rPr lang="en-US" sz="1400" b="1" dirty="0">
-                <a:solidFill>
-                  <a:srgbClr val="FFFFFF"/>
-                </a:solidFill>
-                <a:latin typeface="Quattrocento Sans" panose="020B0502050000020003" pitchFamily="34" charset="0"/>
-                <a:ea typeface="QuattrocentoSans" pitchFamily="34" charset="-122"/>
-                <a:cs typeface="QuattrocentoSans" pitchFamily="34" charset="-120"/>
-              </a:rPr>
-              <a:t>PostgreSQL</a:t>
-            </a:r>
-            <a:endParaRPr lang="en-US" sz="1400" dirty="0">
-              <a:latin typeface="Quattrocento Sans" panose="020B0502050000020003" pitchFamily="34" charset="0"/>
-            </a:endParaRPr>
-          </a:p>
-        </p:txBody>
-      </p:sp>
-      <p:sp>
-        <p:nvSpPr>
-          <p:cNvPr id="34" name="Shape 32">
-            <a:extLst>
-              <a:ext uri="{FF2B5EF4-FFF2-40B4-BE49-F238E27FC236}">
-                <a16:creationId xmlns:a16="http://schemas.microsoft.com/office/drawing/2014/main" id="{95E36640-A313-7741-2EA8-7030AAD717FF}"/>
-              </a:ext>
-            </a:extLst>
-          </p:cNvPr>
-          <p:cNvSpPr/>
-          <p:nvPr/>
-        </p:nvSpPr>
-        <p:spPr>
-          <a:xfrm>
-            <a:off x="7048500" y="5969000"/>
-            <a:ext cx="1651000" cy="457200"/>
-          </a:xfrm>
-          <a:prstGeom prst="roundRect">
-            <a:avLst>
-              <a:gd name="adj" fmla="val 16000"/>
-            </a:avLst>
-          </a:prstGeom>
-          <a:solidFill>
-            <a:srgbClr val="1B4332"/>
-          </a:solidFill>
-          <a:ln/>
-        </p:spPr>
-        <p:txBody>
-          <a:bodyPr/>
-          <a:lstStyle/>
-          <a:p>
-            <a:endParaRPr lang="es-ES">
-              <a:latin typeface="Quattrocento Sans" panose="020B0502050000020003" pitchFamily="34" charset="0"/>
-            </a:endParaRPr>
-          </a:p>
-        </p:txBody>
-      </p:sp>
-      <p:sp>
-        <p:nvSpPr>
-          <p:cNvPr id="35" name="Text 33">
-            <a:extLst>
-              <a:ext uri="{FF2B5EF4-FFF2-40B4-BE49-F238E27FC236}">
-                <a16:creationId xmlns:a16="http://schemas.microsoft.com/office/drawing/2014/main" id="{E78CE0DE-FD54-D6A3-A2EC-918E700B44E9}"/>
-              </a:ext>
-            </a:extLst>
-          </p:cNvPr>
-          <p:cNvSpPr/>
-          <p:nvPr/>
-        </p:nvSpPr>
-        <p:spPr>
-          <a:xfrm>
-            <a:off x="7048500" y="5969000"/>
-            <a:ext cx="1651000" cy="457200"/>
-          </a:xfrm>
-          <a:prstGeom prst="rect">
-            <a:avLst/>
-          </a:prstGeom>
-          <a:noFill/>
-          <a:ln/>
-        </p:spPr>
-        <p:txBody>
-          <a:bodyPr wrap="none" lIns="0" tIns="0" rIns="0" bIns="0" rtlCol="0" anchor="ctr"/>
-          <a:lstStyle/>
-          <a:p>
-            <a:pPr algn="ctr">
-              <a:lnSpc>
-                <a:spcPct val="100000"/>
-              </a:lnSpc>
-            </a:pPr>
-            <a:r>
-              <a:rPr lang="en-US" sz="1400" b="1" dirty="0">
-                <a:solidFill>
-                  <a:srgbClr val="FFFFFF"/>
-                </a:solidFill>
-                <a:latin typeface="Quattrocento Sans" panose="020B0502050000020003" pitchFamily="34" charset="0"/>
-                <a:ea typeface="QuattrocentoSans" pitchFamily="34" charset="-122"/>
-                <a:cs typeface="QuattrocentoSans" pitchFamily="34" charset="-120"/>
-              </a:rPr>
-              <a:t>Docker</a:t>
-            </a:r>
-            <a:endParaRPr lang="en-US" sz="1400" dirty="0">
-              <a:latin typeface="Quattrocento Sans" panose="020B0502050000020003" pitchFamily="34" charset="0"/>
-            </a:endParaRPr>
-          </a:p>
-        </p:txBody>
-      </p:sp>
-      <p:sp>
-        <p:nvSpPr>
-          <p:cNvPr id="36" name="Text 34">
-            <a:extLst>
-              <a:ext uri="{FF2B5EF4-FFF2-40B4-BE49-F238E27FC236}">
-                <a16:creationId xmlns:a16="http://schemas.microsoft.com/office/drawing/2014/main" id="{8B84F229-985D-F0F4-7E8B-46CA9100DB30}"/>
-              </a:ext>
-            </a:extLst>
-          </p:cNvPr>
-          <p:cNvSpPr/>
-          <p:nvPr/>
-        </p:nvSpPr>
-        <p:spPr>
-          <a:xfrm>
-            <a:off x="762000" y="6667500"/>
-            <a:ext cx="14732000" cy="1651000"/>
-          </a:xfrm>
-          <a:prstGeom prst="rect">
-            <a:avLst/>
-          </a:prstGeom>
-          <a:noFill/>
-          <a:ln/>
-        </p:spPr>
-        <p:txBody>
-          <a:bodyPr wrap="square" lIns="0" tIns="0" rIns="0" bIns="0" rtlCol="0" anchor="t"/>
-          <a:lstStyle/>
-          <a:p>
-            <a:pPr>
-              <a:lnSpc>
-                <a:spcPct val="150000"/>
-              </a:lnSpc>
-            </a:pPr>
-            <a:r>
-              <a:rPr lang="en-US" sz="1600" b="1" dirty="0">
-                <a:solidFill>
-                  <a:srgbClr val="212529"/>
-                </a:solidFill>
-                <a:latin typeface="Quattrocento Sans" panose="020B0502050000020003" pitchFamily="34" charset="0"/>
-                <a:ea typeface="QuattrocentoSans" pitchFamily="34" charset="-122"/>
-                <a:cs typeface="QuattrocentoSans" pitchFamily="34" charset="-120"/>
-              </a:rPr>
-              <a:t>Frontend:</a:t>
-            </a:r>
-            <a:r>
-              <a:rPr lang="en-US" sz="1600" dirty="0">
-                <a:solidFill>
-                  <a:srgbClr val="212529"/>
-                </a:solidFill>
-                <a:latin typeface="Quattrocento Sans" panose="020B0502050000020003" pitchFamily="34" charset="0"/>
-                <a:ea typeface="QuattrocentoSans" pitchFamily="34" charset="-122"/>
-                <a:cs typeface="QuattrocentoSans" pitchFamily="34" charset="-120"/>
-              </a:rPr>
-              <a:t> React + Vite — SPA de alto rendimiento con componentes reutilizables.</a:t>
-            </a:r>
-            <a:endParaRPr lang="en-US" sz="1800" dirty="0">
-              <a:latin typeface="Quattrocento Sans" panose="020B0502050000020003" pitchFamily="34" charset="0"/>
-            </a:endParaRPr>
-          </a:p>
-          <a:p>
-            <a:pPr>
-              <a:lnSpc>
-                <a:spcPct val="150000"/>
-              </a:lnSpc>
-              <a:spcBef>
-                <a:spcPts val="400"/>
-              </a:spcBef>
-            </a:pPr>
-            <a:r>
-              <a:rPr lang="en-US" sz="1600" b="1" dirty="0">
-                <a:solidFill>
-                  <a:srgbClr val="212529"/>
-                </a:solidFill>
-                <a:latin typeface="Quattrocento Sans" panose="020B0502050000020003" pitchFamily="34" charset="0"/>
-                <a:ea typeface="QuattrocentoSans" pitchFamily="34" charset="-122"/>
-                <a:cs typeface="QuattrocentoSans" pitchFamily="34" charset="-120"/>
-              </a:rPr>
-              <a:t>Backend:</a:t>
-            </a:r>
-            <a:r>
-              <a:rPr lang="en-US" sz="1600" dirty="0">
-                <a:solidFill>
-                  <a:srgbClr val="212529"/>
-                </a:solidFill>
-                <a:latin typeface="Quattrocento Sans" panose="020B0502050000020003" pitchFamily="34" charset="0"/>
-                <a:ea typeface="QuattrocentoSans" pitchFamily="34" charset="-122"/>
-                <a:cs typeface="QuattrocentoSans" pitchFamily="34" charset="-120"/>
-              </a:rPr>
-              <a:t> Node.js + Express.js — arquitectura ligera y escalable con eventos asíncronos.</a:t>
-            </a:r>
-            <a:endParaRPr lang="en-US" sz="1800" dirty="0">
-              <a:latin typeface="Quattrocento Sans" panose="020B0502050000020003" pitchFamily="34" charset="0"/>
-            </a:endParaRPr>
-          </a:p>
-          <a:p>
-            <a:pPr>
-              <a:lnSpc>
-                <a:spcPct val="150000"/>
-              </a:lnSpc>
-              <a:spcBef>
-                <a:spcPts val="400"/>
-              </a:spcBef>
-            </a:pPr>
-            <a:r>
-              <a:rPr lang="en-US" sz="1600" b="1" dirty="0">
-                <a:solidFill>
-                  <a:srgbClr val="212529"/>
-                </a:solidFill>
-                <a:latin typeface="Quattrocento Sans" panose="020B0502050000020003" pitchFamily="34" charset="0"/>
-                <a:ea typeface="QuattrocentoSans" pitchFamily="34" charset="-122"/>
-                <a:cs typeface="QuattrocentoSans" pitchFamily="34" charset="-120"/>
-              </a:rPr>
-              <a:t>Base de datos:</a:t>
-            </a:r>
-            <a:r>
-              <a:rPr lang="en-US" sz="1600" dirty="0">
-                <a:solidFill>
-                  <a:srgbClr val="212529"/>
-                </a:solidFill>
-                <a:latin typeface="Quattrocento Sans" panose="020B0502050000020003" pitchFamily="34" charset="0"/>
-                <a:ea typeface="QuattrocentoSans" pitchFamily="34" charset="-122"/>
-                <a:cs typeface="QuattrocentoSans" pitchFamily="34" charset="-120"/>
-              </a:rPr>
-              <a:t> PostgreSQL— modelo relacional robusto con migraciones automáticas.</a:t>
-            </a:r>
-            <a:endParaRPr lang="en-US" sz="1800" dirty="0">
-              <a:latin typeface="Quattrocento Sans" panose="020B0502050000020003" pitchFamily="34" charset="0"/>
-            </a:endParaRPr>
-          </a:p>
-          <a:p>
-            <a:pPr>
-              <a:lnSpc>
-                <a:spcPct val="150000"/>
-              </a:lnSpc>
-              <a:spcBef>
-                <a:spcPts val="400"/>
-              </a:spcBef>
-            </a:pPr>
-            <a:r>
-              <a:rPr lang="en-US" sz="1600" b="1" dirty="0">
-                <a:solidFill>
-                  <a:srgbClr val="212529"/>
-                </a:solidFill>
-                <a:latin typeface="Quattrocento Sans" panose="020B0502050000020003" pitchFamily="34" charset="0"/>
-                <a:ea typeface="QuattrocentoSans" pitchFamily="34" charset="-122"/>
-                <a:cs typeface="QuattrocentoSans" pitchFamily="34" charset="-120"/>
-              </a:rPr>
-              <a:t>Despliegue:</a:t>
-            </a:r>
-            <a:r>
-              <a:rPr lang="en-US" sz="1600" dirty="0">
-                <a:solidFill>
-                  <a:srgbClr val="212529"/>
-                </a:solidFill>
-                <a:latin typeface="Quattrocento Sans" panose="020B0502050000020003" pitchFamily="34" charset="0"/>
-                <a:ea typeface="QuattrocentoSans" pitchFamily="34" charset="-122"/>
-                <a:cs typeface="QuattrocentoSans" pitchFamily="34" charset="-120"/>
-              </a:rPr>
-              <a:t> Docker + Nginx — contenedores para entornos idénticos y proxy inverso.</a:t>
-            </a:r>
-            <a:endParaRPr lang="en-US" sz="1800" dirty="0">
-              <a:latin typeface="Quattrocento Sans" panose="020B0502050000020003" pitchFamily="34" charset="0"/>
-            </a:endParaRPr>
-          </a:p>
-        </p:txBody>
-      </p:sp>
-      <p:sp>
-        <p:nvSpPr>
-          <p:cNvPr id="37" name="Text 35">
-            <a:extLst>
-              <a:ext uri="{FF2B5EF4-FFF2-40B4-BE49-F238E27FC236}">
-                <a16:creationId xmlns:a16="http://schemas.microsoft.com/office/drawing/2014/main" id="{D689B158-AFB7-D6A3-83CB-57E6F662CC12}"/>
-              </a:ext>
-            </a:extLst>
-          </p:cNvPr>
-          <p:cNvSpPr/>
-          <p:nvPr/>
-        </p:nvSpPr>
-        <p:spPr>
-          <a:xfrm>
-            <a:off x="15240000" y="8763000"/>
-            <a:ext cx="762000" cy="254000"/>
-          </a:xfrm>
-          <a:prstGeom prst="rect">
-            <a:avLst/>
-          </a:prstGeom>
-          <a:noFill/>
-          <a:ln/>
-        </p:spPr>
-        <p:txBody>
-          <a:bodyPr wrap="none" lIns="0" tIns="0" rIns="0" bIns="0" rtlCol="0" anchor="ctr"/>
-          <a:lstStyle/>
-          <a:p>
-            <a:pPr algn="r">
-              <a:lnSpc>
-                <a:spcPct val="140000"/>
-              </a:lnSpc>
-            </a:pPr>
-            <a:r>
-              <a:rPr lang="en-US" sz="1400" dirty="0">
-                <a:solidFill>
-                  <a:srgbClr val="6C757D"/>
-                </a:solidFill>
-                <a:latin typeface="Quattrocento Sans" panose="020B0502050000020003" pitchFamily="34" charset="0"/>
-                <a:ea typeface="QuattrocentoSans" pitchFamily="34" charset="-122"/>
-                <a:cs typeface="QuattrocentoSans" pitchFamily="34" charset="-120"/>
-              </a:rPr>
-              <a:t>3 / 10</a:t>
-            </a:r>
-            <a:endParaRPr lang="en-US" sz="1400" dirty="0">
+              </a:rPr>
+              <a:t>Gestión de perfiles minimalistas</a:t>
+            </a:r>
+            <a:endParaRPr lang="es-ES" sz="1800" noProof="0" dirty="0">
               <a:latin typeface="Quattrocento Sans" panose="020B0502050000020003" pitchFamily="34" charset="0"/>
             </a:endParaRPr>
           </a:p>
@@ -7153,6 +5379,251 @@
           </a:extLst>
         </p:spPr>
       </p:pic>
+      <p:pic>
+        <p:nvPicPr>
+          <p:cNvPr id="4" name="Imagen 3">
+            <a:extLst>
+              <a:ext uri="{FF2B5EF4-FFF2-40B4-BE49-F238E27FC236}">
+                <a16:creationId xmlns:a16="http://schemas.microsoft.com/office/drawing/2014/main" id="{357935D0-5389-AA24-4DB0-D9D2AE0DB672}"/>
+              </a:ext>
+            </a:extLst>
+          </p:cNvPr>
+          <p:cNvPicPr>
+            <a:picLocks noChangeAspect="1"/>
+          </p:cNvPicPr>
+          <p:nvPr/>
+        </p:nvPicPr>
+        <p:blipFill>
+          <a:blip r:embed="rId4"/>
+          <a:stretch>
+            <a:fillRect/>
+          </a:stretch>
+        </p:blipFill>
+        <p:spPr>
+          <a:xfrm>
+            <a:off x="5981700" y="1567404"/>
+            <a:ext cx="604141" cy="604141"/>
+          </a:xfrm>
+          <a:prstGeom prst="rect">
+            <a:avLst/>
+          </a:prstGeom>
+        </p:spPr>
+      </p:pic>
+      <p:pic>
+        <p:nvPicPr>
+          <p:cNvPr id="7" name="Imagen 6">
+            <a:extLst>
+              <a:ext uri="{FF2B5EF4-FFF2-40B4-BE49-F238E27FC236}">
+                <a16:creationId xmlns:a16="http://schemas.microsoft.com/office/drawing/2014/main" id="{A65DE619-6814-A97E-44FF-0D48A3702672}"/>
+              </a:ext>
+            </a:extLst>
+          </p:cNvPr>
+          <p:cNvPicPr>
+            <a:picLocks noChangeAspect="1"/>
+          </p:cNvPicPr>
+          <p:nvPr/>
+        </p:nvPicPr>
+        <p:blipFill>
+          <a:blip r:embed="rId5"/>
+          <a:stretch>
+            <a:fillRect/>
+          </a:stretch>
+        </p:blipFill>
+        <p:spPr>
+          <a:xfrm>
+            <a:off x="812800" y="5555982"/>
+            <a:ext cx="4691424" cy="2582665"/>
+          </a:xfrm>
+          <a:prstGeom prst="roundRect">
+            <a:avLst>
+              <a:gd name="adj" fmla="val 8594"/>
+            </a:avLst>
+          </a:prstGeom>
+          <a:solidFill>
+            <a:srgbClr val="FFFFFF">
+              <a:shade val="85000"/>
+            </a:srgbClr>
+          </a:solidFill>
+          <a:ln>
+            <a:noFill/>
+          </a:ln>
+          <a:effectLst/>
+        </p:spPr>
+      </p:pic>
+      <p:pic>
+        <p:nvPicPr>
+          <p:cNvPr id="11" name="Imagen 10">
+            <a:extLst>
+              <a:ext uri="{FF2B5EF4-FFF2-40B4-BE49-F238E27FC236}">
+                <a16:creationId xmlns:a16="http://schemas.microsoft.com/office/drawing/2014/main" id="{59822640-136E-B4B7-423B-3041FADA03AD}"/>
+              </a:ext>
+            </a:extLst>
+          </p:cNvPr>
+          <p:cNvPicPr>
+            <a:picLocks noChangeAspect="1"/>
+          </p:cNvPicPr>
+          <p:nvPr/>
+        </p:nvPicPr>
+        <p:blipFill>
+          <a:blip r:embed="rId6"/>
+          <a:stretch>
+            <a:fillRect/>
+          </a:stretch>
+        </p:blipFill>
+        <p:spPr>
+          <a:xfrm>
+            <a:off x="10794999" y="5720693"/>
+            <a:ext cx="4699000" cy="2149658"/>
+          </a:xfrm>
+          <a:prstGeom prst="roundRect">
+            <a:avLst>
+              <a:gd name="adj" fmla="val 8594"/>
+            </a:avLst>
+          </a:prstGeom>
+          <a:solidFill>
+            <a:srgbClr val="FFFFFF">
+              <a:shade val="85000"/>
+            </a:srgbClr>
+          </a:solidFill>
+          <a:ln>
+            <a:noFill/>
+          </a:ln>
+          <a:effectLst/>
+        </p:spPr>
+      </p:pic>
+      <p:pic>
+        <p:nvPicPr>
+          <p:cNvPr id="39" name="Imagen 38">
+            <a:extLst>
+              <a:ext uri="{FF2B5EF4-FFF2-40B4-BE49-F238E27FC236}">
+                <a16:creationId xmlns:a16="http://schemas.microsoft.com/office/drawing/2014/main" id="{38741A87-C787-ED10-358E-396F3C12F315}"/>
+              </a:ext>
+            </a:extLst>
+          </p:cNvPr>
+          <p:cNvPicPr>
+            <a:picLocks noChangeAspect="1"/>
+          </p:cNvPicPr>
+          <p:nvPr/>
+        </p:nvPicPr>
+        <p:blipFill>
+          <a:blip r:embed="rId7"/>
+          <a:srcRect t="53500" b="1124"/>
+          <a:stretch>
+            <a:fillRect/>
+          </a:stretch>
+        </p:blipFill>
+        <p:spPr>
+          <a:xfrm>
+            <a:off x="8376790" y="5690498"/>
+            <a:ext cx="1957989" cy="2179853"/>
+          </a:xfrm>
+          <a:prstGeom prst="roundRect">
+            <a:avLst>
+              <a:gd name="adj" fmla="val 8594"/>
+            </a:avLst>
+          </a:prstGeom>
+          <a:solidFill>
+            <a:srgbClr val="FFFFFF">
+              <a:shade val="85000"/>
+            </a:srgbClr>
+          </a:solidFill>
+          <a:ln>
+            <a:noFill/>
+          </a:ln>
+          <a:effectLst/>
+        </p:spPr>
+      </p:pic>
+      <p:pic>
+        <p:nvPicPr>
+          <p:cNvPr id="40" name="Imagen 39">
+            <a:extLst>
+              <a:ext uri="{FF2B5EF4-FFF2-40B4-BE49-F238E27FC236}">
+                <a16:creationId xmlns:a16="http://schemas.microsoft.com/office/drawing/2014/main" id="{DB560947-DFC3-0586-198A-82D0158DA1DC}"/>
+              </a:ext>
+            </a:extLst>
+          </p:cNvPr>
+          <p:cNvPicPr>
+            <a:picLocks noChangeAspect="1"/>
+          </p:cNvPicPr>
+          <p:nvPr/>
+        </p:nvPicPr>
+        <p:blipFill>
+          <a:blip r:embed="rId7"/>
+          <a:srcRect b="46499"/>
+          <a:stretch>
+            <a:fillRect/>
+          </a:stretch>
+        </p:blipFill>
+        <p:spPr>
+          <a:xfrm>
+            <a:off x="6108356" y="5608740"/>
+            <a:ext cx="1808214" cy="2373563"/>
+          </a:xfrm>
+          <a:prstGeom prst="roundRect">
+            <a:avLst>
+              <a:gd name="adj" fmla="val 8594"/>
+            </a:avLst>
+          </a:prstGeom>
+          <a:solidFill>
+            <a:srgbClr val="FFFFFF">
+              <a:shade val="85000"/>
+            </a:srgbClr>
+          </a:solidFill>
+          <a:ln>
+            <a:noFill/>
+          </a:ln>
+          <a:effectLst/>
+        </p:spPr>
+      </p:pic>
+      <p:sp>
+        <p:nvSpPr>
+          <p:cNvPr id="6" name="Text 35">
+            <a:extLst>
+              <a:ext uri="{FF2B5EF4-FFF2-40B4-BE49-F238E27FC236}">
+                <a16:creationId xmlns:a16="http://schemas.microsoft.com/office/drawing/2014/main" id="{9ED91221-F816-5B74-8EB0-34164E843238}"/>
+              </a:ext>
+            </a:extLst>
+          </p:cNvPr>
+          <p:cNvSpPr/>
+          <p:nvPr/>
+        </p:nvSpPr>
+        <p:spPr>
+          <a:xfrm>
+            <a:off x="15240000" y="8763000"/>
+            <a:ext cx="762000" cy="254000"/>
+          </a:xfrm>
+          <a:prstGeom prst="rect">
+            <a:avLst/>
+          </a:prstGeom>
+          <a:noFill/>
+          <a:ln/>
+        </p:spPr>
+        <p:txBody>
+          <a:bodyPr wrap="none" lIns="0" tIns="0" rIns="0" bIns="0" rtlCol="0" anchor="ctr"/>
+          <a:lstStyle/>
+          <a:p>
+            <a:pPr algn="r">
+              <a:lnSpc>
+                <a:spcPct val="140000"/>
+              </a:lnSpc>
+            </a:pPr>
+            <a:r>
+              <a:rPr lang="es-ES" sz="1400" noProof="0" dirty="0">
+                <a:solidFill>
+                  <a:srgbClr val="6C757D"/>
+                </a:solidFill>
+                <a:latin typeface="Quattrocento Sans" panose="020B0502050000020003" pitchFamily="34" charset="0"/>
+                <a:ea typeface="QuattrocentoSans" pitchFamily="34" charset="-122"/>
+                <a:cs typeface="QuattrocentoSans" pitchFamily="34" charset="-120"/>
+              </a:rPr>
+              <a:t>11 / 12</a:t>
+            </a:r>
+            <a:endParaRPr lang="es-ES" sz="1400" noProof="0" dirty="0">
+              <a:latin typeface="Quattrocento Sans" panose="020B0502050000020003" pitchFamily="34" charset="0"/>
+            </a:endParaRPr>
+          </a:p>
+        </p:txBody>
+      </p:sp>
     </p:spTree>
     <p:extLst>
       <p:ext uri="{BB962C8B-B14F-4D97-AF65-F5344CB8AC3E}">
@@ -10271,7 +8742,7 @@
                 <a:ea typeface="QuattrocentoSans" pitchFamily="34" charset="-122"/>
                 <a:cs typeface="QuattrocentoSans" pitchFamily="34" charset="-120"/>
               </a:rPr>
-              <a:t>2 / 10</a:t>
+              <a:t>2 / 12</a:t>
             </a:r>
             <a:endParaRPr lang="en-US" sz="1400" dirty="0">
               <a:latin typeface="Quattrocento Sans" panose="020B0502050000020003" pitchFamily="34" charset="0"/>
@@ -12283,7 +10754,7 @@
                 <a:ea typeface="QuattrocentoSans" pitchFamily="34" charset="-122"/>
                 <a:cs typeface="QuattrocentoSans" pitchFamily="34" charset="-120"/>
               </a:rPr>
-              <a:t>3 / 10</a:t>
+              <a:t>3 / 12</a:t>
             </a:r>
             <a:endParaRPr lang="en-US" sz="1400" dirty="0">
               <a:latin typeface="Quattrocento Sans" panose="020B0502050000020003" pitchFamily="34" charset="0"/>
@@ -13377,7 +11848,7 @@
                 <a:ea typeface="QuattrocentoSans" pitchFamily="34" charset="-122"/>
                 <a:cs typeface="QuattrocentoSans" pitchFamily="34" charset="-120"/>
               </a:rPr>
-              <a:t>4 / 10</a:t>
+              <a:t>4 / 12</a:t>
             </a:r>
             <a:endParaRPr lang="en-US" sz="1400" dirty="0">
               <a:latin typeface="Quattrocento Sans" panose="020B0502050000020003" pitchFamily="34" charset="0"/>
@@ -15256,7 +13727,7 @@
                 <a:ea typeface="QuattrocentoSans" pitchFamily="34" charset="-122"/>
                 <a:cs typeface="QuattrocentoSans" pitchFamily="34" charset="-120"/>
               </a:rPr>
-              <a:t>5 / 10</a:t>
+              <a:t>5 / 12</a:t>
             </a:r>
             <a:endParaRPr lang="en-US" sz="1400" dirty="0">
               <a:latin typeface="Quattrocento Sans" panose="020B0502050000020003" pitchFamily="34" charset="0"/>
@@ -17254,7 +15725,7 @@
                 <a:ea typeface="QuattrocentoSans" pitchFamily="34" charset="-122"/>
                 <a:cs typeface="QuattrocentoSans" pitchFamily="34" charset="-120"/>
               </a:rPr>
-              <a:t>6 / 10</a:t>
+              <a:t>6 / 12</a:t>
             </a:r>
             <a:endParaRPr lang="en-US" sz="1400" dirty="0">
               <a:latin typeface="Quattrocento Sans" panose="020B0502050000020003" pitchFamily="34" charset="0"/>
@@ -20956,7 +19427,7 @@
                 <a:ea typeface="QuattrocentoSans" pitchFamily="34" charset="-122"/>
                 <a:cs typeface="QuattrocentoSans" pitchFamily="34" charset="-120"/>
               </a:rPr>
-              <a:t>7 / 10</a:t>
+              <a:t>7 / 12</a:t>
             </a:r>
             <a:endParaRPr lang="en-US" sz="1400" dirty="0">
               <a:latin typeface="Quattrocento Sans" panose="020B0502050000020003" pitchFamily="34" charset="0"/>
@@ -23741,7 +22212,7 @@
                 <a:ea typeface="QuattrocentoSans" pitchFamily="34" charset="-122"/>
                 <a:cs typeface="QuattrocentoSans" pitchFamily="34" charset="-120"/>
               </a:rPr>
-              <a:t>8 / 10</a:t>
+              <a:t>8 / 12</a:t>
             </a:r>
             <a:endParaRPr lang="en-US" sz="1400" dirty="0">
               <a:latin typeface="Quattrocento Sans" panose="020B0502050000020003" pitchFamily="34" charset="0"/>
@@ -24818,7 +23289,7 @@
                 <a:ea typeface="QuattrocentoSans" pitchFamily="34" charset="-122"/>
                 <a:cs typeface="QuattrocentoSans" pitchFamily="34" charset="-120"/>
               </a:rPr>
-              <a:t>9 / 10</a:t>
+              <a:t>9 / 12</a:t>
             </a:r>
             <a:endParaRPr lang="en-US" sz="1400" dirty="0">
               <a:latin typeface="Quattrocento Sans" panose="020B0502050000020003" pitchFamily="34" charset="0"/>

--- a/documentos/YourTree.pptx
+++ b/documentos/YourTree.pptx
@@ -11018,7 +11018,51 @@
                 <a:ea typeface="QuattrocentoSans" pitchFamily="34" charset="-122"/>
                 <a:cs typeface="QuattrocentoSans" pitchFamily="34" charset="-120"/>
               </a:rPr>
-              <a:t>PostgreSQL gestionado mediante Sequelize ORM para modelos relacionales y migraciones automáticas.</a:t>
+              <a:t>PostgreSQL para modelos relacionales y </a:t>
+            </a:r>
+            <a:r>
+              <a:rPr lang="en-US" sz="1600" dirty="0" err="1">
+                <a:solidFill>
+                  <a:srgbClr val="212529"/>
+                </a:solidFill>
+                <a:latin typeface="Quattrocento Sans" panose="020B0502050000020003" pitchFamily="34" charset="0"/>
+                <a:ea typeface="QuattrocentoSans" pitchFamily="34" charset="-122"/>
+                <a:cs typeface="QuattrocentoSans" pitchFamily="34" charset="-120"/>
+              </a:rPr>
+              <a:t>migraciones</a:t>
+            </a:r>
+            <a:r>
+              <a:rPr lang="en-US" sz="1600" dirty="0">
+                <a:solidFill>
+                  <a:srgbClr val="212529"/>
+                </a:solidFill>
+                <a:latin typeface="Quattrocento Sans" panose="020B0502050000020003" pitchFamily="34" charset="0"/>
+                <a:ea typeface="QuattrocentoSans" pitchFamily="34" charset="-122"/>
+                <a:cs typeface="QuattrocentoSans" pitchFamily="34" charset="-120"/>
+              </a:rPr>
+              <a:t> </a:t>
+            </a:r>
+            <a:r>
+              <a:rPr lang="en-US" sz="1600" dirty="0" err="1">
+                <a:solidFill>
+                  <a:srgbClr val="212529"/>
+                </a:solidFill>
+                <a:latin typeface="Quattrocento Sans" panose="020B0502050000020003" pitchFamily="34" charset="0"/>
+                <a:ea typeface="QuattrocentoSans" pitchFamily="34" charset="-122"/>
+                <a:cs typeface="QuattrocentoSans" pitchFamily="34" charset="-120"/>
+              </a:rPr>
+              <a:t>futuras</a:t>
+            </a:r>
+            <a:r>
+              <a:rPr lang="en-US" sz="1600" dirty="0">
+                <a:solidFill>
+                  <a:srgbClr val="212529"/>
+                </a:solidFill>
+                <a:latin typeface="Quattrocento Sans" panose="020B0502050000020003" pitchFamily="34" charset="0"/>
+                <a:ea typeface="QuattrocentoSans" pitchFamily="34" charset="-122"/>
+                <a:cs typeface="QuattrocentoSans" pitchFamily="34" charset="-120"/>
+              </a:rPr>
+              <a:t>.</a:t>
             </a:r>
             <a:endParaRPr lang="en-US" sz="1800" dirty="0">
               <a:latin typeface="Quattrocento Sans" panose="020B0502050000020003" pitchFamily="34" charset="0"/>
@@ -11720,7 +11764,7 @@
                 <a:ea typeface="Quattrocento Sans" pitchFamily="34" charset="-122"/>
                 <a:cs typeface="Quattrocento Sans" pitchFamily="34" charset="-120"/>
               </a:rPr>
-              <a:t>Sequelize Model → PostgreSQL</a:t>
+              <a:t>Model → PostgreSQL</a:t>
             </a:r>
             <a:endParaRPr lang="en-US" sz="1600" dirty="0">
               <a:latin typeface="Quattrocento Sans" panose="020B0502050000020003" pitchFamily="34" charset="0"/>
@@ -12194,7 +12238,7 @@
         <p:spPr>
           <a:xfrm>
             <a:off x="762000" y="1397000"/>
-            <a:ext cx="7112000" cy="5270500"/>
+            <a:ext cx="7366000" cy="5270500"/>
           </a:xfrm>
           <a:prstGeom prst="rect">
             <a:avLst/>
@@ -17183,7 +17227,7 @@
                 <a:ea typeface="Quattrocento Sans" pitchFamily="34" charset="-122"/>
                 <a:cs typeface="Quattrocento Sans" pitchFamily="34" charset="-120"/>
               </a:rPr>
-              <a:t>Consultas directas a la base de datos (PostgreSQL/Sequelize)</a:t>
+              <a:t>Consultas directas a la base de datos (PostgreSQL)</a:t>
             </a:r>
             <a:endParaRPr lang="en-US" sz="1600" dirty="0">
               <a:latin typeface="Quattrocento Sans" panose="020B0502050000020003" pitchFamily="34" charset="0"/>
